--- a/engineering/wb_2026_postmortem_deck.pptx
+++ b/engineering/wb_2026_postmortem_deck.pptx
@@ -2706,14 +2706,11 @@
             <a:avLst/>
           </a:prstGeom>
           <a:solidFill>
-            <a:srgbClr val="050505"/>
-          </a:solidFill>
-          <a:ln w="6350">
-            <a:solidFill>
-              <a:srgbClr val="3A3A38"/>
-            </a:solidFill>
-            <a:prstDash val="solid"/>
-          </a:ln>
+            <a:srgbClr val="E9E6DF">
+              <a:alpha val="12000"/>
+            </a:srgbClr>
+          </a:solidFill>
+          <a:ln/>
         </p:spPr>
       </p:sp>
       <p:sp>
@@ -2733,12 +2730,7 @@
           <a:solidFill>
             <a:srgbClr val="A8FF3E"/>
           </a:solidFill>
-          <a:ln w="6350">
-            <a:solidFill>
-              <a:srgbClr val="A8FF3E"/>
-            </a:solidFill>
-            <a:prstDash val="solid"/>
-          </a:ln>
+          <a:ln/>
         </p:spPr>
       </p:sp>
       <p:sp>
@@ -2758,12 +2750,7 @@
           <a:solidFill>
             <a:srgbClr val="A8FF3E"/>
           </a:solidFill>
-          <a:ln w="6350">
-            <a:solidFill>
-              <a:srgbClr val="A8FF3E"/>
-            </a:solidFill>
-            <a:prstDash val="solid"/>
-          </a:ln>
+          <a:ln/>
         </p:spPr>
       </p:sp>
       <p:sp>
@@ -2781,14 +2768,11 @@
             <a:avLst/>
           </a:prstGeom>
           <a:solidFill>
-            <a:srgbClr val="050505"/>
-          </a:solidFill>
-          <a:ln w="6350">
-            <a:solidFill>
-              <a:srgbClr val="3A3A38"/>
-            </a:solidFill>
-            <a:prstDash val="solid"/>
-          </a:ln>
+            <a:srgbClr val="E9E6DF">
+              <a:alpha val="12000"/>
+            </a:srgbClr>
+          </a:solidFill>
+          <a:ln/>
         </p:spPr>
       </p:sp>
       <p:sp>
@@ -2806,14 +2790,11 @@
             <a:avLst/>
           </a:prstGeom>
           <a:solidFill>
-            <a:srgbClr val="050505"/>
-          </a:solidFill>
-          <a:ln w="6350">
-            <a:solidFill>
-              <a:srgbClr val="3A3A38"/>
-            </a:solidFill>
-            <a:prstDash val="solid"/>
-          </a:ln>
+            <a:srgbClr val="E9E6DF">
+              <a:alpha val="12000"/>
+            </a:srgbClr>
+          </a:solidFill>
+          <a:ln/>
         </p:spPr>
       </p:sp>
       <p:sp>
@@ -2831,14 +2812,11 @@
             <a:avLst/>
           </a:prstGeom>
           <a:solidFill>
-            <a:srgbClr val="050505"/>
-          </a:solidFill>
-          <a:ln w="6350">
-            <a:solidFill>
-              <a:srgbClr val="3A3A38"/>
-            </a:solidFill>
-            <a:prstDash val="solid"/>
-          </a:ln>
+            <a:srgbClr val="E9E6DF">
+              <a:alpha val="12000"/>
+            </a:srgbClr>
+          </a:solidFill>
+          <a:ln/>
         </p:spPr>
       </p:sp>
       <p:sp>
@@ -2856,14 +2834,11 @@
             <a:avLst/>
           </a:prstGeom>
           <a:solidFill>
-            <a:srgbClr val="050505"/>
-          </a:solidFill>
-          <a:ln w="6350">
-            <a:solidFill>
-              <a:srgbClr val="3A3A38"/>
-            </a:solidFill>
-            <a:prstDash val="solid"/>
-          </a:ln>
+            <a:srgbClr val="E9E6DF">
+              <a:alpha val="12000"/>
+            </a:srgbClr>
+          </a:solidFill>
+          <a:ln/>
         </p:spPr>
       </p:sp>
       <p:sp>
@@ -2881,14 +2856,11 @@
             <a:avLst/>
           </a:prstGeom>
           <a:solidFill>
-            <a:srgbClr val="050505"/>
-          </a:solidFill>
-          <a:ln w="6350">
-            <a:solidFill>
-              <a:srgbClr val="3A3A38"/>
-            </a:solidFill>
-            <a:prstDash val="solid"/>
-          </a:ln>
+            <a:srgbClr val="E9E6DF">
+              <a:alpha val="12000"/>
+            </a:srgbClr>
+          </a:solidFill>
+          <a:ln/>
         </p:spPr>
       </p:sp>
       <p:sp>
@@ -2906,14 +2878,11 @@
             <a:avLst/>
           </a:prstGeom>
           <a:solidFill>
-            <a:srgbClr val="050505"/>
-          </a:solidFill>
-          <a:ln w="6350">
-            <a:solidFill>
-              <a:srgbClr val="3A3A38"/>
-            </a:solidFill>
-            <a:prstDash val="solid"/>
-          </a:ln>
+            <a:srgbClr val="E9E6DF">
+              <a:alpha val="12000"/>
+            </a:srgbClr>
+          </a:solidFill>
+          <a:ln/>
         </p:spPr>
       </p:sp>
       <p:sp>
@@ -2931,14 +2900,11 @@
             <a:avLst/>
           </a:prstGeom>
           <a:solidFill>
-            <a:srgbClr val="050505"/>
-          </a:solidFill>
-          <a:ln w="6350">
-            <a:solidFill>
-              <a:srgbClr val="3A3A38"/>
-            </a:solidFill>
-            <a:prstDash val="solid"/>
-          </a:ln>
+            <a:srgbClr val="E9E6DF">
+              <a:alpha val="12000"/>
+            </a:srgbClr>
+          </a:solidFill>
+          <a:ln/>
         </p:spPr>
       </p:sp>
       <p:sp>
@@ -2956,14 +2922,11 @@
             <a:avLst/>
           </a:prstGeom>
           <a:solidFill>
-            <a:srgbClr val="050505"/>
-          </a:solidFill>
-          <a:ln w="6350">
-            <a:solidFill>
-              <a:srgbClr val="3A3A38"/>
-            </a:solidFill>
-            <a:prstDash val="solid"/>
-          </a:ln>
+            <a:srgbClr val="E9E6DF">
+              <a:alpha val="12000"/>
+            </a:srgbClr>
+          </a:solidFill>
+          <a:ln/>
         </p:spPr>
       </p:sp>
       <p:sp>
@@ -2981,14 +2944,11 @@
             <a:avLst/>
           </a:prstGeom>
           <a:solidFill>
-            <a:srgbClr val="050505"/>
-          </a:solidFill>
-          <a:ln w="6350">
-            <a:solidFill>
-              <a:srgbClr val="3A3A38"/>
-            </a:solidFill>
-            <a:prstDash val="solid"/>
-          </a:ln>
+            <a:srgbClr val="E9E6DF">
+              <a:alpha val="12000"/>
+            </a:srgbClr>
+          </a:solidFill>
+          <a:ln/>
         </p:spPr>
       </p:sp>
       <p:sp>
@@ -3006,14 +2966,11 @@
             <a:avLst/>
           </a:prstGeom>
           <a:solidFill>
-            <a:srgbClr val="050505"/>
-          </a:solidFill>
-          <a:ln w="6350">
-            <a:solidFill>
-              <a:srgbClr val="3A3A38"/>
-            </a:solidFill>
-            <a:prstDash val="solid"/>
-          </a:ln>
+            <a:srgbClr val="E9E6DF">
+              <a:alpha val="12000"/>
+            </a:srgbClr>
+          </a:solidFill>
+          <a:ln/>
         </p:spPr>
       </p:sp>
       <p:sp>
@@ -3031,14 +2988,11 @@
             <a:avLst/>
           </a:prstGeom>
           <a:solidFill>
-            <a:srgbClr val="050505"/>
-          </a:solidFill>
-          <a:ln w="6350">
-            <a:solidFill>
-              <a:srgbClr val="3A3A38"/>
-            </a:solidFill>
-            <a:prstDash val="solid"/>
-          </a:ln>
+            <a:srgbClr val="E9E6DF">
+              <a:alpha val="12000"/>
+            </a:srgbClr>
+          </a:solidFill>
+          <a:ln/>
         </p:spPr>
       </p:sp>
       <p:sp>
@@ -3269,7 +3223,7 @@
                 <a:ea typeface="Courier New" pitchFamily="34" charset="-122"/>
                 <a:cs typeface="Courier New" pitchFamily="34" charset="-120"/>
               </a:rPr>
-              <a:t>MATUA</a:t>
+              <a:t>MATUA / N24</a:t>
             </a:r>
             <a:endParaRPr lang="en-US" sz="600" dirty="0"/>
           </a:p>
@@ -4239,14 +4193,11 @@
             <a:avLst/>
           </a:prstGeom>
           <a:solidFill>
-            <a:srgbClr val="050505"/>
-          </a:solidFill>
-          <a:ln w="6350">
-            <a:solidFill>
-              <a:srgbClr val="3A3A38"/>
-            </a:solidFill>
-            <a:prstDash val="solid"/>
-          </a:ln>
+            <a:srgbClr val="E9E6DF">
+              <a:alpha val="12000"/>
+            </a:srgbClr>
+          </a:solidFill>
+          <a:ln/>
         </p:spPr>
       </p:sp>
       <p:sp>
@@ -4264,14 +4215,11 @@
             <a:avLst/>
           </a:prstGeom>
           <a:solidFill>
-            <a:srgbClr val="050505"/>
-          </a:solidFill>
-          <a:ln w="6350">
-            <a:solidFill>
-              <a:srgbClr val="3A3A38"/>
-            </a:solidFill>
-            <a:prstDash val="solid"/>
-          </a:ln>
+            <a:srgbClr val="E9E6DF">
+              <a:alpha val="12000"/>
+            </a:srgbClr>
+          </a:solidFill>
+          <a:ln/>
         </p:spPr>
       </p:sp>
       <p:sp>
@@ -4289,14 +4237,11 @@
             <a:avLst/>
           </a:prstGeom>
           <a:solidFill>
-            <a:srgbClr val="050505"/>
-          </a:solidFill>
-          <a:ln w="6350">
-            <a:solidFill>
-              <a:srgbClr val="3A3A38"/>
-            </a:solidFill>
-            <a:prstDash val="solid"/>
-          </a:ln>
+            <a:srgbClr val="E9E6DF">
+              <a:alpha val="12000"/>
+            </a:srgbClr>
+          </a:solidFill>
+          <a:ln/>
         </p:spPr>
       </p:sp>
       <p:sp>
@@ -4314,14 +4259,11 @@
             <a:avLst/>
           </a:prstGeom>
           <a:solidFill>
-            <a:srgbClr val="050505"/>
-          </a:solidFill>
-          <a:ln w="6350">
-            <a:solidFill>
-              <a:srgbClr val="3A3A38"/>
-            </a:solidFill>
-            <a:prstDash val="solid"/>
-          </a:ln>
+            <a:srgbClr val="E9E6DF">
+              <a:alpha val="12000"/>
+            </a:srgbClr>
+          </a:solidFill>
+          <a:ln/>
         </p:spPr>
       </p:sp>
       <p:sp>
@@ -4341,12 +4283,7 @@
           <a:solidFill>
             <a:srgbClr val="A8FF3E"/>
           </a:solidFill>
-          <a:ln w="6350">
-            <a:solidFill>
-              <a:srgbClr val="A8FF3E"/>
-            </a:solidFill>
-            <a:prstDash val="solid"/>
-          </a:ln>
+          <a:ln/>
         </p:spPr>
       </p:sp>
       <p:sp>
@@ -4364,14 +4301,11 @@
             <a:avLst/>
           </a:prstGeom>
           <a:solidFill>
-            <a:srgbClr val="050505"/>
-          </a:solidFill>
-          <a:ln w="6350">
-            <a:solidFill>
-              <a:srgbClr val="3A3A38"/>
-            </a:solidFill>
-            <a:prstDash val="solid"/>
-          </a:ln>
+            <a:srgbClr val="E9E6DF">
+              <a:alpha val="12000"/>
+            </a:srgbClr>
+          </a:solidFill>
+          <a:ln/>
         </p:spPr>
       </p:sp>
       <p:sp>
@@ -4389,14 +4323,11 @@
             <a:avLst/>
           </a:prstGeom>
           <a:solidFill>
-            <a:srgbClr val="050505"/>
-          </a:solidFill>
-          <a:ln w="6350">
-            <a:solidFill>
-              <a:srgbClr val="3A3A38"/>
-            </a:solidFill>
-            <a:prstDash val="solid"/>
-          </a:ln>
+            <a:srgbClr val="E9E6DF">
+              <a:alpha val="12000"/>
+            </a:srgbClr>
+          </a:solidFill>
+          <a:ln/>
         </p:spPr>
       </p:sp>
       <p:sp>
@@ -4414,14 +4345,11 @@
             <a:avLst/>
           </a:prstGeom>
           <a:solidFill>
-            <a:srgbClr val="050505"/>
-          </a:solidFill>
-          <a:ln w="6350">
-            <a:solidFill>
-              <a:srgbClr val="3A3A38"/>
-            </a:solidFill>
-            <a:prstDash val="solid"/>
-          </a:ln>
+            <a:srgbClr val="E9E6DF">
+              <a:alpha val="12000"/>
+            </a:srgbClr>
+          </a:solidFill>
+          <a:ln/>
         </p:spPr>
       </p:sp>
       <p:sp>
@@ -4439,14 +4367,11 @@
             <a:avLst/>
           </a:prstGeom>
           <a:solidFill>
-            <a:srgbClr val="050505"/>
-          </a:solidFill>
-          <a:ln w="6350">
-            <a:solidFill>
-              <a:srgbClr val="3A3A38"/>
-            </a:solidFill>
-            <a:prstDash val="solid"/>
-          </a:ln>
+            <a:srgbClr val="E9E6DF">
+              <a:alpha val="12000"/>
+            </a:srgbClr>
+          </a:solidFill>
+          <a:ln/>
         </p:spPr>
       </p:sp>
       <p:sp>
@@ -4464,14 +4389,11 @@
             <a:avLst/>
           </a:prstGeom>
           <a:solidFill>
-            <a:srgbClr val="050505"/>
-          </a:solidFill>
-          <a:ln w="6350">
-            <a:solidFill>
-              <a:srgbClr val="3A3A38"/>
-            </a:solidFill>
-            <a:prstDash val="solid"/>
-          </a:ln>
+            <a:srgbClr val="E9E6DF">
+              <a:alpha val="12000"/>
+            </a:srgbClr>
+          </a:solidFill>
+          <a:ln/>
         </p:spPr>
       </p:sp>
       <p:sp>
@@ -4489,14 +4411,11 @@
             <a:avLst/>
           </a:prstGeom>
           <a:solidFill>
-            <a:srgbClr val="050505"/>
-          </a:solidFill>
-          <a:ln w="6350">
-            <a:solidFill>
-              <a:srgbClr val="3A3A38"/>
-            </a:solidFill>
-            <a:prstDash val="solid"/>
-          </a:ln>
+            <a:srgbClr val="E9E6DF">
+              <a:alpha val="12000"/>
+            </a:srgbClr>
+          </a:solidFill>
+          <a:ln/>
         </p:spPr>
       </p:sp>
       <p:sp>
@@ -4514,14 +4433,11 @@
             <a:avLst/>
           </a:prstGeom>
           <a:solidFill>
-            <a:srgbClr val="050505"/>
-          </a:solidFill>
-          <a:ln w="6350">
-            <a:solidFill>
-              <a:srgbClr val="3A3A38"/>
-            </a:solidFill>
-            <a:prstDash val="solid"/>
-          </a:ln>
+            <a:srgbClr val="E9E6DF">
+              <a:alpha val="12000"/>
+            </a:srgbClr>
+          </a:solidFill>
+          <a:ln/>
         </p:spPr>
       </p:sp>
       <p:sp>
@@ -4539,14 +4455,11 @@
             <a:avLst/>
           </a:prstGeom>
           <a:solidFill>
-            <a:srgbClr val="050505"/>
-          </a:solidFill>
-          <a:ln w="6350">
-            <a:solidFill>
-              <a:srgbClr val="3A3A38"/>
-            </a:solidFill>
-            <a:prstDash val="solid"/>
-          </a:ln>
+            <a:srgbClr val="E9E6DF">
+              <a:alpha val="12000"/>
+            </a:srgbClr>
+          </a:solidFill>
+          <a:ln/>
         </p:spPr>
       </p:sp>
       <p:sp>
@@ -4564,14 +4477,11 @@
             <a:avLst/>
           </a:prstGeom>
           <a:solidFill>
-            <a:srgbClr val="050505"/>
-          </a:solidFill>
-          <a:ln w="6350">
-            <a:solidFill>
-              <a:srgbClr val="3A3A38"/>
-            </a:solidFill>
-            <a:prstDash val="solid"/>
-          </a:ln>
+            <a:srgbClr val="E9E6DF">
+              <a:alpha val="12000"/>
+            </a:srgbClr>
+          </a:solidFill>
+          <a:ln/>
         </p:spPr>
       </p:sp>
       <p:sp>
@@ -4802,7 +4712,7 @@
                 <a:ea typeface="Courier New" pitchFamily="34" charset="-122"/>
                 <a:cs typeface="Courier New" pitchFamily="34" charset="-120"/>
               </a:rPr>
-              <a:t>MATUA</a:t>
+              <a:t>MATUA / N24</a:t>
             </a:r>
             <a:endParaRPr lang="en-US" sz="600" dirty="0"/>
           </a:p>
@@ -5772,14 +5682,11 @@
             <a:avLst/>
           </a:prstGeom>
           <a:solidFill>
-            <a:srgbClr val="050505"/>
-          </a:solidFill>
-          <a:ln w="6350">
-            <a:solidFill>
-              <a:srgbClr val="3A3A38"/>
-            </a:solidFill>
-            <a:prstDash val="solid"/>
-          </a:ln>
+            <a:srgbClr val="E9E6DF">
+              <a:alpha val="12000"/>
+            </a:srgbClr>
+          </a:solidFill>
+          <a:ln/>
         </p:spPr>
       </p:sp>
       <p:sp>
@@ -5797,14 +5704,11 @@
             <a:avLst/>
           </a:prstGeom>
           <a:solidFill>
-            <a:srgbClr val="050505"/>
-          </a:solidFill>
-          <a:ln w="6350">
-            <a:solidFill>
-              <a:srgbClr val="3A3A38"/>
-            </a:solidFill>
-            <a:prstDash val="solid"/>
-          </a:ln>
+            <a:srgbClr val="E9E6DF">
+              <a:alpha val="12000"/>
+            </a:srgbClr>
+          </a:solidFill>
+          <a:ln/>
         </p:spPr>
       </p:sp>
       <p:sp>
@@ -5822,14 +5726,11 @@
             <a:avLst/>
           </a:prstGeom>
           <a:solidFill>
-            <a:srgbClr val="050505"/>
-          </a:solidFill>
-          <a:ln w="6350">
-            <a:solidFill>
-              <a:srgbClr val="3A3A38"/>
-            </a:solidFill>
-            <a:prstDash val="solid"/>
-          </a:ln>
+            <a:srgbClr val="E9E6DF">
+              <a:alpha val="12000"/>
+            </a:srgbClr>
+          </a:solidFill>
+          <a:ln/>
         </p:spPr>
       </p:sp>
       <p:sp>
@@ -5849,12 +5750,7 @@
           <a:solidFill>
             <a:srgbClr val="A8FF3E"/>
           </a:solidFill>
-          <a:ln w="6350">
-            <a:solidFill>
-              <a:srgbClr val="A8FF3E"/>
-            </a:solidFill>
-            <a:prstDash val="solid"/>
-          </a:ln>
+          <a:ln/>
         </p:spPr>
       </p:sp>
       <p:sp>
@@ -5872,14 +5768,11 @@
             <a:avLst/>
           </a:prstGeom>
           <a:solidFill>
-            <a:srgbClr val="050505"/>
-          </a:solidFill>
-          <a:ln w="6350">
-            <a:solidFill>
-              <a:srgbClr val="3A3A38"/>
-            </a:solidFill>
-            <a:prstDash val="solid"/>
-          </a:ln>
+            <a:srgbClr val="E9E6DF">
+              <a:alpha val="12000"/>
+            </a:srgbClr>
+          </a:solidFill>
+          <a:ln/>
         </p:spPr>
       </p:sp>
       <p:sp>
@@ -5897,14 +5790,11 @@
             <a:avLst/>
           </a:prstGeom>
           <a:solidFill>
-            <a:srgbClr val="050505"/>
-          </a:solidFill>
-          <a:ln w="6350">
-            <a:solidFill>
-              <a:srgbClr val="3A3A38"/>
-            </a:solidFill>
-            <a:prstDash val="solid"/>
-          </a:ln>
+            <a:srgbClr val="E9E6DF">
+              <a:alpha val="12000"/>
+            </a:srgbClr>
+          </a:solidFill>
+          <a:ln/>
         </p:spPr>
       </p:sp>
       <p:sp>
@@ -5922,14 +5812,11 @@
             <a:avLst/>
           </a:prstGeom>
           <a:solidFill>
-            <a:srgbClr val="050505"/>
-          </a:solidFill>
-          <a:ln w="6350">
-            <a:solidFill>
-              <a:srgbClr val="3A3A38"/>
-            </a:solidFill>
-            <a:prstDash val="solid"/>
-          </a:ln>
+            <a:srgbClr val="E9E6DF">
+              <a:alpha val="12000"/>
+            </a:srgbClr>
+          </a:solidFill>
+          <a:ln/>
         </p:spPr>
       </p:sp>
       <p:sp>
@@ -5947,14 +5834,11 @@
             <a:avLst/>
           </a:prstGeom>
           <a:solidFill>
-            <a:srgbClr val="050505"/>
-          </a:solidFill>
-          <a:ln w="6350">
-            <a:solidFill>
-              <a:srgbClr val="3A3A38"/>
-            </a:solidFill>
-            <a:prstDash val="solid"/>
-          </a:ln>
+            <a:srgbClr val="E9E6DF">
+              <a:alpha val="12000"/>
+            </a:srgbClr>
+          </a:solidFill>
+          <a:ln/>
         </p:spPr>
       </p:sp>
       <p:sp>
@@ -5972,14 +5856,11 @@
             <a:avLst/>
           </a:prstGeom>
           <a:solidFill>
-            <a:srgbClr val="050505"/>
-          </a:solidFill>
-          <a:ln w="6350">
-            <a:solidFill>
-              <a:srgbClr val="3A3A38"/>
-            </a:solidFill>
-            <a:prstDash val="solid"/>
-          </a:ln>
+            <a:srgbClr val="E9E6DF">
+              <a:alpha val="12000"/>
+            </a:srgbClr>
+          </a:solidFill>
+          <a:ln/>
         </p:spPr>
       </p:sp>
       <p:sp>
@@ -5997,14 +5878,11 @@
             <a:avLst/>
           </a:prstGeom>
           <a:solidFill>
-            <a:srgbClr val="050505"/>
-          </a:solidFill>
-          <a:ln w="6350">
-            <a:solidFill>
-              <a:srgbClr val="3A3A38"/>
-            </a:solidFill>
-            <a:prstDash val="solid"/>
-          </a:ln>
+            <a:srgbClr val="E9E6DF">
+              <a:alpha val="12000"/>
+            </a:srgbClr>
+          </a:solidFill>
+          <a:ln/>
         </p:spPr>
       </p:sp>
       <p:sp>
@@ -6022,14 +5900,11 @@
             <a:avLst/>
           </a:prstGeom>
           <a:solidFill>
-            <a:srgbClr val="050505"/>
-          </a:solidFill>
-          <a:ln w="6350">
-            <a:solidFill>
-              <a:srgbClr val="3A3A38"/>
-            </a:solidFill>
-            <a:prstDash val="solid"/>
-          </a:ln>
+            <a:srgbClr val="E9E6DF">
+              <a:alpha val="12000"/>
+            </a:srgbClr>
+          </a:solidFill>
+          <a:ln/>
         </p:spPr>
       </p:sp>
       <p:sp>
@@ -6047,14 +5922,11 @@
             <a:avLst/>
           </a:prstGeom>
           <a:solidFill>
-            <a:srgbClr val="050505"/>
-          </a:solidFill>
-          <a:ln w="6350">
-            <a:solidFill>
-              <a:srgbClr val="3A3A38"/>
-            </a:solidFill>
-            <a:prstDash val="solid"/>
-          </a:ln>
+            <a:srgbClr val="E9E6DF">
+              <a:alpha val="12000"/>
+            </a:srgbClr>
+          </a:solidFill>
+          <a:ln/>
         </p:spPr>
       </p:sp>
       <p:sp>
@@ -6072,14 +5944,11 @@
             <a:avLst/>
           </a:prstGeom>
           <a:solidFill>
-            <a:srgbClr val="050505"/>
-          </a:solidFill>
-          <a:ln w="6350">
-            <a:solidFill>
-              <a:srgbClr val="3A3A38"/>
-            </a:solidFill>
-            <a:prstDash val="solid"/>
-          </a:ln>
+            <a:srgbClr val="E9E6DF">
+              <a:alpha val="12000"/>
+            </a:srgbClr>
+          </a:solidFill>
+          <a:ln/>
         </p:spPr>
       </p:sp>
       <p:sp>
@@ -6097,14 +5966,11 @@
             <a:avLst/>
           </a:prstGeom>
           <a:solidFill>
-            <a:srgbClr val="050505"/>
-          </a:solidFill>
-          <a:ln w="6350">
-            <a:solidFill>
-              <a:srgbClr val="3A3A38"/>
-            </a:solidFill>
-            <a:prstDash val="solid"/>
-          </a:ln>
+            <a:srgbClr val="E9E6DF">
+              <a:alpha val="12000"/>
+            </a:srgbClr>
+          </a:solidFill>
+          <a:ln/>
         </p:spPr>
       </p:sp>
       <p:sp>
@@ -6335,7 +6201,7 @@
                 <a:ea typeface="Courier New" pitchFamily="34" charset="-122"/>
                 <a:cs typeface="Courier New" pitchFamily="34" charset="-120"/>
               </a:rPr>
-              <a:t>MATUA</a:t>
+              <a:t>MATUA / N24</a:t>
             </a:r>
             <a:endParaRPr lang="en-US" sz="600" dirty="0"/>
           </a:p>
@@ -7307,12 +7173,7 @@
           <a:solidFill>
             <a:srgbClr val="A8FF3E"/>
           </a:solidFill>
-          <a:ln w="6350">
-            <a:solidFill>
-              <a:srgbClr val="A8FF3E"/>
-            </a:solidFill>
-            <a:prstDash val="solid"/>
-          </a:ln>
+          <a:ln/>
         </p:spPr>
       </p:sp>
       <p:sp>
@@ -7330,14 +7191,11 @@
             <a:avLst/>
           </a:prstGeom>
           <a:solidFill>
-            <a:srgbClr val="050505"/>
-          </a:solidFill>
-          <a:ln w="6350">
-            <a:solidFill>
-              <a:srgbClr val="3A3A38"/>
-            </a:solidFill>
-            <a:prstDash val="solid"/>
-          </a:ln>
+            <a:srgbClr val="E9E6DF">
+              <a:alpha val="12000"/>
+            </a:srgbClr>
+          </a:solidFill>
+          <a:ln/>
         </p:spPr>
       </p:sp>
       <p:sp>
@@ -7355,14 +7213,11 @@
             <a:avLst/>
           </a:prstGeom>
           <a:solidFill>
-            <a:srgbClr val="050505"/>
-          </a:solidFill>
-          <a:ln w="6350">
-            <a:solidFill>
-              <a:srgbClr val="3A3A38"/>
-            </a:solidFill>
-            <a:prstDash val="solid"/>
-          </a:ln>
+            <a:srgbClr val="E9E6DF">
+              <a:alpha val="12000"/>
+            </a:srgbClr>
+          </a:solidFill>
+          <a:ln/>
         </p:spPr>
       </p:sp>
       <p:sp>
@@ -7380,14 +7235,11 @@
             <a:avLst/>
           </a:prstGeom>
           <a:solidFill>
-            <a:srgbClr val="050505"/>
-          </a:solidFill>
-          <a:ln w="6350">
-            <a:solidFill>
-              <a:srgbClr val="3A3A38"/>
-            </a:solidFill>
-            <a:prstDash val="solid"/>
-          </a:ln>
+            <a:srgbClr val="E9E6DF">
+              <a:alpha val="12000"/>
+            </a:srgbClr>
+          </a:solidFill>
+          <a:ln/>
         </p:spPr>
       </p:sp>
       <p:sp>
@@ -7405,14 +7257,11 @@
             <a:avLst/>
           </a:prstGeom>
           <a:solidFill>
-            <a:srgbClr val="050505"/>
-          </a:solidFill>
-          <a:ln w="6350">
-            <a:solidFill>
-              <a:srgbClr val="3A3A38"/>
-            </a:solidFill>
-            <a:prstDash val="solid"/>
-          </a:ln>
+            <a:srgbClr val="E9E6DF">
+              <a:alpha val="12000"/>
+            </a:srgbClr>
+          </a:solidFill>
+          <a:ln/>
         </p:spPr>
       </p:sp>
       <p:sp>
@@ -7430,14 +7279,11 @@
             <a:avLst/>
           </a:prstGeom>
           <a:solidFill>
-            <a:srgbClr val="050505"/>
-          </a:solidFill>
-          <a:ln w="6350">
-            <a:solidFill>
-              <a:srgbClr val="3A3A38"/>
-            </a:solidFill>
-            <a:prstDash val="solid"/>
-          </a:ln>
+            <a:srgbClr val="E9E6DF">
+              <a:alpha val="12000"/>
+            </a:srgbClr>
+          </a:solidFill>
+          <a:ln/>
         </p:spPr>
       </p:sp>
       <p:sp>
@@ -7455,14 +7301,11 @@
             <a:avLst/>
           </a:prstGeom>
           <a:solidFill>
-            <a:srgbClr val="050505"/>
-          </a:solidFill>
-          <a:ln w="6350">
-            <a:solidFill>
-              <a:srgbClr val="3A3A38"/>
-            </a:solidFill>
-            <a:prstDash val="solid"/>
-          </a:ln>
+            <a:srgbClr val="E9E6DF">
+              <a:alpha val="12000"/>
+            </a:srgbClr>
+          </a:solidFill>
+          <a:ln/>
         </p:spPr>
       </p:sp>
       <p:sp>
@@ -7480,14 +7323,11 @@
             <a:avLst/>
           </a:prstGeom>
           <a:solidFill>
-            <a:srgbClr val="050505"/>
-          </a:solidFill>
-          <a:ln w="6350">
-            <a:solidFill>
-              <a:srgbClr val="3A3A38"/>
-            </a:solidFill>
-            <a:prstDash val="solid"/>
-          </a:ln>
+            <a:srgbClr val="E9E6DF">
+              <a:alpha val="12000"/>
+            </a:srgbClr>
+          </a:solidFill>
+          <a:ln/>
         </p:spPr>
       </p:sp>
       <p:sp>
@@ -7505,14 +7345,11 @@
             <a:avLst/>
           </a:prstGeom>
           <a:solidFill>
-            <a:srgbClr val="050505"/>
-          </a:solidFill>
-          <a:ln w="6350">
-            <a:solidFill>
-              <a:srgbClr val="3A3A38"/>
-            </a:solidFill>
-            <a:prstDash val="solid"/>
-          </a:ln>
+            <a:srgbClr val="E9E6DF">
+              <a:alpha val="12000"/>
+            </a:srgbClr>
+          </a:solidFill>
+          <a:ln/>
         </p:spPr>
       </p:sp>
       <p:sp>
@@ -7530,14 +7367,11 @@
             <a:avLst/>
           </a:prstGeom>
           <a:solidFill>
-            <a:srgbClr val="050505"/>
-          </a:solidFill>
-          <a:ln w="6350">
-            <a:solidFill>
-              <a:srgbClr val="3A3A38"/>
-            </a:solidFill>
-            <a:prstDash val="solid"/>
-          </a:ln>
+            <a:srgbClr val="E9E6DF">
+              <a:alpha val="12000"/>
+            </a:srgbClr>
+          </a:solidFill>
+          <a:ln/>
         </p:spPr>
       </p:sp>
       <p:sp>
@@ -7555,14 +7389,11 @@
             <a:avLst/>
           </a:prstGeom>
           <a:solidFill>
-            <a:srgbClr val="050505"/>
-          </a:solidFill>
-          <a:ln w="6350">
-            <a:solidFill>
-              <a:srgbClr val="3A3A38"/>
-            </a:solidFill>
-            <a:prstDash val="solid"/>
-          </a:ln>
+            <a:srgbClr val="E9E6DF">
+              <a:alpha val="12000"/>
+            </a:srgbClr>
+          </a:solidFill>
+          <a:ln/>
         </p:spPr>
       </p:sp>
       <p:sp>
@@ -7580,14 +7411,11 @@
             <a:avLst/>
           </a:prstGeom>
           <a:solidFill>
-            <a:srgbClr val="050505"/>
-          </a:solidFill>
-          <a:ln w="6350">
-            <a:solidFill>
-              <a:srgbClr val="3A3A38"/>
-            </a:solidFill>
-            <a:prstDash val="solid"/>
-          </a:ln>
+            <a:srgbClr val="E9E6DF">
+              <a:alpha val="12000"/>
+            </a:srgbClr>
+          </a:solidFill>
+          <a:ln/>
         </p:spPr>
       </p:sp>
       <p:sp>
@@ -7605,14 +7433,11 @@
             <a:avLst/>
           </a:prstGeom>
           <a:solidFill>
-            <a:srgbClr val="050505"/>
-          </a:solidFill>
-          <a:ln w="6350">
-            <a:solidFill>
-              <a:srgbClr val="3A3A38"/>
-            </a:solidFill>
-            <a:prstDash val="solid"/>
-          </a:ln>
+            <a:srgbClr val="E9E6DF">
+              <a:alpha val="12000"/>
+            </a:srgbClr>
+          </a:solidFill>
+          <a:ln/>
         </p:spPr>
       </p:sp>
       <p:sp>
@@ -7630,14 +7455,11 @@
             <a:avLst/>
           </a:prstGeom>
           <a:solidFill>
-            <a:srgbClr val="050505"/>
-          </a:solidFill>
-          <a:ln w="6350">
-            <a:solidFill>
-              <a:srgbClr val="3A3A38"/>
-            </a:solidFill>
-            <a:prstDash val="solid"/>
-          </a:ln>
+            <a:srgbClr val="E9E6DF">
+              <a:alpha val="12000"/>
+            </a:srgbClr>
+          </a:solidFill>
+          <a:ln/>
         </p:spPr>
       </p:sp>
       <p:sp>
@@ -7868,7 +7690,7 @@
                 <a:ea typeface="Courier New" pitchFamily="34" charset="-122"/>
                 <a:cs typeface="Courier New" pitchFamily="34" charset="-120"/>
               </a:rPr>
-              <a:t>MATUA</a:t>
+              <a:t>MATUA / N24</a:t>
             </a:r>
             <a:endParaRPr lang="en-US" sz="600" dirty="0"/>
           </a:p>
@@ -11137,14 +10959,11 @@
             <a:avLst/>
           </a:prstGeom>
           <a:solidFill>
-            <a:srgbClr val="050505"/>
-          </a:solidFill>
-          <a:ln w="6350">
-            <a:solidFill>
-              <a:srgbClr val="E9E6DF"/>
-            </a:solidFill>
-            <a:prstDash val="solid"/>
-          </a:ln>
+            <a:srgbClr val="E9E6DF">
+              <a:alpha val="12000"/>
+            </a:srgbClr>
+          </a:solidFill>
+          <a:ln/>
         </p:spPr>
       </p:sp>
       <p:sp>
@@ -11164,12 +10983,7 @@
           <a:solidFill>
             <a:srgbClr val="E9E6DF"/>
           </a:solidFill>
-          <a:ln w="6350">
-            <a:solidFill>
-              <a:srgbClr val="E9E6DF"/>
-            </a:solidFill>
-            <a:prstDash val="solid"/>
-          </a:ln>
+          <a:ln/>
         </p:spPr>
       </p:sp>
       <p:sp>
@@ -11189,12 +11003,7 @@
           <a:solidFill>
             <a:srgbClr val="E9E6DF"/>
           </a:solidFill>
-          <a:ln w="6350">
-            <a:solidFill>
-              <a:srgbClr val="E9E6DF"/>
-            </a:solidFill>
-            <a:prstDash val="solid"/>
-          </a:ln>
+          <a:ln/>
         </p:spPr>
       </p:sp>
       <p:sp>
@@ -11214,12 +11023,7 @@
           <a:solidFill>
             <a:srgbClr val="E9E6DF"/>
           </a:solidFill>
-          <a:ln w="6350">
-            <a:solidFill>
-              <a:srgbClr val="E9E6DF"/>
-            </a:solidFill>
-            <a:prstDash val="solid"/>
-          </a:ln>
+          <a:ln/>
         </p:spPr>
       </p:sp>
       <p:sp>
@@ -11239,12 +11043,7 @@
           <a:solidFill>
             <a:srgbClr val="E9E6DF"/>
           </a:solidFill>
-          <a:ln w="6350">
-            <a:solidFill>
-              <a:srgbClr val="E9E6DF"/>
-            </a:solidFill>
-            <a:prstDash val="solid"/>
-          </a:ln>
+          <a:ln/>
         </p:spPr>
       </p:sp>
       <p:sp>
@@ -11264,12 +11063,7 @@
           <a:solidFill>
             <a:srgbClr val="E9E6DF"/>
           </a:solidFill>
-          <a:ln w="6350">
-            <a:solidFill>
-              <a:srgbClr val="E9E6DF"/>
-            </a:solidFill>
-            <a:prstDash val="solid"/>
-          </a:ln>
+          <a:ln/>
         </p:spPr>
       </p:sp>
       <p:sp>
@@ -11289,12 +11083,7 @@
           <a:solidFill>
             <a:srgbClr val="E9E6DF"/>
           </a:solidFill>
-          <a:ln w="6350">
-            <a:solidFill>
-              <a:srgbClr val="E9E6DF"/>
-            </a:solidFill>
-            <a:prstDash val="solid"/>
-          </a:ln>
+          <a:ln/>
         </p:spPr>
       </p:sp>
       <p:sp>
@@ -11314,12 +11103,7 @@
           <a:solidFill>
             <a:srgbClr val="E9E6DF"/>
           </a:solidFill>
-          <a:ln w="6350">
-            <a:solidFill>
-              <a:srgbClr val="E9E6DF"/>
-            </a:solidFill>
-            <a:prstDash val="solid"/>
-          </a:ln>
+          <a:ln/>
         </p:spPr>
       </p:sp>
       <p:sp>
@@ -11339,12 +11123,7 @@
           <a:solidFill>
             <a:srgbClr val="E9E6DF"/>
           </a:solidFill>
-          <a:ln w="6350">
-            <a:solidFill>
-              <a:srgbClr val="E9E6DF"/>
-            </a:solidFill>
-            <a:prstDash val="solid"/>
-          </a:ln>
+          <a:ln/>
         </p:spPr>
       </p:sp>
       <p:sp>
@@ -11364,12 +11143,7 @@
           <a:solidFill>
             <a:srgbClr val="E9E6DF"/>
           </a:solidFill>
-          <a:ln w="6350">
-            <a:solidFill>
-              <a:srgbClr val="E9E6DF"/>
-            </a:solidFill>
-            <a:prstDash val="solid"/>
-          </a:ln>
+          <a:ln/>
         </p:spPr>
       </p:sp>
       <p:sp>
@@ -11389,12 +11163,7 @@
           <a:solidFill>
             <a:srgbClr val="E9E6DF"/>
           </a:solidFill>
-          <a:ln w="6350">
-            <a:solidFill>
-              <a:srgbClr val="E9E6DF"/>
-            </a:solidFill>
-            <a:prstDash val="solid"/>
-          </a:ln>
+          <a:ln/>
         </p:spPr>
       </p:sp>
       <p:sp>
@@ -11414,12 +11183,7 @@
           <a:solidFill>
             <a:srgbClr val="E9E6DF"/>
           </a:solidFill>
-          <a:ln w="6350">
-            <a:solidFill>
-              <a:srgbClr val="E9E6DF"/>
-            </a:solidFill>
-            <a:prstDash val="solid"/>
-          </a:ln>
+          <a:ln/>
         </p:spPr>
       </p:sp>
       <p:sp>
@@ -11439,12 +11203,7 @@
           <a:solidFill>
             <a:srgbClr val="E9E6DF"/>
           </a:solidFill>
-          <a:ln w="6350">
-            <a:solidFill>
-              <a:srgbClr val="E9E6DF"/>
-            </a:solidFill>
-            <a:prstDash val="solid"/>
-          </a:ln>
+          <a:ln/>
         </p:spPr>
       </p:sp>
       <p:sp>
@@ -11464,12 +11223,7 @@
           <a:solidFill>
             <a:srgbClr val="E9E6DF"/>
           </a:solidFill>
-          <a:ln w="6350">
-            <a:solidFill>
-              <a:srgbClr val="E9E6DF"/>
-            </a:solidFill>
-            <a:prstDash val="solid"/>
-          </a:ln>
+          <a:ln/>
         </p:spPr>
       </p:sp>
       <p:sp>
@@ -11700,7 +11454,7 @@
                 <a:ea typeface="Courier New" pitchFamily="34" charset="-122"/>
                 <a:cs typeface="Courier New" pitchFamily="34" charset="-120"/>
               </a:rPr>
-              <a:t>MATUA</a:t>
+              <a:t>MATUA / N24</a:t>
             </a:r>
             <a:endParaRPr lang="en-US" sz="700" dirty="0"/>
           </a:p>
@@ -11955,14 +11709,11 @@
             <a:avLst/>
           </a:prstGeom>
           <a:solidFill>
-            <a:srgbClr val="050505"/>
-          </a:solidFill>
-          <a:ln w="6350">
-            <a:solidFill>
-              <a:srgbClr val="E9E6DF"/>
-            </a:solidFill>
-            <a:prstDash val="solid"/>
-          </a:ln>
+            <a:srgbClr val="E9E6DF">
+              <a:alpha val="12000"/>
+            </a:srgbClr>
+          </a:solidFill>
+          <a:ln/>
         </p:spPr>
       </p:sp>
       <p:sp>
@@ -11980,14 +11731,11 @@
             <a:avLst/>
           </a:prstGeom>
           <a:solidFill>
-            <a:srgbClr val="050505"/>
-          </a:solidFill>
-          <a:ln w="6350">
-            <a:solidFill>
-              <a:srgbClr val="E9E6DF"/>
-            </a:solidFill>
-            <a:prstDash val="solid"/>
-          </a:ln>
+            <a:srgbClr val="E9E6DF">
+              <a:alpha val="12000"/>
+            </a:srgbClr>
+          </a:solidFill>
+          <a:ln/>
         </p:spPr>
       </p:sp>
       <p:sp>
@@ -12005,14 +11753,11 @@
             <a:avLst/>
           </a:prstGeom>
           <a:solidFill>
-            <a:srgbClr val="050505"/>
-          </a:solidFill>
-          <a:ln w="6350">
-            <a:solidFill>
-              <a:srgbClr val="E9E6DF"/>
-            </a:solidFill>
-            <a:prstDash val="solid"/>
-          </a:ln>
+            <a:srgbClr val="E9E6DF">
+              <a:alpha val="12000"/>
+            </a:srgbClr>
+          </a:solidFill>
+          <a:ln/>
         </p:spPr>
       </p:sp>
       <p:sp>
@@ -12030,14 +11775,11 @@
             <a:avLst/>
           </a:prstGeom>
           <a:solidFill>
-            <a:srgbClr val="050505"/>
-          </a:solidFill>
-          <a:ln w="6350">
-            <a:solidFill>
-              <a:srgbClr val="E9E6DF"/>
-            </a:solidFill>
-            <a:prstDash val="solid"/>
-          </a:ln>
+            <a:srgbClr val="E9E6DF">
+              <a:alpha val="12000"/>
+            </a:srgbClr>
+          </a:solidFill>
+          <a:ln/>
         </p:spPr>
       </p:sp>
       <p:sp>
@@ -12057,12 +11799,7 @@
           <a:solidFill>
             <a:srgbClr val="E9E6DF"/>
           </a:solidFill>
-          <a:ln w="6350">
-            <a:solidFill>
-              <a:srgbClr val="E9E6DF"/>
-            </a:solidFill>
-            <a:prstDash val="solid"/>
-          </a:ln>
+          <a:ln/>
         </p:spPr>
       </p:sp>
       <p:sp>
@@ -12080,14 +11817,11 @@
             <a:avLst/>
           </a:prstGeom>
           <a:solidFill>
-            <a:srgbClr val="050505"/>
-          </a:solidFill>
-          <a:ln w="6350">
-            <a:solidFill>
-              <a:srgbClr val="E9E6DF"/>
-            </a:solidFill>
-            <a:prstDash val="solid"/>
-          </a:ln>
+            <a:srgbClr val="E9E6DF">
+              <a:alpha val="12000"/>
+            </a:srgbClr>
+          </a:solidFill>
+          <a:ln/>
         </p:spPr>
       </p:sp>
       <p:sp>
@@ -12105,14 +11839,11 @@
             <a:avLst/>
           </a:prstGeom>
           <a:solidFill>
-            <a:srgbClr val="050505"/>
-          </a:solidFill>
-          <a:ln w="6350">
-            <a:solidFill>
-              <a:srgbClr val="E9E6DF"/>
-            </a:solidFill>
-            <a:prstDash val="solid"/>
-          </a:ln>
+            <a:srgbClr val="E9E6DF">
+              <a:alpha val="12000"/>
+            </a:srgbClr>
+          </a:solidFill>
+          <a:ln/>
         </p:spPr>
       </p:sp>
       <p:sp>
@@ -12130,14 +11861,11 @@
             <a:avLst/>
           </a:prstGeom>
           <a:solidFill>
-            <a:srgbClr val="050505"/>
-          </a:solidFill>
-          <a:ln w="6350">
-            <a:solidFill>
-              <a:srgbClr val="E9E6DF"/>
-            </a:solidFill>
-            <a:prstDash val="solid"/>
-          </a:ln>
+            <a:srgbClr val="E9E6DF">
+              <a:alpha val="12000"/>
+            </a:srgbClr>
+          </a:solidFill>
+          <a:ln/>
         </p:spPr>
       </p:sp>
       <p:sp>
@@ -12155,14 +11883,11 @@
             <a:avLst/>
           </a:prstGeom>
           <a:solidFill>
-            <a:srgbClr val="050505"/>
-          </a:solidFill>
-          <a:ln w="6350">
-            <a:solidFill>
-              <a:srgbClr val="E9E6DF"/>
-            </a:solidFill>
-            <a:prstDash val="solid"/>
-          </a:ln>
+            <a:srgbClr val="E9E6DF">
+              <a:alpha val="12000"/>
+            </a:srgbClr>
+          </a:solidFill>
+          <a:ln/>
         </p:spPr>
       </p:sp>
       <p:sp>
@@ -12180,14 +11905,11 @@
             <a:avLst/>
           </a:prstGeom>
           <a:solidFill>
-            <a:srgbClr val="050505"/>
-          </a:solidFill>
-          <a:ln w="6350">
-            <a:solidFill>
-              <a:srgbClr val="E9E6DF"/>
-            </a:solidFill>
-            <a:prstDash val="solid"/>
-          </a:ln>
+            <a:srgbClr val="E9E6DF">
+              <a:alpha val="12000"/>
+            </a:srgbClr>
+          </a:solidFill>
+          <a:ln/>
         </p:spPr>
       </p:sp>
       <p:sp>
@@ -12205,14 +11927,11 @@
             <a:avLst/>
           </a:prstGeom>
           <a:solidFill>
-            <a:srgbClr val="050505"/>
-          </a:solidFill>
-          <a:ln w="6350">
-            <a:solidFill>
-              <a:srgbClr val="E9E6DF"/>
-            </a:solidFill>
-            <a:prstDash val="solid"/>
-          </a:ln>
+            <a:srgbClr val="E9E6DF">
+              <a:alpha val="12000"/>
+            </a:srgbClr>
+          </a:solidFill>
+          <a:ln/>
         </p:spPr>
       </p:sp>
       <p:sp>
@@ -12230,14 +11949,11 @@
             <a:avLst/>
           </a:prstGeom>
           <a:solidFill>
-            <a:srgbClr val="050505"/>
-          </a:solidFill>
-          <a:ln w="6350">
-            <a:solidFill>
-              <a:srgbClr val="E9E6DF"/>
-            </a:solidFill>
-            <a:prstDash val="solid"/>
-          </a:ln>
+            <a:srgbClr val="E9E6DF">
+              <a:alpha val="12000"/>
+            </a:srgbClr>
+          </a:solidFill>
+          <a:ln/>
         </p:spPr>
       </p:sp>
       <p:sp>
@@ -12255,14 +11971,11 @@
             <a:avLst/>
           </a:prstGeom>
           <a:solidFill>
-            <a:srgbClr val="050505"/>
-          </a:solidFill>
-          <a:ln w="6350">
-            <a:solidFill>
-              <a:srgbClr val="E9E6DF"/>
-            </a:solidFill>
-            <a:prstDash val="solid"/>
-          </a:ln>
+            <a:srgbClr val="E9E6DF">
+              <a:alpha val="12000"/>
+            </a:srgbClr>
+          </a:solidFill>
+          <a:ln/>
         </p:spPr>
       </p:sp>
       <p:sp>
@@ -12280,14 +11993,11 @@
             <a:avLst/>
           </a:prstGeom>
           <a:solidFill>
-            <a:srgbClr val="050505"/>
-          </a:solidFill>
-          <a:ln w="6350">
-            <a:solidFill>
-              <a:srgbClr val="E9E6DF"/>
-            </a:solidFill>
-            <a:prstDash val="solid"/>
-          </a:ln>
+            <a:srgbClr val="E9E6DF">
+              <a:alpha val="12000"/>
+            </a:srgbClr>
+          </a:solidFill>
+          <a:ln/>
         </p:spPr>
       </p:sp>
       <p:sp>
@@ -12518,7 +12228,7 @@
                 <a:ea typeface="Courier New" pitchFamily="34" charset="-122"/>
                 <a:cs typeface="Courier New" pitchFamily="34" charset="-120"/>
               </a:rPr>
-              <a:t>MATUA</a:t>
+              <a:t>MATUA / N24</a:t>
             </a:r>
             <a:endParaRPr lang="en-US" sz="700" dirty="0"/>
           </a:p>
@@ -13020,14 +12730,11 @@
             <a:avLst/>
           </a:prstGeom>
           <a:solidFill>
-            <a:srgbClr val="050505"/>
-          </a:solidFill>
-          <a:ln w="6350">
-            <a:solidFill>
-              <a:srgbClr val="3A3A38"/>
-            </a:solidFill>
-            <a:prstDash val="solid"/>
-          </a:ln>
+            <a:srgbClr val="E9E6DF">
+              <a:alpha val="12000"/>
+            </a:srgbClr>
+          </a:solidFill>
+          <a:ln/>
         </p:spPr>
       </p:sp>
       <p:sp>
@@ -13045,14 +12752,11 @@
             <a:avLst/>
           </a:prstGeom>
           <a:solidFill>
-            <a:srgbClr val="050505"/>
-          </a:solidFill>
-          <a:ln w="6350">
-            <a:solidFill>
-              <a:srgbClr val="3A3A38"/>
-            </a:solidFill>
-            <a:prstDash val="solid"/>
-          </a:ln>
+            <a:srgbClr val="E9E6DF">
+              <a:alpha val="12000"/>
+            </a:srgbClr>
+          </a:solidFill>
+          <a:ln/>
         </p:spPr>
       </p:sp>
       <p:sp>
@@ -13070,14 +12774,11 @@
             <a:avLst/>
           </a:prstGeom>
           <a:solidFill>
-            <a:srgbClr val="050505"/>
-          </a:solidFill>
-          <a:ln w="6350">
-            <a:solidFill>
-              <a:srgbClr val="3A3A38"/>
-            </a:solidFill>
-            <a:prstDash val="solid"/>
-          </a:ln>
+            <a:srgbClr val="E9E6DF">
+              <a:alpha val="12000"/>
+            </a:srgbClr>
+          </a:solidFill>
+          <a:ln/>
         </p:spPr>
       </p:sp>
       <p:sp>
@@ -13095,14 +12796,11 @@
             <a:avLst/>
           </a:prstGeom>
           <a:solidFill>
-            <a:srgbClr val="050505"/>
-          </a:solidFill>
-          <a:ln w="6350">
-            <a:solidFill>
-              <a:srgbClr val="3A3A38"/>
-            </a:solidFill>
-            <a:prstDash val="solid"/>
-          </a:ln>
+            <a:srgbClr val="E9E6DF">
+              <a:alpha val="12000"/>
+            </a:srgbClr>
+          </a:solidFill>
+          <a:ln/>
         </p:spPr>
       </p:sp>
       <p:sp>
@@ -13120,14 +12818,11 @@
             <a:avLst/>
           </a:prstGeom>
           <a:solidFill>
-            <a:srgbClr val="050505"/>
-          </a:solidFill>
-          <a:ln w="6350">
-            <a:solidFill>
-              <a:srgbClr val="3A3A38"/>
-            </a:solidFill>
-            <a:prstDash val="solid"/>
-          </a:ln>
+            <a:srgbClr val="E9E6DF">
+              <a:alpha val="12000"/>
+            </a:srgbClr>
+          </a:solidFill>
+          <a:ln/>
         </p:spPr>
       </p:sp>
       <p:sp>
@@ -13145,14 +12840,11 @@
             <a:avLst/>
           </a:prstGeom>
           <a:solidFill>
-            <a:srgbClr val="050505"/>
-          </a:solidFill>
-          <a:ln w="6350">
-            <a:solidFill>
-              <a:srgbClr val="3A3A38"/>
-            </a:solidFill>
-            <a:prstDash val="solid"/>
-          </a:ln>
+            <a:srgbClr val="E9E6DF">
+              <a:alpha val="12000"/>
+            </a:srgbClr>
+          </a:solidFill>
+          <a:ln/>
         </p:spPr>
       </p:sp>
       <p:sp>
@@ -13170,14 +12862,11 @@
             <a:avLst/>
           </a:prstGeom>
           <a:solidFill>
-            <a:srgbClr val="050505"/>
-          </a:solidFill>
-          <a:ln w="6350">
-            <a:solidFill>
-              <a:srgbClr val="3A3A38"/>
-            </a:solidFill>
-            <a:prstDash val="solid"/>
-          </a:ln>
+            <a:srgbClr val="E9E6DF">
+              <a:alpha val="12000"/>
+            </a:srgbClr>
+          </a:solidFill>
+          <a:ln/>
         </p:spPr>
       </p:sp>
       <p:sp>
@@ -13197,12 +12886,7 @@
           <a:solidFill>
             <a:srgbClr val="A8FF3E"/>
           </a:solidFill>
-          <a:ln w="6350">
-            <a:solidFill>
-              <a:srgbClr val="A8FF3E"/>
-            </a:solidFill>
-            <a:prstDash val="solid"/>
-          </a:ln>
+          <a:ln/>
         </p:spPr>
       </p:sp>
       <p:sp>
@@ -13220,14 +12904,11 @@
             <a:avLst/>
           </a:prstGeom>
           <a:solidFill>
-            <a:srgbClr val="050505"/>
-          </a:solidFill>
-          <a:ln w="6350">
-            <a:solidFill>
-              <a:srgbClr val="3A3A38"/>
-            </a:solidFill>
-            <a:prstDash val="solid"/>
-          </a:ln>
+            <a:srgbClr val="E9E6DF">
+              <a:alpha val="12000"/>
+            </a:srgbClr>
+          </a:solidFill>
+          <a:ln/>
         </p:spPr>
       </p:sp>
       <p:sp>
@@ -13245,14 +12926,11 @@
             <a:avLst/>
           </a:prstGeom>
           <a:solidFill>
-            <a:srgbClr val="050505"/>
-          </a:solidFill>
-          <a:ln w="6350">
-            <a:solidFill>
-              <a:srgbClr val="3A3A38"/>
-            </a:solidFill>
-            <a:prstDash val="solid"/>
-          </a:ln>
+            <a:srgbClr val="E9E6DF">
+              <a:alpha val="12000"/>
+            </a:srgbClr>
+          </a:solidFill>
+          <a:ln/>
         </p:spPr>
       </p:sp>
       <p:sp>
@@ -13270,14 +12948,11 @@
             <a:avLst/>
           </a:prstGeom>
           <a:solidFill>
-            <a:srgbClr val="050505"/>
-          </a:solidFill>
-          <a:ln w="6350">
-            <a:solidFill>
-              <a:srgbClr val="3A3A38"/>
-            </a:solidFill>
-            <a:prstDash val="solid"/>
-          </a:ln>
+            <a:srgbClr val="E9E6DF">
+              <a:alpha val="12000"/>
+            </a:srgbClr>
+          </a:solidFill>
+          <a:ln/>
         </p:spPr>
       </p:sp>
       <p:sp>
@@ -13295,14 +12970,11 @@
             <a:avLst/>
           </a:prstGeom>
           <a:solidFill>
-            <a:srgbClr val="050505"/>
-          </a:solidFill>
-          <a:ln w="6350">
-            <a:solidFill>
-              <a:srgbClr val="3A3A38"/>
-            </a:solidFill>
-            <a:prstDash val="solid"/>
-          </a:ln>
+            <a:srgbClr val="E9E6DF">
+              <a:alpha val="12000"/>
+            </a:srgbClr>
+          </a:solidFill>
+          <a:ln/>
         </p:spPr>
       </p:sp>
       <p:sp>
@@ -13320,14 +12992,11 @@
             <a:avLst/>
           </a:prstGeom>
           <a:solidFill>
-            <a:srgbClr val="050505"/>
-          </a:solidFill>
-          <a:ln w="6350">
-            <a:solidFill>
-              <a:srgbClr val="3A3A38"/>
-            </a:solidFill>
-            <a:prstDash val="solid"/>
-          </a:ln>
+            <a:srgbClr val="E9E6DF">
+              <a:alpha val="12000"/>
+            </a:srgbClr>
+          </a:solidFill>
+          <a:ln/>
         </p:spPr>
       </p:sp>
       <p:sp>
@@ -13345,14 +13014,11 @@
             <a:avLst/>
           </a:prstGeom>
           <a:solidFill>
-            <a:srgbClr val="050505"/>
-          </a:solidFill>
-          <a:ln w="6350">
-            <a:solidFill>
-              <a:srgbClr val="3A3A38"/>
-            </a:solidFill>
-            <a:prstDash val="solid"/>
-          </a:ln>
+            <a:srgbClr val="E9E6DF">
+              <a:alpha val="12000"/>
+            </a:srgbClr>
+          </a:solidFill>
+          <a:ln/>
         </p:spPr>
       </p:sp>
       <p:sp>
@@ -13583,7 +13249,7 @@
                 <a:ea typeface="Courier New" pitchFamily="34" charset="-122"/>
                 <a:cs typeface="Courier New" pitchFamily="34" charset="-120"/>
               </a:rPr>
-              <a:t>MATUA</a:t>
+              <a:t>MATUA / N24</a:t>
             </a:r>
             <a:endParaRPr lang="en-US" sz="600" dirty="0"/>
           </a:p>
@@ -14553,14 +14219,11 @@
             <a:avLst/>
           </a:prstGeom>
           <a:solidFill>
-            <a:srgbClr val="050505"/>
-          </a:solidFill>
-          <a:ln w="6350">
-            <a:solidFill>
-              <a:srgbClr val="3A3A38"/>
-            </a:solidFill>
-            <a:prstDash val="solid"/>
-          </a:ln>
+            <a:srgbClr val="E9E6DF">
+              <a:alpha val="12000"/>
+            </a:srgbClr>
+          </a:solidFill>
+          <a:ln/>
         </p:spPr>
       </p:sp>
       <p:sp>
@@ -14578,14 +14241,11 @@
             <a:avLst/>
           </a:prstGeom>
           <a:solidFill>
-            <a:srgbClr val="050505"/>
-          </a:solidFill>
-          <a:ln w="6350">
-            <a:solidFill>
-              <a:srgbClr val="3A3A38"/>
-            </a:solidFill>
-            <a:prstDash val="solid"/>
-          </a:ln>
+            <a:srgbClr val="E9E6DF">
+              <a:alpha val="12000"/>
+            </a:srgbClr>
+          </a:solidFill>
+          <a:ln/>
         </p:spPr>
       </p:sp>
       <p:sp>
@@ -14603,14 +14263,11 @@
             <a:avLst/>
           </a:prstGeom>
           <a:solidFill>
-            <a:srgbClr val="050505"/>
-          </a:solidFill>
-          <a:ln w="6350">
-            <a:solidFill>
-              <a:srgbClr val="3A3A38"/>
-            </a:solidFill>
-            <a:prstDash val="solid"/>
-          </a:ln>
+            <a:srgbClr val="E9E6DF">
+              <a:alpha val="12000"/>
+            </a:srgbClr>
+          </a:solidFill>
+          <a:ln/>
         </p:spPr>
       </p:sp>
       <p:sp>
@@ -14628,14 +14285,11 @@
             <a:avLst/>
           </a:prstGeom>
           <a:solidFill>
-            <a:srgbClr val="050505"/>
-          </a:solidFill>
-          <a:ln w="6350">
-            <a:solidFill>
-              <a:srgbClr val="3A3A38"/>
-            </a:solidFill>
-            <a:prstDash val="solid"/>
-          </a:ln>
+            <a:srgbClr val="E9E6DF">
+              <a:alpha val="12000"/>
+            </a:srgbClr>
+          </a:solidFill>
+          <a:ln/>
         </p:spPr>
       </p:sp>
       <p:sp>
@@ -14653,14 +14307,11 @@
             <a:avLst/>
           </a:prstGeom>
           <a:solidFill>
-            <a:srgbClr val="050505"/>
-          </a:solidFill>
-          <a:ln w="6350">
-            <a:solidFill>
-              <a:srgbClr val="3A3A38"/>
-            </a:solidFill>
-            <a:prstDash val="solid"/>
-          </a:ln>
+            <a:srgbClr val="E9E6DF">
+              <a:alpha val="12000"/>
+            </a:srgbClr>
+          </a:solidFill>
+          <a:ln/>
         </p:spPr>
       </p:sp>
       <p:sp>
@@ -14678,14 +14329,11 @@
             <a:avLst/>
           </a:prstGeom>
           <a:solidFill>
-            <a:srgbClr val="050505"/>
-          </a:solidFill>
-          <a:ln w="6350">
-            <a:solidFill>
-              <a:srgbClr val="3A3A38"/>
-            </a:solidFill>
-            <a:prstDash val="solid"/>
-          </a:ln>
+            <a:srgbClr val="E9E6DF">
+              <a:alpha val="12000"/>
+            </a:srgbClr>
+          </a:solidFill>
+          <a:ln/>
         </p:spPr>
       </p:sp>
       <p:sp>
@@ -14703,14 +14351,11 @@
             <a:avLst/>
           </a:prstGeom>
           <a:solidFill>
-            <a:srgbClr val="050505"/>
-          </a:solidFill>
-          <a:ln w="6350">
-            <a:solidFill>
-              <a:srgbClr val="3A3A38"/>
-            </a:solidFill>
-            <a:prstDash val="solid"/>
-          </a:ln>
+            <a:srgbClr val="E9E6DF">
+              <a:alpha val="12000"/>
+            </a:srgbClr>
+          </a:solidFill>
+          <a:ln/>
         </p:spPr>
       </p:sp>
       <p:sp>
@@ -14728,14 +14373,11 @@
             <a:avLst/>
           </a:prstGeom>
           <a:solidFill>
-            <a:srgbClr val="050505"/>
-          </a:solidFill>
-          <a:ln w="6350">
-            <a:solidFill>
-              <a:srgbClr val="3A3A38"/>
-            </a:solidFill>
-            <a:prstDash val="solid"/>
-          </a:ln>
+            <a:srgbClr val="E9E6DF">
+              <a:alpha val="12000"/>
+            </a:srgbClr>
+          </a:solidFill>
+          <a:ln/>
         </p:spPr>
       </p:sp>
       <p:sp>
@@ -14753,14 +14395,11 @@
             <a:avLst/>
           </a:prstGeom>
           <a:solidFill>
-            <a:srgbClr val="050505"/>
-          </a:solidFill>
-          <a:ln w="6350">
-            <a:solidFill>
-              <a:srgbClr val="3A3A38"/>
-            </a:solidFill>
-            <a:prstDash val="solid"/>
-          </a:ln>
+            <a:srgbClr val="E9E6DF">
+              <a:alpha val="12000"/>
+            </a:srgbClr>
+          </a:solidFill>
+          <a:ln/>
         </p:spPr>
       </p:sp>
       <p:sp>
@@ -14778,14 +14417,11 @@
             <a:avLst/>
           </a:prstGeom>
           <a:solidFill>
-            <a:srgbClr val="050505"/>
-          </a:solidFill>
-          <a:ln w="6350">
-            <a:solidFill>
-              <a:srgbClr val="3A3A38"/>
-            </a:solidFill>
-            <a:prstDash val="solid"/>
-          </a:ln>
+            <a:srgbClr val="E9E6DF">
+              <a:alpha val="12000"/>
+            </a:srgbClr>
+          </a:solidFill>
+          <a:ln/>
         </p:spPr>
       </p:sp>
       <p:sp>
@@ -14805,12 +14441,7 @@
           <a:solidFill>
             <a:srgbClr val="A8FF3E"/>
           </a:solidFill>
-          <a:ln w="6350">
-            <a:solidFill>
-              <a:srgbClr val="A8FF3E"/>
-            </a:solidFill>
-            <a:prstDash val="solid"/>
-          </a:ln>
+          <a:ln/>
         </p:spPr>
       </p:sp>
       <p:sp>
@@ -14830,12 +14461,7 @@
           <a:solidFill>
             <a:srgbClr val="A8FF3E"/>
           </a:solidFill>
-          <a:ln w="6350">
-            <a:solidFill>
-              <a:srgbClr val="A8FF3E"/>
-            </a:solidFill>
-            <a:prstDash val="solid"/>
-          </a:ln>
+          <a:ln/>
         </p:spPr>
       </p:sp>
       <p:sp>
@@ -14853,14 +14479,11 @@
             <a:avLst/>
           </a:prstGeom>
           <a:solidFill>
-            <a:srgbClr val="050505"/>
-          </a:solidFill>
-          <a:ln w="6350">
-            <a:solidFill>
-              <a:srgbClr val="3A3A38"/>
-            </a:solidFill>
-            <a:prstDash val="solid"/>
-          </a:ln>
+            <a:srgbClr val="E9E6DF">
+              <a:alpha val="12000"/>
+            </a:srgbClr>
+          </a:solidFill>
+          <a:ln/>
         </p:spPr>
       </p:sp>
       <p:sp>
@@ -14878,14 +14501,11 @@
             <a:avLst/>
           </a:prstGeom>
           <a:solidFill>
-            <a:srgbClr val="050505"/>
-          </a:solidFill>
-          <a:ln w="6350">
-            <a:solidFill>
-              <a:srgbClr val="3A3A38"/>
-            </a:solidFill>
-            <a:prstDash val="solid"/>
-          </a:ln>
+            <a:srgbClr val="E9E6DF">
+              <a:alpha val="12000"/>
+            </a:srgbClr>
+          </a:solidFill>
+          <a:ln/>
         </p:spPr>
       </p:sp>
       <p:sp>
@@ -15116,7 +14736,7 @@
                 <a:ea typeface="Courier New" pitchFamily="34" charset="-122"/>
                 <a:cs typeface="Courier New" pitchFamily="34" charset="-120"/>
               </a:rPr>
-              <a:t>MATUA</a:t>
+              <a:t>MATUA / N24</a:t>
             </a:r>
             <a:endParaRPr lang="en-US" sz="600" dirty="0"/>
           </a:p>
@@ -16086,14 +15706,11 @@
             <a:avLst/>
           </a:prstGeom>
           <a:solidFill>
-            <a:srgbClr val="050505"/>
-          </a:solidFill>
-          <a:ln w="6350">
-            <a:solidFill>
-              <a:srgbClr val="3A3A38"/>
-            </a:solidFill>
-            <a:prstDash val="solid"/>
-          </a:ln>
+            <a:srgbClr val="E9E6DF">
+              <a:alpha val="12000"/>
+            </a:srgbClr>
+          </a:solidFill>
+          <a:ln/>
         </p:spPr>
       </p:sp>
       <p:sp>
@@ -16111,14 +15728,11 @@
             <a:avLst/>
           </a:prstGeom>
           <a:solidFill>
-            <a:srgbClr val="050505"/>
-          </a:solidFill>
-          <a:ln w="6350">
-            <a:solidFill>
-              <a:srgbClr val="3A3A38"/>
-            </a:solidFill>
-            <a:prstDash val="solid"/>
-          </a:ln>
+            <a:srgbClr val="E9E6DF">
+              <a:alpha val="12000"/>
+            </a:srgbClr>
+          </a:solidFill>
+          <a:ln/>
         </p:spPr>
       </p:sp>
       <p:sp>
@@ -16136,14 +15750,11 @@
             <a:avLst/>
           </a:prstGeom>
           <a:solidFill>
-            <a:srgbClr val="050505"/>
-          </a:solidFill>
-          <a:ln w="6350">
-            <a:solidFill>
-              <a:srgbClr val="3A3A38"/>
-            </a:solidFill>
-            <a:prstDash val="solid"/>
-          </a:ln>
+            <a:srgbClr val="E9E6DF">
+              <a:alpha val="12000"/>
+            </a:srgbClr>
+          </a:solidFill>
+          <a:ln/>
         </p:spPr>
       </p:sp>
       <p:sp>
@@ -16161,14 +15772,11 @@
             <a:avLst/>
           </a:prstGeom>
           <a:solidFill>
-            <a:srgbClr val="050505"/>
-          </a:solidFill>
-          <a:ln w="6350">
-            <a:solidFill>
-              <a:srgbClr val="3A3A38"/>
-            </a:solidFill>
-            <a:prstDash val="solid"/>
-          </a:ln>
+            <a:srgbClr val="E9E6DF">
+              <a:alpha val="12000"/>
+            </a:srgbClr>
+          </a:solidFill>
+          <a:ln/>
         </p:spPr>
       </p:sp>
       <p:sp>
@@ -16186,14 +15794,11 @@
             <a:avLst/>
           </a:prstGeom>
           <a:solidFill>
-            <a:srgbClr val="050505"/>
-          </a:solidFill>
-          <a:ln w="6350">
-            <a:solidFill>
-              <a:srgbClr val="3A3A38"/>
-            </a:solidFill>
-            <a:prstDash val="solid"/>
-          </a:ln>
+            <a:srgbClr val="E9E6DF">
+              <a:alpha val="12000"/>
+            </a:srgbClr>
+          </a:solidFill>
+          <a:ln/>
         </p:spPr>
       </p:sp>
       <p:sp>
@@ -16211,14 +15816,11 @@
             <a:avLst/>
           </a:prstGeom>
           <a:solidFill>
-            <a:srgbClr val="050505"/>
-          </a:solidFill>
-          <a:ln w="6350">
-            <a:solidFill>
-              <a:srgbClr val="3A3A38"/>
-            </a:solidFill>
-            <a:prstDash val="solid"/>
-          </a:ln>
+            <a:srgbClr val="E9E6DF">
+              <a:alpha val="12000"/>
+            </a:srgbClr>
+          </a:solidFill>
+          <a:ln/>
         </p:spPr>
       </p:sp>
       <p:sp>
@@ -16236,14 +15838,11 @@
             <a:avLst/>
           </a:prstGeom>
           <a:solidFill>
-            <a:srgbClr val="050505"/>
-          </a:solidFill>
-          <a:ln w="6350">
-            <a:solidFill>
-              <a:srgbClr val="3A3A38"/>
-            </a:solidFill>
-            <a:prstDash val="solid"/>
-          </a:ln>
+            <a:srgbClr val="E9E6DF">
+              <a:alpha val="12000"/>
+            </a:srgbClr>
+          </a:solidFill>
+          <a:ln/>
         </p:spPr>
       </p:sp>
       <p:sp>
@@ -16261,14 +15860,11 @@
             <a:avLst/>
           </a:prstGeom>
           <a:solidFill>
-            <a:srgbClr val="050505"/>
-          </a:solidFill>
-          <a:ln w="6350">
-            <a:solidFill>
-              <a:srgbClr val="3A3A38"/>
-            </a:solidFill>
-            <a:prstDash val="solid"/>
-          </a:ln>
+            <a:srgbClr val="E9E6DF">
+              <a:alpha val="12000"/>
+            </a:srgbClr>
+          </a:solidFill>
+          <a:ln/>
         </p:spPr>
       </p:sp>
       <p:sp>
@@ -16288,12 +15884,7 @@
           <a:solidFill>
             <a:srgbClr val="A8FF3E"/>
           </a:solidFill>
-          <a:ln w="6350">
-            <a:solidFill>
-              <a:srgbClr val="A8FF3E"/>
-            </a:solidFill>
-            <a:prstDash val="solid"/>
-          </a:ln>
+          <a:ln/>
         </p:spPr>
       </p:sp>
       <p:sp>
@@ -16313,12 +15904,7 @@
           <a:solidFill>
             <a:srgbClr val="A8FF3E"/>
           </a:solidFill>
-          <a:ln w="6350">
-            <a:solidFill>
-              <a:srgbClr val="A8FF3E"/>
-            </a:solidFill>
-            <a:prstDash val="solid"/>
-          </a:ln>
+          <a:ln/>
         </p:spPr>
       </p:sp>
       <p:sp>
@@ -16336,14 +15922,11 @@
             <a:avLst/>
           </a:prstGeom>
           <a:solidFill>
-            <a:srgbClr val="050505"/>
-          </a:solidFill>
-          <a:ln w="6350">
-            <a:solidFill>
-              <a:srgbClr val="3A3A38"/>
-            </a:solidFill>
-            <a:prstDash val="solid"/>
-          </a:ln>
+            <a:srgbClr val="E9E6DF">
+              <a:alpha val="12000"/>
+            </a:srgbClr>
+          </a:solidFill>
+          <a:ln/>
         </p:spPr>
       </p:sp>
       <p:sp>
@@ -16361,14 +15944,11 @@
             <a:avLst/>
           </a:prstGeom>
           <a:solidFill>
-            <a:srgbClr val="050505"/>
-          </a:solidFill>
-          <a:ln w="6350">
-            <a:solidFill>
-              <a:srgbClr val="3A3A38"/>
-            </a:solidFill>
-            <a:prstDash val="solid"/>
-          </a:ln>
+            <a:srgbClr val="E9E6DF">
+              <a:alpha val="12000"/>
+            </a:srgbClr>
+          </a:solidFill>
+          <a:ln/>
         </p:spPr>
       </p:sp>
       <p:sp>
@@ -16386,14 +15966,11 @@
             <a:avLst/>
           </a:prstGeom>
           <a:solidFill>
-            <a:srgbClr val="050505"/>
-          </a:solidFill>
-          <a:ln w="6350">
-            <a:solidFill>
-              <a:srgbClr val="3A3A38"/>
-            </a:solidFill>
-            <a:prstDash val="solid"/>
-          </a:ln>
+            <a:srgbClr val="E9E6DF">
+              <a:alpha val="12000"/>
+            </a:srgbClr>
+          </a:solidFill>
+          <a:ln/>
         </p:spPr>
       </p:sp>
       <p:sp>
@@ -16411,14 +15988,11 @@
             <a:avLst/>
           </a:prstGeom>
           <a:solidFill>
-            <a:srgbClr val="050505"/>
-          </a:solidFill>
-          <a:ln w="6350">
-            <a:solidFill>
-              <a:srgbClr val="3A3A38"/>
-            </a:solidFill>
-            <a:prstDash val="solid"/>
-          </a:ln>
+            <a:srgbClr val="E9E6DF">
+              <a:alpha val="12000"/>
+            </a:srgbClr>
+          </a:solidFill>
+          <a:ln/>
         </p:spPr>
       </p:sp>
       <p:sp>
@@ -16649,7 +16223,7 @@
                 <a:ea typeface="Courier New" pitchFamily="34" charset="-122"/>
                 <a:cs typeface="Courier New" pitchFamily="34" charset="-120"/>
               </a:rPr>
-              <a:t>MATUA</a:t>
+              <a:t>MATUA / N24</a:t>
             </a:r>
             <a:endParaRPr lang="en-US" sz="600" dirty="0"/>
           </a:p>
@@ -17619,14 +17193,11 @@
             <a:avLst/>
           </a:prstGeom>
           <a:solidFill>
-            <a:srgbClr val="050505"/>
-          </a:solidFill>
-          <a:ln w="6350">
-            <a:solidFill>
-              <a:srgbClr val="3A3A38"/>
-            </a:solidFill>
-            <a:prstDash val="solid"/>
-          </a:ln>
+            <a:srgbClr val="E9E6DF">
+              <a:alpha val="12000"/>
+            </a:srgbClr>
+          </a:solidFill>
+          <a:ln/>
         </p:spPr>
       </p:sp>
       <p:sp>
@@ -17644,14 +17215,11 @@
             <a:avLst/>
           </a:prstGeom>
           <a:solidFill>
-            <a:srgbClr val="050505"/>
-          </a:solidFill>
-          <a:ln w="6350">
-            <a:solidFill>
-              <a:srgbClr val="3A3A38"/>
-            </a:solidFill>
-            <a:prstDash val="solid"/>
-          </a:ln>
+            <a:srgbClr val="E9E6DF">
+              <a:alpha val="12000"/>
+            </a:srgbClr>
+          </a:solidFill>
+          <a:ln/>
         </p:spPr>
       </p:sp>
       <p:sp>
@@ -17669,14 +17237,11 @@
             <a:avLst/>
           </a:prstGeom>
           <a:solidFill>
-            <a:srgbClr val="050505"/>
-          </a:solidFill>
-          <a:ln w="6350">
-            <a:solidFill>
-              <a:srgbClr val="3A3A38"/>
-            </a:solidFill>
-            <a:prstDash val="solid"/>
-          </a:ln>
+            <a:srgbClr val="E9E6DF">
+              <a:alpha val="12000"/>
+            </a:srgbClr>
+          </a:solidFill>
+          <a:ln/>
         </p:spPr>
       </p:sp>
       <p:sp>
@@ -17694,14 +17259,11 @@
             <a:avLst/>
           </a:prstGeom>
           <a:solidFill>
-            <a:srgbClr val="050505"/>
-          </a:solidFill>
-          <a:ln w="6350">
-            <a:solidFill>
-              <a:srgbClr val="3A3A38"/>
-            </a:solidFill>
-            <a:prstDash val="solid"/>
-          </a:ln>
+            <a:srgbClr val="E9E6DF">
+              <a:alpha val="12000"/>
+            </a:srgbClr>
+          </a:solidFill>
+          <a:ln/>
         </p:spPr>
       </p:sp>
       <p:sp>
@@ -17719,14 +17281,11 @@
             <a:avLst/>
           </a:prstGeom>
           <a:solidFill>
-            <a:srgbClr val="050505"/>
-          </a:solidFill>
-          <a:ln w="6350">
-            <a:solidFill>
-              <a:srgbClr val="3A3A38"/>
-            </a:solidFill>
-            <a:prstDash val="solid"/>
-          </a:ln>
+            <a:srgbClr val="E9E6DF">
+              <a:alpha val="12000"/>
+            </a:srgbClr>
+          </a:solidFill>
+          <a:ln/>
         </p:spPr>
       </p:sp>
       <p:sp>
@@ -17744,14 +17303,11 @@
             <a:avLst/>
           </a:prstGeom>
           <a:solidFill>
-            <a:srgbClr val="050505"/>
-          </a:solidFill>
-          <a:ln w="6350">
-            <a:solidFill>
-              <a:srgbClr val="3A3A38"/>
-            </a:solidFill>
-            <a:prstDash val="solid"/>
-          </a:ln>
+            <a:srgbClr val="E9E6DF">
+              <a:alpha val="12000"/>
+            </a:srgbClr>
+          </a:solidFill>
+          <a:ln/>
         </p:spPr>
       </p:sp>
       <p:sp>
@@ -17769,14 +17325,11 @@
             <a:avLst/>
           </a:prstGeom>
           <a:solidFill>
-            <a:srgbClr val="050505"/>
-          </a:solidFill>
-          <a:ln w="6350">
-            <a:solidFill>
-              <a:srgbClr val="3A3A38"/>
-            </a:solidFill>
-            <a:prstDash val="solid"/>
-          </a:ln>
+            <a:srgbClr val="E9E6DF">
+              <a:alpha val="12000"/>
+            </a:srgbClr>
+          </a:solidFill>
+          <a:ln/>
         </p:spPr>
       </p:sp>
       <p:sp>
@@ -17794,14 +17347,11 @@
             <a:avLst/>
           </a:prstGeom>
           <a:solidFill>
-            <a:srgbClr val="050505"/>
-          </a:solidFill>
-          <a:ln w="6350">
-            <a:solidFill>
-              <a:srgbClr val="3A3A38"/>
-            </a:solidFill>
-            <a:prstDash val="solid"/>
-          </a:ln>
+            <a:srgbClr val="E9E6DF">
+              <a:alpha val="12000"/>
+            </a:srgbClr>
+          </a:solidFill>
+          <a:ln/>
         </p:spPr>
       </p:sp>
       <p:sp>
@@ -17819,14 +17369,11 @@
             <a:avLst/>
           </a:prstGeom>
           <a:solidFill>
-            <a:srgbClr val="050505"/>
-          </a:solidFill>
-          <a:ln w="6350">
-            <a:solidFill>
-              <a:srgbClr val="3A3A38"/>
-            </a:solidFill>
-            <a:prstDash val="solid"/>
-          </a:ln>
+            <a:srgbClr val="E9E6DF">
+              <a:alpha val="12000"/>
+            </a:srgbClr>
+          </a:solidFill>
+          <a:ln/>
         </p:spPr>
       </p:sp>
       <p:sp>
@@ -17844,14 +17391,11 @@
             <a:avLst/>
           </a:prstGeom>
           <a:solidFill>
-            <a:srgbClr val="050505"/>
-          </a:solidFill>
-          <a:ln w="6350">
-            <a:solidFill>
-              <a:srgbClr val="3A3A38"/>
-            </a:solidFill>
-            <a:prstDash val="solid"/>
-          </a:ln>
+            <a:srgbClr val="E9E6DF">
+              <a:alpha val="12000"/>
+            </a:srgbClr>
+          </a:solidFill>
+          <a:ln/>
         </p:spPr>
       </p:sp>
       <p:sp>
@@ -17869,14 +17413,11 @@
             <a:avLst/>
           </a:prstGeom>
           <a:solidFill>
-            <a:srgbClr val="050505"/>
-          </a:solidFill>
-          <a:ln w="6350">
-            <a:solidFill>
-              <a:srgbClr val="3A3A38"/>
-            </a:solidFill>
-            <a:prstDash val="solid"/>
-          </a:ln>
+            <a:srgbClr val="E9E6DF">
+              <a:alpha val="12000"/>
+            </a:srgbClr>
+          </a:solidFill>
+          <a:ln/>
         </p:spPr>
       </p:sp>
       <p:sp>
@@ -17894,14 +17435,11 @@
             <a:avLst/>
           </a:prstGeom>
           <a:solidFill>
-            <a:srgbClr val="050505"/>
-          </a:solidFill>
-          <a:ln w="6350">
-            <a:solidFill>
-              <a:srgbClr val="3A3A38"/>
-            </a:solidFill>
-            <a:prstDash val="solid"/>
-          </a:ln>
+            <a:srgbClr val="E9E6DF">
+              <a:alpha val="12000"/>
+            </a:srgbClr>
+          </a:solidFill>
+          <a:ln/>
         </p:spPr>
       </p:sp>
       <p:sp>
@@ -17919,14 +17457,11 @@
             <a:avLst/>
           </a:prstGeom>
           <a:solidFill>
-            <a:srgbClr val="050505"/>
-          </a:solidFill>
-          <a:ln w="6350">
-            <a:solidFill>
-              <a:srgbClr val="3A3A38"/>
-            </a:solidFill>
-            <a:prstDash val="solid"/>
-          </a:ln>
+            <a:srgbClr val="E9E6DF">
+              <a:alpha val="12000"/>
+            </a:srgbClr>
+          </a:solidFill>
+          <a:ln/>
         </p:spPr>
       </p:sp>
       <p:sp>
@@ -17946,12 +17481,7 @@
           <a:solidFill>
             <a:srgbClr val="A8FF3E"/>
           </a:solidFill>
-          <a:ln w="6350">
-            <a:solidFill>
-              <a:srgbClr val="A8FF3E"/>
-            </a:solidFill>
-            <a:prstDash val="solid"/>
-          </a:ln>
+          <a:ln/>
         </p:spPr>
       </p:sp>
       <p:sp>
@@ -18182,7 +17712,7 @@
                 <a:ea typeface="Courier New" pitchFamily="34" charset="-122"/>
                 <a:cs typeface="Courier New" pitchFamily="34" charset="-120"/>
               </a:rPr>
-              <a:t>MATUA</a:t>
+              <a:t>MATUA / N24</a:t>
             </a:r>
             <a:endParaRPr lang="en-US" sz="600" dirty="0"/>
           </a:p>
@@ -19152,14 +18682,11 @@
             <a:avLst/>
           </a:prstGeom>
           <a:solidFill>
-            <a:srgbClr val="050505"/>
-          </a:solidFill>
-          <a:ln w="6350">
-            <a:solidFill>
-              <a:srgbClr val="3A3A38"/>
-            </a:solidFill>
-            <a:prstDash val="solid"/>
-          </a:ln>
+            <a:srgbClr val="E9E6DF">
+              <a:alpha val="12000"/>
+            </a:srgbClr>
+          </a:solidFill>
+          <a:ln/>
         </p:spPr>
       </p:sp>
       <p:sp>
@@ -19177,14 +18704,11 @@
             <a:avLst/>
           </a:prstGeom>
           <a:solidFill>
-            <a:srgbClr val="050505"/>
-          </a:solidFill>
-          <a:ln w="6350">
-            <a:solidFill>
-              <a:srgbClr val="3A3A38"/>
-            </a:solidFill>
-            <a:prstDash val="solid"/>
-          </a:ln>
+            <a:srgbClr val="E9E6DF">
+              <a:alpha val="12000"/>
+            </a:srgbClr>
+          </a:solidFill>
+          <a:ln/>
         </p:spPr>
       </p:sp>
       <p:sp>
@@ -19202,14 +18726,11 @@
             <a:avLst/>
           </a:prstGeom>
           <a:solidFill>
-            <a:srgbClr val="050505"/>
-          </a:solidFill>
-          <a:ln w="6350">
-            <a:solidFill>
-              <a:srgbClr val="3A3A38"/>
-            </a:solidFill>
-            <a:prstDash val="solid"/>
-          </a:ln>
+            <a:srgbClr val="E9E6DF">
+              <a:alpha val="12000"/>
+            </a:srgbClr>
+          </a:solidFill>
+          <a:ln/>
         </p:spPr>
       </p:sp>
       <p:sp>
@@ -19227,14 +18748,11 @@
             <a:avLst/>
           </a:prstGeom>
           <a:solidFill>
-            <a:srgbClr val="050505"/>
-          </a:solidFill>
-          <a:ln w="6350">
-            <a:solidFill>
-              <a:srgbClr val="3A3A38"/>
-            </a:solidFill>
-            <a:prstDash val="solid"/>
-          </a:ln>
+            <a:srgbClr val="E9E6DF">
+              <a:alpha val="12000"/>
+            </a:srgbClr>
+          </a:solidFill>
+          <a:ln/>
         </p:spPr>
       </p:sp>
       <p:sp>
@@ -19252,14 +18770,11 @@
             <a:avLst/>
           </a:prstGeom>
           <a:solidFill>
-            <a:srgbClr val="050505"/>
-          </a:solidFill>
-          <a:ln w="6350">
-            <a:solidFill>
-              <a:srgbClr val="3A3A38"/>
-            </a:solidFill>
-            <a:prstDash val="solid"/>
-          </a:ln>
+            <a:srgbClr val="E9E6DF">
+              <a:alpha val="12000"/>
+            </a:srgbClr>
+          </a:solidFill>
+          <a:ln/>
         </p:spPr>
       </p:sp>
       <p:sp>
@@ -19277,14 +18792,11 @@
             <a:avLst/>
           </a:prstGeom>
           <a:solidFill>
-            <a:srgbClr val="050505"/>
-          </a:solidFill>
-          <a:ln w="6350">
-            <a:solidFill>
-              <a:srgbClr val="3A3A38"/>
-            </a:solidFill>
-            <a:prstDash val="solid"/>
-          </a:ln>
+            <a:srgbClr val="E9E6DF">
+              <a:alpha val="12000"/>
+            </a:srgbClr>
+          </a:solidFill>
+          <a:ln/>
         </p:spPr>
       </p:sp>
       <p:sp>
@@ -19302,14 +18814,11 @@
             <a:avLst/>
           </a:prstGeom>
           <a:solidFill>
-            <a:srgbClr val="050505"/>
-          </a:solidFill>
-          <a:ln w="6350">
-            <a:solidFill>
-              <a:srgbClr val="3A3A38"/>
-            </a:solidFill>
-            <a:prstDash val="solid"/>
-          </a:ln>
+            <a:srgbClr val="E9E6DF">
+              <a:alpha val="12000"/>
+            </a:srgbClr>
+          </a:solidFill>
+          <a:ln/>
         </p:spPr>
       </p:sp>
       <p:sp>
@@ -19327,14 +18836,11 @@
             <a:avLst/>
           </a:prstGeom>
           <a:solidFill>
-            <a:srgbClr val="050505"/>
-          </a:solidFill>
-          <a:ln w="6350">
-            <a:solidFill>
-              <a:srgbClr val="3A3A38"/>
-            </a:solidFill>
-            <a:prstDash val="solid"/>
-          </a:ln>
+            <a:srgbClr val="E9E6DF">
+              <a:alpha val="12000"/>
+            </a:srgbClr>
+          </a:solidFill>
+          <a:ln/>
         </p:spPr>
       </p:sp>
       <p:sp>
@@ -19352,14 +18858,11 @@
             <a:avLst/>
           </a:prstGeom>
           <a:solidFill>
-            <a:srgbClr val="050505"/>
-          </a:solidFill>
-          <a:ln w="6350">
-            <a:solidFill>
-              <a:srgbClr val="3A3A38"/>
-            </a:solidFill>
-            <a:prstDash val="solid"/>
-          </a:ln>
+            <a:srgbClr val="E9E6DF">
+              <a:alpha val="12000"/>
+            </a:srgbClr>
+          </a:solidFill>
+          <a:ln/>
         </p:spPr>
       </p:sp>
       <p:sp>
@@ -19377,14 +18880,11 @@
             <a:avLst/>
           </a:prstGeom>
           <a:solidFill>
-            <a:srgbClr val="050505"/>
-          </a:solidFill>
-          <a:ln w="6350">
-            <a:solidFill>
-              <a:srgbClr val="3A3A38"/>
-            </a:solidFill>
-            <a:prstDash val="solid"/>
-          </a:ln>
+            <a:srgbClr val="E9E6DF">
+              <a:alpha val="12000"/>
+            </a:srgbClr>
+          </a:solidFill>
+          <a:ln/>
         </p:spPr>
       </p:sp>
       <p:sp>
@@ -19402,14 +18902,11 @@
             <a:avLst/>
           </a:prstGeom>
           <a:solidFill>
-            <a:srgbClr val="050505"/>
-          </a:solidFill>
-          <a:ln w="6350">
-            <a:solidFill>
-              <a:srgbClr val="3A3A38"/>
-            </a:solidFill>
-            <a:prstDash val="solid"/>
-          </a:ln>
+            <a:srgbClr val="E9E6DF">
+              <a:alpha val="12000"/>
+            </a:srgbClr>
+          </a:solidFill>
+          <a:ln/>
         </p:spPr>
       </p:sp>
       <p:sp>
@@ -19427,14 +18924,11 @@
             <a:avLst/>
           </a:prstGeom>
           <a:solidFill>
-            <a:srgbClr val="050505"/>
-          </a:solidFill>
-          <a:ln w="6350">
-            <a:solidFill>
-              <a:srgbClr val="3A3A38"/>
-            </a:solidFill>
-            <a:prstDash val="solid"/>
-          </a:ln>
+            <a:srgbClr val="E9E6DF">
+              <a:alpha val="12000"/>
+            </a:srgbClr>
+          </a:solidFill>
+          <a:ln/>
         </p:spPr>
       </p:sp>
       <p:sp>
@@ -19454,12 +18948,7 @@
           <a:solidFill>
             <a:srgbClr val="A8FF3E"/>
           </a:solidFill>
-          <a:ln w="6350">
-            <a:solidFill>
-              <a:srgbClr val="A8FF3E"/>
-            </a:solidFill>
-            <a:prstDash val="solid"/>
-          </a:ln>
+          <a:ln/>
         </p:spPr>
       </p:sp>
       <p:sp>
@@ -19477,14 +18966,11 @@
             <a:avLst/>
           </a:prstGeom>
           <a:solidFill>
-            <a:srgbClr val="050505"/>
-          </a:solidFill>
-          <a:ln w="6350">
-            <a:solidFill>
-              <a:srgbClr val="3A3A38"/>
-            </a:solidFill>
-            <a:prstDash val="solid"/>
-          </a:ln>
+            <a:srgbClr val="E9E6DF">
+              <a:alpha val="12000"/>
+            </a:srgbClr>
+          </a:solidFill>
+          <a:ln/>
         </p:spPr>
       </p:sp>
       <p:sp>
@@ -19715,7 +19201,7 @@
                 <a:ea typeface="Courier New" pitchFamily="34" charset="-122"/>
                 <a:cs typeface="Courier New" pitchFamily="34" charset="-120"/>
               </a:rPr>
-              <a:t>MATUA</a:t>
+              <a:t>MATUA / N24</a:t>
             </a:r>
             <a:endParaRPr lang="en-US" sz="600" dirty="0"/>
           </a:p>
@@ -20685,14 +20171,11 @@
             <a:avLst/>
           </a:prstGeom>
           <a:solidFill>
-            <a:srgbClr val="050505"/>
-          </a:solidFill>
-          <a:ln w="6350">
-            <a:solidFill>
-              <a:srgbClr val="3A3A38"/>
-            </a:solidFill>
-            <a:prstDash val="solid"/>
-          </a:ln>
+            <a:srgbClr val="E9E6DF">
+              <a:alpha val="12000"/>
+            </a:srgbClr>
+          </a:solidFill>
+          <a:ln/>
         </p:spPr>
       </p:sp>
       <p:sp>
@@ -20710,14 +20193,11 @@
             <a:avLst/>
           </a:prstGeom>
           <a:solidFill>
-            <a:srgbClr val="050505"/>
-          </a:solidFill>
-          <a:ln w="6350">
-            <a:solidFill>
-              <a:srgbClr val="3A3A38"/>
-            </a:solidFill>
-            <a:prstDash val="solid"/>
-          </a:ln>
+            <a:srgbClr val="E9E6DF">
+              <a:alpha val="12000"/>
+            </a:srgbClr>
+          </a:solidFill>
+          <a:ln/>
         </p:spPr>
       </p:sp>
       <p:sp>
@@ -20735,14 +20215,11 @@
             <a:avLst/>
           </a:prstGeom>
           <a:solidFill>
-            <a:srgbClr val="050505"/>
-          </a:solidFill>
-          <a:ln w="6350">
-            <a:solidFill>
-              <a:srgbClr val="3A3A38"/>
-            </a:solidFill>
-            <a:prstDash val="solid"/>
-          </a:ln>
+            <a:srgbClr val="E9E6DF">
+              <a:alpha val="12000"/>
+            </a:srgbClr>
+          </a:solidFill>
+          <a:ln/>
         </p:spPr>
       </p:sp>
       <p:sp>
@@ -20760,14 +20237,11 @@
             <a:avLst/>
           </a:prstGeom>
           <a:solidFill>
-            <a:srgbClr val="050505"/>
-          </a:solidFill>
-          <a:ln w="6350">
-            <a:solidFill>
-              <a:srgbClr val="3A3A38"/>
-            </a:solidFill>
-            <a:prstDash val="solid"/>
-          </a:ln>
+            <a:srgbClr val="E9E6DF">
+              <a:alpha val="12000"/>
+            </a:srgbClr>
+          </a:solidFill>
+          <a:ln/>
         </p:spPr>
       </p:sp>
       <p:sp>
@@ -20785,14 +20259,11 @@
             <a:avLst/>
           </a:prstGeom>
           <a:solidFill>
-            <a:srgbClr val="050505"/>
-          </a:solidFill>
-          <a:ln w="6350">
-            <a:solidFill>
-              <a:srgbClr val="3A3A38"/>
-            </a:solidFill>
-            <a:prstDash val="solid"/>
-          </a:ln>
+            <a:srgbClr val="E9E6DF">
+              <a:alpha val="12000"/>
+            </a:srgbClr>
+          </a:solidFill>
+          <a:ln/>
         </p:spPr>
       </p:sp>
       <p:sp>
@@ -20812,12 +20283,7 @@
           <a:solidFill>
             <a:srgbClr val="A8FF3E"/>
           </a:solidFill>
-          <a:ln w="6350">
-            <a:solidFill>
-              <a:srgbClr val="A8FF3E"/>
-            </a:solidFill>
-            <a:prstDash val="solid"/>
-          </a:ln>
+          <a:ln/>
         </p:spPr>
       </p:sp>
       <p:sp>
@@ -20837,12 +20303,7 @@
           <a:solidFill>
             <a:srgbClr val="A8FF3E"/>
           </a:solidFill>
-          <a:ln w="6350">
-            <a:solidFill>
-              <a:srgbClr val="A8FF3E"/>
-            </a:solidFill>
-            <a:prstDash val="solid"/>
-          </a:ln>
+          <a:ln/>
         </p:spPr>
       </p:sp>
       <p:sp>
@@ -20860,14 +20321,11 @@
             <a:avLst/>
           </a:prstGeom>
           <a:solidFill>
-            <a:srgbClr val="050505"/>
-          </a:solidFill>
-          <a:ln w="6350">
-            <a:solidFill>
-              <a:srgbClr val="3A3A38"/>
-            </a:solidFill>
-            <a:prstDash val="solid"/>
-          </a:ln>
+            <a:srgbClr val="E9E6DF">
+              <a:alpha val="12000"/>
+            </a:srgbClr>
+          </a:solidFill>
+          <a:ln/>
         </p:spPr>
       </p:sp>
       <p:sp>
@@ -20885,14 +20343,11 @@
             <a:avLst/>
           </a:prstGeom>
           <a:solidFill>
-            <a:srgbClr val="050505"/>
-          </a:solidFill>
-          <a:ln w="6350">
-            <a:solidFill>
-              <a:srgbClr val="3A3A38"/>
-            </a:solidFill>
-            <a:prstDash val="solid"/>
-          </a:ln>
+            <a:srgbClr val="E9E6DF">
+              <a:alpha val="12000"/>
+            </a:srgbClr>
+          </a:solidFill>
+          <a:ln/>
         </p:spPr>
       </p:sp>
       <p:sp>
@@ -20910,14 +20365,11 @@
             <a:avLst/>
           </a:prstGeom>
           <a:solidFill>
-            <a:srgbClr val="050505"/>
-          </a:solidFill>
-          <a:ln w="6350">
-            <a:solidFill>
-              <a:srgbClr val="3A3A38"/>
-            </a:solidFill>
-            <a:prstDash val="solid"/>
-          </a:ln>
+            <a:srgbClr val="E9E6DF">
+              <a:alpha val="12000"/>
+            </a:srgbClr>
+          </a:solidFill>
+          <a:ln/>
         </p:spPr>
       </p:sp>
       <p:sp>
@@ -20935,14 +20387,11 @@
             <a:avLst/>
           </a:prstGeom>
           <a:solidFill>
-            <a:srgbClr val="050505"/>
-          </a:solidFill>
-          <a:ln w="6350">
-            <a:solidFill>
-              <a:srgbClr val="3A3A38"/>
-            </a:solidFill>
-            <a:prstDash val="solid"/>
-          </a:ln>
+            <a:srgbClr val="E9E6DF">
+              <a:alpha val="12000"/>
+            </a:srgbClr>
+          </a:solidFill>
+          <a:ln/>
         </p:spPr>
       </p:sp>
       <p:sp>
@@ -20960,14 +20409,11 @@
             <a:avLst/>
           </a:prstGeom>
           <a:solidFill>
-            <a:srgbClr val="050505"/>
-          </a:solidFill>
-          <a:ln w="6350">
-            <a:solidFill>
-              <a:srgbClr val="3A3A38"/>
-            </a:solidFill>
-            <a:prstDash val="solid"/>
-          </a:ln>
+            <a:srgbClr val="E9E6DF">
+              <a:alpha val="12000"/>
+            </a:srgbClr>
+          </a:solidFill>
+          <a:ln/>
         </p:spPr>
       </p:sp>
       <p:sp>
@@ -20985,14 +20431,11 @@
             <a:avLst/>
           </a:prstGeom>
           <a:solidFill>
-            <a:srgbClr val="050505"/>
-          </a:solidFill>
-          <a:ln w="6350">
-            <a:solidFill>
-              <a:srgbClr val="3A3A38"/>
-            </a:solidFill>
-            <a:prstDash val="solid"/>
-          </a:ln>
+            <a:srgbClr val="E9E6DF">
+              <a:alpha val="12000"/>
+            </a:srgbClr>
+          </a:solidFill>
+          <a:ln/>
         </p:spPr>
       </p:sp>
       <p:sp>
@@ -21010,14 +20453,11 @@
             <a:avLst/>
           </a:prstGeom>
           <a:solidFill>
-            <a:srgbClr val="050505"/>
-          </a:solidFill>
-          <a:ln w="6350">
-            <a:solidFill>
-              <a:srgbClr val="3A3A38"/>
-            </a:solidFill>
-            <a:prstDash val="solid"/>
-          </a:ln>
+            <a:srgbClr val="E9E6DF">
+              <a:alpha val="12000"/>
+            </a:srgbClr>
+          </a:solidFill>
+          <a:ln/>
         </p:spPr>
       </p:sp>
       <p:sp>
@@ -21248,7 +20688,7 @@
                 <a:ea typeface="Courier New" pitchFamily="34" charset="-122"/>
                 <a:cs typeface="Courier New" pitchFamily="34" charset="-120"/>
               </a:rPr>
-              <a:t>MATUA</a:t>
+              <a:t>MATUA / N24</a:t>
             </a:r>
             <a:endParaRPr lang="en-US" sz="600" dirty="0"/>
           </a:p>

--- a/engineering/wb_2026_postmortem_deck.pptx
+++ b/engineering/wb_2026_postmortem_deck.pptx
@@ -20,9 +20,10 @@
     <p:sldId id="268" r:id="rId14"/>
     <p:sldId id="269" r:id="rId15"/>
     <p:sldId id="270" r:id="rId16"/>
+    <p:sldId id="271" r:id="rId17"/>
   </p:sldIdLst>
   <p:notesMasterIdLst>
-    <p:notesMasterId r:id="rId17"/>
+    <p:notesMasterId r:id="rId18"/>
   </p:notesMasterIdLst>
   <p:sldSz cx="9144000" cy="5143500"/>
   <p:notesSz cx="5143500" cy="9144000"/>
@@ -1068,6 +1069,94 @@
             <a:fld id="{F7021451-1387-4CA6-816F-3879F97B5CBC}" type="slidenum">
               <a:rPr lang="en-US"/>
               <a:t>15</a:t>
+            </a:fld>
+            <a:endParaRPr lang="en-US"/>
+          </a:p>
+        </p:txBody>
+      </p:sp>
+    </p:spTree>
+    <p:extLst>
+      <p:ext uri="{BB962C8B-B14F-4D97-AF65-F5344CB8AC3E}">
+        <p14:creationId xmlns:p14="http://schemas.microsoft.com/office/powerpoint/2010/main" val="1024086991"/>
+      </p:ext>
+    </p:extLst>
+  </p:cSld>
+  <p:clrMapOvr>
+    <a:masterClrMapping/>
+  </p:clrMapOvr>
+</p:notes>
+</file>
+
+<file path=ppt/notesSlides/notesSlide16.xml><?xml version="1.0" encoding="utf-8"?>
+<p:notes xmlns:a="http://schemas.openxmlformats.org/drawingml/2006/main" xmlns:r="http://schemas.openxmlformats.org/officeDocument/2006/relationships" xmlns:p="http://schemas.openxmlformats.org/presentationml/2006/main">
+  <p:cSld>
+    <p:spTree>
+      <p:nvGrpSpPr>
+        <p:cNvPr id="1" name=""/>
+        <p:cNvGrpSpPr/>
+        <p:nvPr/>
+      </p:nvGrpSpPr>
+      <p:grpSpPr>
+        <a:xfrm>
+          <a:off x="0" y="0"/>
+          <a:ext cx="0" cy="0"/>
+          <a:chOff x="0" y="0"/>
+          <a:chExt cx="0" cy="0"/>
+        </a:xfrm>
+      </p:grpSpPr>
+      <p:sp>
+        <p:nvSpPr>
+          <p:cNvPr id="2" name="Slide Image Placeholder 1"/>
+          <p:cNvSpPr>
+            <a:spLocks noGrp="1" noRot="1" noChangeAspect="1"/>
+          </p:cNvSpPr>
+          <p:nvPr>
+            <p:ph type="sldImg"/>
+          </p:nvPr>
+        </p:nvSpPr>
+        <p:spPr/>
+      </p:sp>
+      <p:sp>
+        <p:nvSpPr>
+          <p:cNvPr id="3" name="Notes Placeholder 2"/>
+          <p:cNvSpPr>
+            <a:spLocks noGrp="1"/>
+          </p:cNvSpPr>
+          <p:nvPr>
+            <p:ph type="body" idx="1"/>
+          </p:nvPr>
+        </p:nvSpPr>
+        <p:spPr/>
+        <p:txBody>
+          <a:bodyPr/>
+          <a:lstStyle/>
+          <a:p>
+            <a:r>
+              <a:rPr lang="en-US" dirty="0"/>
+              <a:t/>
+            </a:r>
+            <a:endParaRPr lang="en-US" dirty="0"/>
+          </a:p>
+        </p:txBody>
+      </p:sp>
+      <p:sp>
+        <p:nvSpPr>
+          <p:cNvPr id="4" name="Slide Number Placeholder 3"/>
+          <p:cNvSpPr>
+            <a:spLocks noGrp="1"/>
+          </p:cNvSpPr>
+          <p:nvPr>
+            <p:ph type="sldNum" sz="quarter" idx="10"/>
+          </p:nvPr>
+        </p:nvSpPr>
+        <p:spPr/>
+        <p:txBody>
+          <a:bodyPr/>
+          <a:lstStyle/>
+          <a:p>
+            <a:fld id="{F7021451-1387-4CA6-816F-3879F97B5CBC}" type="slidenum">
+              <a:rPr lang="en-US"/>
+              <a:t>16</a:t>
             </a:fld>
             <a:endParaRPr lang="en-US"/>
           </a:p>
@@ -2623,7 +2712,7 @@
                 <a:ea typeface="Courier New" pitchFamily="34" charset="-122"/>
                 <a:cs typeface="Courier New" pitchFamily="34" charset="-120"/>
               </a:rPr>
-              <a:t>ANALYSIS · 07 OF 10 · NORTH BENGAL</a:t>
+              <a:t>ANALYSIS · 06 OF 10 · BURDWAN INDUSTRIAL</a:t>
             </a:r>
             <a:endParaRPr lang="en-US" sz="900" dirty="0"/>
           </a:p>
@@ -2662,7 +2751,7 @@
                 <a:ea typeface="Arial Narrow" pitchFamily="34" charset="-122"/>
                 <a:cs typeface="Arial Narrow" pitchFamily="34" charset="-120"/>
               </a:rPr>
-              <a:t>North Bengal: TMC → BJP</a:t>
+              <a:t>Burdwan Industrial: TMC → BJP</a:t>
             </a:r>
             <a:endParaRPr lang="en-US" sz="3000" dirty="0"/>
           </a:p>
@@ -2693,7 +2782,7 @@
       </p:sp>
       <p:pic>
         <p:nvPicPr>
-          <p:cNvPr id="10" name="Image 0" descr="/Users/admin/Documents/Simulatte Projects/PopScale/engineering/maps/wb_cluster_north_bengal.png">    </p:cNvPr>
+          <p:cNvPr id="10" name="Image 0" descr="/Users/admin/Documents/Simulatte Projects/PopScale/engineering/maps/wb_cluster_burdwan_industrial.png">    </p:cNvPr>
           <p:cNvPicPr>
             <a:picLocks noChangeAspect="1"/>
           </p:cNvPicPr>
@@ -2786,7 +2875,7 @@
                 <a:ea typeface="Calibri" pitchFamily="34" charset="-122"/>
                 <a:cs typeface="Calibri" pitchFamily="34" charset="-120"/>
               </a:rPr>
-              <a:t>TMC 48%</a:t>
+              <a:t>TMC 53%</a:t>
             </a:r>
             <a:endParaRPr lang="en-US" sz="1400" dirty="0"/>
           </a:p>
@@ -2825,7 +2914,7 @@
                 <a:ea typeface="Calibri" pitchFamily="34" charset="-122"/>
                 <a:cs typeface="Calibri" pitchFamily="34" charset="-120"/>
               </a:rPr>
-              <a:t>BJP 35%</a:t>
+              <a:t>BJP 30%</a:t>
             </a:r>
             <a:endParaRPr lang="en-US" sz="1400" dirty="0"/>
           </a:p>
@@ -2903,7 +2992,7 @@
                 <a:ea typeface="Calibri" pitchFamily="34" charset="-122"/>
                 <a:cs typeface="Calibri" pitchFamily="34" charset="-120"/>
               </a:rPr>
-              <a:t>TMC 28%</a:t>
+              <a:t>TMC 35%</a:t>
             </a:r>
             <a:endParaRPr lang="en-US" sz="1400" dirty="0"/>
           </a:p>
@@ -2942,7 +3031,7 @@
                 <a:ea typeface="Calibri" pitchFamily="34" charset="-122"/>
                 <a:cs typeface="Calibri" pitchFamily="34" charset="-120"/>
               </a:rPr>
-              <a:t>BJP 56%</a:t>
+              <a:t>BJP 50%</a:t>
             </a:r>
             <a:endParaRPr lang="en-US" sz="1400" dirty="0"/>
           </a:p>
@@ -3020,7 +3109,7 @@
                 <a:ea typeface="Calibri" pitchFamily="34" charset="-122"/>
                 <a:cs typeface="Calibri" pitchFamily="34" charset="-120"/>
               </a:rPr>
-              <a:t>Pred: TMC 14 · BJP 10</a:t>
+              <a:t>Pred: TMC 17 · BJP 8</a:t>
             </a:r>
             <a:endParaRPr lang="en-US" sz="1100" dirty="0"/>
           </a:p>
@@ -3059,7 +3148,7 @@
                 <a:ea typeface="Calibri" pitchFamily="34" charset="-122"/>
                 <a:cs typeface="Calibri" pitchFamily="34" charset="-120"/>
               </a:rPr>
-              <a:t>Act:  BJP 22 · TMC 2</a:t>
+              <a:t>Act:  BJP 18 · TMC 7</a:t>
             </a:r>
             <a:endParaRPr lang="en-US" sz="1100" dirty="0"/>
           </a:p>
@@ -3137,7 +3226,7 @@
                 <a:ea typeface="Calibri" pitchFamily="34" charset="-122"/>
                 <a:cs typeface="Calibri" pitchFamily="34" charset="-120"/>
               </a:rPr>
-              <a:t>SIR voter-roll deletions.</a:t>
+              <a:t>Industrial worker swing.</a:t>
             </a:r>
             <a:endParaRPr lang="en-US" sz="1400" dirty="0"/>
           </a:p>
@@ -3176,7 +3265,7 @@
                 <a:ea typeface="Calibri" pitchFamily="34" charset="-122"/>
                 <a:cs typeface="Calibri" pitchFamily="34" charset="-120"/>
               </a:rPr>
-              <a:t>Disproportionate impact in Muslim-majority blocks; turnout asymmetry.</a:t>
+              <a:t>Economic anxiety + Hindu consolidation, not modelled together.</a:t>
             </a:r>
             <a:endParaRPr lang="en-US" sz="1200" dirty="0"/>
           </a:p>
@@ -3215,7 +3304,7 @@
                 <a:ea typeface="Courier New" pitchFamily="34" charset="-122"/>
                 <a:cs typeface="Courier New" pitchFamily="34" charset="-120"/>
               </a:rPr>
-              <a:t>24 SEATS</a:t>
+              <a:t>25 SEATS</a:t>
             </a:r>
             <a:endParaRPr lang="en-US" sz="1000" dirty="0"/>
           </a:p>
@@ -3439,7 +3528,7 @@
                 <a:ea typeface="Courier New" pitchFamily="34" charset="-122"/>
                 <a:cs typeface="Courier New" pitchFamily="34" charset="-120"/>
               </a:rPr>
-              <a:t>ANALYSIS · 08 OF 10 · MURSHIDABAD</a:t>
+              <a:t>ANALYSIS · 07 OF 10 · NORTH BENGAL</a:t>
             </a:r>
             <a:endParaRPr lang="en-US" sz="900" dirty="0"/>
           </a:p>
@@ -3478,7 +3567,7 @@
                 <a:ea typeface="Arial Narrow" pitchFamily="34" charset="-122"/>
                 <a:cs typeface="Arial Narrow" pitchFamily="34" charset="-120"/>
               </a:rPr>
-              <a:t>Murshidabad: TMC → TMC</a:t>
+              <a:t>North Bengal: TMC → BJP</a:t>
             </a:r>
             <a:endParaRPr lang="en-US" sz="3000" dirty="0"/>
           </a:p>
@@ -3509,7 +3598,7 @@
       </p:sp>
       <p:pic>
         <p:nvPicPr>
-          <p:cNvPr id="10" name="Image 0" descr="/Users/admin/Documents/Simulatte Projects/PopScale/engineering/maps/wb_cluster_murshidabad.png">    </p:cNvPr>
+          <p:cNvPr id="10" name="Image 0" descr="/Users/admin/Documents/Simulatte Projects/PopScale/engineering/maps/wb_cluster_north_bengal.png">    </p:cNvPr>
           <p:cNvPicPr>
             <a:picLocks noChangeAspect="1"/>
           </p:cNvPicPr>
@@ -3602,7 +3691,7 @@
                 <a:ea typeface="Calibri" pitchFamily="34" charset="-122"/>
                 <a:cs typeface="Calibri" pitchFamily="34" charset="-120"/>
               </a:rPr>
-              <a:t>TMC 78%</a:t>
+              <a:t>TMC 48%</a:t>
             </a:r>
             <a:endParaRPr lang="en-US" sz="1400" dirty="0"/>
           </a:p>
@@ -3641,7 +3730,7 @@
                 <a:ea typeface="Calibri" pitchFamily="34" charset="-122"/>
                 <a:cs typeface="Calibri" pitchFamily="34" charset="-120"/>
               </a:rPr>
-              <a:t>BJP 12%</a:t>
+              <a:t>BJP 35%</a:t>
             </a:r>
             <a:endParaRPr lang="en-US" sz="1400" dirty="0"/>
           </a:p>
@@ -3719,7 +3808,7 @@
                 <a:ea typeface="Calibri" pitchFamily="34" charset="-122"/>
                 <a:cs typeface="Calibri" pitchFamily="34" charset="-120"/>
               </a:rPr>
-              <a:t>TMC 52%</a:t>
+              <a:t>TMC 28%</a:t>
             </a:r>
             <a:endParaRPr lang="en-US" sz="1400" dirty="0"/>
           </a:p>
@@ -3758,7 +3847,7 @@
                 <a:ea typeface="Calibri" pitchFamily="34" charset="-122"/>
                 <a:cs typeface="Calibri" pitchFamily="34" charset="-120"/>
               </a:rPr>
-              <a:t>BJP 38%</a:t>
+              <a:t>BJP 56%</a:t>
             </a:r>
             <a:endParaRPr lang="en-US" sz="1400" dirty="0"/>
           </a:p>
@@ -3836,7 +3925,7 @@
                 <a:ea typeface="Calibri" pitchFamily="34" charset="-122"/>
                 <a:cs typeface="Calibri" pitchFamily="34" charset="-120"/>
               </a:rPr>
-              <a:t>Pred: TMC 19 · BJP 3</a:t>
+              <a:t>Pred: TMC 14 · BJP 10</a:t>
             </a:r>
             <a:endParaRPr lang="en-US" sz="1100" dirty="0"/>
           </a:p>
@@ -3875,7 +3964,7 @@
                 <a:ea typeface="Calibri" pitchFamily="34" charset="-122"/>
                 <a:cs typeface="Calibri" pitchFamily="34" charset="-120"/>
               </a:rPr>
-              <a:t>Act:  TMC 13 · BJP 9</a:t>
+              <a:t>Act:  BJP 22 · TMC 2</a:t>
             </a:r>
             <a:endParaRPr lang="en-US" sz="1100" dirty="0"/>
           </a:p>
@@ -3953,7 +4042,7 @@
                 <a:ea typeface="Calibri" pitchFamily="34" charset="-122"/>
                 <a:cs typeface="Calibri" pitchFamily="34" charset="-120"/>
               </a:rPr>
-              <a:t>Held — but barely.</a:t>
+              <a:t>SIR voter-roll deletions.</a:t>
             </a:r>
             <a:endParaRPr lang="en-US" sz="1400" dirty="0"/>
           </a:p>
@@ -3992,7 +4081,7 @@
                 <a:ea typeface="Calibri" pitchFamily="34" charset="-122"/>
                 <a:cs typeface="Calibri" pitchFamily="34" charset="-120"/>
               </a:rPr>
-              <a:t>Muslim consolidation worked here as modelled. The model was right about this cluster.</a:t>
+              <a:t>Disproportionate impact in Muslim-majority blocks; turnout asymmetry.</a:t>
             </a:r>
             <a:endParaRPr lang="en-US" sz="1200" dirty="0"/>
           </a:p>
@@ -4031,7 +4120,7 @@
                 <a:ea typeface="Courier New" pitchFamily="34" charset="-122"/>
                 <a:cs typeface="Courier New" pitchFamily="34" charset="-120"/>
               </a:rPr>
-              <a:t>22 SEATS</a:t>
+              <a:t>24 SEATS</a:t>
             </a:r>
             <a:endParaRPr lang="en-US" sz="1000" dirty="0"/>
           </a:p>
@@ -4255,7 +4344,7 @@
                 <a:ea typeface="Courier New" pitchFamily="34" charset="-122"/>
                 <a:cs typeface="Courier New" pitchFamily="34" charset="-120"/>
               </a:rPr>
-              <a:t>ANALYSIS · 09 OF 10 · MALDA</a:t>
+              <a:t>ANALYSIS · 08 OF 10 · MURSHIDABAD</a:t>
             </a:r>
             <a:endParaRPr lang="en-US" sz="900" dirty="0"/>
           </a:p>
@@ -4294,7 +4383,7 @@
                 <a:ea typeface="Arial Narrow" pitchFamily="34" charset="-122"/>
                 <a:cs typeface="Arial Narrow" pitchFamily="34" charset="-120"/>
               </a:rPr>
-              <a:t>Malda: TMC → BJP</a:t>
+              <a:t>Murshidabad: TMC → TMC</a:t>
             </a:r>
             <a:endParaRPr lang="en-US" sz="3000" dirty="0"/>
           </a:p>
@@ -4325,7 +4414,7 @@
       </p:sp>
       <p:pic>
         <p:nvPicPr>
-          <p:cNvPr id="10" name="Image 0" descr="/Users/admin/Documents/Simulatte Projects/PopScale/engineering/maps/wb_cluster_malda.png">    </p:cNvPr>
+          <p:cNvPr id="10" name="Image 0" descr="/Users/admin/Documents/Simulatte Projects/PopScale/engineering/maps/wb_cluster_murshidabad.png">    </p:cNvPr>
           <p:cNvPicPr>
             <a:picLocks noChangeAspect="1"/>
           </p:cNvPicPr>
@@ -4418,7 +4507,7 @@
                 <a:ea typeface="Calibri" pitchFamily="34" charset="-122"/>
                 <a:cs typeface="Calibri" pitchFamily="34" charset="-120"/>
               </a:rPr>
-              <a:t>TMC 56%</a:t>
+              <a:t>TMC 78%</a:t>
             </a:r>
             <a:endParaRPr lang="en-US" sz="1400" dirty="0"/>
           </a:p>
@@ -4457,7 +4546,7 @@
                 <a:ea typeface="Calibri" pitchFamily="34" charset="-122"/>
                 <a:cs typeface="Calibri" pitchFamily="34" charset="-120"/>
               </a:rPr>
-              <a:t>BJP 30%</a:t>
+              <a:t>BJP 12%</a:t>
             </a:r>
             <a:endParaRPr lang="en-US" sz="1400" dirty="0"/>
           </a:p>
@@ -4535,7 +4624,7 @@
                 <a:ea typeface="Calibri" pitchFamily="34" charset="-122"/>
                 <a:cs typeface="Calibri" pitchFamily="34" charset="-120"/>
               </a:rPr>
-              <a:t>TMC 38%</a:t>
+              <a:t>TMC 52%</a:t>
             </a:r>
             <a:endParaRPr lang="en-US" sz="1400" dirty="0"/>
           </a:p>
@@ -4574,7 +4663,7 @@
                 <a:ea typeface="Calibri" pitchFamily="34" charset="-122"/>
                 <a:cs typeface="Calibri" pitchFamily="34" charset="-120"/>
               </a:rPr>
-              <a:t>BJP 48%</a:t>
+              <a:t>BJP 38%</a:t>
             </a:r>
             <a:endParaRPr lang="en-US" sz="1400" dirty="0"/>
           </a:p>
@@ -4652,7 +4741,7 @@
                 <a:ea typeface="Calibri" pitchFamily="34" charset="-122"/>
                 <a:cs typeface="Calibri" pitchFamily="34" charset="-120"/>
               </a:rPr>
-              <a:t>Pred: TMC 7 · BJP 4 · INC 1</a:t>
+              <a:t>Pred: TMC 19 · BJP 3</a:t>
             </a:r>
             <a:endParaRPr lang="en-US" sz="1100" dirty="0"/>
           </a:p>
@@ -4691,7 +4780,7 @@
                 <a:ea typeface="Calibri" pitchFamily="34" charset="-122"/>
                 <a:cs typeface="Calibri" pitchFamily="34" charset="-120"/>
               </a:rPr>
-              <a:t>Act:  BJP 7 · TMC 4 · INC 1</a:t>
+              <a:t>Act:  TMC 13 · BJP 9</a:t>
             </a:r>
             <a:endParaRPr lang="en-US" sz="1100" dirty="0"/>
           </a:p>
@@ -4769,7 +4858,7 @@
                 <a:ea typeface="Calibri" pitchFamily="34" charset="-122"/>
                 <a:cs typeface="Calibri" pitchFamily="34" charset="-120"/>
               </a:rPr>
-              <a:t>Muslim split + INC weakness.</a:t>
+              <a:t>Held — but barely.</a:t>
             </a:r>
             <a:endParaRPr lang="en-US" sz="1400" dirty="0"/>
           </a:p>
@@ -4808,7 +4897,7 @@
                 <a:ea typeface="Calibri" pitchFamily="34" charset="-122"/>
                 <a:cs typeface="Calibri" pitchFamily="34" charset="-120"/>
               </a:rPr>
-              <a:t>AIMIM/AJUP fragmentation handed BJP pluralities.</a:t>
+              <a:t>Muslim consolidation worked here as modelled. The model was right about this cluster.</a:t>
             </a:r>
             <a:endParaRPr lang="en-US" sz="1200" dirty="0"/>
           </a:p>
@@ -4847,7 +4936,7 @@
                 <a:ea typeface="Courier New" pitchFamily="34" charset="-122"/>
                 <a:cs typeface="Courier New" pitchFamily="34" charset="-120"/>
               </a:rPr>
-              <a:t>12 SEATS</a:t>
+              <a:t>22 SEATS</a:t>
             </a:r>
             <a:endParaRPr lang="en-US" sz="1000" dirty="0"/>
           </a:p>
@@ -5071,7 +5160,7 @@
                 <a:ea typeface="Courier New" pitchFamily="34" charset="-122"/>
                 <a:cs typeface="Courier New" pitchFamily="34" charset="-120"/>
               </a:rPr>
-              <a:t>ANALYSIS · 10 OF 10 · DARJEELING HILLS</a:t>
+              <a:t>ANALYSIS · 09 OF 10 · MALDA</a:t>
             </a:r>
             <a:endParaRPr lang="en-US" sz="900" dirty="0"/>
           </a:p>
@@ -5110,7 +5199,7 @@
                 <a:ea typeface="Arial Narrow" pitchFamily="34" charset="-122"/>
                 <a:cs typeface="Arial Narrow" pitchFamily="34" charset="-120"/>
               </a:rPr>
-              <a:t>Darjeeling Hills: BJP → BJP</a:t>
+              <a:t>Malda: TMC → BJP</a:t>
             </a:r>
             <a:endParaRPr lang="en-US" sz="3000" dirty="0"/>
           </a:p>
@@ -5141,7 +5230,7 @@
       </p:sp>
       <p:pic>
         <p:nvPicPr>
-          <p:cNvPr id="10" name="Image 0" descr="/Users/admin/Documents/Simulatte Projects/PopScale/engineering/maps/wb_cluster_darjeeling_hills.png">    </p:cNvPr>
+          <p:cNvPr id="10" name="Image 0" descr="/Users/admin/Documents/Simulatte Projects/PopScale/engineering/maps/wb_cluster_malda.png">    </p:cNvPr>
           <p:cNvPicPr>
             <a:picLocks noChangeAspect="1"/>
           </p:cNvPicPr>
@@ -5234,7 +5323,7 @@
                 <a:ea typeface="Calibri" pitchFamily="34" charset="-122"/>
                 <a:cs typeface="Calibri" pitchFamily="34" charset="-120"/>
               </a:rPr>
-              <a:t>TMC 22%</a:t>
+              <a:t>TMC 56%</a:t>
             </a:r>
             <a:endParaRPr lang="en-US" sz="1400" dirty="0"/>
           </a:p>
@@ -5273,7 +5362,7 @@
                 <a:ea typeface="Calibri" pitchFamily="34" charset="-122"/>
                 <a:cs typeface="Calibri" pitchFamily="34" charset="-120"/>
               </a:rPr>
-              <a:t>BJP 50%</a:t>
+              <a:t>BJP 30%</a:t>
             </a:r>
             <a:endParaRPr lang="en-US" sz="1400" dirty="0"/>
           </a:p>
@@ -5351,7 +5440,7 @@
                 <a:ea typeface="Calibri" pitchFamily="34" charset="-122"/>
                 <a:cs typeface="Calibri" pitchFamily="34" charset="-120"/>
               </a:rPr>
-              <a:t>TMC 20%</a:t>
+              <a:t>TMC 38%</a:t>
             </a:r>
             <a:endParaRPr lang="en-US" sz="1400" dirty="0"/>
           </a:p>
@@ -5390,7 +5479,7 @@
                 <a:ea typeface="Calibri" pitchFamily="34" charset="-122"/>
                 <a:cs typeface="Calibri" pitchFamily="34" charset="-120"/>
               </a:rPr>
-              <a:t>BJP 60%</a:t>
+              <a:t>BJP 48%</a:t>
             </a:r>
             <a:endParaRPr lang="en-US" sz="1400" dirty="0"/>
           </a:p>
@@ -5468,7 +5557,7 @@
                 <a:ea typeface="Calibri" pitchFamily="34" charset="-122"/>
                 <a:cs typeface="Calibri" pitchFamily="34" charset="-120"/>
               </a:rPr>
-              <a:t>Pred: BJP/GJM 10 · TMC 3</a:t>
+              <a:t>Pred: TMC 7 · BJP 4 · INC 1</a:t>
             </a:r>
             <a:endParaRPr lang="en-US" sz="1100" dirty="0"/>
           </a:p>
@@ -5507,7 +5596,7 @@
                 <a:ea typeface="Calibri" pitchFamily="34" charset="-122"/>
                 <a:cs typeface="Calibri" pitchFamily="34" charset="-120"/>
               </a:rPr>
-              <a:t>Act:  BJP/GJM 10 · TMC 2 · Oth 1</a:t>
+              <a:t>Act:  BJP 7 · TMC 4 · INC 1</a:t>
             </a:r>
             <a:endParaRPr lang="en-US" sz="1100" dirty="0"/>
           </a:p>
@@ -5585,7 +5674,7 @@
                 <a:ea typeface="Calibri" pitchFamily="34" charset="-122"/>
                 <a:cs typeface="Calibri" pitchFamily="34" charset="-120"/>
               </a:rPr>
-              <a:t>Correctly predicted.</a:t>
+              <a:t>Muslim split + INC weakness.</a:t>
             </a:r>
             <a:endParaRPr lang="en-US" sz="1400" dirty="0"/>
           </a:p>
@@ -5624,7 +5713,7 @@
                 <a:ea typeface="Calibri" pitchFamily="34" charset="-122"/>
                 <a:cs typeface="Calibri" pitchFamily="34" charset="-120"/>
               </a:rPr>
-              <a:t>BJP/GJM alliance worked as modelled.</a:t>
+              <a:t>AIMIM/AJUP fragmentation handed BJP pluralities.</a:t>
             </a:r>
             <a:endParaRPr lang="en-US" sz="1200" dirty="0"/>
           </a:p>
@@ -5663,7 +5752,7 @@
                 <a:ea typeface="Courier New" pitchFamily="34" charset="-122"/>
                 <a:cs typeface="Courier New" pitchFamily="34" charset="-120"/>
               </a:rPr>
-              <a:t>13 SEATS</a:t>
+              <a:t>12 SEATS</a:t>
             </a:r>
             <a:endParaRPr lang="en-US" sz="1000" dirty="0"/>
           </a:p>
@@ -5887,7 +5976,7 @@
                 <a:ea typeface="Courier New" pitchFamily="34" charset="-122"/>
                 <a:cs typeface="Courier New" pitchFamily="34" charset="-120"/>
               </a:rPr>
-              <a:t>03 — STRUCTURAL FAILURE</a:t>
+              <a:t>ANALYSIS · 10 OF 10 · DARJEELING HILLS</a:t>
             </a:r>
             <a:endParaRPr lang="en-US" sz="900" dirty="0"/>
           </a:p>
@@ -5902,23 +5991,23 @@
         <p:spPr>
           <a:xfrm>
             <a:off x="457200" y="566928"/>
-            <a:ext cx="7772400" cy="548640"/>
-          </a:xfrm>
-          <a:prstGeom prst="rect">
-            <a:avLst/>
-          </a:prstGeom>
-          <a:noFill/>
-          <a:ln/>
-        </p:spPr>
-        <p:txBody>
-          <a:bodyPr wrap="square" lIns="0" tIns="0" rIns="0" bIns="0" rtlCol="0" anchor="ctr"/>
-          <a:lstStyle/>
-          <a:p>
-            <a:pPr indent="0" marL="0">
-              <a:buNone/>
-            </a:pPr>
-            <a:r>
-              <a:rPr lang="en-US" sz="3200" b="1" dirty="0">
+            <a:ext cx="8229600" cy="548640"/>
+          </a:xfrm>
+          <a:prstGeom prst="rect">
+            <a:avLst/>
+          </a:prstGeom>
+          <a:noFill/>
+          <a:ln/>
+        </p:spPr>
+        <p:txBody>
+          <a:bodyPr wrap="square" lIns="0" tIns="0" rIns="0" bIns="0" rtlCol="0" anchor="ctr"/>
+          <a:lstStyle/>
+          <a:p>
+            <a:pPr indent="0" marL="0">
+              <a:buNone/>
+            </a:pPr>
+            <a:r>
+              <a:rPr lang="en-US" sz="3000" b="1" dirty="0">
                 <a:solidFill>
                   <a:srgbClr val="E9E6DF"/>
                 </a:solidFill>
@@ -5926,9 +6015,9 @@
                 <a:ea typeface="Arial Narrow" pitchFamily="34" charset="-122"/>
                 <a:cs typeface="Arial Narrow" pitchFamily="34" charset="-120"/>
               </a:rPr>
-              <a:t>Three things to fix in the model.</a:t>
-            </a:r>
-            <a:endParaRPr lang="en-US" sz="3200" dirty="0"/>
+              <a:t>Darjeeling Hills: BJP → BJP</a:t>
+            </a:r>
+            <a:endParaRPr lang="en-US" sz="3000" dirty="0"/>
           </a:p>
         </p:txBody>
       </p:sp>
@@ -5955,32 +6044,55 @@
           </a:ln>
         </p:spPr>
       </p:sp>
-      <p:sp>
-        <p:nvSpPr>
-          <p:cNvPr id="10" name="Text 8"/>
-          <p:cNvSpPr/>
-          <p:nvPr/>
-        </p:nvSpPr>
-        <p:spPr>
-          <a:xfrm>
-            <a:off x="457200" y="1554480"/>
-            <a:ext cx="457200" cy="457200"/>
-          </a:xfrm>
-          <a:prstGeom prst="rect">
-            <a:avLst/>
-          </a:prstGeom>
-          <a:noFill/>
-          <a:ln/>
-        </p:spPr>
-        <p:txBody>
-          <a:bodyPr wrap="square" lIns="0" tIns="0" rIns="0" bIns="0" rtlCol="0" anchor="ctr"/>
-          <a:lstStyle/>
-          <a:p>
-            <a:pPr indent="0" marL="0">
-              <a:buNone/>
-            </a:pPr>
-            <a:r>
-              <a:rPr lang="en-US" sz="1100" dirty="0">
+      <p:pic>
+        <p:nvPicPr>
+          <p:cNvPr id="10" name="Image 0" descr="/Users/admin/Documents/Simulatte Projects/PopScale/engineering/maps/wb_cluster_darjeeling_hills.png">    </p:cNvPr>
+          <p:cNvPicPr>
+            <a:picLocks noChangeAspect="1"/>
+          </p:cNvPicPr>
+          <p:nvPr/>
+        </p:nvPicPr>
+        <p:blipFill>
+          <a:blip r:embed="rId1"/>
+          <a:srcRect l="0" r="0" t="0" b="0"/>
+          <a:stretch/>
+        </p:blipFill>
+        <p:spPr>
+          <a:xfrm>
+            <a:off x="502920" y="1508760"/>
+            <a:ext cx="3017520" cy="3108960"/>
+          </a:xfrm>
+          <a:prstGeom prst="rect">
+            <a:avLst/>
+          </a:prstGeom>
+        </p:spPr>
+      </p:pic>
+      <p:sp>
+        <p:nvSpPr>
+          <p:cNvPr id="11" name="Text 8"/>
+          <p:cNvSpPr/>
+          <p:nvPr/>
+        </p:nvSpPr>
+        <p:spPr>
+          <a:xfrm>
+            <a:off x="3749040" y="1554480"/>
+            <a:ext cx="2651760" cy="201168"/>
+          </a:xfrm>
+          <a:prstGeom prst="rect">
+            <a:avLst/>
+          </a:prstGeom>
+          <a:noFill/>
+          <a:ln/>
+        </p:spPr>
+        <p:txBody>
+          <a:bodyPr wrap="square" lIns="0" tIns="0" rIns="0" bIns="0" rtlCol="0" anchor="ctr"/>
+          <a:lstStyle/>
+          <a:p>
+            <a:pPr indent="0" marL="0">
+              <a:buNone/>
+            </a:pPr>
+            <a:r>
+              <a:rPr lang="en-US" sz="900" spc="150" kern="0" dirty="0">
                 <a:solidFill>
                   <a:srgbClr val="9A9997"/>
                 </a:solidFill>
@@ -5988,38 +6100,38 @@
                 <a:ea typeface="Courier New" pitchFamily="34" charset="-122"/>
                 <a:cs typeface="Courier New" pitchFamily="34" charset="-120"/>
               </a:rPr>
-              <a:t>01</a:t>
-            </a:r>
-            <a:endParaRPr lang="en-US" sz="1100" dirty="0"/>
-          </a:p>
-        </p:txBody>
-      </p:sp>
-      <p:sp>
-        <p:nvSpPr>
-          <p:cNvPr id="11" name="Text 9"/>
-          <p:cNvSpPr/>
-          <p:nvPr/>
-        </p:nvSpPr>
-        <p:spPr>
-          <a:xfrm>
-            <a:off x="914400" y="1554480"/>
-            <a:ext cx="7680960" cy="365760"/>
-          </a:xfrm>
-          <a:prstGeom prst="rect">
-            <a:avLst/>
-          </a:prstGeom>
-          <a:noFill/>
-          <a:ln/>
-        </p:spPr>
-        <p:txBody>
-          <a:bodyPr wrap="square" lIns="0" tIns="0" rIns="0" bIns="0" rtlCol="0" anchor="ctr"/>
-          <a:lstStyle/>
-          <a:p>
-            <a:pPr indent="0" marL="0">
-              <a:buNone/>
-            </a:pPr>
-            <a:r>
-              <a:rPr lang="en-US" sz="1300" b="1" dirty="0">
+              <a:t>PREDICTED</a:t>
+            </a:r>
+            <a:endParaRPr lang="en-US" sz="900" dirty="0"/>
+          </a:p>
+        </p:txBody>
+      </p:sp>
+      <p:sp>
+        <p:nvSpPr>
+          <p:cNvPr id="12" name="Text 9"/>
+          <p:cNvSpPr/>
+          <p:nvPr/>
+        </p:nvSpPr>
+        <p:spPr>
+          <a:xfrm>
+            <a:off x="3749040" y="1773936"/>
+            <a:ext cx="2651760" cy="274320"/>
+          </a:xfrm>
+          <a:prstGeom prst="rect">
+            <a:avLst/>
+          </a:prstGeom>
+          <a:noFill/>
+          <a:ln/>
+        </p:spPr>
+        <p:txBody>
+          <a:bodyPr wrap="square" lIns="0" tIns="0" rIns="0" bIns="0" rtlCol="0" anchor="ctr"/>
+          <a:lstStyle/>
+          <a:p>
+            <a:pPr indent="0" marL="0">
+              <a:buNone/>
+            </a:pPr>
+            <a:r>
+              <a:rPr lang="en-US" sz="1400" dirty="0">
                 <a:solidFill>
                   <a:srgbClr val="E9E6DF"/>
                 </a:solidFill>
@@ -6027,77 +6139,77 @@
                 <a:ea typeface="Calibri" pitchFamily="34" charset="-122"/>
                 <a:cs typeface="Calibri" pitchFamily="34" charset="-120"/>
               </a:rPr>
-              <a:t>Anchoring on 2021 baseline.</a:t>
-            </a:r>
-            <a:endParaRPr lang="en-US" sz="1300" dirty="0"/>
-          </a:p>
-        </p:txBody>
-      </p:sp>
-      <p:sp>
-        <p:nvSpPr>
-          <p:cNvPr id="12" name="Text 10"/>
-          <p:cNvSpPr/>
-          <p:nvPr/>
-        </p:nvSpPr>
-        <p:spPr>
-          <a:xfrm>
-            <a:off x="914400" y="1920240"/>
-            <a:ext cx="7680960" cy="594360"/>
-          </a:xfrm>
-          <a:prstGeom prst="rect">
-            <a:avLst/>
-          </a:prstGeom>
-          <a:noFill/>
-          <a:ln/>
-        </p:spPr>
-        <p:txBody>
-          <a:bodyPr wrap="square" lIns="0" tIns="0" rIns="0" bIns="0" rtlCol="0" anchor="ctr"/>
-          <a:lstStyle/>
-          <a:p>
-            <a:pPr indent="0" marL="0">
-              <a:buNone/>
-            </a:pPr>
-            <a:r>
-              <a:rPr lang="en-US" sz="1300" dirty="0">
-                <a:solidFill>
-                  <a:srgbClr val="C9C7C0"/>
+              <a:t>TMC 22%</a:t>
+            </a:r>
+            <a:endParaRPr lang="en-US" sz="1400" dirty="0"/>
+          </a:p>
+        </p:txBody>
+      </p:sp>
+      <p:sp>
+        <p:nvSpPr>
+          <p:cNvPr id="13" name="Text 10"/>
+          <p:cNvSpPr/>
+          <p:nvPr/>
+        </p:nvSpPr>
+        <p:spPr>
+          <a:xfrm>
+            <a:off x="3749040" y="2011680"/>
+            <a:ext cx="2651760" cy="274320"/>
+          </a:xfrm>
+          <a:prstGeom prst="rect">
+            <a:avLst/>
+          </a:prstGeom>
+          <a:noFill/>
+          <a:ln/>
+        </p:spPr>
+        <p:txBody>
+          <a:bodyPr wrap="square" lIns="0" tIns="0" rIns="0" bIns="0" rtlCol="0" anchor="ctr"/>
+          <a:lstStyle/>
+          <a:p>
+            <a:pPr indent="0" marL="0">
+              <a:buNone/>
+            </a:pPr>
+            <a:r>
+              <a:rPr lang="en-US" sz="1400" dirty="0">
+                <a:solidFill>
+                  <a:srgbClr val="A8A6A0"/>
                 </a:solidFill>
                 <a:latin typeface="Calibri" pitchFamily="34" charset="0"/>
                 <a:ea typeface="Calibri" pitchFamily="34" charset="-122"/>
                 <a:cs typeface="Calibri" pitchFamily="34" charset="-120"/>
               </a:rPr>
-              <a:t>Uniform-swing assumed corrections of 10-20pp; realised swing was 25-30pp.</a:t>
-            </a:r>
-            <a:endParaRPr lang="en-US" sz="1300" dirty="0"/>
-          </a:p>
-        </p:txBody>
-      </p:sp>
-      <p:sp>
-        <p:nvSpPr>
-          <p:cNvPr id="13" name="Text 11"/>
-          <p:cNvSpPr/>
-          <p:nvPr/>
-        </p:nvSpPr>
-        <p:spPr>
-          <a:xfrm>
-            <a:off x="457200" y="2560320"/>
-            <a:ext cx="457200" cy="457200"/>
-          </a:xfrm>
-          <a:prstGeom prst="rect">
-            <a:avLst/>
-          </a:prstGeom>
-          <a:noFill/>
-          <a:ln/>
-        </p:spPr>
-        <p:txBody>
-          <a:bodyPr wrap="square" lIns="0" tIns="0" rIns="0" bIns="0" rtlCol="0" anchor="ctr"/>
-          <a:lstStyle/>
-          <a:p>
-            <a:pPr indent="0" marL="0">
-              <a:buNone/>
-            </a:pPr>
-            <a:r>
-              <a:rPr lang="en-US" sz="1100" dirty="0">
+              <a:t>BJP 50%</a:t>
+            </a:r>
+            <a:endParaRPr lang="en-US" sz="1400" dirty="0"/>
+          </a:p>
+        </p:txBody>
+      </p:sp>
+      <p:sp>
+        <p:nvSpPr>
+          <p:cNvPr id="14" name="Text 11"/>
+          <p:cNvSpPr/>
+          <p:nvPr/>
+        </p:nvSpPr>
+        <p:spPr>
+          <a:xfrm>
+            <a:off x="3749040" y="2423160"/>
+            <a:ext cx="2651760" cy="201168"/>
+          </a:xfrm>
+          <a:prstGeom prst="rect">
+            <a:avLst/>
+          </a:prstGeom>
+          <a:noFill/>
+          <a:ln/>
+        </p:spPr>
+        <p:txBody>
+          <a:bodyPr wrap="square" lIns="0" tIns="0" rIns="0" bIns="0" rtlCol="0" anchor="ctr"/>
+          <a:lstStyle/>
+          <a:p>
+            <a:pPr indent="0" marL="0">
+              <a:buNone/>
+            </a:pPr>
+            <a:r>
+              <a:rPr lang="en-US" sz="900" spc="150" kern="0" dirty="0">
                 <a:solidFill>
                   <a:srgbClr val="9A9997"/>
                 </a:solidFill>
@@ -6105,38 +6217,38 @@
                 <a:ea typeface="Courier New" pitchFamily="34" charset="-122"/>
                 <a:cs typeface="Courier New" pitchFamily="34" charset="-120"/>
               </a:rPr>
-              <a:t>02</a:t>
-            </a:r>
-            <a:endParaRPr lang="en-US" sz="1100" dirty="0"/>
-          </a:p>
-        </p:txBody>
-      </p:sp>
-      <p:sp>
-        <p:nvSpPr>
-          <p:cNvPr id="14" name="Text 12"/>
-          <p:cNvSpPr/>
-          <p:nvPr/>
-        </p:nvSpPr>
-        <p:spPr>
-          <a:xfrm>
-            <a:off x="914400" y="2560320"/>
-            <a:ext cx="7680960" cy="365760"/>
-          </a:xfrm>
-          <a:prstGeom prst="rect">
-            <a:avLst/>
-          </a:prstGeom>
-          <a:noFill/>
-          <a:ln/>
-        </p:spPr>
-        <p:txBody>
-          <a:bodyPr wrap="square" lIns="0" tIns="0" rIns="0" bIns="0" rtlCol="0" anchor="ctr"/>
-          <a:lstStyle/>
-          <a:p>
-            <a:pPr indent="0" marL="0">
-              <a:buNone/>
-            </a:pPr>
-            <a:r>
-              <a:rPr lang="en-US" sz="1300" b="1" dirty="0">
+              <a:t>ACTUAL</a:t>
+            </a:r>
+            <a:endParaRPr lang="en-US" sz="900" dirty="0"/>
+          </a:p>
+        </p:txBody>
+      </p:sp>
+      <p:sp>
+        <p:nvSpPr>
+          <p:cNvPr id="15" name="Text 12"/>
+          <p:cNvSpPr/>
+          <p:nvPr/>
+        </p:nvSpPr>
+        <p:spPr>
+          <a:xfrm>
+            <a:off x="3749040" y="2642616"/>
+            <a:ext cx="2651760" cy="274320"/>
+          </a:xfrm>
+          <a:prstGeom prst="rect">
+            <a:avLst/>
+          </a:prstGeom>
+          <a:noFill/>
+          <a:ln/>
+        </p:spPr>
+        <p:txBody>
+          <a:bodyPr wrap="square" lIns="0" tIns="0" rIns="0" bIns="0" rtlCol="0" anchor="ctr"/>
+          <a:lstStyle/>
+          <a:p>
+            <a:pPr indent="0" marL="0">
+              <a:buNone/>
+            </a:pPr>
+            <a:r>
+              <a:rPr lang="en-US" sz="1400" dirty="0">
                 <a:solidFill>
                   <a:srgbClr val="E9E6DF"/>
                 </a:solidFill>
@@ -6144,77 +6256,77 @@
                 <a:ea typeface="Calibri" pitchFamily="34" charset="-122"/>
                 <a:cs typeface="Calibri" pitchFamily="34" charset="-120"/>
               </a:rPr>
-              <a:t>Hindu consolidation modelled as localized.</a:t>
-            </a:r>
-            <a:endParaRPr lang="en-US" sz="1300" dirty="0"/>
-          </a:p>
-        </p:txBody>
-      </p:sp>
-      <p:sp>
-        <p:nvSpPr>
-          <p:cNvPr id="15" name="Text 13"/>
-          <p:cNvSpPr/>
-          <p:nvPr/>
-        </p:nvSpPr>
-        <p:spPr>
-          <a:xfrm>
-            <a:off x="914400" y="2926080"/>
-            <a:ext cx="7680960" cy="594360"/>
-          </a:xfrm>
-          <a:prstGeom prst="rect">
-            <a:avLst/>
-          </a:prstGeom>
-          <a:noFill/>
-          <a:ln/>
-        </p:spPr>
-        <p:txBody>
-          <a:bodyPr wrap="square" lIns="0" tIns="0" rIns="0" bIns="0" rtlCol="0" anchor="ctr"/>
-          <a:lstStyle/>
-          <a:p>
-            <a:pPr indent="0" marL="0">
-              <a:buNone/>
-            </a:pPr>
-            <a:r>
-              <a:rPr lang="en-US" sz="1300" dirty="0">
-                <a:solidFill>
-                  <a:srgbClr val="C9C7C0"/>
+              <a:t>TMC 20%</a:t>
+            </a:r>
+            <a:endParaRPr lang="en-US" sz="1400" dirty="0"/>
+          </a:p>
+        </p:txBody>
+      </p:sp>
+      <p:sp>
+        <p:nvSpPr>
+          <p:cNvPr id="16" name="Text 13"/>
+          <p:cNvSpPr/>
+          <p:nvPr/>
+        </p:nvSpPr>
+        <p:spPr>
+          <a:xfrm>
+            <a:off x="3749040" y="2880360"/>
+            <a:ext cx="2651760" cy="274320"/>
+          </a:xfrm>
+          <a:prstGeom prst="rect">
+            <a:avLst/>
+          </a:prstGeom>
+          <a:noFill/>
+          <a:ln/>
+        </p:spPr>
+        <p:txBody>
+          <a:bodyPr wrap="square" lIns="0" tIns="0" rIns="0" bIns="0" rtlCol="0" anchor="ctr"/>
+          <a:lstStyle/>
+          <a:p>
+            <a:pPr indent="0" marL="0">
+              <a:buNone/>
+            </a:pPr>
+            <a:r>
+              <a:rPr lang="en-US" sz="1400" dirty="0">
+                <a:solidFill>
+                  <a:srgbClr val="A8A6A0"/>
                 </a:solidFill>
                 <a:latin typeface="Calibri" pitchFamily="34" charset="0"/>
                 <a:ea typeface="Calibri" pitchFamily="34" charset="-122"/>
                 <a:cs typeface="Calibri" pitchFamily="34" charset="-120"/>
               </a:rPr>
-              <a:t>The data shows it was the dominant statewide frame.</a:t>
-            </a:r>
-            <a:endParaRPr lang="en-US" sz="1300" dirty="0"/>
-          </a:p>
-        </p:txBody>
-      </p:sp>
-      <p:sp>
-        <p:nvSpPr>
-          <p:cNvPr id="16" name="Text 14"/>
-          <p:cNvSpPr/>
-          <p:nvPr/>
-        </p:nvSpPr>
-        <p:spPr>
-          <a:xfrm>
-            <a:off x="457200" y="3566160"/>
-            <a:ext cx="457200" cy="457200"/>
-          </a:xfrm>
-          <a:prstGeom prst="rect">
-            <a:avLst/>
-          </a:prstGeom>
-          <a:noFill/>
-          <a:ln/>
-        </p:spPr>
-        <p:txBody>
-          <a:bodyPr wrap="square" lIns="0" tIns="0" rIns="0" bIns="0" rtlCol="0" anchor="ctr"/>
-          <a:lstStyle/>
-          <a:p>
-            <a:pPr indent="0" marL="0">
-              <a:buNone/>
-            </a:pPr>
-            <a:r>
-              <a:rPr lang="en-US" sz="1100" dirty="0">
+              <a:t>BJP 60%</a:t>
+            </a:r>
+            <a:endParaRPr lang="en-US" sz="1400" dirty="0"/>
+          </a:p>
+        </p:txBody>
+      </p:sp>
+      <p:sp>
+        <p:nvSpPr>
+          <p:cNvPr id="17" name="Text 14"/>
+          <p:cNvSpPr/>
+          <p:nvPr/>
+        </p:nvSpPr>
+        <p:spPr>
+          <a:xfrm>
+            <a:off x="3749040" y="3291840"/>
+            <a:ext cx="2651760" cy="201168"/>
+          </a:xfrm>
+          <a:prstGeom prst="rect">
+            <a:avLst/>
+          </a:prstGeom>
+          <a:noFill/>
+          <a:ln/>
+        </p:spPr>
+        <p:txBody>
+          <a:bodyPr wrap="square" lIns="0" tIns="0" rIns="0" bIns="0" rtlCol="0" anchor="ctr"/>
+          <a:lstStyle/>
+          <a:p>
+            <a:pPr indent="0" marL="0">
+              <a:buNone/>
+            </a:pPr>
+            <a:r>
+              <a:rPr lang="en-US" sz="900" spc="150" kern="0" dirty="0">
                 <a:solidFill>
                   <a:srgbClr val="9A9997"/>
                 </a:solidFill>
@@ -6222,87 +6334,243 @@
                 <a:ea typeface="Courier New" pitchFamily="34" charset="-122"/>
                 <a:cs typeface="Courier New" pitchFamily="34" charset="-120"/>
               </a:rPr>
-              <a:t>03</a:t>
-            </a:r>
-            <a:endParaRPr lang="en-US" sz="1100" dirty="0"/>
-          </a:p>
-        </p:txBody>
-      </p:sp>
-      <p:sp>
-        <p:nvSpPr>
-          <p:cNvPr id="17" name="Text 15"/>
-          <p:cNvSpPr/>
-          <p:nvPr/>
-        </p:nvSpPr>
-        <p:spPr>
-          <a:xfrm>
-            <a:off x="914400" y="3566160"/>
-            <a:ext cx="7680960" cy="365760"/>
-          </a:xfrm>
-          <a:prstGeom prst="rect">
-            <a:avLst/>
-          </a:prstGeom>
-          <a:noFill/>
-          <a:ln/>
-        </p:spPr>
-        <p:txBody>
-          <a:bodyPr wrap="square" lIns="0" tIns="0" rIns="0" bIns="0" rtlCol="0" anchor="ctr"/>
-          <a:lstStyle/>
-          <a:p>
-            <a:pPr indent="0" marL="0">
-              <a:buNone/>
-            </a:pPr>
-            <a:r>
-              <a:rPr lang="en-US" sz="1300" b="1" dirty="0">
-                <a:solidFill>
-                  <a:srgbClr val="E9E6DF"/>
+              <a:t>SEATS</a:t>
+            </a:r>
+            <a:endParaRPr lang="en-US" sz="900" dirty="0"/>
+          </a:p>
+        </p:txBody>
+      </p:sp>
+      <p:sp>
+        <p:nvSpPr>
+          <p:cNvPr id="18" name="Text 15"/>
+          <p:cNvSpPr/>
+          <p:nvPr/>
+        </p:nvSpPr>
+        <p:spPr>
+          <a:xfrm>
+            <a:off x="3749040" y="3502152"/>
+            <a:ext cx="2651760" cy="237744"/>
+          </a:xfrm>
+          <a:prstGeom prst="rect">
+            <a:avLst/>
+          </a:prstGeom>
+          <a:noFill/>
+          <a:ln/>
+        </p:spPr>
+        <p:txBody>
+          <a:bodyPr wrap="square" lIns="0" tIns="0" rIns="0" bIns="0" rtlCol="0" anchor="ctr"/>
+          <a:lstStyle/>
+          <a:p>
+            <a:pPr indent="0" marL="0">
+              <a:buNone/>
+            </a:pPr>
+            <a:r>
+              <a:rPr lang="en-US" sz="1100" dirty="0">
+                <a:solidFill>
+                  <a:srgbClr val="A8A6A0"/>
                 </a:solidFill>
                 <a:latin typeface="Calibri" pitchFamily="34" charset="0"/>
                 <a:ea typeface="Calibri" pitchFamily="34" charset="-122"/>
                 <a:cs typeface="Calibri" pitchFamily="34" charset="-120"/>
               </a:rPr>
-              <a:t>SIR weight too small.</a:t>
-            </a:r>
-            <a:endParaRPr lang="en-US" sz="1300" dirty="0"/>
-          </a:p>
-        </p:txBody>
-      </p:sp>
-      <p:sp>
-        <p:nvSpPr>
-          <p:cNvPr id="18" name="Text 16"/>
-          <p:cNvSpPr/>
-          <p:nvPr/>
-        </p:nvSpPr>
-        <p:spPr>
-          <a:xfrm>
-            <a:off x="914400" y="3931920"/>
-            <a:ext cx="7680960" cy="594360"/>
-          </a:xfrm>
-          <a:prstGeom prst="rect">
-            <a:avLst/>
-          </a:prstGeom>
-          <a:noFill/>
-          <a:ln/>
-        </p:spPr>
-        <p:txBody>
-          <a:bodyPr wrap="square" lIns="0" tIns="0" rIns="0" bIns="0" rtlCol="0" anchor="ctr"/>
-          <a:lstStyle/>
-          <a:p>
-            <a:pPr indent="0" marL="0">
-              <a:buNone/>
-            </a:pPr>
-            <a:r>
-              <a:rPr lang="en-US" sz="1300" dirty="0">
-                <a:solidFill>
-                  <a:srgbClr val="C9C7C0"/>
+              <a:t>Pred: BJP/GJM 10 · TMC 3</a:t>
+            </a:r>
+            <a:endParaRPr lang="en-US" sz="1100" dirty="0"/>
+          </a:p>
+        </p:txBody>
+      </p:sp>
+      <p:sp>
+        <p:nvSpPr>
+          <p:cNvPr id="19" name="Text 16"/>
+          <p:cNvSpPr/>
+          <p:nvPr/>
+        </p:nvSpPr>
+        <p:spPr>
+          <a:xfrm>
+            <a:off x="3749040" y="3730752"/>
+            <a:ext cx="2651760" cy="237744"/>
+          </a:xfrm>
+          <a:prstGeom prst="rect">
+            <a:avLst/>
+          </a:prstGeom>
+          <a:noFill/>
+          <a:ln/>
+        </p:spPr>
+        <p:txBody>
+          <a:bodyPr wrap="square" lIns="0" tIns="0" rIns="0" bIns="0" rtlCol="0" anchor="ctr"/>
+          <a:lstStyle/>
+          <a:p>
+            <a:pPr indent="0" marL="0">
+              <a:buNone/>
+            </a:pPr>
+            <a:r>
+              <a:rPr lang="en-US" sz="1100" dirty="0">
+                <a:solidFill>
+                  <a:srgbClr val="A8A6A0"/>
                 </a:solidFill>
                 <a:latin typeface="Calibri" pitchFamily="34" charset="0"/>
                 <a:ea typeface="Calibri" pitchFamily="34" charset="-122"/>
                 <a:cs typeface="Calibri" pitchFamily="34" charset="-120"/>
               </a:rPr>
-              <a:t>Modelled as marginal; reality showed structural turnout asymmetry across all Muslim-majority clusters.</a:t>
-            </a:r>
-            <a:endParaRPr lang="en-US" sz="1300" dirty="0"/>
+              <a:t>Act:  BJP/GJM 10 · TMC 2 · Oth 1</a:t>
+            </a:r>
+            <a:endParaRPr lang="en-US" sz="1100" dirty="0"/>
+          </a:p>
+        </p:txBody>
+      </p:sp>
+      <p:sp>
+        <p:nvSpPr>
+          <p:cNvPr id="20" name="Text 17"/>
+          <p:cNvSpPr/>
+          <p:nvPr/>
+        </p:nvSpPr>
+        <p:spPr>
+          <a:xfrm>
+            <a:off x="6583680" y="1554480"/>
+            <a:ext cx="2240280" cy="201168"/>
+          </a:xfrm>
+          <a:prstGeom prst="rect">
+            <a:avLst/>
+          </a:prstGeom>
+          <a:noFill/>
+          <a:ln/>
+        </p:spPr>
+        <p:txBody>
+          <a:bodyPr wrap="square" lIns="0" tIns="0" rIns="0" bIns="0" rtlCol="0" anchor="ctr"/>
+          <a:lstStyle/>
+          <a:p>
+            <a:pPr indent="0" marL="0">
+              <a:buNone/>
+            </a:pPr>
+            <a:r>
+              <a:rPr lang="en-US" sz="900" spc="150" kern="0" dirty="0">
+                <a:solidFill>
+                  <a:srgbClr val="9A9997"/>
+                </a:solidFill>
+                <a:latin typeface="Courier New" pitchFamily="34" charset="0"/>
+                <a:ea typeface="Courier New" pitchFamily="34" charset="-122"/>
+                <a:cs typeface="Courier New" pitchFamily="34" charset="-120"/>
+              </a:rPr>
+              <a:t>THE FACTOR</a:t>
+            </a:r>
+            <a:endParaRPr lang="en-US" sz="900" dirty="0"/>
+          </a:p>
+        </p:txBody>
+      </p:sp>
+      <p:sp>
+        <p:nvSpPr>
+          <p:cNvPr id="21" name="Text 18"/>
+          <p:cNvSpPr/>
+          <p:nvPr/>
+        </p:nvSpPr>
+        <p:spPr>
+          <a:xfrm>
+            <a:off x="6583680" y="1828800"/>
+            <a:ext cx="2240280" cy="457200"/>
+          </a:xfrm>
+          <a:prstGeom prst="rect">
+            <a:avLst/>
+          </a:prstGeom>
+          <a:noFill/>
+          <a:ln/>
+        </p:spPr>
+        <p:txBody>
+          <a:bodyPr wrap="square" lIns="0" tIns="0" rIns="0" bIns="0" rtlCol="0" anchor="ctr"/>
+          <a:lstStyle/>
+          <a:p>
+            <a:pPr indent="0" marL="0">
+              <a:buNone/>
+            </a:pPr>
+            <a:r>
+              <a:rPr lang="en-US" sz="1400" b="1" dirty="0">
+                <a:solidFill>
+                  <a:srgbClr val="E9E6DF"/>
+                </a:solidFill>
+                <a:latin typeface="Calibri" pitchFamily="34" charset="0"/>
+                <a:ea typeface="Calibri" pitchFamily="34" charset="-122"/>
+                <a:cs typeface="Calibri" pitchFamily="34" charset="-120"/>
+              </a:rPr>
+              <a:t>Correctly predicted.</a:t>
+            </a:r>
+            <a:endParaRPr lang="en-US" sz="1400" dirty="0"/>
+          </a:p>
+        </p:txBody>
+      </p:sp>
+      <p:sp>
+        <p:nvSpPr>
+          <p:cNvPr id="22" name="Text 19"/>
+          <p:cNvSpPr/>
+          <p:nvPr/>
+        </p:nvSpPr>
+        <p:spPr>
+          <a:xfrm>
+            <a:off x="6583680" y="2423160"/>
+            <a:ext cx="2240280" cy="2011680"/>
+          </a:xfrm>
+          <a:prstGeom prst="rect">
+            <a:avLst/>
+          </a:prstGeom>
+          <a:noFill/>
+          <a:ln/>
+        </p:spPr>
+        <p:txBody>
+          <a:bodyPr wrap="square" lIns="0" tIns="0" rIns="0" bIns="0" rtlCol="0" anchor="ctr"/>
+          <a:lstStyle/>
+          <a:p>
+            <a:pPr indent="0" marL="0">
+              <a:buNone/>
+            </a:pPr>
+            <a:r>
+              <a:rPr lang="en-US" sz="1200" dirty="0">
+                <a:solidFill>
+                  <a:srgbClr val="C9C7C0"/>
+                </a:solidFill>
+                <a:latin typeface="Calibri" pitchFamily="34" charset="0"/>
+                <a:ea typeface="Calibri" pitchFamily="34" charset="-122"/>
+                <a:cs typeface="Calibri" pitchFamily="34" charset="-120"/>
+              </a:rPr>
+              <a:t>BJP/GJM alliance worked as modelled.</a:t>
+            </a:r>
+            <a:endParaRPr lang="en-US" sz="1200" dirty="0"/>
+          </a:p>
+        </p:txBody>
+      </p:sp>
+      <p:sp>
+        <p:nvSpPr>
+          <p:cNvPr id="23" name="Text 20"/>
+          <p:cNvSpPr/>
+          <p:nvPr/>
+        </p:nvSpPr>
+        <p:spPr>
+          <a:xfrm>
+            <a:off x="6583680" y="4160520"/>
+            <a:ext cx="2240280" cy="274320"/>
+          </a:xfrm>
+          <a:prstGeom prst="rect">
+            <a:avLst/>
+          </a:prstGeom>
+          <a:noFill/>
+          <a:ln/>
+        </p:spPr>
+        <p:txBody>
+          <a:bodyPr wrap="square" lIns="0" tIns="0" rIns="0" bIns="0" rtlCol="0" anchor="ctr"/>
+          <a:lstStyle/>
+          <a:p>
+            <a:pPr indent="0" marL="0">
+              <a:buNone/>
+            </a:pPr>
+            <a:r>
+              <a:rPr lang="en-US" sz="1000" spc="150" kern="0" dirty="0">
+                <a:solidFill>
+                  <a:srgbClr val="9A9997"/>
+                </a:solidFill>
+                <a:latin typeface="Courier New" pitchFamily="34" charset="0"/>
+                <a:ea typeface="Courier New" pitchFamily="34" charset="-122"/>
+                <a:cs typeface="Courier New" pitchFamily="34" charset="-120"/>
+              </a:rPr>
+              <a:t>13 SEATS</a:t>
+            </a:r>
+            <a:endParaRPr lang="en-US" sz="1000" dirty="0"/>
           </a:p>
         </p:txBody>
       </p:sp>
@@ -6340,6 +6608,643 @@
       </p:grpSpPr>
       <p:sp>
         <p:nvSpPr>
+          <p:cNvPr id="2" name="Shape 0"/>
+          <p:cNvSpPr/>
+          <p:nvPr/>
+        </p:nvSpPr>
+        <p:spPr>
+          <a:xfrm>
+            <a:off x="8522208" y="128016"/>
+            <a:ext cx="329184" cy="329184"/>
+          </a:xfrm>
+          <a:prstGeom prst="ellipse">
+            <a:avLst/>
+          </a:prstGeom>
+          <a:solidFill>
+            <a:srgbClr val="050505"/>
+          </a:solidFill>
+          <a:ln w="19050">
+            <a:solidFill>
+              <a:srgbClr val="A8FF3E"/>
+            </a:solidFill>
+            <a:prstDash val="solid"/>
+          </a:ln>
+        </p:spPr>
+      </p:sp>
+      <p:sp>
+        <p:nvSpPr>
+          <p:cNvPr id="3" name="Shape 1"/>
+          <p:cNvSpPr/>
+          <p:nvPr/>
+        </p:nvSpPr>
+        <p:spPr>
+          <a:xfrm>
+            <a:off x="8595360" y="201168"/>
+            <a:ext cx="182880" cy="182880"/>
+          </a:xfrm>
+          <a:prstGeom prst="ellipse">
+            <a:avLst/>
+          </a:prstGeom>
+          <a:solidFill>
+            <a:srgbClr val="050505"/>
+          </a:solidFill>
+          <a:ln w="12700">
+            <a:solidFill>
+              <a:srgbClr val="A8FF3E"/>
+            </a:solidFill>
+            <a:prstDash val="solid"/>
+          </a:ln>
+        </p:spPr>
+      </p:sp>
+      <p:sp>
+        <p:nvSpPr>
+          <p:cNvPr id="4" name="Shape 2"/>
+          <p:cNvSpPr/>
+          <p:nvPr/>
+        </p:nvSpPr>
+        <p:spPr>
+          <a:xfrm>
+            <a:off x="8650224" y="256032"/>
+            <a:ext cx="73152" cy="73152"/>
+          </a:xfrm>
+          <a:prstGeom prst="ellipse">
+            <a:avLst/>
+          </a:prstGeom>
+          <a:solidFill>
+            <a:srgbClr val="A8FF3E"/>
+          </a:solidFill>
+          <a:ln w="12700">
+            <a:solidFill>
+              <a:srgbClr val="A8FF3E"/>
+            </a:solidFill>
+            <a:prstDash val="solid"/>
+          </a:ln>
+        </p:spPr>
+      </p:sp>
+      <p:sp>
+        <p:nvSpPr>
+          <p:cNvPr id="5" name="Text 3"/>
+          <p:cNvSpPr/>
+          <p:nvPr/>
+        </p:nvSpPr>
+        <p:spPr>
+          <a:xfrm>
+            <a:off x="457200" y="4864608"/>
+            <a:ext cx="3657600" cy="182880"/>
+          </a:xfrm>
+          <a:prstGeom prst="rect">
+            <a:avLst/>
+          </a:prstGeom>
+          <a:noFill/>
+          <a:ln/>
+        </p:spPr>
+        <p:txBody>
+          <a:bodyPr wrap="square" lIns="0" tIns="0" rIns="0" bIns="0" rtlCol="0" anchor="ctr"/>
+          <a:lstStyle/>
+          <a:p>
+            <a:pPr algn="l" indent="0" marL="0">
+              <a:buNone/>
+            </a:pPr>
+            <a:r>
+              <a:rPr lang="en-US" sz="900" dirty="0">
+                <a:solidFill>
+                  <a:srgbClr val="9A9997"/>
+                </a:solidFill>
+                <a:latin typeface="Courier New" pitchFamily="34" charset="0"/>
+                <a:ea typeface="Courier New" pitchFamily="34" charset="-122"/>
+                <a:cs typeface="Courier New" pitchFamily="34" charset="-120"/>
+              </a:rPr>
+              <a:t>Simulatte / Confidential</a:t>
+            </a:r>
+            <a:endParaRPr lang="en-US" sz="900" dirty="0"/>
+          </a:p>
+        </p:txBody>
+      </p:sp>
+      <p:sp>
+        <p:nvSpPr>
+          <p:cNvPr id="6" name="Text 4"/>
+          <p:cNvSpPr/>
+          <p:nvPr/>
+        </p:nvSpPr>
+        <p:spPr>
+          <a:xfrm>
+            <a:off x="8046720" y="4864608"/>
+            <a:ext cx="731520" cy="182880"/>
+          </a:xfrm>
+          <a:prstGeom prst="rect">
+            <a:avLst/>
+          </a:prstGeom>
+          <a:noFill/>
+          <a:ln/>
+        </p:spPr>
+        <p:txBody>
+          <a:bodyPr wrap="square" lIns="0" tIns="0" rIns="0" bIns="0" rtlCol="0" anchor="ctr"/>
+          <a:lstStyle/>
+          <a:p>
+            <a:pPr algn="r" indent="0" marL="0">
+              <a:buNone/>
+            </a:pPr>
+            <a:r>
+              <a:rPr lang="en-US" sz="900" dirty="0">
+                <a:solidFill>
+                  <a:srgbClr val="9A9997"/>
+                </a:solidFill>
+                <a:latin typeface="Courier New" pitchFamily="34" charset="0"/>
+                <a:ea typeface="Courier New" pitchFamily="34" charset="-122"/>
+                <a:cs typeface="Courier New" pitchFamily="34" charset="-120"/>
+              </a:rPr>
+              <a:t>15</a:t>
+            </a:r>
+            <a:endParaRPr lang="en-US" sz="900" dirty="0"/>
+          </a:p>
+        </p:txBody>
+      </p:sp>
+      <p:sp>
+        <p:nvSpPr>
+          <p:cNvPr id="7" name="Text 5"/>
+          <p:cNvSpPr/>
+          <p:nvPr/>
+        </p:nvSpPr>
+        <p:spPr>
+          <a:xfrm>
+            <a:off x="457200" y="201168"/>
+            <a:ext cx="7772400" cy="201168"/>
+          </a:xfrm>
+          <a:prstGeom prst="rect">
+            <a:avLst/>
+          </a:prstGeom>
+          <a:noFill/>
+          <a:ln/>
+        </p:spPr>
+        <p:txBody>
+          <a:bodyPr wrap="square" lIns="0" tIns="0" rIns="0" bIns="0" rtlCol="0" anchor="ctr"/>
+          <a:lstStyle/>
+          <a:p>
+            <a:pPr indent="0" marL="0">
+              <a:buNone/>
+            </a:pPr>
+            <a:r>
+              <a:rPr lang="en-US" sz="900" spc="200" kern="0" dirty="0">
+                <a:solidFill>
+                  <a:srgbClr val="9A9997"/>
+                </a:solidFill>
+                <a:latin typeface="Courier New" pitchFamily="34" charset="0"/>
+                <a:ea typeface="Courier New" pitchFamily="34" charset="-122"/>
+                <a:cs typeface="Courier New" pitchFamily="34" charset="-120"/>
+              </a:rPr>
+              <a:t>05 — STRUCTURAL FAILURE</a:t>
+            </a:r>
+            <a:endParaRPr lang="en-US" sz="900" dirty="0"/>
+          </a:p>
+        </p:txBody>
+      </p:sp>
+      <p:sp>
+        <p:nvSpPr>
+          <p:cNvPr id="8" name="Text 6"/>
+          <p:cNvSpPr/>
+          <p:nvPr/>
+        </p:nvSpPr>
+        <p:spPr>
+          <a:xfrm>
+            <a:off x="457200" y="566928"/>
+            <a:ext cx="7772400" cy="548640"/>
+          </a:xfrm>
+          <a:prstGeom prst="rect">
+            <a:avLst/>
+          </a:prstGeom>
+          <a:noFill/>
+          <a:ln/>
+        </p:spPr>
+        <p:txBody>
+          <a:bodyPr wrap="square" lIns="0" tIns="0" rIns="0" bIns="0" rtlCol="0" anchor="ctr"/>
+          <a:lstStyle/>
+          <a:p>
+            <a:pPr indent="0" marL="0">
+              <a:buNone/>
+            </a:pPr>
+            <a:r>
+              <a:rPr lang="en-US" sz="3200" b="1" dirty="0">
+                <a:solidFill>
+                  <a:srgbClr val="E9E6DF"/>
+                </a:solidFill>
+                <a:latin typeface="Arial Narrow" pitchFamily="34" charset="0"/>
+                <a:ea typeface="Arial Narrow" pitchFamily="34" charset="-122"/>
+                <a:cs typeface="Arial Narrow" pitchFamily="34" charset="-120"/>
+              </a:rPr>
+              <a:t>Three things to fix in the model.</a:t>
+            </a:r>
+            <a:endParaRPr lang="en-US" sz="3200" dirty="0"/>
+          </a:p>
+        </p:txBody>
+      </p:sp>
+      <p:sp>
+        <p:nvSpPr>
+          <p:cNvPr id="9" name="Shape 7"/>
+          <p:cNvSpPr/>
+          <p:nvPr/>
+        </p:nvSpPr>
+        <p:spPr>
+          <a:xfrm>
+            <a:off x="457200" y="1298448"/>
+            <a:ext cx="8229600" cy="0"/>
+          </a:xfrm>
+          <a:prstGeom prst="line">
+            <a:avLst/>
+          </a:prstGeom>
+          <a:noFill/>
+          <a:ln w="6350">
+            <a:solidFill>
+              <a:srgbClr val="9A9997"/>
+            </a:solidFill>
+            <a:prstDash val="solid"/>
+          </a:ln>
+        </p:spPr>
+      </p:sp>
+      <p:sp>
+        <p:nvSpPr>
+          <p:cNvPr id="10" name="Text 8"/>
+          <p:cNvSpPr/>
+          <p:nvPr/>
+        </p:nvSpPr>
+        <p:spPr>
+          <a:xfrm>
+            <a:off x="457200" y="1554480"/>
+            <a:ext cx="457200" cy="457200"/>
+          </a:xfrm>
+          <a:prstGeom prst="rect">
+            <a:avLst/>
+          </a:prstGeom>
+          <a:noFill/>
+          <a:ln/>
+        </p:spPr>
+        <p:txBody>
+          <a:bodyPr wrap="square" lIns="0" tIns="0" rIns="0" bIns="0" rtlCol="0" anchor="ctr"/>
+          <a:lstStyle/>
+          <a:p>
+            <a:pPr indent="0" marL="0">
+              <a:buNone/>
+            </a:pPr>
+            <a:r>
+              <a:rPr lang="en-US" sz="1100" dirty="0">
+                <a:solidFill>
+                  <a:srgbClr val="9A9997"/>
+                </a:solidFill>
+                <a:latin typeface="Courier New" pitchFamily="34" charset="0"/>
+                <a:ea typeface="Courier New" pitchFamily="34" charset="-122"/>
+                <a:cs typeface="Courier New" pitchFamily="34" charset="-120"/>
+              </a:rPr>
+              <a:t>01</a:t>
+            </a:r>
+            <a:endParaRPr lang="en-US" sz="1100" dirty="0"/>
+          </a:p>
+        </p:txBody>
+      </p:sp>
+      <p:sp>
+        <p:nvSpPr>
+          <p:cNvPr id="11" name="Text 9"/>
+          <p:cNvSpPr/>
+          <p:nvPr/>
+        </p:nvSpPr>
+        <p:spPr>
+          <a:xfrm>
+            <a:off x="914400" y="1554480"/>
+            <a:ext cx="7680960" cy="365760"/>
+          </a:xfrm>
+          <a:prstGeom prst="rect">
+            <a:avLst/>
+          </a:prstGeom>
+          <a:noFill/>
+          <a:ln/>
+        </p:spPr>
+        <p:txBody>
+          <a:bodyPr wrap="square" lIns="0" tIns="0" rIns="0" bIns="0" rtlCol="0" anchor="ctr"/>
+          <a:lstStyle/>
+          <a:p>
+            <a:pPr indent="0" marL="0">
+              <a:buNone/>
+            </a:pPr>
+            <a:r>
+              <a:rPr lang="en-US" sz="1300" b="1" dirty="0">
+                <a:solidFill>
+                  <a:srgbClr val="E9E6DF"/>
+                </a:solidFill>
+                <a:latin typeface="Calibri" pitchFamily="34" charset="0"/>
+                <a:ea typeface="Calibri" pitchFamily="34" charset="-122"/>
+                <a:cs typeface="Calibri" pitchFamily="34" charset="-120"/>
+              </a:rPr>
+              <a:t>Anchoring on 2021 baseline.</a:t>
+            </a:r>
+            <a:endParaRPr lang="en-US" sz="1300" dirty="0"/>
+          </a:p>
+        </p:txBody>
+      </p:sp>
+      <p:sp>
+        <p:nvSpPr>
+          <p:cNvPr id="12" name="Text 10"/>
+          <p:cNvSpPr/>
+          <p:nvPr/>
+        </p:nvSpPr>
+        <p:spPr>
+          <a:xfrm>
+            <a:off x="914400" y="1920240"/>
+            <a:ext cx="7680960" cy="594360"/>
+          </a:xfrm>
+          <a:prstGeom prst="rect">
+            <a:avLst/>
+          </a:prstGeom>
+          <a:noFill/>
+          <a:ln/>
+        </p:spPr>
+        <p:txBody>
+          <a:bodyPr wrap="square" lIns="0" tIns="0" rIns="0" bIns="0" rtlCol="0" anchor="ctr"/>
+          <a:lstStyle/>
+          <a:p>
+            <a:pPr indent="0" marL="0">
+              <a:buNone/>
+            </a:pPr>
+            <a:r>
+              <a:rPr lang="en-US" sz="1300" dirty="0">
+                <a:solidFill>
+                  <a:srgbClr val="C9C7C0"/>
+                </a:solidFill>
+                <a:latin typeface="Calibri" pitchFamily="34" charset="0"/>
+                <a:ea typeface="Calibri" pitchFamily="34" charset="-122"/>
+                <a:cs typeface="Calibri" pitchFamily="34" charset="-120"/>
+              </a:rPr>
+              <a:t>Uniform-swing assumed corrections of 10-20pp; realised swing was 25-30pp.</a:t>
+            </a:r>
+            <a:endParaRPr lang="en-US" sz="1300" dirty="0"/>
+          </a:p>
+        </p:txBody>
+      </p:sp>
+      <p:sp>
+        <p:nvSpPr>
+          <p:cNvPr id="13" name="Text 11"/>
+          <p:cNvSpPr/>
+          <p:nvPr/>
+        </p:nvSpPr>
+        <p:spPr>
+          <a:xfrm>
+            <a:off x="457200" y="2560320"/>
+            <a:ext cx="457200" cy="457200"/>
+          </a:xfrm>
+          <a:prstGeom prst="rect">
+            <a:avLst/>
+          </a:prstGeom>
+          <a:noFill/>
+          <a:ln/>
+        </p:spPr>
+        <p:txBody>
+          <a:bodyPr wrap="square" lIns="0" tIns="0" rIns="0" bIns="0" rtlCol="0" anchor="ctr"/>
+          <a:lstStyle/>
+          <a:p>
+            <a:pPr indent="0" marL="0">
+              <a:buNone/>
+            </a:pPr>
+            <a:r>
+              <a:rPr lang="en-US" sz="1100" dirty="0">
+                <a:solidFill>
+                  <a:srgbClr val="9A9997"/>
+                </a:solidFill>
+                <a:latin typeface="Courier New" pitchFamily="34" charset="0"/>
+                <a:ea typeface="Courier New" pitchFamily="34" charset="-122"/>
+                <a:cs typeface="Courier New" pitchFamily="34" charset="-120"/>
+              </a:rPr>
+              <a:t>02</a:t>
+            </a:r>
+            <a:endParaRPr lang="en-US" sz="1100" dirty="0"/>
+          </a:p>
+        </p:txBody>
+      </p:sp>
+      <p:sp>
+        <p:nvSpPr>
+          <p:cNvPr id="14" name="Text 12"/>
+          <p:cNvSpPr/>
+          <p:nvPr/>
+        </p:nvSpPr>
+        <p:spPr>
+          <a:xfrm>
+            <a:off x="914400" y="2560320"/>
+            <a:ext cx="7680960" cy="365760"/>
+          </a:xfrm>
+          <a:prstGeom prst="rect">
+            <a:avLst/>
+          </a:prstGeom>
+          <a:noFill/>
+          <a:ln/>
+        </p:spPr>
+        <p:txBody>
+          <a:bodyPr wrap="square" lIns="0" tIns="0" rIns="0" bIns="0" rtlCol="0" anchor="ctr"/>
+          <a:lstStyle/>
+          <a:p>
+            <a:pPr indent="0" marL="0">
+              <a:buNone/>
+            </a:pPr>
+            <a:r>
+              <a:rPr lang="en-US" sz="1300" b="1" dirty="0">
+                <a:solidFill>
+                  <a:srgbClr val="E9E6DF"/>
+                </a:solidFill>
+                <a:latin typeface="Calibri" pitchFamily="34" charset="0"/>
+                <a:ea typeface="Calibri" pitchFamily="34" charset="-122"/>
+                <a:cs typeface="Calibri" pitchFamily="34" charset="-120"/>
+              </a:rPr>
+              <a:t>Hindu consolidation modelled as localized.</a:t>
+            </a:r>
+            <a:endParaRPr lang="en-US" sz="1300" dirty="0"/>
+          </a:p>
+        </p:txBody>
+      </p:sp>
+      <p:sp>
+        <p:nvSpPr>
+          <p:cNvPr id="15" name="Text 13"/>
+          <p:cNvSpPr/>
+          <p:nvPr/>
+        </p:nvSpPr>
+        <p:spPr>
+          <a:xfrm>
+            <a:off x="914400" y="2926080"/>
+            <a:ext cx="7680960" cy="594360"/>
+          </a:xfrm>
+          <a:prstGeom prst="rect">
+            <a:avLst/>
+          </a:prstGeom>
+          <a:noFill/>
+          <a:ln/>
+        </p:spPr>
+        <p:txBody>
+          <a:bodyPr wrap="square" lIns="0" tIns="0" rIns="0" bIns="0" rtlCol="0" anchor="ctr"/>
+          <a:lstStyle/>
+          <a:p>
+            <a:pPr indent="0" marL="0">
+              <a:buNone/>
+            </a:pPr>
+            <a:r>
+              <a:rPr lang="en-US" sz="1300" dirty="0">
+                <a:solidFill>
+                  <a:srgbClr val="C9C7C0"/>
+                </a:solidFill>
+                <a:latin typeface="Calibri" pitchFamily="34" charset="0"/>
+                <a:ea typeface="Calibri" pitchFamily="34" charset="-122"/>
+                <a:cs typeface="Calibri" pitchFamily="34" charset="-120"/>
+              </a:rPr>
+              <a:t>The data shows it was the dominant statewide frame.</a:t>
+            </a:r>
+            <a:endParaRPr lang="en-US" sz="1300" dirty="0"/>
+          </a:p>
+        </p:txBody>
+      </p:sp>
+      <p:sp>
+        <p:nvSpPr>
+          <p:cNvPr id="16" name="Text 14"/>
+          <p:cNvSpPr/>
+          <p:nvPr/>
+        </p:nvSpPr>
+        <p:spPr>
+          <a:xfrm>
+            <a:off x="457200" y="3566160"/>
+            <a:ext cx="457200" cy="457200"/>
+          </a:xfrm>
+          <a:prstGeom prst="rect">
+            <a:avLst/>
+          </a:prstGeom>
+          <a:noFill/>
+          <a:ln/>
+        </p:spPr>
+        <p:txBody>
+          <a:bodyPr wrap="square" lIns="0" tIns="0" rIns="0" bIns="0" rtlCol="0" anchor="ctr"/>
+          <a:lstStyle/>
+          <a:p>
+            <a:pPr indent="0" marL="0">
+              <a:buNone/>
+            </a:pPr>
+            <a:r>
+              <a:rPr lang="en-US" sz="1100" dirty="0">
+                <a:solidFill>
+                  <a:srgbClr val="9A9997"/>
+                </a:solidFill>
+                <a:latin typeface="Courier New" pitchFamily="34" charset="0"/>
+                <a:ea typeface="Courier New" pitchFamily="34" charset="-122"/>
+                <a:cs typeface="Courier New" pitchFamily="34" charset="-120"/>
+              </a:rPr>
+              <a:t>03</a:t>
+            </a:r>
+            <a:endParaRPr lang="en-US" sz="1100" dirty="0"/>
+          </a:p>
+        </p:txBody>
+      </p:sp>
+      <p:sp>
+        <p:nvSpPr>
+          <p:cNvPr id="17" name="Text 15"/>
+          <p:cNvSpPr/>
+          <p:nvPr/>
+        </p:nvSpPr>
+        <p:spPr>
+          <a:xfrm>
+            <a:off x="914400" y="3566160"/>
+            <a:ext cx="7680960" cy="365760"/>
+          </a:xfrm>
+          <a:prstGeom prst="rect">
+            <a:avLst/>
+          </a:prstGeom>
+          <a:noFill/>
+          <a:ln/>
+        </p:spPr>
+        <p:txBody>
+          <a:bodyPr wrap="square" lIns="0" tIns="0" rIns="0" bIns="0" rtlCol="0" anchor="ctr"/>
+          <a:lstStyle/>
+          <a:p>
+            <a:pPr indent="0" marL="0">
+              <a:buNone/>
+            </a:pPr>
+            <a:r>
+              <a:rPr lang="en-US" sz="1300" b="1" dirty="0">
+                <a:solidFill>
+                  <a:srgbClr val="E9E6DF"/>
+                </a:solidFill>
+                <a:latin typeface="Calibri" pitchFamily="34" charset="0"/>
+                <a:ea typeface="Calibri" pitchFamily="34" charset="-122"/>
+                <a:cs typeface="Calibri" pitchFamily="34" charset="-120"/>
+              </a:rPr>
+              <a:t>SIR weight too small.</a:t>
+            </a:r>
+            <a:endParaRPr lang="en-US" sz="1300" dirty="0"/>
+          </a:p>
+        </p:txBody>
+      </p:sp>
+      <p:sp>
+        <p:nvSpPr>
+          <p:cNvPr id="18" name="Text 16"/>
+          <p:cNvSpPr/>
+          <p:nvPr/>
+        </p:nvSpPr>
+        <p:spPr>
+          <a:xfrm>
+            <a:off x="914400" y="3931920"/>
+            <a:ext cx="7680960" cy="594360"/>
+          </a:xfrm>
+          <a:prstGeom prst="rect">
+            <a:avLst/>
+          </a:prstGeom>
+          <a:noFill/>
+          <a:ln/>
+        </p:spPr>
+        <p:txBody>
+          <a:bodyPr wrap="square" lIns="0" tIns="0" rIns="0" bIns="0" rtlCol="0" anchor="ctr"/>
+          <a:lstStyle/>
+          <a:p>
+            <a:pPr indent="0" marL="0">
+              <a:buNone/>
+            </a:pPr>
+            <a:r>
+              <a:rPr lang="en-US" sz="1300" dirty="0">
+                <a:solidFill>
+                  <a:srgbClr val="C9C7C0"/>
+                </a:solidFill>
+                <a:latin typeface="Calibri" pitchFamily="34" charset="0"/>
+                <a:ea typeface="Calibri" pitchFamily="34" charset="-122"/>
+                <a:cs typeface="Calibri" pitchFamily="34" charset="-120"/>
+              </a:rPr>
+              <a:t>Modelled as marginal; reality showed structural turnout asymmetry across all Muslim-majority clusters.</a:t>
+            </a:r>
+            <a:endParaRPr lang="en-US" sz="1300" dirty="0"/>
+          </a:p>
+        </p:txBody>
+      </p:sp>
+    </p:spTree>
+  </p:cSld>
+  <p:clrMapOvr>
+    <a:masterClrMapping/>
+  </p:clrMapOvr>
+</p:sld>
+</file>
+
+<file path=ppt/slides/slide16.xml><?xml version="1.0" encoding="utf-8"?>
+<p:sld xmlns:a="http://schemas.openxmlformats.org/drawingml/2006/main" xmlns:r="http://schemas.openxmlformats.org/officeDocument/2006/relationships" xmlns:p="http://schemas.openxmlformats.org/presentationml/2006/main">
+  <p:cSld name="Slide 16">
+    <p:bg>
+      <p:bgPr>
+        <a:solidFill>
+          <a:srgbClr val="050505"/>
+        </a:solidFill>
+      </p:bgPr>
+    </p:bg>
+    <p:spTree>
+      <p:nvGrpSpPr>
+        <p:cNvPr id="1" name=""/>
+        <p:cNvGrpSpPr/>
+        <p:nvPr/>
+      </p:nvGrpSpPr>
+      <p:grpSpPr>
+        <a:xfrm>
+          <a:off x="0" y="0"/>
+          <a:ext cx="0" cy="0"/>
+          <a:chOff x="0" y="0"/>
+          <a:chExt cx="0" cy="0"/>
+        </a:xfrm>
+      </p:grpSpPr>
+      <p:sp>
+        <p:nvSpPr>
           <p:cNvPr id="2" name="Text 0"/>
           <p:cNvSpPr/>
           <p:nvPr/>
@@ -8170,7 +9075,7 @@
                 <a:ea typeface="Courier New" pitchFamily="34" charset="-122"/>
                 <a:cs typeface="Courier New" pitchFamily="34" charset="-120"/>
               </a:rPr>
-              <a:t>01 — THE PREDICTED MAP VS THE ACTUAL</a:t>
+              <a:t>03 — 294 ASSEMBLY SEATS  |  PREDICTED WINNER  |  WEST BENGAL 2026</a:t>
             </a:r>
             <a:endParaRPr lang="en-US" sz="900" dirty="0"/>
           </a:p>
@@ -8184,24 +9089,24 @@
         </p:nvSpPr>
         <p:spPr>
           <a:xfrm>
-            <a:off x="457200" y="566928"/>
-            <a:ext cx="7772400" cy="548640"/>
-          </a:xfrm>
-          <a:prstGeom prst="rect">
-            <a:avLst/>
-          </a:prstGeom>
-          <a:noFill/>
-          <a:ln/>
-        </p:spPr>
-        <p:txBody>
-          <a:bodyPr wrap="square" lIns="0" tIns="0" rIns="0" bIns="0" rtlCol="0" anchor="ctr"/>
-          <a:lstStyle/>
-          <a:p>
-            <a:pPr indent="0" marL="0">
-              <a:buNone/>
-            </a:pPr>
-            <a:r>
-              <a:rPr lang="en-US" sz="3200" b="1" dirty="0">
+            <a:off x="365760" y="502920"/>
+            <a:ext cx="8412480" cy="502920"/>
+          </a:xfrm>
+          <a:prstGeom prst="rect">
+            <a:avLst/>
+          </a:prstGeom>
+          <a:noFill/>
+          <a:ln/>
+        </p:spPr>
+        <p:txBody>
+          <a:bodyPr wrap="square" lIns="0" tIns="0" rIns="0" bIns="0" rtlCol="0" anchor="ctr"/>
+          <a:lstStyle/>
+          <a:p>
+            <a:pPr indent="0" marL="0">
+              <a:buNone/>
+            </a:pPr>
+            <a:r>
+              <a:rPr lang="en-US" sz="3600" b="1" dirty="0">
                 <a:solidFill>
                   <a:srgbClr val="E9E6DF"/>
                 </a:solidFill>
@@ -8209,9 +9114,40 @@
                 <a:ea typeface="Arial Narrow" pitchFamily="34" charset="-122"/>
                 <a:cs typeface="Arial Narrow" pitchFamily="34" charset="-120"/>
               </a:rPr>
-              <a:t>Bengal predicted. Bengal voted.</a:t>
-            </a:r>
-            <a:endParaRPr lang="en-US" sz="3200" dirty="0"/>
+              <a:t>TMC holds the</a:t>
+            </a:r>
+            <a:pPr indent="0" marL="0">
+              <a:buNone/>
+            </a:pPr>
+            <a:r>
+              <a:rPr lang="en-US" sz="3600" b="1" dirty="0">
+                <a:solidFill>
+                  <a:srgbClr val="000000"/>
+                </a:solidFill>
+                <a:latin typeface="Arial Narrow" pitchFamily="34" charset="0"/>
+                <a:ea typeface="Arial Narrow" pitchFamily="34" charset="-122"/>
+                <a:cs typeface="Arial Narrow" pitchFamily="34" charset="-120"/>
+              </a:rPr>
+              <a:t> </a:t>
+            </a:r>
+            <a:pPr indent="0" marL="0">
+              <a:buNone/>
+            </a:pPr>
+            <a:pPr indent="0" marL="0">
+              <a:buNone/>
+            </a:pPr>
+            <a:r>
+              <a:rPr lang="en-US" sz="3600" b="1" dirty="0">
+                <a:solidFill>
+                  <a:srgbClr val="A8FF3E"/>
+                </a:solidFill>
+                <a:latin typeface="Arial Narrow" pitchFamily="34" charset="0"/>
+                <a:ea typeface="Arial Narrow" pitchFamily="34" charset="-122"/>
+                <a:cs typeface="Arial Narrow" pitchFamily="34" charset="-120"/>
+              </a:rPr>
+              <a:t>map.</a:t>
+            </a:r>
+            <a:endParaRPr lang="en-US" sz="3600" dirty="0"/>
           </a:p>
         </p:txBody>
       </p:sp>
@@ -8223,24 +9159,24 @@
         </p:nvSpPr>
         <p:spPr>
           <a:xfrm>
-            <a:off x="365760" y="1188720"/>
-            <a:ext cx="4023360" cy="201168"/>
-          </a:xfrm>
-          <a:prstGeom prst="rect">
-            <a:avLst/>
-          </a:prstGeom>
-          <a:noFill/>
-          <a:ln/>
-        </p:spPr>
-        <p:txBody>
-          <a:bodyPr wrap="square" lIns="0" tIns="0" rIns="0" bIns="0" rtlCol="0" anchor="ctr"/>
-          <a:lstStyle/>
-          <a:p>
-            <a:pPr indent="0" marL="0">
-              <a:buNone/>
-            </a:pPr>
-            <a:r>
-              <a:rPr lang="en-US" sz="1000" spc="200" kern="0" dirty="0">
+            <a:off x="365760" y="1097280"/>
+            <a:ext cx="2560320" cy="182880"/>
+          </a:xfrm>
+          <a:prstGeom prst="rect">
+            <a:avLst/>
+          </a:prstGeom>
+          <a:noFill/>
+          <a:ln/>
+        </p:spPr>
+        <p:txBody>
+          <a:bodyPr wrap="square" lIns="0" tIns="0" rIns="0" bIns="0" rtlCol="0" anchor="ctr"/>
+          <a:lstStyle/>
+          <a:p>
+            <a:pPr indent="0" marL="0">
+              <a:buNone/>
+            </a:pPr>
+            <a:r>
+              <a:rPr lang="en-US" sz="900" spc="200" kern="0" dirty="0">
                 <a:solidFill>
                   <a:srgbClr val="9A9997"/>
                 </a:solidFill>
@@ -8248,15 +9184,54 @@
                 <a:ea typeface="Courier New" pitchFamily="34" charset="-122"/>
                 <a:cs typeface="Courier New" pitchFamily="34" charset="-120"/>
               </a:rPr>
-              <a:t>PREDICTED</a:t>
-            </a:r>
-            <a:endParaRPr lang="en-US" sz="1000" dirty="0"/>
+              <a:t>SEAT DISTRIBUTION</a:t>
+            </a:r>
+            <a:endParaRPr lang="en-US" sz="900" dirty="0"/>
+          </a:p>
+        </p:txBody>
+      </p:sp>
+      <p:sp>
+        <p:nvSpPr>
+          <p:cNvPr id="10" name="Text 8"/>
+          <p:cNvSpPr/>
+          <p:nvPr/>
+        </p:nvSpPr>
+        <p:spPr>
+          <a:xfrm>
+            <a:off x="365760" y="1298448"/>
+            <a:ext cx="2560320" cy="310896"/>
+          </a:xfrm>
+          <a:prstGeom prst="rect">
+            <a:avLst/>
+          </a:prstGeom>
+          <a:noFill/>
+          <a:ln/>
+        </p:spPr>
+        <p:txBody>
+          <a:bodyPr wrap="square" lIns="0" tIns="0" rIns="0" bIns="0" rtlCol="0" anchor="ctr"/>
+          <a:lstStyle/>
+          <a:p>
+            <a:pPr indent="0" marL="0">
+              <a:buNone/>
+            </a:pPr>
+            <a:r>
+              <a:rPr lang="en-US" sz="2200" dirty="0">
+                <a:solidFill>
+                  <a:srgbClr val="E9E6DF"/>
+                </a:solidFill>
+                <a:latin typeface="Arial Narrow" pitchFamily="34" charset="0"/>
+                <a:ea typeface="Arial Narrow" pitchFamily="34" charset="-122"/>
+                <a:cs typeface="Arial Narrow" pitchFamily="34" charset="-120"/>
+              </a:rPr>
+              <a:t>294  /  TMC 194</a:t>
+            </a:r>
+            <a:endParaRPr lang="en-US" sz="2200" dirty="0"/>
           </a:p>
         </p:txBody>
       </p:sp>
       <p:pic>
         <p:nvPicPr>
-          <p:cNvPr id="10" name="Image 0" descr="/Users/admin/Documents/Simulatte Projects/PopScale/engineering/maps/wb_predicted_map.png">    </p:cNvPr>
+          <p:cNvPr id="11" name="Image 0" descr="/Users/admin/Documents/Simulatte Projects/PopScale/engineering/maps/wb_predicted_hemicycle.png">    </p:cNvPr>
           <p:cNvPicPr>
             <a:picLocks noChangeAspect="1"/>
           </p:cNvPicPr>
@@ -8269,8 +9244,8 @@
         </p:blipFill>
         <p:spPr>
           <a:xfrm>
-            <a:off x="868680" y="1417320"/>
-            <a:ext cx="3017520" cy="3108960"/>
+            <a:off x="365760" y="1645920"/>
+            <a:ext cx="2560320" cy="1417320"/>
           </a:xfrm>
           <a:prstGeom prst="rect">
             <a:avLst/>
@@ -8279,69 +9254,30 @@
       </p:pic>
       <p:sp>
         <p:nvSpPr>
-          <p:cNvPr id="11" name="Text 8"/>
-          <p:cNvSpPr/>
-          <p:nvPr/>
-        </p:nvSpPr>
-        <p:spPr>
-          <a:xfrm>
-            <a:off x="365760" y="4617720"/>
-            <a:ext cx="4023360" cy="201168"/>
-          </a:xfrm>
-          <a:prstGeom prst="rect">
-            <a:avLst/>
-          </a:prstGeom>
-          <a:noFill/>
-          <a:ln/>
-        </p:spPr>
-        <p:txBody>
-          <a:bodyPr wrap="square" lIns="0" tIns="0" rIns="0" bIns="0" rtlCol="0" anchor="ctr"/>
-          <a:lstStyle/>
-          <a:p>
-            <a:pPr indent="0" marL="0">
-              <a:buNone/>
-            </a:pPr>
-            <a:r>
-              <a:rPr lang="en-US" sz="1000" dirty="0">
-                <a:solidFill>
-                  <a:srgbClr val="A8A6A0"/>
-                </a:solidFill>
-                <a:latin typeface="Calibri" pitchFamily="34" charset="0"/>
-                <a:ea typeface="Calibri" pitchFamily="34" charset="-122"/>
-                <a:cs typeface="Calibri" pitchFamily="34" charset="-120"/>
-              </a:rPr>
-              <a:t>Predicted: TMC majority across 9 clusters · 194 ± 10 seats</a:t>
-            </a:r>
-            <a:endParaRPr lang="en-US" sz="1000" dirty="0"/>
-          </a:p>
-        </p:txBody>
-      </p:sp>
-      <p:sp>
-        <p:nvSpPr>
           <p:cNvPr id="12" name="Text 9"/>
           <p:cNvSpPr/>
           <p:nvPr/>
         </p:nvSpPr>
         <p:spPr>
           <a:xfrm>
-            <a:off x="4754880" y="1188720"/>
-            <a:ext cx="4023360" cy="201168"/>
-          </a:xfrm>
-          <a:prstGeom prst="rect">
-            <a:avLst/>
-          </a:prstGeom>
-          <a:noFill/>
-          <a:ln/>
-        </p:spPr>
-        <p:txBody>
-          <a:bodyPr wrap="square" lIns="0" tIns="0" rIns="0" bIns="0" rtlCol="0" anchor="ctr"/>
-          <a:lstStyle/>
-          <a:p>
-            <a:pPr indent="0" marL="0">
-              <a:buNone/>
-            </a:pPr>
-            <a:r>
-              <a:rPr lang="en-US" sz="1000" spc="200" kern="0" dirty="0">
+            <a:off x="365760" y="3108960"/>
+            <a:ext cx="2560320" cy="182880"/>
+          </a:xfrm>
+          <a:prstGeom prst="rect">
+            <a:avLst/>
+          </a:prstGeom>
+          <a:noFill/>
+          <a:ln/>
+        </p:spPr>
+        <p:txBody>
+          <a:bodyPr wrap="square" lIns="0" tIns="0" rIns="0" bIns="0" rtlCol="0" anchor="ctr"/>
+          <a:lstStyle/>
+          <a:p>
+            <a:pPr indent="0" marL="0">
+              <a:buNone/>
+            </a:pPr>
+            <a:r>
+              <a:rPr lang="en-US" sz="800" spc="150" kern="0" dirty="0">
                 <a:solidFill>
                   <a:srgbClr val="9A9997"/>
                 </a:solidFill>
@@ -8349,15 +9285,466 @@
                 <a:ea typeface="Courier New" pitchFamily="34" charset="-122"/>
                 <a:cs typeface="Courier New" pitchFamily="34" charset="-120"/>
               </a:rPr>
-              <a:t>ACTUAL</a:t>
-            </a:r>
-            <a:endParaRPr lang="en-US" sz="1000" dirty="0"/>
+              <a:t>294 SEATS  ·  148 = MAJORITY</a:t>
+            </a:r>
+            <a:endParaRPr lang="en-US" sz="800" dirty="0"/>
+          </a:p>
+        </p:txBody>
+      </p:sp>
+      <p:sp>
+        <p:nvSpPr>
+          <p:cNvPr id="13" name="Shape 10"/>
+          <p:cNvSpPr/>
+          <p:nvPr/>
+        </p:nvSpPr>
+        <p:spPr>
+          <a:xfrm>
+            <a:off x="365760" y="3429000"/>
+            <a:ext cx="146304" cy="146304"/>
+          </a:xfrm>
+          <a:prstGeom prst="rect">
+            <a:avLst/>
+          </a:prstGeom>
+          <a:solidFill>
+            <a:srgbClr val="3FA34D"/>
+          </a:solidFill>
+          <a:ln w="12700">
+            <a:solidFill>
+              <a:srgbClr val="3FA34D"/>
+            </a:solidFill>
+            <a:prstDash val="solid"/>
+          </a:ln>
+        </p:spPr>
+      </p:sp>
+      <p:sp>
+        <p:nvSpPr>
+          <p:cNvPr id="14" name="Text 11"/>
+          <p:cNvSpPr/>
+          <p:nvPr/>
+        </p:nvSpPr>
+        <p:spPr>
+          <a:xfrm>
+            <a:off x="585216" y="3383280"/>
+            <a:ext cx="1280160" cy="237744"/>
+          </a:xfrm>
+          <a:prstGeom prst="rect">
+            <a:avLst/>
+          </a:prstGeom>
+          <a:noFill/>
+          <a:ln/>
+        </p:spPr>
+        <p:txBody>
+          <a:bodyPr wrap="square" lIns="0" tIns="0" rIns="0" bIns="0" rtlCol="0" anchor="ctr"/>
+          <a:lstStyle/>
+          <a:p>
+            <a:pPr indent="0" marL="0">
+              <a:buNone/>
+            </a:pPr>
+            <a:r>
+              <a:rPr lang="en-US" sz="1300" b="1" dirty="0">
+                <a:solidFill>
+                  <a:srgbClr val="E9E6DF"/>
+                </a:solidFill>
+                <a:latin typeface="Arial Narrow" pitchFamily="34" charset="0"/>
+                <a:ea typeface="Arial Narrow" pitchFamily="34" charset="-122"/>
+                <a:cs typeface="Arial Narrow" pitchFamily="34" charset="-120"/>
+              </a:rPr>
+              <a:t>TMC</a:t>
+            </a:r>
+            <a:endParaRPr lang="en-US" sz="1300" dirty="0"/>
+          </a:p>
+        </p:txBody>
+      </p:sp>
+      <p:sp>
+        <p:nvSpPr>
+          <p:cNvPr id="15" name="Text 12"/>
+          <p:cNvSpPr/>
+          <p:nvPr/>
+        </p:nvSpPr>
+        <p:spPr>
+          <a:xfrm>
+            <a:off x="1828800" y="3383280"/>
+            <a:ext cx="1097280" cy="237744"/>
+          </a:xfrm>
+          <a:prstGeom prst="rect">
+            <a:avLst/>
+          </a:prstGeom>
+          <a:noFill/>
+          <a:ln/>
+        </p:spPr>
+        <p:txBody>
+          <a:bodyPr wrap="square" lIns="0" tIns="0" rIns="0" bIns="0" rtlCol="0" anchor="ctr"/>
+          <a:lstStyle/>
+          <a:p>
+            <a:pPr algn="r" indent="0" marL="0">
+              <a:buNone/>
+            </a:pPr>
+            <a:r>
+              <a:rPr lang="en-US" sz="1300" b="1" dirty="0">
+                <a:solidFill>
+                  <a:srgbClr val="A8FF3E"/>
+                </a:solidFill>
+                <a:latin typeface="Arial Narrow" pitchFamily="34" charset="0"/>
+                <a:ea typeface="Arial Narrow" pitchFamily="34" charset="-122"/>
+                <a:cs typeface="Arial Narrow" pitchFamily="34" charset="-120"/>
+              </a:rPr>
+              <a:t>194</a:t>
+            </a:r>
+            <a:endParaRPr lang="en-US" sz="1300" dirty="0"/>
+          </a:p>
+        </p:txBody>
+      </p:sp>
+      <p:sp>
+        <p:nvSpPr>
+          <p:cNvPr id="16" name="Shape 13"/>
+          <p:cNvSpPr/>
+          <p:nvPr/>
+        </p:nvSpPr>
+        <p:spPr>
+          <a:xfrm>
+            <a:off x="365760" y="3721608"/>
+            <a:ext cx="146304" cy="146304"/>
+          </a:xfrm>
+          <a:prstGeom prst="rect">
+            <a:avLst/>
+          </a:prstGeom>
+          <a:solidFill>
+            <a:srgbClr val="F4A02C"/>
+          </a:solidFill>
+          <a:ln w="12700">
+            <a:solidFill>
+              <a:srgbClr val="F4A02C"/>
+            </a:solidFill>
+            <a:prstDash val="solid"/>
+          </a:ln>
+        </p:spPr>
+      </p:sp>
+      <p:sp>
+        <p:nvSpPr>
+          <p:cNvPr id="17" name="Text 14"/>
+          <p:cNvSpPr/>
+          <p:nvPr/>
+        </p:nvSpPr>
+        <p:spPr>
+          <a:xfrm>
+            <a:off x="585216" y="3675888"/>
+            <a:ext cx="1280160" cy="237744"/>
+          </a:xfrm>
+          <a:prstGeom prst="rect">
+            <a:avLst/>
+          </a:prstGeom>
+          <a:noFill/>
+          <a:ln/>
+        </p:spPr>
+        <p:txBody>
+          <a:bodyPr wrap="square" lIns="0" tIns="0" rIns="0" bIns="0" rtlCol="0" anchor="ctr"/>
+          <a:lstStyle/>
+          <a:p>
+            <a:pPr indent="0" marL="0">
+              <a:buNone/>
+            </a:pPr>
+            <a:r>
+              <a:rPr lang="en-US" sz="1300" b="1" dirty="0">
+                <a:solidFill>
+                  <a:srgbClr val="E9E6DF"/>
+                </a:solidFill>
+                <a:latin typeface="Arial Narrow" pitchFamily="34" charset="0"/>
+                <a:ea typeface="Arial Narrow" pitchFamily="34" charset="-122"/>
+                <a:cs typeface="Arial Narrow" pitchFamily="34" charset="-120"/>
+              </a:rPr>
+              <a:t>BJP</a:t>
+            </a:r>
+            <a:endParaRPr lang="en-US" sz="1300" dirty="0"/>
+          </a:p>
+        </p:txBody>
+      </p:sp>
+      <p:sp>
+        <p:nvSpPr>
+          <p:cNvPr id="18" name="Text 15"/>
+          <p:cNvSpPr/>
+          <p:nvPr/>
+        </p:nvSpPr>
+        <p:spPr>
+          <a:xfrm>
+            <a:off x="1828800" y="3675888"/>
+            <a:ext cx="1097280" cy="237744"/>
+          </a:xfrm>
+          <a:prstGeom prst="rect">
+            <a:avLst/>
+          </a:prstGeom>
+          <a:noFill/>
+          <a:ln/>
+        </p:spPr>
+        <p:txBody>
+          <a:bodyPr wrap="square" lIns="0" tIns="0" rIns="0" bIns="0" rtlCol="0" anchor="ctr"/>
+          <a:lstStyle/>
+          <a:p>
+            <a:pPr algn="r" indent="0" marL="0">
+              <a:buNone/>
+            </a:pPr>
+            <a:r>
+              <a:rPr lang="en-US" sz="1300" b="1" dirty="0">
+                <a:solidFill>
+                  <a:srgbClr val="E9E6DF"/>
+                </a:solidFill>
+                <a:latin typeface="Arial Narrow" pitchFamily="34" charset="0"/>
+                <a:ea typeface="Arial Narrow" pitchFamily="34" charset="-122"/>
+                <a:cs typeface="Arial Narrow" pitchFamily="34" charset="-120"/>
+              </a:rPr>
+              <a:t>45</a:t>
+            </a:r>
+            <a:endParaRPr lang="en-US" sz="1300" dirty="0"/>
+          </a:p>
+        </p:txBody>
+      </p:sp>
+      <p:sp>
+        <p:nvSpPr>
+          <p:cNvPr id="19" name="Shape 16"/>
+          <p:cNvSpPr/>
+          <p:nvPr/>
+        </p:nvSpPr>
+        <p:spPr>
+          <a:xfrm>
+            <a:off x="365760" y="4014216"/>
+            <a:ext cx="146304" cy="146304"/>
+          </a:xfrm>
+          <a:prstGeom prst="rect">
+            <a:avLst/>
+          </a:prstGeom>
+          <a:solidFill>
+            <a:srgbClr val="C44545"/>
+          </a:solidFill>
+          <a:ln w="12700">
+            <a:solidFill>
+              <a:srgbClr val="C44545"/>
+            </a:solidFill>
+            <a:prstDash val="solid"/>
+          </a:ln>
+        </p:spPr>
+      </p:sp>
+      <p:sp>
+        <p:nvSpPr>
+          <p:cNvPr id="20" name="Text 17"/>
+          <p:cNvSpPr/>
+          <p:nvPr/>
+        </p:nvSpPr>
+        <p:spPr>
+          <a:xfrm>
+            <a:off x="585216" y="3968496"/>
+            <a:ext cx="1280160" cy="237744"/>
+          </a:xfrm>
+          <a:prstGeom prst="rect">
+            <a:avLst/>
+          </a:prstGeom>
+          <a:noFill/>
+          <a:ln/>
+        </p:spPr>
+        <p:txBody>
+          <a:bodyPr wrap="square" lIns="0" tIns="0" rIns="0" bIns="0" rtlCol="0" anchor="ctr"/>
+          <a:lstStyle/>
+          <a:p>
+            <a:pPr indent="0" marL="0">
+              <a:buNone/>
+            </a:pPr>
+            <a:r>
+              <a:rPr lang="en-US" sz="1300" b="1" dirty="0">
+                <a:solidFill>
+                  <a:srgbClr val="E9E6DF"/>
+                </a:solidFill>
+                <a:latin typeface="Arial Narrow" pitchFamily="34" charset="0"/>
+                <a:ea typeface="Arial Narrow" pitchFamily="34" charset="-122"/>
+                <a:cs typeface="Arial Narrow" pitchFamily="34" charset="-120"/>
+              </a:rPr>
+              <a:t>INDI</a:t>
+            </a:r>
+            <a:endParaRPr lang="en-US" sz="1300" dirty="0"/>
+          </a:p>
+        </p:txBody>
+      </p:sp>
+      <p:sp>
+        <p:nvSpPr>
+          <p:cNvPr id="21" name="Text 18"/>
+          <p:cNvSpPr/>
+          <p:nvPr/>
+        </p:nvSpPr>
+        <p:spPr>
+          <a:xfrm>
+            <a:off x="1828800" y="3968496"/>
+            <a:ext cx="1097280" cy="237744"/>
+          </a:xfrm>
+          <a:prstGeom prst="rect">
+            <a:avLst/>
+          </a:prstGeom>
+          <a:noFill/>
+          <a:ln/>
+        </p:spPr>
+        <p:txBody>
+          <a:bodyPr wrap="square" lIns="0" tIns="0" rIns="0" bIns="0" rtlCol="0" anchor="ctr"/>
+          <a:lstStyle/>
+          <a:p>
+            <a:pPr algn="r" indent="0" marL="0">
+              <a:buNone/>
+            </a:pPr>
+            <a:r>
+              <a:rPr lang="en-US" sz="1300" b="1" dirty="0">
+                <a:solidFill>
+                  <a:srgbClr val="E9E6DF"/>
+                </a:solidFill>
+                <a:latin typeface="Arial Narrow" pitchFamily="34" charset="0"/>
+                <a:ea typeface="Arial Narrow" pitchFamily="34" charset="-122"/>
+                <a:cs typeface="Arial Narrow" pitchFamily="34" charset="-120"/>
+              </a:rPr>
+              <a:t>50</a:t>
+            </a:r>
+            <a:endParaRPr lang="en-US" sz="1300" dirty="0"/>
+          </a:p>
+        </p:txBody>
+      </p:sp>
+      <p:sp>
+        <p:nvSpPr>
+          <p:cNvPr id="22" name="Shape 19"/>
+          <p:cNvSpPr/>
+          <p:nvPr/>
+        </p:nvSpPr>
+        <p:spPr>
+          <a:xfrm>
+            <a:off x="365760" y="4306824"/>
+            <a:ext cx="146304" cy="146304"/>
+          </a:xfrm>
+          <a:prstGeom prst="rect">
+            <a:avLst/>
+          </a:prstGeom>
+          <a:solidFill>
+            <a:srgbClr val="8A8A8A"/>
+          </a:solidFill>
+          <a:ln w="12700">
+            <a:solidFill>
+              <a:srgbClr val="8A8A8A"/>
+            </a:solidFill>
+            <a:prstDash val="solid"/>
+          </a:ln>
+        </p:spPr>
+      </p:sp>
+      <p:sp>
+        <p:nvSpPr>
+          <p:cNvPr id="23" name="Text 20"/>
+          <p:cNvSpPr/>
+          <p:nvPr/>
+        </p:nvSpPr>
+        <p:spPr>
+          <a:xfrm>
+            <a:off x="585216" y="4261104"/>
+            <a:ext cx="1280160" cy="237744"/>
+          </a:xfrm>
+          <a:prstGeom prst="rect">
+            <a:avLst/>
+          </a:prstGeom>
+          <a:noFill/>
+          <a:ln/>
+        </p:spPr>
+        <p:txBody>
+          <a:bodyPr wrap="square" lIns="0" tIns="0" rIns="0" bIns="0" rtlCol="0" anchor="ctr"/>
+          <a:lstStyle/>
+          <a:p>
+            <a:pPr indent="0" marL="0">
+              <a:buNone/>
+            </a:pPr>
+            <a:r>
+              <a:rPr lang="en-US" sz="1300" b="1" dirty="0">
+                <a:solidFill>
+                  <a:srgbClr val="E9E6DF"/>
+                </a:solidFill>
+                <a:latin typeface="Arial Narrow" pitchFamily="34" charset="0"/>
+                <a:ea typeface="Arial Narrow" pitchFamily="34" charset="-122"/>
+                <a:cs typeface="Arial Narrow" pitchFamily="34" charset="-120"/>
+              </a:rPr>
+              <a:t>OTH</a:t>
+            </a:r>
+            <a:endParaRPr lang="en-US" sz="1300" dirty="0"/>
+          </a:p>
+        </p:txBody>
+      </p:sp>
+      <p:sp>
+        <p:nvSpPr>
+          <p:cNvPr id="24" name="Text 21"/>
+          <p:cNvSpPr/>
+          <p:nvPr/>
+        </p:nvSpPr>
+        <p:spPr>
+          <a:xfrm>
+            <a:off x="1828800" y="4261104"/>
+            <a:ext cx="1097280" cy="237744"/>
+          </a:xfrm>
+          <a:prstGeom prst="rect">
+            <a:avLst/>
+          </a:prstGeom>
+          <a:noFill/>
+          <a:ln/>
+        </p:spPr>
+        <p:txBody>
+          <a:bodyPr wrap="square" lIns="0" tIns="0" rIns="0" bIns="0" rtlCol="0" anchor="ctr"/>
+          <a:lstStyle/>
+          <a:p>
+            <a:pPr algn="r" indent="0" marL="0">
+              <a:buNone/>
+            </a:pPr>
+            <a:r>
+              <a:rPr lang="en-US" sz="1300" b="1" dirty="0">
+                <a:solidFill>
+                  <a:srgbClr val="E9E6DF"/>
+                </a:solidFill>
+                <a:latin typeface="Arial Narrow" pitchFamily="34" charset="0"/>
+                <a:ea typeface="Arial Narrow" pitchFamily="34" charset="-122"/>
+                <a:cs typeface="Arial Narrow" pitchFamily="34" charset="-120"/>
+              </a:rPr>
+              <a:t>5</a:t>
+            </a:r>
+            <a:endParaRPr lang="en-US" sz="1300" dirty="0"/>
+          </a:p>
+        </p:txBody>
+      </p:sp>
+      <p:sp>
+        <p:nvSpPr>
+          <p:cNvPr id="25" name="Text 22"/>
+          <p:cNvSpPr/>
+          <p:nvPr/>
+        </p:nvSpPr>
+        <p:spPr>
+          <a:xfrm>
+            <a:off x="3108960" y="1097280"/>
+            <a:ext cx="3840480" cy="182880"/>
+          </a:xfrm>
+          <a:prstGeom prst="rect">
+            <a:avLst/>
+          </a:prstGeom>
+          <a:noFill/>
+          <a:ln/>
+        </p:spPr>
+        <p:txBody>
+          <a:bodyPr wrap="square" lIns="0" tIns="0" rIns="0" bIns="0" rtlCol="0" anchor="ctr"/>
+          <a:lstStyle/>
+          <a:p>
+            <a:pPr algn="ctr" indent="0" marL="0">
+              <a:buNone/>
+            </a:pPr>
+            <a:r>
+              <a:rPr lang="en-US" sz="900" spc="200" kern="0" dirty="0">
+                <a:solidFill>
+                  <a:srgbClr val="9A9997"/>
+                </a:solidFill>
+                <a:latin typeface="Courier New" pitchFamily="34" charset="0"/>
+                <a:ea typeface="Courier New" pitchFamily="34" charset="-122"/>
+                <a:cs typeface="Courier New" pitchFamily="34" charset="-120"/>
+              </a:rPr>
+              <a:t>WEST BENGAL · 294 ASSEMBLY CONSTITUENCIES</a:t>
+            </a:r>
+            <a:endParaRPr lang="en-US" sz="900" dirty="0"/>
           </a:p>
         </p:txBody>
       </p:sp>
       <p:pic>
         <p:nvPicPr>
-          <p:cNvPr id="13" name="Image 1" descr="/Users/admin/Documents/Simulatte Projects/PopScale/engineering/maps/wb_actual_map.png">    </p:cNvPr>
+          <p:cNvPr id="26" name="Image 1" descr="/Users/admin/Documents/Simulatte Projects/PopScale/engineering/maps/wb_predicted_per_ac.png">    </p:cNvPr>
           <p:cNvPicPr>
             <a:picLocks noChangeAspect="1"/>
           </p:cNvPicPr>
@@ -8370,8 +9757,8 @@
         </p:blipFill>
         <p:spPr>
           <a:xfrm>
-            <a:off x="5257800" y="1417320"/>
-            <a:ext cx="3017520" cy="3108960"/>
+            <a:off x="3108960" y="1280160"/>
+            <a:ext cx="3840480" cy="3611880"/>
           </a:xfrm>
           <a:prstGeom prst="rect">
             <a:avLst/>
@@ -8380,40 +9767,335 @@
       </p:pic>
       <p:sp>
         <p:nvSpPr>
-          <p:cNvPr id="14" name="Text 10"/>
-          <p:cNvSpPr/>
-          <p:nvPr/>
-        </p:nvSpPr>
-        <p:spPr>
-          <a:xfrm>
-            <a:off x="4754880" y="4617720"/>
-            <a:ext cx="4023360" cy="201168"/>
-          </a:xfrm>
-          <a:prstGeom prst="rect">
-            <a:avLst/>
-          </a:prstGeom>
-          <a:noFill/>
-          <a:ln/>
-        </p:spPr>
-        <p:txBody>
-          <a:bodyPr wrap="square" lIns="0" tIns="0" rIns="0" bIns="0" rtlCol="0" anchor="ctr"/>
-          <a:lstStyle/>
-          <a:p>
-            <a:pPr indent="0" marL="0">
-              <a:buNone/>
-            </a:pPr>
-            <a:r>
-              <a:rPr lang="en-US" sz="1000" dirty="0">
-                <a:solidFill>
-                  <a:srgbClr val="A8A6A0"/>
-                </a:solidFill>
-                <a:latin typeface="Calibri" pitchFamily="34" charset="0"/>
-                <a:ea typeface="Calibri" pitchFamily="34" charset="-122"/>
-                <a:cs typeface="Calibri" pitchFamily="34" charset="-120"/>
-              </a:rPr>
-              <a:t>Actual: TMC held 1 cluster · 84 seats</a:t>
-            </a:r>
-            <a:endParaRPr lang="en-US" sz="1000" dirty="0"/>
+          <p:cNvPr id="27" name="Shape 23"/>
+          <p:cNvSpPr/>
+          <p:nvPr/>
+        </p:nvSpPr>
+        <p:spPr>
+          <a:xfrm>
+            <a:off x="7132320" y="1097280"/>
+            <a:ext cx="1737360" cy="1078992"/>
+          </a:xfrm>
+          <a:prstGeom prst="rect">
+            <a:avLst/>
+          </a:prstGeom>
+          <a:solidFill>
+            <a:srgbClr val="050505"/>
+          </a:solidFill>
+          <a:ln w="9525">
+            <a:solidFill>
+              <a:srgbClr val="1A1A1A"/>
+            </a:solidFill>
+            <a:prstDash val="solid"/>
+          </a:ln>
+        </p:spPr>
+      </p:sp>
+      <p:sp>
+        <p:nvSpPr>
+          <p:cNvPr id="28" name="Text 24"/>
+          <p:cNvSpPr/>
+          <p:nvPr/>
+        </p:nvSpPr>
+        <p:spPr>
+          <a:xfrm>
+            <a:off x="7260336" y="1188720"/>
+            <a:ext cx="1554480" cy="182880"/>
+          </a:xfrm>
+          <a:prstGeom prst="rect">
+            <a:avLst/>
+          </a:prstGeom>
+          <a:noFill/>
+          <a:ln/>
+        </p:spPr>
+        <p:txBody>
+          <a:bodyPr wrap="square" lIns="0" tIns="0" rIns="0" bIns="0" rtlCol="0" anchor="ctr"/>
+          <a:lstStyle/>
+          <a:p>
+            <a:pPr indent="0" marL="0">
+              <a:buNone/>
+            </a:pPr>
+            <a:r>
+              <a:rPr lang="en-US" sz="800" spc="150" kern="0" dirty="0">
+                <a:solidFill>
+                  <a:srgbClr val="9A9997"/>
+                </a:solidFill>
+                <a:latin typeface="Courier New" pitchFamily="34" charset="0"/>
+                <a:ea typeface="Courier New" pitchFamily="34" charset="-122"/>
+                <a:cs typeface="Courier New" pitchFamily="34" charset="-120"/>
+              </a:rPr>
+              <a:t>MAJORITY LINE</a:t>
+            </a:r>
+            <a:endParaRPr lang="en-US" sz="800" dirty="0"/>
+          </a:p>
+        </p:txBody>
+      </p:sp>
+      <p:sp>
+        <p:nvSpPr>
+          <p:cNvPr id="29" name="Text 25"/>
+          <p:cNvSpPr/>
+          <p:nvPr/>
+        </p:nvSpPr>
+        <p:spPr>
+          <a:xfrm>
+            <a:off x="7260336" y="1417320"/>
+            <a:ext cx="1554480" cy="640080"/>
+          </a:xfrm>
+          <a:prstGeom prst="rect">
+            <a:avLst/>
+          </a:prstGeom>
+          <a:noFill/>
+          <a:ln/>
+        </p:spPr>
+        <p:txBody>
+          <a:bodyPr wrap="square" lIns="0" tIns="0" rIns="0" bIns="0" rtlCol="0" anchor="ctr"/>
+          <a:lstStyle/>
+          <a:p>
+            <a:pPr indent="0" marL="0">
+              <a:buNone/>
+            </a:pPr>
+            <a:r>
+              <a:rPr lang="en-US" sz="3600" b="1" dirty="0">
+                <a:solidFill>
+                  <a:srgbClr val="E9E6DF"/>
+                </a:solidFill>
+                <a:latin typeface="Arial Narrow" pitchFamily="34" charset="0"/>
+                <a:ea typeface="Arial Narrow" pitchFamily="34" charset="-122"/>
+                <a:cs typeface="Arial Narrow" pitchFamily="34" charset="-120"/>
+              </a:rPr>
+              <a:t>148</a:t>
+            </a:r>
+            <a:endParaRPr lang="en-US" sz="3600" dirty="0"/>
+          </a:p>
+        </p:txBody>
+      </p:sp>
+      <p:sp>
+        <p:nvSpPr>
+          <p:cNvPr id="30" name="Shape 26"/>
+          <p:cNvSpPr/>
+          <p:nvPr/>
+        </p:nvSpPr>
+        <p:spPr>
+          <a:xfrm>
+            <a:off x="7132320" y="2331720"/>
+            <a:ext cx="1737360" cy="1078992"/>
+          </a:xfrm>
+          <a:prstGeom prst="rect">
+            <a:avLst/>
+          </a:prstGeom>
+          <a:solidFill>
+            <a:srgbClr val="050505"/>
+          </a:solidFill>
+          <a:ln w="9525">
+            <a:solidFill>
+              <a:srgbClr val="1A1A1A"/>
+            </a:solidFill>
+            <a:prstDash val="solid"/>
+          </a:ln>
+        </p:spPr>
+      </p:sp>
+      <p:sp>
+        <p:nvSpPr>
+          <p:cNvPr id="31" name="Shape 27"/>
+          <p:cNvSpPr/>
+          <p:nvPr/>
+        </p:nvSpPr>
+        <p:spPr>
+          <a:xfrm>
+            <a:off x="7132320" y="2331720"/>
+            <a:ext cx="54864" cy="1078992"/>
+          </a:xfrm>
+          <a:prstGeom prst="rect">
+            <a:avLst/>
+          </a:prstGeom>
+          <a:solidFill>
+            <a:srgbClr val="A8FF3E"/>
+          </a:solidFill>
+          <a:ln w="12700">
+            <a:solidFill>
+              <a:srgbClr val="A8FF3E"/>
+            </a:solidFill>
+            <a:prstDash val="solid"/>
+          </a:ln>
+        </p:spPr>
+      </p:sp>
+      <p:sp>
+        <p:nvSpPr>
+          <p:cNvPr id="32" name="Text 28"/>
+          <p:cNvSpPr/>
+          <p:nvPr/>
+        </p:nvSpPr>
+        <p:spPr>
+          <a:xfrm>
+            <a:off x="7296912" y="2423160"/>
+            <a:ext cx="1517904" cy="182880"/>
+          </a:xfrm>
+          <a:prstGeom prst="rect">
+            <a:avLst/>
+          </a:prstGeom>
+          <a:noFill/>
+          <a:ln/>
+        </p:spPr>
+        <p:txBody>
+          <a:bodyPr wrap="square" lIns="0" tIns="0" rIns="0" bIns="0" rtlCol="0" anchor="ctr"/>
+          <a:lstStyle/>
+          <a:p>
+            <a:pPr indent="0" marL="0">
+              <a:buNone/>
+            </a:pPr>
+            <a:r>
+              <a:rPr lang="en-US" sz="800" spc="150" kern="0" dirty="0">
+                <a:solidFill>
+                  <a:srgbClr val="9A9997"/>
+                </a:solidFill>
+                <a:latin typeface="Courier New" pitchFamily="34" charset="0"/>
+                <a:ea typeface="Courier New" pitchFamily="34" charset="-122"/>
+                <a:cs typeface="Courier New" pitchFamily="34" charset="-120"/>
+              </a:rPr>
+              <a:t>TMC MARGIN</a:t>
+            </a:r>
+            <a:endParaRPr lang="en-US" sz="800" dirty="0"/>
+          </a:p>
+        </p:txBody>
+      </p:sp>
+      <p:sp>
+        <p:nvSpPr>
+          <p:cNvPr id="33" name="Text 29"/>
+          <p:cNvSpPr/>
+          <p:nvPr/>
+        </p:nvSpPr>
+        <p:spPr>
+          <a:xfrm>
+            <a:off x="7296912" y="2651760"/>
+            <a:ext cx="1517904" cy="640080"/>
+          </a:xfrm>
+          <a:prstGeom prst="rect">
+            <a:avLst/>
+          </a:prstGeom>
+          <a:noFill/>
+          <a:ln/>
+        </p:spPr>
+        <p:txBody>
+          <a:bodyPr wrap="square" lIns="0" tIns="0" rIns="0" bIns="0" rtlCol="0" anchor="ctr"/>
+          <a:lstStyle/>
+          <a:p>
+            <a:pPr indent="0" marL="0">
+              <a:buNone/>
+            </a:pPr>
+            <a:r>
+              <a:rPr lang="en-US" sz="3600" b="1" dirty="0">
+                <a:solidFill>
+                  <a:srgbClr val="A8FF3E"/>
+                </a:solidFill>
+                <a:latin typeface="Arial Narrow" pitchFamily="34" charset="0"/>
+                <a:ea typeface="Arial Narrow" pitchFamily="34" charset="-122"/>
+                <a:cs typeface="Arial Narrow" pitchFamily="34" charset="-120"/>
+              </a:rPr>
+              <a:t>+47</a:t>
+            </a:r>
+            <a:endParaRPr lang="en-US" sz="3600" dirty="0"/>
+          </a:p>
+        </p:txBody>
+      </p:sp>
+      <p:sp>
+        <p:nvSpPr>
+          <p:cNvPr id="34" name="Shape 30"/>
+          <p:cNvSpPr/>
+          <p:nvPr/>
+        </p:nvSpPr>
+        <p:spPr>
+          <a:xfrm>
+            <a:off x="7132320" y="3566160"/>
+            <a:ext cx="1737360" cy="1078992"/>
+          </a:xfrm>
+          <a:prstGeom prst="rect">
+            <a:avLst/>
+          </a:prstGeom>
+          <a:solidFill>
+            <a:srgbClr val="050505"/>
+          </a:solidFill>
+          <a:ln w="9525">
+            <a:solidFill>
+              <a:srgbClr val="1A1A1A"/>
+            </a:solidFill>
+            <a:prstDash val="solid"/>
+          </a:ln>
+        </p:spPr>
+      </p:sp>
+      <p:sp>
+        <p:nvSpPr>
+          <p:cNvPr id="35" name="Text 31"/>
+          <p:cNvSpPr/>
+          <p:nvPr/>
+        </p:nvSpPr>
+        <p:spPr>
+          <a:xfrm>
+            <a:off x="7260336" y="3657600"/>
+            <a:ext cx="1554480" cy="182880"/>
+          </a:xfrm>
+          <a:prstGeom prst="rect">
+            <a:avLst/>
+          </a:prstGeom>
+          <a:noFill/>
+          <a:ln/>
+        </p:spPr>
+        <p:txBody>
+          <a:bodyPr wrap="square" lIns="0" tIns="0" rIns="0" bIns="0" rtlCol="0" anchor="ctr"/>
+          <a:lstStyle/>
+          <a:p>
+            <a:pPr indent="0" marL="0">
+              <a:buNone/>
+            </a:pPr>
+            <a:r>
+              <a:rPr lang="en-US" sz="800" spc="150" kern="0" dirty="0">
+                <a:solidFill>
+                  <a:srgbClr val="9A9997"/>
+                </a:solidFill>
+                <a:latin typeface="Courier New" pitchFamily="34" charset="0"/>
+                <a:ea typeface="Courier New" pitchFamily="34" charset="-122"/>
+                <a:cs typeface="Courier New" pitchFamily="34" charset="-120"/>
+              </a:rPr>
+              <a:t>TMC SEATS / 294</a:t>
+            </a:r>
+            <a:endParaRPr lang="en-US" sz="800" dirty="0"/>
+          </a:p>
+        </p:txBody>
+      </p:sp>
+      <p:sp>
+        <p:nvSpPr>
+          <p:cNvPr id="36" name="Text 32"/>
+          <p:cNvSpPr/>
+          <p:nvPr/>
+        </p:nvSpPr>
+        <p:spPr>
+          <a:xfrm>
+            <a:off x="7260336" y="3886200"/>
+            <a:ext cx="1554480" cy="640080"/>
+          </a:xfrm>
+          <a:prstGeom prst="rect">
+            <a:avLst/>
+          </a:prstGeom>
+          <a:noFill/>
+          <a:ln/>
+        </p:spPr>
+        <p:txBody>
+          <a:bodyPr wrap="square" lIns="0" tIns="0" rIns="0" bIns="0" rtlCol="0" anchor="ctr"/>
+          <a:lstStyle/>
+          <a:p>
+            <a:pPr indent="0" marL="0">
+              <a:buNone/>
+            </a:pPr>
+            <a:r>
+              <a:rPr lang="en-US" sz="3600" b="1" dirty="0">
+                <a:solidFill>
+                  <a:srgbClr val="E9E6DF"/>
+                </a:solidFill>
+                <a:latin typeface="Arial Narrow" pitchFamily="34" charset="0"/>
+                <a:ea typeface="Arial Narrow" pitchFamily="34" charset="-122"/>
+                <a:cs typeface="Arial Narrow" pitchFamily="34" charset="-120"/>
+              </a:rPr>
+              <a:t>194</a:t>
+            </a:r>
+            <a:endParaRPr lang="en-US" sz="3600" dirty="0"/>
           </a:p>
         </p:txBody>
       </p:sp>
@@ -8635,7 +10317,7 @@
                 <a:ea typeface="Courier New" pitchFamily="34" charset="-122"/>
                 <a:cs typeface="Courier New" pitchFamily="34" charset="-120"/>
               </a:rPr>
-              <a:t>ANALYSIS · 01 OF 10 · MATUA BELT (NADIA · N24PGS)</a:t>
+              <a:t>04 — 294 ASSEMBLY SEATS  |  ACTUAL WINNER  |  WEST BENGAL 2026</a:t>
             </a:r>
             <a:endParaRPr lang="en-US" sz="900" dirty="0"/>
           </a:p>
@@ -8649,24 +10331,24 @@
         </p:nvSpPr>
         <p:spPr>
           <a:xfrm>
-            <a:off x="457200" y="566928"/>
-            <a:ext cx="8229600" cy="548640"/>
-          </a:xfrm>
-          <a:prstGeom prst="rect">
-            <a:avLst/>
-          </a:prstGeom>
-          <a:noFill/>
-          <a:ln/>
-        </p:spPr>
-        <p:txBody>
-          <a:bodyPr wrap="square" lIns="0" tIns="0" rIns="0" bIns="0" rtlCol="0" anchor="ctr"/>
-          <a:lstStyle/>
-          <a:p>
-            <a:pPr indent="0" marL="0">
-              <a:buNone/>
-            </a:pPr>
-            <a:r>
-              <a:rPr lang="en-US" sz="3000" b="1" dirty="0">
+            <a:off x="365760" y="502920"/>
+            <a:ext cx="8412480" cy="502920"/>
+          </a:xfrm>
+          <a:prstGeom prst="rect">
+            <a:avLst/>
+          </a:prstGeom>
+          <a:noFill/>
+          <a:ln/>
+        </p:spPr>
+        <p:txBody>
+          <a:bodyPr wrap="square" lIns="0" tIns="0" rIns="0" bIns="0" rtlCol="0" anchor="ctr"/>
+          <a:lstStyle/>
+          <a:p>
+            <a:pPr indent="0" marL="0">
+              <a:buNone/>
+            </a:pPr>
+            <a:r>
+              <a:rPr lang="en-US" sz="3600" b="1" dirty="0">
                 <a:solidFill>
                   <a:srgbClr val="E9E6DF"/>
                 </a:solidFill>
@@ -8674,38 +10356,124 @@
                 <a:ea typeface="Arial Narrow" pitchFamily="34" charset="-122"/>
                 <a:cs typeface="Arial Narrow" pitchFamily="34" charset="-120"/>
               </a:rPr>
-              <a:t>Matua Belt (Nadia · N24Pgs): TMC → BJP</a:t>
-            </a:r>
-            <a:endParaRPr lang="en-US" sz="3000" dirty="0"/>
-          </a:p>
-        </p:txBody>
-      </p:sp>
-      <p:sp>
-        <p:nvSpPr>
-          <p:cNvPr id="9" name="Shape 7"/>
-          <p:cNvSpPr/>
-          <p:nvPr/>
-        </p:nvSpPr>
-        <p:spPr>
-          <a:xfrm>
-            <a:off x="457200" y="1298448"/>
-            <a:ext cx="8229600" cy="0"/>
-          </a:xfrm>
-          <a:prstGeom prst="line">
-            <a:avLst/>
-          </a:prstGeom>
-          <a:noFill/>
-          <a:ln w="6350">
-            <a:solidFill>
-              <a:srgbClr val="9A9997"/>
-            </a:solidFill>
-            <a:prstDash val="solid"/>
-          </a:ln>
-        </p:spPr>
+              <a:t>BJP holds the</a:t>
+            </a:r>
+            <a:pPr indent="0" marL="0">
+              <a:buNone/>
+            </a:pPr>
+            <a:r>
+              <a:rPr lang="en-US" sz="3600" b="1" dirty="0">
+                <a:solidFill>
+                  <a:srgbClr val="000000"/>
+                </a:solidFill>
+                <a:latin typeface="Arial Narrow" pitchFamily="34" charset="0"/>
+                <a:ea typeface="Arial Narrow" pitchFamily="34" charset="-122"/>
+                <a:cs typeface="Arial Narrow" pitchFamily="34" charset="-120"/>
+              </a:rPr>
+              <a:t> </a:t>
+            </a:r>
+            <a:pPr indent="0" marL="0">
+              <a:buNone/>
+            </a:pPr>
+            <a:pPr indent="0" marL="0">
+              <a:buNone/>
+            </a:pPr>
+            <a:r>
+              <a:rPr lang="en-US" sz="3600" b="1" dirty="0">
+                <a:solidFill>
+                  <a:srgbClr val="A8FF3E"/>
+                </a:solidFill>
+                <a:latin typeface="Arial Narrow" pitchFamily="34" charset="0"/>
+                <a:ea typeface="Arial Narrow" pitchFamily="34" charset="-122"/>
+                <a:cs typeface="Arial Narrow" pitchFamily="34" charset="-120"/>
+              </a:rPr>
+              <a:t>map.</a:t>
+            </a:r>
+            <a:endParaRPr lang="en-US" sz="3600" dirty="0"/>
+          </a:p>
+        </p:txBody>
+      </p:sp>
+      <p:sp>
+        <p:nvSpPr>
+          <p:cNvPr id="9" name="Text 7"/>
+          <p:cNvSpPr/>
+          <p:nvPr/>
+        </p:nvSpPr>
+        <p:spPr>
+          <a:xfrm>
+            <a:off x="365760" y="1097280"/>
+            <a:ext cx="2560320" cy="182880"/>
+          </a:xfrm>
+          <a:prstGeom prst="rect">
+            <a:avLst/>
+          </a:prstGeom>
+          <a:noFill/>
+          <a:ln/>
+        </p:spPr>
+        <p:txBody>
+          <a:bodyPr wrap="square" lIns="0" tIns="0" rIns="0" bIns="0" rtlCol="0" anchor="ctr"/>
+          <a:lstStyle/>
+          <a:p>
+            <a:pPr indent="0" marL="0">
+              <a:buNone/>
+            </a:pPr>
+            <a:r>
+              <a:rPr lang="en-US" sz="900" spc="200" kern="0" dirty="0">
+                <a:solidFill>
+                  <a:srgbClr val="9A9997"/>
+                </a:solidFill>
+                <a:latin typeface="Courier New" pitchFamily="34" charset="0"/>
+                <a:ea typeface="Courier New" pitchFamily="34" charset="-122"/>
+                <a:cs typeface="Courier New" pitchFamily="34" charset="-120"/>
+              </a:rPr>
+              <a:t>SEAT DISTRIBUTION</a:t>
+            </a:r>
+            <a:endParaRPr lang="en-US" sz="900" dirty="0"/>
+          </a:p>
+        </p:txBody>
+      </p:sp>
+      <p:sp>
+        <p:nvSpPr>
+          <p:cNvPr id="10" name="Text 8"/>
+          <p:cNvSpPr/>
+          <p:nvPr/>
+        </p:nvSpPr>
+        <p:spPr>
+          <a:xfrm>
+            <a:off x="365760" y="1298448"/>
+            <a:ext cx="2560320" cy="310896"/>
+          </a:xfrm>
+          <a:prstGeom prst="rect">
+            <a:avLst/>
+          </a:prstGeom>
+          <a:noFill/>
+          <a:ln/>
+        </p:spPr>
+        <p:txBody>
+          <a:bodyPr wrap="square" lIns="0" tIns="0" rIns="0" bIns="0" rtlCol="0" anchor="ctr"/>
+          <a:lstStyle/>
+          <a:p>
+            <a:pPr indent="0" marL="0">
+              <a:buNone/>
+            </a:pPr>
+            <a:r>
+              <a:rPr lang="en-US" sz="2200" dirty="0">
+                <a:solidFill>
+                  <a:srgbClr val="E9E6DF"/>
+                </a:solidFill>
+                <a:latin typeface="Arial Narrow" pitchFamily="34" charset="0"/>
+                <a:ea typeface="Arial Narrow" pitchFamily="34" charset="-122"/>
+                <a:cs typeface="Arial Narrow" pitchFamily="34" charset="-120"/>
+              </a:rPr>
+              <a:t>294  /  BJP 203</a:t>
+            </a:r>
+            <a:endParaRPr lang="en-US" sz="2200" dirty="0"/>
+          </a:p>
+        </p:txBody>
       </p:sp>
       <p:pic>
         <p:nvPicPr>
-          <p:cNvPr id="10" name="Image 0" descr="/Users/admin/Documents/Simulatte Projects/PopScale/engineering/maps/wb_cluster_matua_belt.png">    </p:cNvPr>
+          <p:cNvPr id="11" name="Image 0" descr="/Users/admin/Documents/Simulatte Projects/PopScale/engineering/maps/wb_actual_hemicycle.png">    </p:cNvPr>
           <p:cNvPicPr>
             <a:picLocks noChangeAspect="1"/>
           </p:cNvPicPr>
@@ -8718,8 +10486,8 @@
         </p:blipFill>
         <p:spPr>
           <a:xfrm>
-            <a:off x="502920" y="1508760"/>
-            <a:ext cx="3017520" cy="3108960"/>
+            <a:off x="365760" y="1645920"/>
+            <a:ext cx="2560320" cy="1417320"/>
           </a:xfrm>
           <a:prstGeom prst="rect">
             <a:avLst/>
@@ -8728,30 +10496,30 @@
       </p:pic>
       <p:sp>
         <p:nvSpPr>
-          <p:cNvPr id="11" name="Text 8"/>
-          <p:cNvSpPr/>
-          <p:nvPr/>
-        </p:nvSpPr>
-        <p:spPr>
-          <a:xfrm>
-            <a:off x="3749040" y="1554480"/>
-            <a:ext cx="2651760" cy="201168"/>
-          </a:xfrm>
-          <a:prstGeom prst="rect">
-            <a:avLst/>
-          </a:prstGeom>
-          <a:noFill/>
-          <a:ln/>
-        </p:spPr>
-        <p:txBody>
-          <a:bodyPr wrap="square" lIns="0" tIns="0" rIns="0" bIns="0" rtlCol="0" anchor="ctr"/>
-          <a:lstStyle/>
-          <a:p>
-            <a:pPr indent="0" marL="0">
-              <a:buNone/>
-            </a:pPr>
-            <a:r>
-              <a:rPr lang="en-US" sz="900" spc="150" kern="0" dirty="0">
+          <p:cNvPr id="12" name="Text 9"/>
+          <p:cNvSpPr/>
+          <p:nvPr/>
+        </p:nvSpPr>
+        <p:spPr>
+          <a:xfrm>
+            <a:off x="365760" y="3108960"/>
+            <a:ext cx="2560320" cy="182880"/>
+          </a:xfrm>
+          <a:prstGeom prst="rect">
+            <a:avLst/>
+          </a:prstGeom>
+          <a:noFill/>
+          <a:ln/>
+        </p:spPr>
+        <p:txBody>
+          <a:bodyPr wrap="square" lIns="0" tIns="0" rIns="0" bIns="0" rtlCol="0" anchor="ctr"/>
+          <a:lstStyle/>
+          <a:p>
+            <a:pPr indent="0" marL="0">
+              <a:buNone/>
+            </a:pPr>
+            <a:r>
+              <a:rPr lang="en-US" sz="800" spc="150" kern="0" dirty="0">
                 <a:solidFill>
                   <a:srgbClr val="9A9997"/>
                 </a:solidFill>
@@ -8759,116 +10527,450 @@
                 <a:ea typeface="Courier New" pitchFamily="34" charset="-122"/>
                 <a:cs typeface="Courier New" pitchFamily="34" charset="-120"/>
               </a:rPr>
-              <a:t>PREDICTED</a:t>
-            </a:r>
-            <a:endParaRPr lang="en-US" sz="900" dirty="0"/>
-          </a:p>
-        </p:txBody>
-      </p:sp>
-      <p:sp>
-        <p:nvSpPr>
-          <p:cNvPr id="12" name="Text 9"/>
-          <p:cNvSpPr/>
-          <p:nvPr/>
-        </p:nvSpPr>
-        <p:spPr>
-          <a:xfrm>
-            <a:off x="3749040" y="1773936"/>
-            <a:ext cx="2651760" cy="274320"/>
-          </a:xfrm>
-          <a:prstGeom prst="rect">
-            <a:avLst/>
-          </a:prstGeom>
-          <a:noFill/>
-          <a:ln/>
-        </p:spPr>
-        <p:txBody>
-          <a:bodyPr wrap="square" lIns="0" tIns="0" rIns="0" bIns="0" rtlCol="0" anchor="ctr"/>
-          <a:lstStyle/>
-          <a:p>
-            <a:pPr indent="0" marL="0">
-              <a:buNone/>
-            </a:pPr>
-            <a:r>
-              <a:rPr lang="en-US" sz="1400" dirty="0">
+              <a:t>294 SEATS  ·  148 = MAJORITY</a:t>
+            </a:r>
+            <a:endParaRPr lang="en-US" sz="800" dirty="0"/>
+          </a:p>
+        </p:txBody>
+      </p:sp>
+      <p:sp>
+        <p:nvSpPr>
+          <p:cNvPr id="13" name="Shape 10"/>
+          <p:cNvSpPr/>
+          <p:nvPr/>
+        </p:nvSpPr>
+        <p:spPr>
+          <a:xfrm>
+            <a:off x="365760" y="3429000"/>
+            <a:ext cx="146304" cy="146304"/>
+          </a:xfrm>
+          <a:prstGeom prst="rect">
+            <a:avLst/>
+          </a:prstGeom>
+          <a:solidFill>
+            <a:srgbClr val="F4A02C"/>
+          </a:solidFill>
+          <a:ln w="12700">
+            <a:solidFill>
+              <a:srgbClr val="F4A02C"/>
+            </a:solidFill>
+            <a:prstDash val="solid"/>
+          </a:ln>
+        </p:spPr>
+      </p:sp>
+      <p:sp>
+        <p:nvSpPr>
+          <p:cNvPr id="14" name="Text 11"/>
+          <p:cNvSpPr/>
+          <p:nvPr/>
+        </p:nvSpPr>
+        <p:spPr>
+          <a:xfrm>
+            <a:off x="585216" y="3383280"/>
+            <a:ext cx="1280160" cy="237744"/>
+          </a:xfrm>
+          <a:prstGeom prst="rect">
+            <a:avLst/>
+          </a:prstGeom>
+          <a:noFill/>
+          <a:ln/>
+        </p:spPr>
+        <p:txBody>
+          <a:bodyPr wrap="square" lIns="0" tIns="0" rIns="0" bIns="0" rtlCol="0" anchor="ctr"/>
+          <a:lstStyle/>
+          <a:p>
+            <a:pPr indent="0" marL="0">
+              <a:buNone/>
+            </a:pPr>
+            <a:r>
+              <a:rPr lang="en-US" sz="1300" b="1" dirty="0">
                 <a:solidFill>
                   <a:srgbClr val="E9E6DF"/>
                 </a:solidFill>
-                <a:latin typeface="Calibri" pitchFamily="34" charset="0"/>
-                <a:ea typeface="Calibri" pitchFamily="34" charset="-122"/>
-                <a:cs typeface="Calibri" pitchFamily="34" charset="-120"/>
-              </a:rPr>
-              <a:t>TMC 65%</a:t>
-            </a:r>
-            <a:endParaRPr lang="en-US" sz="1400" dirty="0"/>
-          </a:p>
-        </p:txBody>
-      </p:sp>
-      <p:sp>
-        <p:nvSpPr>
-          <p:cNvPr id="13" name="Text 10"/>
-          <p:cNvSpPr/>
-          <p:nvPr/>
-        </p:nvSpPr>
-        <p:spPr>
-          <a:xfrm>
-            <a:off x="3749040" y="2011680"/>
-            <a:ext cx="2651760" cy="274320"/>
-          </a:xfrm>
-          <a:prstGeom prst="rect">
-            <a:avLst/>
-          </a:prstGeom>
-          <a:noFill/>
-          <a:ln/>
-        </p:spPr>
-        <p:txBody>
-          <a:bodyPr wrap="square" lIns="0" tIns="0" rIns="0" bIns="0" rtlCol="0" anchor="ctr"/>
-          <a:lstStyle/>
-          <a:p>
-            <a:pPr indent="0" marL="0">
-              <a:buNone/>
-            </a:pPr>
-            <a:r>
-              <a:rPr lang="en-US" sz="1400" dirty="0">
-                <a:solidFill>
-                  <a:srgbClr val="A8A6A0"/>
-                </a:solidFill>
-                <a:latin typeface="Calibri" pitchFamily="34" charset="0"/>
-                <a:ea typeface="Calibri" pitchFamily="34" charset="-122"/>
-                <a:cs typeface="Calibri" pitchFamily="34" charset="-120"/>
-              </a:rPr>
-              <a:t>BJP 30%</a:t>
-            </a:r>
-            <a:endParaRPr lang="en-US" sz="1400" dirty="0"/>
-          </a:p>
-        </p:txBody>
-      </p:sp>
-      <p:sp>
-        <p:nvSpPr>
-          <p:cNvPr id="14" name="Text 11"/>
-          <p:cNvSpPr/>
-          <p:nvPr/>
-        </p:nvSpPr>
-        <p:spPr>
-          <a:xfrm>
-            <a:off x="3749040" y="2423160"/>
-            <a:ext cx="2651760" cy="201168"/>
-          </a:xfrm>
-          <a:prstGeom prst="rect">
-            <a:avLst/>
-          </a:prstGeom>
-          <a:noFill/>
-          <a:ln/>
-        </p:spPr>
-        <p:txBody>
-          <a:bodyPr wrap="square" lIns="0" tIns="0" rIns="0" bIns="0" rtlCol="0" anchor="ctr"/>
-          <a:lstStyle/>
-          <a:p>
-            <a:pPr indent="0" marL="0">
-              <a:buNone/>
-            </a:pPr>
-            <a:r>
-              <a:rPr lang="en-US" sz="900" spc="150" kern="0" dirty="0">
+                <a:latin typeface="Arial Narrow" pitchFamily="34" charset="0"/>
+                <a:ea typeface="Arial Narrow" pitchFamily="34" charset="-122"/>
+                <a:cs typeface="Arial Narrow" pitchFamily="34" charset="-120"/>
+              </a:rPr>
+              <a:t>BJP</a:t>
+            </a:r>
+            <a:endParaRPr lang="en-US" sz="1300" dirty="0"/>
+          </a:p>
+        </p:txBody>
+      </p:sp>
+      <p:sp>
+        <p:nvSpPr>
+          <p:cNvPr id="15" name="Text 12"/>
+          <p:cNvSpPr/>
+          <p:nvPr/>
+        </p:nvSpPr>
+        <p:spPr>
+          <a:xfrm>
+            <a:off x="1828800" y="3383280"/>
+            <a:ext cx="1097280" cy="237744"/>
+          </a:xfrm>
+          <a:prstGeom prst="rect">
+            <a:avLst/>
+          </a:prstGeom>
+          <a:noFill/>
+          <a:ln/>
+        </p:spPr>
+        <p:txBody>
+          <a:bodyPr wrap="square" lIns="0" tIns="0" rIns="0" bIns="0" rtlCol="0" anchor="ctr"/>
+          <a:lstStyle/>
+          <a:p>
+            <a:pPr algn="r" indent="0" marL="0">
+              <a:buNone/>
+            </a:pPr>
+            <a:r>
+              <a:rPr lang="en-US" sz="1300" b="1" dirty="0">
+                <a:solidFill>
+                  <a:srgbClr val="A8FF3E"/>
+                </a:solidFill>
+                <a:latin typeface="Arial Narrow" pitchFamily="34" charset="0"/>
+                <a:ea typeface="Arial Narrow" pitchFamily="34" charset="-122"/>
+                <a:cs typeface="Arial Narrow" pitchFamily="34" charset="-120"/>
+              </a:rPr>
+              <a:t>203</a:t>
+            </a:r>
+            <a:endParaRPr lang="en-US" sz="1300" dirty="0"/>
+          </a:p>
+        </p:txBody>
+      </p:sp>
+      <p:sp>
+        <p:nvSpPr>
+          <p:cNvPr id="16" name="Shape 13"/>
+          <p:cNvSpPr/>
+          <p:nvPr/>
+        </p:nvSpPr>
+        <p:spPr>
+          <a:xfrm>
+            <a:off x="365760" y="3721608"/>
+            <a:ext cx="146304" cy="146304"/>
+          </a:xfrm>
+          <a:prstGeom prst="rect">
+            <a:avLst/>
+          </a:prstGeom>
+          <a:solidFill>
+            <a:srgbClr val="3FA34D"/>
+          </a:solidFill>
+          <a:ln w="12700">
+            <a:solidFill>
+              <a:srgbClr val="3FA34D"/>
+            </a:solidFill>
+            <a:prstDash val="solid"/>
+          </a:ln>
+        </p:spPr>
+      </p:sp>
+      <p:sp>
+        <p:nvSpPr>
+          <p:cNvPr id="17" name="Text 14"/>
+          <p:cNvSpPr/>
+          <p:nvPr/>
+        </p:nvSpPr>
+        <p:spPr>
+          <a:xfrm>
+            <a:off x="585216" y="3675888"/>
+            <a:ext cx="1280160" cy="237744"/>
+          </a:xfrm>
+          <a:prstGeom prst="rect">
+            <a:avLst/>
+          </a:prstGeom>
+          <a:noFill/>
+          <a:ln/>
+        </p:spPr>
+        <p:txBody>
+          <a:bodyPr wrap="square" lIns="0" tIns="0" rIns="0" bIns="0" rtlCol="0" anchor="ctr"/>
+          <a:lstStyle/>
+          <a:p>
+            <a:pPr indent="0" marL="0">
+              <a:buNone/>
+            </a:pPr>
+            <a:r>
+              <a:rPr lang="en-US" sz="1300" b="1" dirty="0">
+                <a:solidFill>
+                  <a:srgbClr val="E9E6DF"/>
+                </a:solidFill>
+                <a:latin typeface="Arial Narrow" pitchFamily="34" charset="0"/>
+                <a:ea typeface="Arial Narrow" pitchFamily="34" charset="-122"/>
+                <a:cs typeface="Arial Narrow" pitchFamily="34" charset="-120"/>
+              </a:rPr>
+              <a:t>TMC</a:t>
+            </a:r>
+            <a:endParaRPr lang="en-US" sz="1300" dirty="0"/>
+          </a:p>
+        </p:txBody>
+      </p:sp>
+      <p:sp>
+        <p:nvSpPr>
+          <p:cNvPr id="18" name="Text 15"/>
+          <p:cNvSpPr/>
+          <p:nvPr/>
+        </p:nvSpPr>
+        <p:spPr>
+          <a:xfrm>
+            <a:off x="1828800" y="3675888"/>
+            <a:ext cx="1097280" cy="237744"/>
+          </a:xfrm>
+          <a:prstGeom prst="rect">
+            <a:avLst/>
+          </a:prstGeom>
+          <a:noFill/>
+          <a:ln/>
+        </p:spPr>
+        <p:txBody>
+          <a:bodyPr wrap="square" lIns="0" tIns="0" rIns="0" bIns="0" rtlCol="0" anchor="ctr"/>
+          <a:lstStyle/>
+          <a:p>
+            <a:pPr algn="r" indent="0" marL="0">
+              <a:buNone/>
+            </a:pPr>
+            <a:r>
+              <a:rPr lang="en-US" sz="1300" b="1" dirty="0">
+                <a:solidFill>
+                  <a:srgbClr val="E9E6DF"/>
+                </a:solidFill>
+                <a:latin typeface="Arial Narrow" pitchFamily="34" charset="0"/>
+                <a:ea typeface="Arial Narrow" pitchFamily="34" charset="-122"/>
+                <a:cs typeface="Arial Narrow" pitchFamily="34" charset="-120"/>
+              </a:rPr>
+              <a:t>84</a:t>
+            </a:r>
+            <a:endParaRPr lang="en-US" sz="1300" dirty="0"/>
+          </a:p>
+        </p:txBody>
+      </p:sp>
+      <p:sp>
+        <p:nvSpPr>
+          <p:cNvPr id="19" name="Shape 16"/>
+          <p:cNvSpPr/>
+          <p:nvPr/>
+        </p:nvSpPr>
+        <p:spPr>
+          <a:xfrm>
+            <a:off x="365760" y="4014216"/>
+            <a:ext cx="146304" cy="146304"/>
+          </a:xfrm>
+          <a:prstGeom prst="rect">
+            <a:avLst/>
+          </a:prstGeom>
+          <a:solidFill>
+            <a:srgbClr val="C44545"/>
+          </a:solidFill>
+          <a:ln w="12700">
+            <a:solidFill>
+              <a:srgbClr val="C44545"/>
+            </a:solidFill>
+            <a:prstDash val="solid"/>
+          </a:ln>
+        </p:spPr>
+      </p:sp>
+      <p:sp>
+        <p:nvSpPr>
+          <p:cNvPr id="20" name="Text 17"/>
+          <p:cNvSpPr/>
+          <p:nvPr/>
+        </p:nvSpPr>
+        <p:spPr>
+          <a:xfrm>
+            <a:off x="585216" y="3968496"/>
+            <a:ext cx="1280160" cy="237744"/>
+          </a:xfrm>
+          <a:prstGeom prst="rect">
+            <a:avLst/>
+          </a:prstGeom>
+          <a:noFill/>
+          <a:ln/>
+        </p:spPr>
+        <p:txBody>
+          <a:bodyPr wrap="square" lIns="0" tIns="0" rIns="0" bIns="0" rtlCol="0" anchor="ctr"/>
+          <a:lstStyle/>
+          <a:p>
+            <a:pPr indent="0" marL="0">
+              <a:buNone/>
+            </a:pPr>
+            <a:r>
+              <a:rPr lang="en-US" sz="1300" b="1" dirty="0">
+                <a:solidFill>
+                  <a:srgbClr val="E9E6DF"/>
+                </a:solidFill>
+                <a:latin typeface="Arial Narrow" pitchFamily="34" charset="0"/>
+                <a:ea typeface="Arial Narrow" pitchFamily="34" charset="-122"/>
+                <a:cs typeface="Arial Narrow" pitchFamily="34" charset="-120"/>
+              </a:rPr>
+              <a:t>INDI</a:t>
+            </a:r>
+            <a:endParaRPr lang="en-US" sz="1300" dirty="0"/>
+          </a:p>
+        </p:txBody>
+      </p:sp>
+      <p:sp>
+        <p:nvSpPr>
+          <p:cNvPr id="21" name="Text 18"/>
+          <p:cNvSpPr/>
+          <p:nvPr/>
+        </p:nvSpPr>
+        <p:spPr>
+          <a:xfrm>
+            <a:off x="1828800" y="3968496"/>
+            <a:ext cx="1097280" cy="237744"/>
+          </a:xfrm>
+          <a:prstGeom prst="rect">
+            <a:avLst/>
+          </a:prstGeom>
+          <a:noFill/>
+          <a:ln/>
+        </p:spPr>
+        <p:txBody>
+          <a:bodyPr wrap="square" lIns="0" tIns="0" rIns="0" bIns="0" rtlCol="0" anchor="ctr"/>
+          <a:lstStyle/>
+          <a:p>
+            <a:pPr algn="r" indent="0" marL="0">
+              <a:buNone/>
+            </a:pPr>
+            <a:r>
+              <a:rPr lang="en-US" sz="1300" b="1" dirty="0">
+                <a:solidFill>
+                  <a:srgbClr val="E9E6DF"/>
+                </a:solidFill>
+                <a:latin typeface="Arial Narrow" pitchFamily="34" charset="0"/>
+                <a:ea typeface="Arial Narrow" pitchFamily="34" charset="-122"/>
+                <a:cs typeface="Arial Narrow" pitchFamily="34" charset="-120"/>
+              </a:rPr>
+              <a:t>6</a:t>
+            </a:r>
+            <a:endParaRPr lang="en-US" sz="1300" dirty="0"/>
+          </a:p>
+        </p:txBody>
+      </p:sp>
+      <p:sp>
+        <p:nvSpPr>
+          <p:cNvPr id="22" name="Shape 19"/>
+          <p:cNvSpPr/>
+          <p:nvPr/>
+        </p:nvSpPr>
+        <p:spPr>
+          <a:xfrm>
+            <a:off x="365760" y="4306824"/>
+            <a:ext cx="146304" cy="146304"/>
+          </a:xfrm>
+          <a:prstGeom prst="rect">
+            <a:avLst/>
+          </a:prstGeom>
+          <a:solidFill>
+            <a:srgbClr val="8A8A8A"/>
+          </a:solidFill>
+          <a:ln w="12700">
+            <a:solidFill>
+              <a:srgbClr val="8A8A8A"/>
+            </a:solidFill>
+            <a:prstDash val="solid"/>
+          </a:ln>
+        </p:spPr>
+      </p:sp>
+      <p:sp>
+        <p:nvSpPr>
+          <p:cNvPr id="23" name="Text 20"/>
+          <p:cNvSpPr/>
+          <p:nvPr/>
+        </p:nvSpPr>
+        <p:spPr>
+          <a:xfrm>
+            <a:off x="585216" y="4261104"/>
+            <a:ext cx="1280160" cy="237744"/>
+          </a:xfrm>
+          <a:prstGeom prst="rect">
+            <a:avLst/>
+          </a:prstGeom>
+          <a:noFill/>
+          <a:ln/>
+        </p:spPr>
+        <p:txBody>
+          <a:bodyPr wrap="square" lIns="0" tIns="0" rIns="0" bIns="0" rtlCol="0" anchor="ctr"/>
+          <a:lstStyle/>
+          <a:p>
+            <a:pPr indent="0" marL="0">
+              <a:buNone/>
+            </a:pPr>
+            <a:r>
+              <a:rPr lang="en-US" sz="1300" b="1" dirty="0">
+                <a:solidFill>
+                  <a:srgbClr val="E9E6DF"/>
+                </a:solidFill>
+                <a:latin typeface="Arial Narrow" pitchFamily="34" charset="0"/>
+                <a:ea typeface="Arial Narrow" pitchFamily="34" charset="-122"/>
+                <a:cs typeface="Arial Narrow" pitchFamily="34" charset="-120"/>
+              </a:rPr>
+              <a:t>OTH</a:t>
+            </a:r>
+            <a:endParaRPr lang="en-US" sz="1300" dirty="0"/>
+          </a:p>
+        </p:txBody>
+      </p:sp>
+      <p:sp>
+        <p:nvSpPr>
+          <p:cNvPr id="24" name="Text 21"/>
+          <p:cNvSpPr/>
+          <p:nvPr/>
+        </p:nvSpPr>
+        <p:spPr>
+          <a:xfrm>
+            <a:off x="1828800" y="4261104"/>
+            <a:ext cx="1097280" cy="237744"/>
+          </a:xfrm>
+          <a:prstGeom prst="rect">
+            <a:avLst/>
+          </a:prstGeom>
+          <a:noFill/>
+          <a:ln/>
+        </p:spPr>
+        <p:txBody>
+          <a:bodyPr wrap="square" lIns="0" tIns="0" rIns="0" bIns="0" rtlCol="0" anchor="ctr"/>
+          <a:lstStyle/>
+          <a:p>
+            <a:pPr algn="r" indent="0" marL="0">
+              <a:buNone/>
+            </a:pPr>
+            <a:r>
+              <a:rPr lang="en-US" sz="1300" b="1" dirty="0">
+                <a:solidFill>
+                  <a:srgbClr val="E9E6DF"/>
+                </a:solidFill>
+                <a:latin typeface="Arial Narrow" pitchFamily="34" charset="0"/>
+                <a:ea typeface="Arial Narrow" pitchFamily="34" charset="-122"/>
+                <a:cs typeface="Arial Narrow" pitchFamily="34" charset="-120"/>
+              </a:rPr>
+              <a:t>1</a:t>
+            </a:r>
+            <a:endParaRPr lang="en-US" sz="1300" dirty="0"/>
+          </a:p>
+        </p:txBody>
+      </p:sp>
+      <p:sp>
+        <p:nvSpPr>
+          <p:cNvPr id="25" name="Text 22"/>
+          <p:cNvSpPr/>
+          <p:nvPr/>
+        </p:nvSpPr>
+        <p:spPr>
+          <a:xfrm>
+            <a:off x="3108960" y="1097280"/>
+            <a:ext cx="3840480" cy="182880"/>
+          </a:xfrm>
+          <a:prstGeom prst="rect">
+            <a:avLst/>
+          </a:prstGeom>
+          <a:noFill/>
+          <a:ln/>
+        </p:spPr>
+        <p:txBody>
+          <a:bodyPr wrap="square" lIns="0" tIns="0" rIns="0" bIns="0" rtlCol="0" anchor="ctr"/>
+          <a:lstStyle/>
+          <a:p>
+            <a:pPr algn="ctr" indent="0" marL="0">
+              <a:buNone/>
+            </a:pPr>
+            <a:r>
+              <a:rPr lang="en-US" sz="900" spc="200" kern="0" dirty="0">
                 <a:solidFill>
                   <a:srgbClr val="9A9997"/>
                 </a:solidFill>
@@ -8876,116 +10978,86 @@
                 <a:ea typeface="Courier New" pitchFamily="34" charset="-122"/>
                 <a:cs typeface="Courier New" pitchFamily="34" charset="-120"/>
               </a:rPr>
-              <a:t>ACTUAL</a:t>
+              <a:t>WEST BENGAL · 294 ASSEMBLY CONSTITUENCIES</a:t>
             </a:r>
             <a:endParaRPr lang="en-US" sz="900" dirty="0"/>
           </a:p>
         </p:txBody>
       </p:sp>
-      <p:sp>
-        <p:nvSpPr>
-          <p:cNvPr id="15" name="Text 12"/>
-          <p:cNvSpPr/>
-          <p:nvPr/>
-        </p:nvSpPr>
-        <p:spPr>
-          <a:xfrm>
-            <a:off x="3749040" y="2642616"/>
-            <a:ext cx="2651760" cy="274320"/>
-          </a:xfrm>
-          <a:prstGeom prst="rect">
-            <a:avLst/>
-          </a:prstGeom>
-          <a:noFill/>
-          <a:ln/>
-        </p:spPr>
-        <p:txBody>
-          <a:bodyPr wrap="square" lIns="0" tIns="0" rIns="0" bIns="0" rtlCol="0" anchor="ctr"/>
-          <a:lstStyle/>
-          <a:p>
-            <a:pPr indent="0" marL="0">
-              <a:buNone/>
-            </a:pPr>
-            <a:r>
-              <a:rPr lang="en-US" sz="1400" dirty="0">
-                <a:solidFill>
-                  <a:srgbClr val="E9E6DF"/>
-                </a:solidFill>
-                <a:latin typeface="Calibri" pitchFamily="34" charset="0"/>
-                <a:ea typeface="Calibri" pitchFamily="34" charset="-122"/>
-                <a:cs typeface="Calibri" pitchFamily="34" charset="-120"/>
-              </a:rPr>
-              <a:t>TMC 30%</a:t>
-            </a:r>
-            <a:endParaRPr lang="en-US" sz="1400" dirty="0"/>
-          </a:p>
-        </p:txBody>
-      </p:sp>
-      <p:sp>
-        <p:nvSpPr>
-          <p:cNvPr id="16" name="Text 13"/>
-          <p:cNvSpPr/>
-          <p:nvPr/>
-        </p:nvSpPr>
-        <p:spPr>
-          <a:xfrm>
-            <a:off x="3749040" y="2880360"/>
-            <a:ext cx="2651760" cy="274320"/>
-          </a:xfrm>
-          <a:prstGeom prst="rect">
-            <a:avLst/>
-          </a:prstGeom>
-          <a:noFill/>
-          <a:ln/>
-        </p:spPr>
-        <p:txBody>
-          <a:bodyPr wrap="square" lIns="0" tIns="0" rIns="0" bIns="0" rtlCol="0" anchor="ctr"/>
-          <a:lstStyle/>
-          <a:p>
-            <a:pPr indent="0" marL="0">
-              <a:buNone/>
-            </a:pPr>
-            <a:r>
-              <a:rPr lang="en-US" sz="1400" dirty="0">
-                <a:solidFill>
-                  <a:srgbClr val="A8A6A0"/>
-                </a:solidFill>
-                <a:latin typeface="Calibri" pitchFamily="34" charset="0"/>
-                <a:ea typeface="Calibri" pitchFamily="34" charset="-122"/>
-                <a:cs typeface="Calibri" pitchFamily="34" charset="-120"/>
-              </a:rPr>
-              <a:t>BJP 60%</a:t>
-            </a:r>
-            <a:endParaRPr lang="en-US" sz="1400" dirty="0"/>
-          </a:p>
-        </p:txBody>
-      </p:sp>
-      <p:sp>
-        <p:nvSpPr>
-          <p:cNvPr id="17" name="Text 14"/>
-          <p:cNvSpPr/>
-          <p:nvPr/>
-        </p:nvSpPr>
-        <p:spPr>
-          <a:xfrm>
-            <a:off x="3749040" y="3291840"/>
-            <a:ext cx="2651760" cy="201168"/>
-          </a:xfrm>
-          <a:prstGeom prst="rect">
-            <a:avLst/>
-          </a:prstGeom>
-          <a:noFill/>
-          <a:ln/>
-        </p:spPr>
-        <p:txBody>
-          <a:bodyPr wrap="square" lIns="0" tIns="0" rIns="0" bIns="0" rtlCol="0" anchor="ctr"/>
-          <a:lstStyle/>
-          <a:p>
-            <a:pPr indent="0" marL="0">
-              <a:buNone/>
-            </a:pPr>
-            <a:r>
-              <a:rPr lang="en-US" sz="900" spc="150" kern="0" dirty="0">
+      <p:pic>
+        <p:nvPicPr>
+          <p:cNvPr id="26" name="Image 1" descr="/Users/admin/Documents/Simulatte Projects/PopScale/engineering/maps/wb_actual_per_ac.png">    </p:cNvPr>
+          <p:cNvPicPr>
+            <a:picLocks noChangeAspect="1"/>
+          </p:cNvPicPr>
+          <p:nvPr/>
+        </p:nvPicPr>
+        <p:blipFill>
+          <a:blip r:embed="rId2"/>
+          <a:srcRect l="0" r="0" t="0" b="0"/>
+          <a:stretch/>
+        </p:blipFill>
+        <p:spPr>
+          <a:xfrm>
+            <a:off x="3108960" y="1280160"/>
+            <a:ext cx="3840480" cy="3611880"/>
+          </a:xfrm>
+          <a:prstGeom prst="rect">
+            <a:avLst/>
+          </a:prstGeom>
+        </p:spPr>
+      </p:pic>
+      <p:sp>
+        <p:nvSpPr>
+          <p:cNvPr id="27" name="Shape 23"/>
+          <p:cNvSpPr/>
+          <p:nvPr/>
+        </p:nvSpPr>
+        <p:spPr>
+          <a:xfrm>
+            <a:off x="7132320" y="1097280"/>
+            <a:ext cx="1737360" cy="1078992"/>
+          </a:xfrm>
+          <a:prstGeom prst="rect">
+            <a:avLst/>
+          </a:prstGeom>
+          <a:solidFill>
+            <a:srgbClr val="050505"/>
+          </a:solidFill>
+          <a:ln w="9525">
+            <a:solidFill>
+              <a:srgbClr val="1A1A1A"/>
+            </a:solidFill>
+            <a:prstDash val="solid"/>
+          </a:ln>
+        </p:spPr>
+      </p:sp>
+      <p:sp>
+        <p:nvSpPr>
+          <p:cNvPr id="28" name="Text 24"/>
+          <p:cNvSpPr/>
+          <p:nvPr/>
+        </p:nvSpPr>
+        <p:spPr>
+          <a:xfrm>
+            <a:off x="7260336" y="1188720"/>
+            <a:ext cx="1554480" cy="182880"/>
+          </a:xfrm>
+          <a:prstGeom prst="rect">
+            <a:avLst/>
+          </a:prstGeom>
+          <a:noFill/>
+          <a:ln/>
+        </p:spPr>
+        <p:txBody>
+          <a:bodyPr wrap="square" lIns="0" tIns="0" rIns="0" bIns="0" rtlCol="0" anchor="ctr"/>
+          <a:lstStyle/>
+          <a:p>
+            <a:pPr indent="0" marL="0">
+              <a:buNone/>
+            </a:pPr>
+            <a:r>
+              <a:rPr lang="en-US" sz="800" spc="150" kern="0" dirty="0">
                 <a:solidFill>
                   <a:srgbClr val="9A9997"/>
                 </a:solidFill>
@@ -8993,116 +11065,127 @@
                 <a:ea typeface="Courier New" pitchFamily="34" charset="-122"/>
                 <a:cs typeface="Courier New" pitchFamily="34" charset="-120"/>
               </a:rPr>
-              <a:t>SEATS</a:t>
-            </a:r>
-            <a:endParaRPr lang="en-US" sz="900" dirty="0"/>
-          </a:p>
-        </p:txBody>
-      </p:sp>
-      <p:sp>
-        <p:nvSpPr>
-          <p:cNvPr id="18" name="Text 15"/>
-          <p:cNvSpPr/>
-          <p:nvPr/>
-        </p:nvSpPr>
-        <p:spPr>
-          <a:xfrm>
-            <a:off x="3749040" y="3502152"/>
-            <a:ext cx="2651760" cy="237744"/>
-          </a:xfrm>
-          <a:prstGeom prst="rect">
-            <a:avLst/>
-          </a:prstGeom>
-          <a:noFill/>
-          <a:ln/>
-        </p:spPr>
-        <p:txBody>
-          <a:bodyPr wrap="square" lIns="0" tIns="0" rIns="0" bIns="0" rtlCol="0" anchor="ctr"/>
-          <a:lstStyle/>
-          <a:p>
-            <a:pPr indent="0" marL="0">
-              <a:buNone/>
-            </a:pPr>
-            <a:r>
-              <a:rPr lang="en-US" sz="1100" dirty="0">
-                <a:solidFill>
-                  <a:srgbClr val="A8A6A0"/>
-                </a:solidFill>
-                <a:latin typeface="Calibri" pitchFamily="34" charset="0"/>
-                <a:ea typeface="Calibri" pitchFamily="34" charset="-122"/>
-                <a:cs typeface="Calibri" pitchFamily="34" charset="-120"/>
-              </a:rPr>
-              <a:t>Pred: TMC 28 · BJP 12</a:t>
-            </a:r>
-            <a:endParaRPr lang="en-US" sz="1100" dirty="0"/>
-          </a:p>
-        </p:txBody>
-      </p:sp>
-      <p:sp>
-        <p:nvSpPr>
-          <p:cNvPr id="19" name="Text 16"/>
-          <p:cNvSpPr/>
-          <p:nvPr/>
-        </p:nvSpPr>
-        <p:spPr>
-          <a:xfrm>
-            <a:off x="3749040" y="3730752"/>
-            <a:ext cx="2651760" cy="237744"/>
-          </a:xfrm>
-          <a:prstGeom prst="rect">
-            <a:avLst/>
-          </a:prstGeom>
-          <a:noFill/>
-          <a:ln/>
-        </p:spPr>
-        <p:txBody>
-          <a:bodyPr wrap="square" lIns="0" tIns="0" rIns="0" bIns="0" rtlCol="0" anchor="ctr"/>
-          <a:lstStyle/>
-          <a:p>
-            <a:pPr indent="0" marL="0">
-              <a:buNone/>
-            </a:pPr>
-            <a:r>
-              <a:rPr lang="en-US" sz="1100" dirty="0">
-                <a:solidFill>
-                  <a:srgbClr val="A8A6A0"/>
-                </a:solidFill>
-                <a:latin typeface="Calibri" pitchFamily="34" charset="0"/>
-                <a:ea typeface="Calibri" pitchFamily="34" charset="-122"/>
-                <a:cs typeface="Calibri" pitchFamily="34" charset="-120"/>
-              </a:rPr>
-              <a:t>Act:  BJP 33 · TMC 7</a:t>
-            </a:r>
-            <a:endParaRPr lang="en-US" sz="1100" dirty="0"/>
-          </a:p>
-        </p:txBody>
-      </p:sp>
-      <p:sp>
-        <p:nvSpPr>
-          <p:cNvPr id="20" name="Text 17"/>
-          <p:cNvSpPr/>
-          <p:nvPr/>
-        </p:nvSpPr>
-        <p:spPr>
-          <a:xfrm>
-            <a:off x="6583680" y="1554480"/>
-            <a:ext cx="2240280" cy="201168"/>
-          </a:xfrm>
-          <a:prstGeom prst="rect">
-            <a:avLst/>
-          </a:prstGeom>
-          <a:noFill/>
-          <a:ln/>
-        </p:spPr>
-        <p:txBody>
-          <a:bodyPr wrap="square" lIns="0" tIns="0" rIns="0" bIns="0" rtlCol="0" anchor="ctr"/>
-          <a:lstStyle/>
-          <a:p>
-            <a:pPr indent="0" marL="0">
-              <a:buNone/>
-            </a:pPr>
-            <a:r>
-              <a:rPr lang="en-US" sz="900" spc="150" kern="0" dirty="0">
+              <a:t>MAJORITY LINE</a:t>
+            </a:r>
+            <a:endParaRPr lang="en-US" sz="800" dirty="0"/>
+          </a:p>
+        </p:txBody>
+      </p:sp>
+      <p:sp>
+        <p:nvSpPr>
+          <p:cNvPr id="29" name="Text 25"/>
+          <p:cNvSpPr/>
+          <p:nvPr/>
+        </p:nvSpPr>
+        <p:spPr>
+          <a:xfrm>
+            <a:off x="7260336" y="1417320"/>
+            <a:ext cx="1554480" cy="640080"/>
+          </a:xfrm>
+          <a:prstGeom prst="rect">
+            <a:avLst/>
+          </a:prstGeom>
+          <a:noFill/>
+          <a:ln/>
+        </p:spPr>
+        <p:txBody>
+          <a:bodyPr wrap="square" lIns="0" tIns="0" rIns="0" bIns="0" rtlCol="0" anchor="ctr"/>
+          <a:lstStyle/>
+          <a:p>
+            <a:pPr indent="0" marL="0">
+              <a:buNone/>
+            </a:pPr>
+            <a:r>
+              <a:rPr lang="en-US" sz="3600" b="1" dirty="0">
+                <a:solidFill>
+                  <a:srgbClr val="E9E6DF"/>
+                </a:solidFill>
+                <a:latin typeface="Arial Narrow" pitchFamily="34" charset="0"/>
+                <a:ea typeface="Arial Narrow" pitchFamily="34" charset="-122"/>
+                <a:cs typeface="Arial Narrow" pitchFamily="34" charset="-120"/>
+              </a:rPr>
+              <a:t>148</a:t>
+            </a:r>
+            <a:endParaRPr lang="en-US" sz="3600" dirty="0"/>
+          </a:p>
+        </p:txBody>
+      </p:sp>
+      <p:sp>
+        <p:nvSpPr>
+          <p:cNvPr id="30" name="Shape 26"/>
+          <p:cNvSpPr/>
+          <p:nvPr/>
+        </p:nvSpPr>
+        <p:spPr>
+          <a:xfrm>
+            <a:off x="7132320" y="2331720"/>
+            <a:ext cx="1737360" cy="1078992"/>
+          </a:xfrm>
+          <a:prstGeom prst="rect">
+            <a:avLst/>
+          </a:prstGeom>
+          <a:solidFill>
+            <a:srgbClr val="050505"/>
+          </a:solidFill>
+          <a:ln w="9525">
+            <a:solidFill>
+              <a:srgbClr val="1A1A1A"/>
+            </a:solidFill>
+            <a:prstDash val="solid"/>
+          </a:ln>
+        </p:spPr>
+      </p:sp>
+      <p:sp>
+        <p:nvSpPr>
+          <p:cNvPr id="31" name="Shape 27"/>
+          <p:cNvSpPr/>
+          <p:nvPr/>
+        </p:nvSpPr>
+        <p:spPr>
+          <a:xfrm>
+            <a:off x="7132320" y="2331720"/>
+            <a:ext cx="54864" cy="1078992"/>
+          </a:xfrm>
+          <a:prstGeom prst="rect">
+            <a:avLst/>
+          </a:prstGeom>
+          <a:solidFill>
+            <a:srgbClr val="A8FF3E"/>
+          </a:solidFill>
+          <a:ln w="12700">
+            <a:solidFill>
+              <a:srgbClr val="A8FF3E"/>
+            </a:solidFill>
+            <a:prstDash val="solid"/>
+          </a:ln>
+        </p:spPr>
+      </p:sp>
+      <p:sp>
+        <p:nvSpPr>
+          <p:cNvPr id="32" name="Text 28"/>
+          <p:cNvSpPr/>
+          <p:nvPr/>
+        </p:nvSpPr>
+        <p:spPr>
+          <a:xfrm>
+            <a:off x="7296912" y="2423160"/>
+            <a:ext cx="1517904" cy="182880"/>
+          </a:xfrm>
+          <a:prstGeom prst="rect">
+            <a:avLst/>
+          </a:prstGeom>
+          <a:noFill/>
+          <a:ln/>
+        </p:spPr>
+        <p:txBody>
+          <a:bodyPr wrap="square" lIns="0" tIns="0" rIns="0" bIns="0" rtlCol="0" anchor="ctr"/>
+          <a:lstStyle/>
+          <a:p>
+            <a:pPr indent="0" marL="0">
+              <a:buNone/>
+            </a:pPr>
+            <a:r>
+              <a:rPr lang="en-US" sz="800" spc="150" kern="0" dirty="0">
                 <a:solidFill>
                   <a:srgbClr val="9A9997"/>
                 </a:solidFill>
@@ -9110,116 +11193,102 @@
                 <a:ea typeface="Courier New" pitchFamily="34" charset="-122"/>
                 <a:cs typeface="Courier New" pitchFamily="34" charset="-120"/>
               </a:rPr>
-              <a:t>THE FACTOR</a:t>
-            </a:r>
-            <a:endParaRPr lang="en-US" sz="900" dirty="0"/>
-          </a:p>
-        </p:txBody>
-      </p:sp>
-      <p:sp>
-        <p:nvSpPr>
-          <p:cNvPr id="21" name="Text 18"/>
-          <p:cNvSpPr/>
-          <p:nvPr/>
-        </p:nvSpPr>
-        <p:spPr>
-          <a:xfrm>
-            <a:off x="6583680" y="1828800"/>
-            <a:ext cx="2240280" cy="457200"/>
-          </a:xfrm>
-          <a:prstGeom prst="rect">
-            <a:avLst/>
-          </a:prstGeom>
-          <a:noFill/>
-          <a:ln/>
-        </p:spPr>
-        <p:txBody>
-          <a:bodyPr wrap="square" lIns="0" tIns="0" rIns="0" bIns="0" rtlCol="0" anchor="ctr"/>
-          <a:lstStyle/>
-          <a:p>
-            <a:pPr indent="0" marL="0">
-              <a:buNone/>
-            </a:pPr>
-            <a:r>
-              <a:rPr lang="en-US" sz="1400" b="1" dirty="0">
-                <a:solidFill>
-                  <a:srgbClr val="E9E6DF"/>
-                </a:solidFill>
-                <a:latin typeface="Calibri" pitchFamily="34" charset="0"/>
-                <a:ea typeface="Calibri" pitchFamily="34" charset="-122"/>
-                <a:cs typeface="Calibri" pitchFamily="34" charset="-120"/>
-              </a:rPr>
-              <a:t>Reverse CAA swing.</a:t>
-            </a:r>
-            <a:endParaRPr lang="en-US" sz="1400" dirty="0"/>
-          </a:p>
-        </p:txBody>
-      </p:sp>
-      <p:sp>
-        <p:nvSpPr>
-          <p:cNvPr id="22" name="Text 19"/>
-          <p:cNvSpPr/>
-          <p:nvPr/>
-        </p:nvSpPr>
-        <p:spPr>
-          <a:xfrm>
-            <a:off x="6583680" y="2423160"/>
-            <a:ext cx="2240280" cy="2011680"/>
-          </a:xfrm>
-          <a:prstGeom prst="rect">
-            <a:avLst/>
-          </a:prstGeom>
-          <a:noFill/>
-          <a:ln/>
-        </p:spPr>
-        <p:txBody>
-          <a:bodyPr wrap="square" lIns="0" tIns="0" rIns="0" bIns="0" rtlCol="0" anchor="ctr"/>
-          <a:lstStyle/>
-          <a:p>
-            <a:pPr indent="0" marL="0">
-              <a:buNone/>
-            </a:pPr>
-            <a:r>
-              <a:rPr lang="en-US" sz="1200" dirty="0">
-                <a:solidFill>
-                  <a:srgbClr val="C9C7C0"/>
-                </a:solidFill>
-                <a:latin typeface="Calibri" pitchFamily="34" charset="0"/>
-                <a:ea typeface="Calibri" pitchFamily="34" charset="-122"/>
-                <a:cs typeface="Calibri" pitchFamily="34" charset="-120"/>
-              </a:rPr>
-              <a:t>Matua identification with BJP's CAA delivery, not the modelled backlash.</a:t>
-            </a:r>
-            <a:endParaRPr lang="en-US" sz="1200" dirty="0"/>
-          </a:p>
-        </p:txBody>
-      </p:sp>
-      <p:sp>
-        <p:nvSpPr>
-          <p:cNvPr id="23" name="Text 20"/>
-          <p:cNvSpPr/>
-          <p:nvPr/>
-        </p:nvSpPr>
-        <p:spPr>
-          <a:xfrm>
-            <a:off x="6583680" y="4160520"/>
-            <a:ext cx="2240280" cy="274320"/>
-          </a:xfrm>
-          <a:prstGeom prst="rect">
-            <a:avLst/>
-          </a:prstGeom>
-          <a:noFill/>
-          <a:ln/>
-        </p:spPr>
-        <p:txBody>
-          <a:bodyPr wrap="square" lIns="0" tIns="0" rIns="0" bIns="0" rtlCol="0" anchor="ctr"/>
-          <a:lstStyle/>
-          <a:p>
-            <a:pPr indent="0" marL="0">
-              <a:buNone/>
-            </a:pPr>
-            <a:r>
-              <a:rPr lang="en-US" sz="1000" spc="150" kern="0" dirty="0">
+              <a:t>BJP MARGIN</a:t>
+            </a:r>
+            <a:endParaRPr lang="en-US" sz="800" dirty="0"/>
+          </a:p>
+        </p:txBody>
+      </p:sp>
+      <p:sp>
+        <p:nvSpPr>
+          <p:cNvPr id="33" name="Text 29"/>
+          <p:cNvSpPr/>
+          <p:nvPr/>
+        </p:nvSpPr>
+        <p:spPr>
+          <a:xfrm>
+            <a:off x="7296912" y="2651760"/>
+            <a:ext cx="1517904" cy="640080"/>
+          </a:xfrm>
+          <a:prstGeom prst="rect">
+            <a:avLst/>
+          </a:prstGeom>
+          <a:noFill/>
+          <a:ln/>
+        </p:spPr>
+        <p:txBody>
+          <a:bodyPr wrap="square" lIns="0" tIns="0" rIns="0" bIns="0" rtlCol="0" anchor="ctr"/>
+          <a:lstStyle/>
+          <a:p>
+            <a:pPr indent="0" marL="0">
+              <a:buNone/>
+            </a:pPr>
+            <a:r>
+              <a:rPr lang="en-US" sz="3600" b="1" dirty="0">
+                <a:solidFill>
+                  <a:srgbClr val="A8FF3E"/>
+                </a:solidFill>
+                <a:latin typeface="Arial Narrow" pitchFamily="34" charset="0"/>
+                <a:ea typeface="Arial Narrow" pitchFamily="34" charset="-122"/>
+                <a:cs typeface="Arial Narrow" pitchFamily="34" charset="-120"/>
+              </a:rPr>
+              <a:t>+55</a:t>
+            </a:r>
+            <a:endParaRPr lang="en-US" sz="3600" dirty="0"/>
+          </a:p>
+        </p:txBody>
+      </p:sp>
+      <p:sp>
+        <p:nvSpPr>
+          <p:cNvPr id="34" name="Shape 30"/>
+          <p:cNvSpPr/>
+          <p:nvPr/>
+        </p:nvSpPr>
+        <p:spPr>
+          <a:xfrm>
+            <a:off x="7132320" y="3566160"/>
+            <a:ext cx="1737360" cy="1078992"/>
+          </a:xfrm>
+          <a:prstGeom prst="rect">
+            <a:avLst/>
+          </a:prstGeom>
+          <a:solidFill>
+            <a:srgbClr val="050505"/>
+          </a:solidFill>
+          <a:ln w="9525">
+            <a:solidFill>
+              <a:srgbClr val="1A1A1A"/>
+            </a:solidFill>
+            <a:prstDash val="solid"/>
+          </a:ln>
+        </p:spPr>
+      </p:sp>
+      <p:sp>
+        <p:nvSpPr>
+          <p:cNvPr id="35" name="Text 31"/>
+          <p:cNvSpPr/>
+          <p:nvPr/>
+        </p:nvSpPr>
+        <p:spPr>
+          <a:xfrm>
+            <a:off x="7260336" y="3657600"/>
+            <a:ext cx="1554480" cy="182880"/>
+          </a:xfrm>
+          <a:prstGeom prst="rect">
+            <a:avLst/>
+          </a:prstGeom>
+          <a:noFill/>
+          <a:ln/>
+        </p:spPr>
+        <p:txBody>
+          <a:bodyPr wrap="square" lIns="0" tIns="0" rIns="0" bIns="0" rtlCol="0" anchor="ctr"/>
+          <a:lstStyle/>
+          <a:p>
+            <a:pPr indent="0" marL="0">
+              <a:buNone/>
+            </a:pPr>
+            <a:r>
+              <a:rPr lang="en-US" sz="800" spc="150" kern="0" dirty="0">
                 <a:solidFill>
                   <a:srgbClr val="9A9997"/>
                 </a:solidFill>
@@ -9227,9 +11296,48 @@
                 <a:ea typeface="Courier New" pitchFamily="34" charset="-122"/>
                 <a:cs typeface="Courier New" pitchFamily="34" charset="-120"/>
               </a:rPr>
-              <a:t>40 SEATS</a:t>
-            </a:r>
-            <a:endParaRPr lang="en-US" sz="1000" dirty="0"/>
+              <a:t>BJP SEATS / 294</a:t>
+            </a:r>
+            <a:endParaRPr lang="en-US" sz="800" dirty="0"/>
+          </a:p>
+        </p:txBody>
+      </p:sp>
+      <p:sp>
+        <p:nvSpPr>
+          <p:cNvPr id="36" name="Text 32"/>
+          <p:cNvSpPr/>
+          <p:nvPr/>
+        </p:nvSpPr>
+        <p:spPr>
+          <a:xfrm>
+            <a:off x="7260336" y="3886200"/>
+            <a:ext cx="1554480" cy="640080"/>
+          </a:xfrm>
+          <a:prstGeom prst="rect">
+            <a:avLst/>
+          </a:prstGeom>
+          <a:noFill/>
+          <a:ln/>
+        </p:spPr>
+        <p:txBody>
+          <a:bodyPr wrap="square" lIns="0" tIns="0" rIns="0" bIns="0" rtlCol="0" anchor="ctr"/>
+          <a:lstStyle/>
+          <a:p>
+            <a:pPr indent="0" marL="0">
+              <a:buNone/>
+            </a:pPr>
+            <a:r>
+              <a:rPr lang="en-US" sz="3600" b="1" dirty="0">
+                <a:solidFill>
+                  <a:srgbClr val="E9E6DF"/>
+                </a:solidFill>
+                <a:latin typeface="Arial Narrow" pitchFamily="34" charset="0"/>
+                <a:ea typeface="Arial Narrow" pitchFamily="34" charset="-122"/>
+                <a:cs typeface="Arial Narrow" pitchFamily="34" charset="-120"/>
+              </a:rPr>
+              <a:t>203</a:t>
+            </a:r>
+            <a:endParaRPr lang="en-US" sz="3600" dirty="0"/>
           </a:p>
         </p:txBody>
       </p:sp>
@@ -9451,7 +11559,7 @@
                 <a:ea typeface="Courier New" pitchFamily="34" charset="-122"/>
                 <a:cs typeface="Courier New" pitchFamily="34" charset="-120"/>
               </a:rPr>
-              <a:t>ANALYSIS · 02 OF 10 · PRESIDENCY SUBURBS</a:t>
+              <a:t>ANALYSIS · 01 OF 10 · MATUA BELT (NADIA · N24PGS)</a:t>
             </a:r>
             <a:endParaRPr lang="en-US" sz="900" dirty="0"/>
           </a:p>
@@ -9490,7 +11598,7 @@
                 <a:ea typeface="Arial Narrow" pitchFamily="34" charset="-122"/>
                 <a:cs typeface="Arial Narrow" pitchFamily="34" charset="-120"/>
               </a:rPr>
-              <a:t>Presidency Suburbs: TMC → BJP</a:t>
+              <a:t>Matua Belt (Nadia · N24Pgs): TMC → BJP</a:t>
             </a:r>
             <a:endParaRPr lang="en-US" sz="3000" dirty="0"/>
           </a:p>
@@ -9521,7 +11629,7 @@
       </p:sp>
       <p:pic>
         <p:nvPicPr>
-          <p:cNvPr id="10" name="Image 0" descr="/Users/admin/Documents/Simulatte Projects/PopScale/engineering/maps/wb_cluster_presidency_suburbs.png">    </p:cNvPr>
+          <p:cNvPr id="10" name="Image 0" descr="/Users/admin/Documents/Simulatte Projects/PopScale/engineering/maps/wb_cluster_matua_belt.png">    </p:cNvPr>
           <p:cNvPicPr>
             <a:picLocks noChangeAspect="1"/>
           </p:cNvPicPr>
@@ -9614,7 +11722,7 @@
                 <a:ea typeface="Calibri" pitchFamily="34" charset="-122"/>
                 <a:cs typeface="Calibri" pitchFamily="34" charset="-120"/>
               </a:rPr>
-              <a:t>TMC 52%</a:t>
+              <a:t>TMC 65%</a:t>
             </a:r>
             <a:endParaRPr lang="en-US" sz="1400" dirty="0"/>
           </a:p>
@@ -9731,7 +11839,7 @@
                 <a:ea typeface="Calibri" pitchFamily="34" charset="-122"/>
                 <a:cs typeface="Calibri" pitchFamily="34" charset="-120"/>
               </a:rPr>
-              <a:t>TMC 36%</a:t>
+              <a:t>TMC 30%</a:t>
             </a:r>
             <a:endParaRPr lang="en-US" sz="1400" dirty="0"/>
           </a:p>
@@ -9770,7 +11878,7 @@
                 <a:ea typeface="Calibri" pitchFamily="34" charset="-122"/>
                 <a:cs typeface="Calibri" pitchFamily="34" charset="-120"/>
               </a:rPr>
-              <a:t>BJP 50%</a:t>
+              <a:t>BJP 60%</a:t>
             </a:r>
             <a:endParaRPr lang="en-US" sz="1400" dirty="0"/>
           </a:p>
@@ -9887,7 +11995,7 @@
                 <a:ea typeface="Calibri" pitchFamily="34" charset="-122"/>
                 <a:cs typeface="Calibri" pitchFamily="34" charset="-120"/>
               </a:rPr>
-              <a:t>Act:  BJP 30 · TMC 10</a:t>
+              <a:t>Act:  BJP 33 · TMC 7</a:t>
             </a:r>
             <a:endParaRPr lang="en-US" sz="1100" dirty="0"/>
           </a:p>
@@ -9965,7 +12073,7 @@
                 <a:ea typeface="Calibri" pitchFamily="34" charset="-122"/>
                 <a:cs typeface="Calibri" pitchFamily="34" charset="-120"/>
               </a:rPr>
-              <a:t>Hindu consolidation.</a:t>
+              <a:t>Reverse CAA swing.</a:t>
             </a:r>
             <a:endParaRPr lang="en-US" sz="1400" dirty="0"/>
           </a:p>
@@ -10004,7 +12112,7 @@
                 <a:ea typeface="Calibri" pitchFamily="34" charset="-122"/>
                 <a:cs typeface="Calibri" pitchFamily="34" charset="-120"/>
               </a:rPr>
-              <a:t>Unified BJP voteshare across heterogeneous suburbs.</a:t>
+              <a:t>Matua identification with BJP's CAA delivery, not the modelled backlash.</a:t>
             </a:r>
             <a:endParaRPr lang="en-US" sz="1200" dirty="0"/>
           </a:p>
@@ -10267,7 +12375,7 @@
                 <a:ea typeface="Courier New" pitchFamily="34" charset="-122"/>
                 <a:cs typeface="Courier New" pitchFamily="34" charset="-120"/>
               </a:rPr>
-              <a:t>ANALYSIS · 03 OF 10 · JUNGLE MAHAL</a:t>
+              <a:t>ANALYSIS · 02 OF 10 · PRESIDENCY SUBURBS</a:t>
             </a:r>
             <a:endParaRPr lang="en-US" sz="900" dirty="0"/>
           </a:p>
@@ -10306,7 +12414,7 @@
                 <a:ea typeface="Arial Narrow" pitchFamily="34" charset="-122"/>
                 <a:cs typeface="Arial Narrow" pitchFamily="34" charset="-120"/>
               </a:rPr>
-              <a:t>Jungle Mahal: TMC → BJP</a:t>
+              <a:t>Presidency Suburbs: TMC → BJP</a:t>
             </a:r>
             <a:endParaRPr lang="en-US" sz="3000" dirty="0"/>
           </a:p>
@@ -10337,7 +12445,7 @@
       </p:sp>
       <p:pic>
         <p:nvPicPr>
-          <p:cNvPr id="10" name="Image 0" descr="/Users/admin/Documents/Simulatte Projects/PopScale/engineering/maps/wb_cluster_jungle_mahal.png">    </p:cNvPr>
+          <p:cNvPr id="10" name="Image 0" descr="/Users/admin/Documents/Simulatte Projects/PopScale/engineering/maps/wb_cluster_presidency_suburbs.png">    </p:cNvPr>
           <p:cNvPicPr>
             <a:picLocks noChangeAspect="1"/>
           </p:cNvPicPr>
@@ -10430,7 +12538,7 @@
                 <a:ea typeface="Calibri" pitchFamily="34" charset="-122"/>
                 <a:cs typeface="Calibri" pitchFamily="34" charset="-120"/>
               </a:rPr>
-              <a:t>TMC 58%</a:t>
+              <a:t>TMC 52%</a:t>
             </a:r>
             <a:endParaRPr lang="en-US" sz="1400" dirty="0"/>
           </a:p>
@@ -10469,7 +12577,7 @@
                 <a:ea typeface="Calibri" pitchFamily="34" charset="-122"/>
                 <a:cs typeface="Calibri" pitchFamily="34" charset="-120"/>
               </a:rPr>
-              <a:t>BJP 28%</a:t>
+              <a:t>BJP 30%</a:t>
             </a:r>
             <a:endParaRPr lang="en-US" sz="1400" dirty="0"/>
           </a:p>
@@ -10547,7 +12655,7 @@
                 <a:ea typeface="Calibri" pitchFamily="34" charset="-122"/>
                 <a:cs typeface="Calibri" pitchFamily="34" charset="-120"/>
               </a:rPr>
-              <a:t>TMC 32%</a:t>
+              <a:t>TMC 36%</a:t>
             </a:r>
             <a:endParaRPr lang="en-US" sz="1400" dirty="0"/>
           </a:p>
@@ -10586,7 +12694,7 @@
                 <a:ea typeface="Calibri" pitchFamily="34" charset="-122"/>
                 <a:cs typeface="Calibri" pitchFamily="34" charset="-120"/>
               </a:rPr>
-              <a:t>BJP 56%</a:t>
+              <a:t>BJP 50%</a:t>
             </a:r>
             <a:endParaRPr lang="en-US" sz="1400" dirty="0"/>
           </a:p>
@@ -10664,7 +12772,7 @@
                 <a:ea typeface="Calibri" pitchFamily="34" charset="-122"/>
                 <a:cs typeface="Calibri" pitchFamily="34" charset="-120"/>
               </a:rPr>
-              <a:t>Pred: TMC 38 · BJP 12</a:t>
+              <a:t>Pred: TMC 28 · BJP 12</a:t>
             </a:r>
             <a:endParaRPr lang="en-US" sz="1100" dirty="0"/>
           </a:p>
@@ -10703,7 +12811,7 @@
                 <a:ea typeface="Calibri" pitchFamily="34" charset="-122"/>
                 <a:cs typeface="Calibri" pitchFamily="34" charset="-120"/>
               </a:rPr>
-              <a:t>Act:  BJP 38 · TMC 12</a:t>
+              <a:t>Act:  BJP 30 · TMC 10</a:t>
             </a:r>
             <a:endParaRPr lang="en-US" sz="1100" dirty="0"/>
           </a:p>
@@ -10781,7 +12889,7 @@
                 <a:ea typeface="Calibri" pitchFamily="34" charset="-122"/>
                 <a:cs typeface="Calibri" pitchFamily="34" charset="-120"/>
               </a:rPr>
-              <a:t>Sustained BJP organisation.</a:t>
+              <a:t>Hindu consolidation.</a:t>
             </a:r>
             <a:endParaRPr lang="en-US" sz="1400" dirty="0"/>
           </a:p>
@@ -10820,7 +12928,7 @@
                 <a:ea typeface="Calibri" pitchFamily="34" charset="-122"/>
                 <a:cs typeface="Calibri" pitchFamily="34" charset="-120"/>
               </a:rPr>
-              <a:t>2021 anti-BJP correction did not stick; rural welfare delivery held.</a:t>
+              <a:t>Unified BJP voteshare across heterogeneous suburbs.</a:t>
             </a:r>
             <a:endParaRPr lang="en-US" sz="1200" dirty="0"/>
           </a:p>
@@ -10859,7 +12967,7 @@
                 <a:ea typeface="Courier New" pitchFamily="34" charset="-122"/>
                 <a:cs typeface="Courier New" pitchFamily="34" charset="-120"/>
               </a:rPr>
-              <a:t>50 SEATS</a:t>
+              <a:t>40 SEATS</a:t>
             </a:r>
             <a:endParaRPr lang="en-US" sz="1000" dirty="0"/>
           </a:p>
@@ -11083,7 +13191,7 @@
                 <a:ea typeface="Courier New" pitchFamily="34" charset="-122"/>
                 <a:cs typeface="Courier New" pitchFamily="34" charset="-120"/>
               </a:rPr>
-              <a:t>ANALYSIS · 04 OF 10 · SOUTH RURAL</a:t>
+              <a:t>ANALYSIS · 03 OF 10 · JUNGLE MAHAL</a:t>
             </a:r>
             <a:endParaRPr lang="en-US" sz="900" dirty="0"/>
           </a:p>
@@ -11122,7 +13230,7 @@
                 <a:ea typeface="Arial Narrow" pitchFamily="34" charset="-122"/>
                 <a:cs typeface="Arial Narrow" pitchFamily="34" charset="-120"/>
               </a:rPr>
-              <a:t>South Rural: TMC → BJP</a:t>
+              <a:t>Jungle Mahal: TMC → BJP</a:t>
             </a:r>
             <a:endParaRPr lang="en-US" sz="3000" dirty="0"/>
           </a:p>
@@ -11153,7 +13261,7 @@
       </p:sp>
       <p:pic>
         <p:nvPicPr>
-          <p:cNvPr id="10" name="Image 0" descr="/Users/admin/Documents/Simulatte Projects/PopScale/engineering/maps/wb_cluster_south_rural.png">    </p:cNvPr>
+          <p:cNvPr id="10" name="Image 0" descr="/Users/admin/Documents/Simulatte Projects/PopScale/engineering/maps/wb_cluster_jungle_mahal.png">    </p:cNvPr>
           <p:cNvPicPr>
             <a:picLocks noChangeAspect="1"/>
           </p:cNvPicPr>
@@ -11246,7 +13354,7 @@
                 <a:ea typeface="Calibri" pitchFamily="34" charset="-122"/>
                 <a:cs typeface="Calibri" pitchFamily="34" charset="-120"/>
               </a:rPr>
-              <a:t>TMC 55%</a:t>
+              <a:t>TMC 58%</a:t>
             </a:r>
             <a:endParaRPr lang="en-US" sz="1400" dirty="0"/>
           </a:p>
@@ -11285,7 +13393,7 @@
                 <a:ea typeface="Calibri" pitchFamily="34" charset="-122"/>
                 <a:cs typeface="Calibri" pitchFamily="34" charset="-120"/>
               </a:rPr>
-              <a:t>BJP 32%</a:t>
+              <a:t>BJP 28%</a:t>
             </a:r>
             <a:endParaRPr lang="en-US" sz="1400" dirty="0"/>
           </a:p>
@@ -11363,7 +13471,7 @@
                 <a:ea typeface="Calibri" pitchFamily="34" charset="-122"/>
                 <a:cs typeface="Calibri" pitchFamily="34" charset="-120"/>
               </a:rPr>
-              <a:t>TMC 35%</a:t>
+              <a:t>TMC 32%</a:t>
             </a:r>
             <a:endParaRPr lang="en-US" sz="1400" dirty="0"/>
           </a:p>
@@ -11402,7 +13510,7 @@
                 <a:ea typeface="Calibri" pitchFamily="34" charset="-122"/>
                 <a:cs typeface="Calibri" pitchFamily="34" charset="-120"/>
               </a:rPr>
-              <a:t>BJP 52%</a:t>
+              <a:t>BJP 56%</a:t>
             </a:r>
             <a:endParaRPr lang="en-US" sz="1400" dirty="0"/>
           </a:p>
@@ -11480,7 +13588,7 @@
                 <a:ea typeface="Calibri" pitchFamily="34" charset="-122"/>
                 <a:cs typeface="Calibri" pitchFamily="34" charset="-120"/>
               </a:rPr>
-              <a:t>Pred: TMC 25 · BJP 10</a:t>
+              <a:t>Pred: TMC 38 · BJP 12</a:t>
             </a:r>
             <a:endParaRPr lang="en-US" sz="1100" dirty="0"/>
           </a:p>
@@ -11519,7 +13627,7 @@
                 <a:ea typeface="Calibri" pitchFamily="34" charset="-122"/>
                 <a:cs typeface="Calibri" pitchFamily="34" charset="-120"/>
               </a:rPr>
-              <a:t>Act:  BJP 26 · TMC 9</a:t>
+              <a:t>Act:  BJP 38 · TMC 12</a:t>
             </a:r>
             <a:endParaRPr lang="en-US" sz="1100" dirty="0"/>
           </a:p>
@@ -11597,7 +13705,7 @@
                 <a:ea typeface="Calibri" pitchFamily="34" charset="-122"/>
                 <a:cs typeface="Calibri" pitchFamily="34" charset="-120"/>
               </a:rPr>
-              <a:t>Anti-incumbency.</a:t>
+              <a:t>Sustained BJP organisation.</a:t>
             </a:r>
             <a:endParaRPr lang="en-US" sz="1400" dirty="0"/>
           </a:p>
@@ -11636,7 +13744,7 @@
                 <a:ea typeface="Calibri" pitchFamily="34" charset="-122"/>
                 <a:cs typeface="Calibri" pitchFamily="34" charset="-120"/>
               </a:rPr>
-              <a:t>Corruption cases (Sandeshkhali, recruitment scam) cut deepest here.</a:t>
+              <a:t>2021 anti-BJP correction did not stick; rural welfare delivery held.</a:t>
             </a:r>
             <a:endParaRPr lang="en-US" sz="1200" dirty="0"/>
           </a:p>
@@ -11675,7 +13783,7 @@
                 <a:ea typeface="Courier New" pitchFamily="34" charset="-122"/>
                 <a:cs typeface="Courier New" pitchFamily="34" charset="-120"/>
               </a:rPr>
-              <a:t>35 SEATS</a:t>
+              <a:t>50 SEATS</a:t>
             </a:r>
             <a:endParaRPr lang="en-US" sz="1000" dirty="0"/>
           </a:p>
@@ -11899,7 +14007,7 @@
                 <a:ea typeface="Courier New" pitchFamily="34" charset="-122"/>
                 <a:cs typeface="Courier New" pitchFamily="34" charset="-120"/>
               </a:rPr>
-              <a:t>ANALYSIS · 05 OF 10 · KOLKATA URBAN</a:t>
+              <a:t>ANALYSIS · 04 OF 10 · SOUTH RURAL</a:t>
             </a:r>
             <a:endParaRPr lang="en-US" sz="900" dirty="0"/>
           </a:p>
@@ -11938,7 +14046,7 @@
                 <a:ea typeface="Arial Narrow" pitchFamily="34" charset="-122"/>
                 <a:cs typeface="Arial Narrow" pitchFamily="34" charset="-120"/>
               </a:rPr>
-              <a:t>Kolkata Urban: TMC → BJP</a:t>
+              <a:t>South Rural: TMC → BJP</a:t>
             </a:r>
             <a:endParaRPr lang="en-US" sz="3000" dirty="0"/>
           </a:p>
@@ -11969,7 +14077,7 @@
       </p:sp>
       <p:pic>
         <p:nvPicPr>
-          <p:cNvPr id="10" name="Image 0" descr="/Users/admin/Documents/Simulatte Projects/PopScale/engineering/maps/wb_cluster_kolkata_urban.png">    </p:cNvPr>
+          <p:cNvPr id="10" name="Image 0" descr="/Users/admin/Documents/Simulatte Projects/PopScale/engineering/maps/wb_cluster_south_rural.png">    </p:cNvPr>
           <p:cNvPicPr>
             <a:picLocks noChangeAspect="1"/>
           </p:cNvPicPr>
@@ -12062,7 +14170,7 @@
                 <a:ea typeface="Calibri" pitchFamily="34" charset="-122"/>
                 <a:cs typeface="Calibri" pitchFamily="34" charset="-120"/>
               </a:rPr>
-              <a:t>TMC 50%</a:t>
+              <a:t>TMC 55%</a:t>
             </a:r>
             <a:endParaRPr lang="en-US" sz="1400" dirty="0"/>
           </a:p>
@@ -12101,7 +14209,7 @@
                 <a:ea typeface="Calibri" pitchFamily="34" charset="-122"/>
                 <a:cs typeface="Calibri" pitchFamily="34" charset="-120"/>
               </a:rPr>
-              <a:t>BJP 28%</a:t>
+              <a:t>BJP 32%</a:t>
             </a:r>
             <a:endParaRPr lang="en-US" sz="1400" dirty="0"/>
           </a:p>
@@ -12179,7 +14287,7 @@
                 <a:ea typeface="Calibri" pitchFamily="34" charset="-122"/>
                 <a:cs typeface="Calibri" pitchFamily="34" charset="-120"/>
               </a:rPr>
-              <a:t>TMC 36%</a:t>
+              <a:t>TMC 35%</a:t>
             </a:r>
             <a:endParaRPr lang="en-US" sz="1400" dirty="0"/>
           </a:p>
@@ -12218,7 +14326,7 @@
                 <a:ea typeface="Calibri" pitchFamily="34" charset="-122"/>
                 <a:cs typeface="Calibri" pitchFamily="34" charset="-120"/>
               </a:rPr>
-              <a:t>BJP 48%</a:t>
+              <a:t>BJP 52%</a:t>
             </a:r>
             <a:endParaRPr lang="en-US" sz="1400" dirty="0"/>
           </a:p>
@@ -12296,7 +14404,7 @@
                 <a:ea typeface="Calibri" pitchFamily="34" charset="-122"/>
                 <a:cs typeface="Calibri" pitchFamily="34" charset="-120"/>
               </a:rPr>
-              <a:t>Pred: TMC 22 · BJP 10</a:t>
+              <a:t>Pred: TMC 25 · BJP 10</a:t>
             </a:r>
             <a:endParaRPr lang="en-US" sz="1100" dirty="0"/>
           </a:p>
@@ -12335,7 +14443,7 @@
                 <a:ea typeface="Calibri" pitchFamily="34" charset="-122"/>
                 <a:cs typeface="Calibri" pitchFamily="34" charset="-120"/>
               </a:rPr>
-              <a:t>Act:  BJP 20 · TMC 12</a:t>
+              <a:t>Act:  BJP 26 · TMC 9</a:t>
             </a:r>
             <a:endParaRPr lang="en-US" sz="1100" dirty="0"/>
           </a:p>
@@ -12413,7 +14521,7 @@
                 <a:ea typeface="Calibri" pitchFamily="34" charset="-122"/>
                 <a:cs typeface="Calibri" pitchFamily="34" charset="-120"/>
               </a:rPr>
-              <a:t>Muslim vote split.</a:t>
+              <a:t>Anti-incumbency.</a:t>
             </a:r>
             <a:endParaRPr lang="en-US" sz="1400" dirty="0"/>
           </a:p>
@@ -12452,7 +14560,7 @@
                 <a:ea typeface="Calibri" pitchFamily="34" charset="-122"/>
                 <a:cs typeface="Calibri" pitchFamily="34" charset="-120"/>
               </a:rPr>
-              <a:t>4-way fragmentation handed BJP pluralities in Muslim-mixed seats.</a:t>
+              <a:t>Corruption cases (Sandeshkhali, recruitment scam) cut deepest here.</a:t>
             </a:r>
             <a:endParaRPr lang="en-US" sz="1200" dirty="0"/>
           </a:p>
@@ -12491,7 +14599,7 @@
                 <a:ea typeface="Courier New" pitchFamily="34" charset="-122"/>
                 <a:cs typeface="Courier New" pitchFamily="34" charset="-120"/>
               </a:rPr>
-              <a:t>32 SEATS</a:t>
+              <a:t>35 SEATS</a:t>
             </a:r>
             <a:endParaRPr lang="en-US" sz="1000" dirty="0"/>
           </a:p>
@@ -12715,7 +14823,7 @@
                 <a:ea typeface="Courier New" pitchFamily="34" charset="-122"/>
                 <a:cs typeface="Courier New" pitchFamily="34" charset="-120"/>
               </a:rPr>
-              <a:t>ANALYSIS · 06 OF 10 · BURDWAN INDUSTRIAL</a:t>
+              <a:t>ANALYSIS · 05 OF 10 · KOLKATA URBAN</a:t>
             </a:r>
             <a:endParaRPr lang="en-US" sz="900" dirty="0"/>
           </a:p>
@@ -12754,7 +14862,7 @@
                 <a:ea typeface="Arial Narrow" pitchFamily="34" charset="-122"/>
                 <a:cs typeface="Arial Narrow" pitchFamily="34" charset="-120"/>
               </a:rPr>
-              <a:t>Burdwan Industrial: TMC → BJP</a:t>
+              <a:t>Kolkata Urban: TMC → BJP</a:t>
             </a:r>
             <a:endParaRPr lang="en-US" sz="3000" dirty="0"/>
           </a:p>
@@ -12785,7 +14893,7 @@
       </p:sp>
       <p:pic>
         <p:nvPicPr>
-          <p:cNvPr id="10" name="Image 0" descr="/Users/admin/Documents/Simulatte Projects/PopScale/engineering/maps/wb_cluster_burdwan_industrial.png">    </p:cNvPr>
+          <p:cNvPr id="10" name="Image 0" descr="/Users/admin/Documents/Simulatte Projects/PopScale/engineering/maps/wb_cluster_kolkata_urban.png">    </p:cNvPr>
           <p:cNvPicPr>
             <a:picLocks noChangeAspect="1"/>
           </p:cNvPicPr>
@@ -12878,7 +14986,7 @@
                 <a:ea typeface="Calibri" pitchFamily="34" charset="-122"/>
                 <a:cs typeface="Calibri" pitchFamily="34" charset="-120"/>
               </a:rPr>
-              <a:t>TMC 53%</a:t>
+              <a:t>TMC 50%</a:t>
             </a:r>
             <a:endParaRPr lang="en-US" sz="1400" dirty="0"/>
           </a:p>
@@ -12917,7 +15025,7 @@
                 <a:ea typeface="Calibri" pitchFamily="34" charset="-122"/>
                 <a:cs typeface="Calibri" pitchFamily="34" charset="-120"/>
               </a:rPr>
-              <a:t>BJP 30%</a:t>
+              <a:t>BJP 28%</a:t>
             </a:r>
             <a:endParaRPr lang="en-US" sz="1400" dirty="0"/>
           </a:p>
@@ -12995,7 +15103,7 @@
                 <a:ea typeface="Calibri" pitchFamily="34" charset="-122"/>
                 <a:cs typeface="Calibri" pitchFamily="34" charset="-120"/>
               </a:rPr>
-              <a:t>TMC 35%</a:t>
+              <a:t>TMC 36%</a:t>
             </a:r>
             <a:endParaRPr lang="en-US" sz="1400" dirty="0"/>
           </a:p>
@@ -13034,7 +15142,7 @@
                 <a:ea typeface="Calibri" pitchFamily="34" charset="-122"/>
                 <a:cs typeface="Calibri" pitchFamily="34" charset="-120"/>
               </a:rPr>
-              <a:t>BJP 50%</a:t>
+              <a:t>BJP 48%</a:t>
             </a:r>
             <a:endParaRPr lang="en-US" sz="1400" dirty="0"/>
           </a:p>
@@ -13112,7 +15220,7 @@
                 <a:ea typeface="Calibri" pitchFamily="34" charset="-122"/>
                 <a:cs typeface="Calibri" pitchFamily="34" charset="-120"/>
               </a:rPr>
-              <a:t>Pred: TMC 17 · BJP 8</a:t>
+              <a:t>Pred: TMC 22 · BJP 10</a:t>
             </a:r>
             <a:endParaRPr lang="en-US" sz="1100" dirty="0"/>
           </a:p>
@@ -13151,7 +15259,7 @@
                 <a:ea typeface="Calibri" pitchFamily="34" charset="-122"/>
                 <a:cs typeface="Calibri" pitchFamily="34" charset="-120"/>
               </a:rPr>
-              <a:t>Act:  BJP 18 · TMC 7</a:t>
+              <a:t>Act:  BJP 20 · TMC 12</a:t>
             </a:r>
             <a:endParaRPr lang="en-US" sz="1100" dirty="0"/>
           </a:p>
@@ -13229,7 +15337,7 @@
                 <a:ea typeface="Calibri" pitchFamily="34" charset="-122"/>
                 <a:cs typeface="Calibri" pitchFamily="34" charset="-120"/>
               </a:rPr>
-              <a:t>Industrial worker swing.</a:t>
+              <a:t>Muslim vote split.</a:t>
             </a:r>
             <a:endParaRPr lang="en-US" sz="1400" dirty="0"/>
           </a:p>
@@ -13268,7 +15376,7 @@
                 <a:ea typeface="Calibri" pitchFamily="34" charset="-122"/>
                 <a:cs typeface="Calibri" pitchFamily="34" charset="-120"/>
               </a:rPr>
-              <a:t>Economic anxiety + Hindu consolidation, not modelled together.</a:t>
+              <a:t>4-way fragmentation handed BJP pluralities in Muslim-mixed seats.</a:t>
             </a:r>
             <a:endParaRPr lang="en-US" sz="1200" dirty="0"/>
           </a:p>
@@ -13307,7 +15415,7 @@
                 <a:ea typeface="Courier New" pitchFamily="34" charset="-122"/>
                 <a:cs typeface="Courier New" pitchFamily="34" charset="-120"/>
               </a:rPr>
-              <a:t>25 SEATS</a:t>
+              <a:t>32 SEATS</a:t>
             </a:r>
             <a:endParaRPr lang="en-US" sz="1000" dirty="0"/>
           </a:p>

--- a/engineering/wb_2026_postmortem_deck.pptx
+++ b/engineering/wb_2026_postmortem_deck.pptx
@@ -20,10 +20,9 @@
     <p:sldId id="268" r:id="rId14"/>
     <p:sldId id="269" r:id="rId15"/>
     <p:sldId id="270" r:id="rId16"/>
-    <p:sldId id="271" r:id="rId17"/>
   </p:sldIdLst>
   <p:notesMasterIdLst>
-    <p:notesMasterId r:id="rId18"/>
+    <p:notesMasterId r:id="rId17"/>
   </p:notesMasterIdLst>
   <p:sldSz cx="9144000" cy="5143500"/>
   <p:notesSz cx="5143500" cy="9144000"/>
@@ -1069,94 +1068,6 @@
             <a:fld id="{F7021451-1387-4CA6-816F-3879F97B5CBC}" type="slidenum">
               <a:rPr lang="en-US"/>
               <a:t>15</a:t>
-            </a:fld>
-            <a:endParaRPr lang="en-US"/>
-          </a:p>
-        </p:txBody>
-      </p:sp>
-    </p:spTree>
-    <p:extLst>
-      <p:ext uri="{BB962C8B-B14F-4D97-AF65-F5344CB8AC3E}">
-        <p14:creationId xmlns:p14="http://schemas.microsoft.com/office/powerpoint/2010/main" val="1024086991"/>
-      </p:ext>
-    </p:extLst>
-  </p:cSld>
-  <p:clrMapOvr>
-    <a:masterClrMapping/>
-  </p:clrMapOvr>
-</p:notes>
-</file>
-
-<file path=ppt/notesSlides/notesSlide16.xml><?xml version="1.0" encoding="utf-8"?>
-<p:notes xmlns:a="http://schemas.openxmlformats.org/drawingml/2006/main" xmlns:r="http://schemas.openxmlformats.org/officeDocument/2006/relationships" xmlns:p="http://schemas.openxmlformats.org/presentationml/2006/main">
-  <p:cSld>
-    <p:spTree>
-      <p:nvGrpSpPr>
-        <p:cNvPr id="1" name=""/>
-        <p:cNvGrpSpPr/>
-        <p:nvPr/>
-      </p:nvGrpSpPr>
-      <p:grpSpPr>
-        <a:xfrm>
-          <a:off x="0" y="0"/>
-          <a:ext cx="0" cy="0"/>
-          <a:chOff x="0" y="0"/>
-          <a:chExt cx="0" cy="0"/>
-        </a:xfrm>
-      </p:grpSpPr>
-      <p:sp>
-        <p:nvSpPr>
-          <p:cNvPr id="2" name="Slide Image Placeholder 1"/>
-          <p:cNvSpPr>
-            <a:spLocks noGrp="1" noRot="1" noChangeAspect="1"/>
-          </p:cNvSpPr>
-          <p:nvPr>
-            <p:ph type="sldImg"/>
-          </p:nvPr>
-        </p:nvSpPr>
-        <p:spPr/>
-      </p:sp>
-      <p:sp>
-        <p:nvSpPr>
-          <p:cNvPr id="3" name="Notes Placeholder 2"/>
-          <p:cNvSpPr>
-            <a:spLocks noGrp="1"/>
-          </p:cNvSpPr>
-          <p:nvPr>
-            <p:ph type="body" idx="1"/>
-          </p:nvPr>
-        </p:nvSpPr>
-        <p:spPr/>
-        <p:txBody>
-          <a:bodyPr/>
-          <a:lstStyle/>
-          <a:p>
-            <a:r>
-              <a:rPr lang="en-US" dirty="0"/>
-              <a:t/>
-            </a:r>
-            <a:endParaRPr lang="en-US" dirty="0"/>
-          </a:p>
-        </p:txBody>
-      </p:sp>
-      <p:sp>
-        <p:nvSpPr>
-          <p:cNvPr id="4" name="Slide Number Placeholder 3"/>
-          <p:cNvSpPr>
-            <a:spLocks noGrp="1"/>
-          </p:cNvSpPr>
-          <p:nvPr>
-            <p:ph type="sldNum" sz="quarter" idx="10"/>
-          </p:nvPr>
-        </p:nvSpPr>
-        <p:spPr/>
-        <p:txBody>
-          <a:bodyPr/>
-          <a:lstStyle/>
-          <a:p>
-            <a:fld id="{F7021451-1387-4CA6-816F-3879F97B5CBC}" type="slidenum">
-              <a:rPr lang="en-US"/>
-              <a:t>16</a:t>
             </a:fld>
             <a:endParaRPr lang="en-US"/>
           </a:p>
@@ -2712,7 +2623,7 @@
                 <a:ea typeface="Courier New" pitchFamily="34" charset="-122"/>
                 <a:cs typeface="Courier New" pitchFamily="34" charset="-120"/>
               </a:rPr>
-              <a:t>ANALYSIS · 06 OF 10 · BURDWAN INDUSTRIAL</a:t>
+              <a:t>ANALYSIS · 07 OF 10 · NORTH BENGAL</a:t>
             </a:r>
             <a:endParaRPr lang="en-US" sz="900" dirty="0"/>
           </a:p>
@@ -2751,7 +2662,7 @@
                 <a:ea typeface="Arial Narrow" pitchFamily="34" charset="-122"/>
                 <a:cs typeface="Arial Narrow" pitchFamily="34" charset="-120"/>
               </a:rPr>
-              <a:t>Burdwan Industrial: TMC → BJP</a:t>
+              <a:t>North Bengal: TMC → BJP</a:t>
             </a:r>
             <a:endParaRPr lang="en-US" sz="3000" dirty="0"/>
           </a:p>
@@ -2782,7 +2693,7 @@
       </p:sp>
       <p:pic>
         <p:nvPicPr>
-          <p:cNvPr id="10" name="Image 0" descr="/Users/admin/Documents/Simulatte Projects/PopScale/engineering/maps/wb_cluster_burdwan_industrial.png">    </p:cNvPr>
+          <p:cNvPr id="10" name="Image 0" descr="/Users/admin/Documents/Simulatte Projects/PopScale/engineering/maps/wb_cluster_north_bengal.png">    </p:cNvPr>
           <p:cNvPicPr>
             <a:picLocks noChangeAspect="1"/>
           </p:cNvPicPr>
@@ -2875,7 +2786,7 @@
                 <a:ea typeface="Calibri" pitchFamily="34" charset="-122"/>
                 <a:cs typeface="Calibri" pitchFamily="34" charset="-120"/>
               </a:rPr>
-              <a:t>TMC 53%</a:t>
+              <a:t>TMC 48%</a:t>
             </a:r>
             <a:endParaRPr lang="en-US" sz="1400" dirty="0"/>
           </a:p>
@@ -2914,7 +2825,7 @@
                 <a:ea typeface="Calibri" pitchFamily="34" charset="-122"/>
                 <a:cs typeface="Calibri" pitchFamily="34" charset="-120"/>
               </a:rPr>
-              <a:t>BJP 30%</a:t>
+              <a:t>BJP 35%</a:t>
             </a:r>
             <a:endParaRPr lang="en-US" sz="1400" dirty="0"/>
           </a:p>
@@ -2992,7 +2903,7 @@
                 <a:ea typeface="Calibri" pitchFamily="34" charset="-122"/>
                 <a:cs typeface="Calibri" pitchFamily="34" charset="-120"/>
               </a:rPr>
-              <a:t>TMC 35%</a:t>
+              <a:t>TMC 28%</a:t>
             </a:r>
             <a:endParaRPr lang="en-US" sz="1400" dirty="0"/>
           </a:p>
@@ -3031,7 +2942,7 @@
                 <a:ea typeface="Calibri" pitchFamily="34" charset="-122"/>
                 <a:cs typeface="Calibri" pitchFamily="34" charset="-120"/>
               </a:rPr>
-              <a:t>BJP 50%</a:t>
+              <a:t>BJP 56%</a:t>
             </a:r>
             <a:endParaRPr lang="en-US" sz="1400" dirty="0"/>
           </a:p>
@@ -3109,7 +3020,7 @@
                 <a:ea typeface="Calibri" pitchFamily="34" charset="-122"/>
                 <a:cs typeface="Calibri" pitchFamily="34" charset="-120"/>
               </a:rPr>
-              <a:t>Pred: TMC 17 · BJP 8</a:t>
+              <a:t>Pred: TMC 14 · BJP 10</a:t>
             </a:r>
             <a:endParaRPr lang="en-US" sz="1100" dirty="0"/>
           </a:p>
@@ -3148,7 +3059,7 @@
                 <a:ea typeface="Calibri" pitchFamily="34" charset="-122"/>
                 <a:cs typeface="Calibri" pitchFamily="34" charset="-120"/>
               </a:rPr>
-              <a:t>Act:  BJP 18 · TMC 7</a:t>
+              <a:t>Act:  BJP 22 · TMC 2</a:t>
             </a:r>
             <a:endParaRPr lang="en-US" sz="1100" dirty="0"/>
           </a:p>
@@ -3226,7 +3137,7 @@
                 <a:ea typeface="Calibri" pitchFamily="34" charset="-122"/>
                 <a:cs typeface="Calibri" pitchFamily="34" charset="-120"/>
               </a:rPr>
-              <a:t>Industrial worker swing.</a:t>
+              <a:t>SIR voter-roll deletions.</a:t>
             </a:r>
             <a:endParaRPr lang="en-US" sz="1400" dirty="0"/>
           </a:p>
@@ -3265,7 +3176,7 @@
                 <a:ea typeface="Calibri" pitchFamily="34" charset="-122"/>
                 <a:cs typeface="Calibri" pitchFamily="34" charset="-120"/>
               </a:rPr>
-              <a:t>Economic anxiety + Hindu consolidation, not modelled together.</a:t>
+              <a:t>Disproportionate impact in Muslim-majority blocks; turnout asymmetry.</a:t>
             </a:r>
             <a:endParaRPr lang="en-US" sz="1200" dirty="0"/>
           </a:p>
@@ -3304,7 +3215,7 @@
                 <a:ea typeface="Courier New" pitchFamily="34" charset="-122"/>
                 <a:cs typeface="Courier New" pitchFamily="34" charset="-120"/>
               </a:rPr>
-              <a:t>25 SEATS</a:t>
+              <a:t>24 SEATS</a:t>
             </a:r>
             <a:endParaRPr lang="en-US" sz="1000" dirty="0"/>
           </a:p>
@@ -3528,7 +3439,7 @@
                 <a:ea typeface="Courier New" pitchFamily="34" charset="-122"/>
                 <a:cs typeface="Courier New" pitchFamily="34" charset="-120"/>
               </a:rPr>
-              <a:t>ANALYSIS · 07 OF 10 · NORTH BENGAL</a:t>
+              <a:t>ANALYSIS · 08 OF 10 · MURSHIDABAD</a:t>
             </a:r>
             <a:endParaRPr lang="en-US" sz="900" dirty="0"/>
           </a:p>
@@ -3567,7 +3478,7 @@
                 <a:ea typeface="Arial Narrow" pitchFamily="34" charset="-122"/>
                 <a:cs typeface="Arial Narrow" pitchFamily="34" charset="-120"/>
               </a:rPr>
-              <a:t>North Bengal: TMC → BJP</a:t>
+              <a:t>Murshidabad: TMC → TMC</a:t>
             </a:r>
             <a:endParaRPr lang="en-US" sz="3000" dirty="0"/>
           </a:p>
@@ -3598,7 +3509,7 @@
       </p:sp>
       <p:pic>
         <p:nvPicPr>
-          <p:cNvPr id="10" name="Image 0" descr="/Users/admin/Documents/Simulatte Projects/PopScale/engineering/maps/wb_cluster_north_bengal.png">    </p:cNvPr>
+          <p:cNvPr id="10" name="Image 0" descr="/Users/admin/Documents/Simulatte Projects/PopScale/engineering/maps/wb_cluster_murshidabad.png">    </p:cNvPr>
           <p:cNvPicPr>
             <a:picLocks noChangeAspect="1"/>
           </p:cNvPicPr>
@@ -3691,7 +3602,7 @@
                 <a:ea typeface="Calibri" pitchFamily="34" charset="-122"/>
                 <a:cs typeface="Calibri" pitchFamily="34" charset="-120"/>
               </a:rPr>
-              <a:t>TMC 48%</a:t>
+              <a:t>TMC 78%</a:t>
             </a:r>
             <a:endParaRPr lang="en-US" sz="1400" dirty="0"/>
           </a:p>
@@ -3730,7 +3641,7 @@
                 <a:ea typeface="Calibri" pitchFamily="34" charset="-122"/>
                 <a:cs typeface="Calibri" pitchFamily="34" charset="-120"/>
               </a:rPr>
-              <a:t>BJP 35%</a:t>
+              <a:t>BJP 12%</a:t>
             </a:r>
             <a:endParaRPr lang="en-US" sz="1400" dirty="0"/>
           </a:p>
@@ -3808,7 +3719,7 @@
                 <a:ea typeface="Calibri" pitchFamily="34" charset="-122"/>
                 <a:cs typeface="Calibri" pitchFamily="34" charset="-120"/>
               </a:rPr>
-              <a:t>TMC 28%</a:t>
+              <a:t>TMC 52%</a:t>
             </a:r>
             <a:endParaRPr lang="en-US" sz="1400" dirty="0"/>
           </a:p>
@@ -3847,7 +3758,7 @@
                 <a:ea typeface="Calibri" pitchFamily="34" charset="-122"/>
                 <a:cs typeface="Calibri" pitchFamily="34" charset="-120"/>
               </a:rPr>
-              <a:t>BJP 56%</a:t>
+              <a:t>BJP 38%</a:t>
             </a:r>
             <a:endParaRPr lang="en-US" sz="1400" dirty="0"/>
           </a:p>
@@ -3925,7 +3836,7 @@
                 <a:ea typeface="Calibri" pitchFamily="34" charset="-122"/>
                 <a:cs typeface="Calibri" pitchFamily="34" charset="-120"/>
               </a:rPr>
-              <a:t>Pred: TMC 14 · BJP 10</a:t>
+              <a:t>Pred: TMC 19 · BJP 3</a:t>
             </a:r>
             <a:endParaRPr lang="en-US" sz="1100" dirty="0"/>
           </a:p>
@@ -3964,7 +3875,7 @@
                 <a:ea typeface="Calibri" pitchFamily="34" charset="-122"/>
                 <a:cs typeface="Calibri" pitchFamily="34" charset="-120"/>
               </a:rPr>
-              <a:t>Act:  BJP 22 · TMC 2</a:t>
+              <a:t>Act:  TMC 13 · BJP 9</a:t>
             </a:r>
             <a:endParaRPr lang="en-US" sz="1100" dirty="0"/>
           </a:p>
@@ -4042,7 +3953,7 @@
                 <a:ea typeface="Calibri" pitchFamily="34" charset="-122"/>
                 <a:cs typeface="Calibri" pitchFamily="34" charset="-120"/>
               </a:rPr>
-              <a:t>SIR voter-roll deletions.</a:t>
+              <a:t>Held — but barely.</a:t>
             </a:r>
             <a:endParaRPr lang="en-US" sz="1400" dirty="0"/>
           </a:p>
@@ -4081,7 +3992,7 @@
                 <a:ea typeface="Calibri" pitchFamily="34" charset="-122"/>
                 <a:cs typeface="Calibri" pitchFamily="34" charset="-120"/>
               </a:rPr>
-              <a:t>Disproportionate impact in Muslim-majority blocks; turnout asymmetry.</a:t>
+              <a:t>Muslim consolidation worked here as modelled. The model was right about this cluster.</a:t>
             </a:r>
             <a:endParaRPr lang="en-US" sz="1200" dirty="0"/>
           </a:p>
@@ -4120,7 +4031,7 @@
                 <a:ea typeface="Courier New" pitchFamily="34" charset="-122"/>
                 <a:cs typeface="Courier New" pitchFamily="34" charset="-120"/>
               </a:rPr>
-              <a:t>24 SEATS</a:t>
+              <a:t>22 SEATS</a:t>
             </a:r>
             <a:endParaRPr lang="en-US" sz="1000" dirty="0"/>
           </a:p>
@@ -4344,7 +4255,7 @@
                 <a:ea typeface="Courier New" pitchFamily="34" charset="-122"/>
                 <a:cs typeface="Courier New" pitchFamily="34" charset="-120"/>
               </a:rPr>
-              <a:t>ANALYSIS · 08 OF 10 · MURSHIDABAD</a:t>
+              <a:t>ANALYSIS · 09 OF 10 · MALDA</a:t>
             </a:r>
             <a:endParaRPr lang="en-US" sz="900" dirty="0"/>
           </a:p>
@@ -4383,7 +4294,7 @@
                 <a:ea typeface="Arial Narrow" pitchFamily="34" charset="-122"/>
                 <a:cs typeface="Arial Narrow" pitchFamily="34" charset="-120"/>
               </a:rPr>
-              <a:t>Murshidabad: TMC → TMC</a:t>
+              <a:t>Malda: TMC → BJP</a:t>
             </a:r>
             <a:endParaRPr lang="en-US" sz="3000" dirty="0"/>
           </a:p>
@@ -4414,7 +4325,7 @@
       </p:sp>
       <p:pic>
         <p:nvPicPr>
-          <p:cNvPr id="10" name="Image 0" descr="/Users/admin/Documents/Simulatte Projects/PopScale/engineering/maps/wb_cluster_murshidabad.png">    </p:cNvPr>
+          <p:cNvPr id="10" name="Image 0" descr="/Users/admin/Documents/Simulatte Projects/PopScale/engineering/maps/wb_cluster_malda.png">    </p:cNvPr>
           <p:cNvPicPr>
             <a:picLocks noChangeAspect="1"/>
           </p:cNvPicPr>
@@ -4507,7 +4418,7 @@
                 <a:ea typeface="Calibri" pitchFamily="34" charset="-122"/>
                 <a:cs typeface="Calibri" pitchFamily="34" charset="-120"/>
               </a:rPr>
-              <a:t>TMC 78%</a:t>
+              <a:t>TMC 56%</a:t>
             </a:r>
             <a:endParaRPr lang="en-US" sz="1400" dirty="0"/>
           </a:p>
@@ -4546,7 +4457,7 @@
                 <a:ea typeface="Calibri" pitchFamily="34" charset="-122"/>
                 <a:cs typeface="Calibri" pitchFamily="34" charset="-120"/>
               </a:rPr>
-              <a:t>BJP 12%</a:t>
+              <a:t>BJP 30%</a:t>
             </a:r>
             <a:endParaRPr lang="en-US" sz="1400" dirty="0"/>
           </a:p>
@@ -4624,7 +4535,7 @@
                 <a:ea typeface="Calibri" pitchFamily="34" charset="-122"/>
                 <a:cs typeface="Calibri" pitchFamily="34" charset="-120"/>
               </a:rPr>
-              <a:t>TMC 52%</a:t>
+              <a:t>TMC 38%</a:t>
             </a:r>
             <a:endParaRPr lang="en-US" sz="1400" dirty="0"/>
           </a:p>
@@ -4663,7 +4574,7 @@
                 <a:ea typeface="Calibri" pitchFamily="34" charset="-122"/>
                 <a:cs typeface="Calibri" pitchFamily="34" charset="-120"/>
               </a:rPr>
-              <a:t>BJP 38%</a:t>
+              <a:t>BJP 48%</a:t>
             </a:r>
             <a:endParaRPr lang="en-US" sz="1400" dirty="0"/>
           </a:p>
@@ -4741,7 +4652,7 @@
                 <a:ea typeface="Calibri" pitchFamily="34" charset="-122"/>
                 <a:cs typeface="Calibri" pitchFamily="34" charset="-120"/>
               </a:rPr>
-              <a:t>Pred: TMC 19 · BJP 3</a:t>
+              <a:t>Pred: TMC 7 · BJP 4 · INC 1</a:t>
             </a:r>
             <a:endParaRPr lang="en-US" sz="1100" dirty="0"/>
           </a:p>
@@ -4780,7 +4691,7 @@
                 <a:ea typeface="Calibri" pitchFamily="34" charset="-122"/>
                 <a:cs typeface="Calibri" pitchFamily="34" charset="-120"/>
               </a:rPr>
-              <a:t>Act:  TMC 13 · BJP 9</a:t>
+              <a:t>Act:  BJP 7 · TMC 4 · INC 1</a:t>
             </a:r>
             <a:endParaRPr lang="en-US" sz="1100" dirty="0"/>
           </a:p>
@@ -4858,7 +4769,7 @@
                 <a:ea typeface="Calibri" pitchFamily="34" charset="-122"/>
                 <a:cs typeface="Calibri" pitchFamily="34" charset="-120"/>
               </a:rPr>
-              <a:t>Held — but barely.</a:t>
+              <a:t>Muslim split + INC weakness.</a:t>
             </a:r>
             <a:endParaRPr lang="en-US" sz="1400" dirty="0"/>
           </a:p>
@@ -4897,7 +4808,7 @@
                 <a:ea typeface="Calibri" pitchFamily="34" charset="-122"/>
                 <a:cs typeface="Calibri" pitchFamily="34" charset="-120"/>
               </a:rPr>
-              <a:t>Muslim consolidation worked here as modelled. The model was right about this cluster.</a:t>
+              <a:t>AIMIM/AJUP fragmentation handed BJP pluralities.</a:t>
             </a:r>
             <a:endParaRPr lang="en-US" sz="1200" dirty="0"/>
           </a:p>
@@ -4936,7 +4847,7 @@
                 <a:ea typeface="Courier New" pitchFamily="34" charset="-122"/>
                 <a:cs typeface="Courier New" pitchFamily="34" charset="-120"/>
               </a:rPr>
-              <a:t>22 SEATS</a:t>
+              <a:t>12 SEATS</a:t>
             </a:r>
             <a:endParaRPr lang="en-US" sz="1000" dirty="0"/>
           </a:p>
@@ -5160,7 +5071,7 @@
                 <a:ea typeface="Courier New" pitchFamily="34" charset="-122"/>
                 <a:cs typeface="Courier New" pitchFamily="34" charset="-120"/>
               </a:rPr>
-              <a:t>ANALYSIS · 09 OF 10 · MALDA</a:t>
+              <a:t>ANALYSIS · 10 OF 10 · DARJEELING HILLS</a:t>
             </a:r>
             <a:endParaRPr lang="en-US" sz="900" dirty="0"/>
           </a:p>
@@ -5199,7 +5110,7 @@
                 <a:ea typeface="Arial Narrow" pitchFamily="34" charset="-122"/>
                 <a:cs typeface="Arial Narrow" pitchFamily="34" charset="-120"/>
               </a:rPr>
-              <a:t>Malda: TMC → BJP</a:t>
+              <a:t>Darjeeling Hills: BJP → BJP</a:t>
             </a:r>
             <a:endParaRPr lang="en-US" sz="3000" dirty="0"/>
           </a:p>
@@ -5230,7 +5141,7 @@
       </p:sp>
       <p:pic>
         <p:nvPicPr>
-          <p:cNvPr id="10" name="Image 0" descr="/Users/admin/Documents/Simulatte Projects/PopScale/engineering/maps/wb_cluster_malda.png">    </p:cNvPr>
+          <p:cNvPr id="10" name="Image 0" descr="/Users/admin/Documents/Simulatte Projects/PopScale/engineering/maps/wb_cluster_darjeeling_hills.png">    </p:cNvPr>
           <p:cNvPicPr>
             <a:picLocks noChangeAspect="1"/>
           </p:cNvPicPr>
@@ -5323,7 +5234,7 @@
                 <a:ea typeface="Calibri" pitchFamily="34" charset="-122"/>
                 <a:cs typeface="Calibri" pitchFamily="34" charset="-120"/>
               </a:rPr>
-              <a:t>TMC 56%</a:t>
+              <a:t>TMC 22%</a:t>
             </a:r>
             <a:endParaRPr lang="en-US" sz="1400" dirty="0"/>
           </a:p>
@@ -5362,7 +5273,7 @@
                 <a:ea typeface="Calibri" pitchFamily="34" charset="-122"/>
                 <a:cs typeface="Calibri" pitchFamily="34" charset="-120"/>
               </a:rPr>
-              <a:t>BJP 30%</a:t>
+              <a:t>BJP 50%</a:t>
             </a:r>
             <a:endParaRPr lang="en-US" sz="1400" dirty="0"/>
           </a:p>
@@ -5440,7 +5351,7 @@
                 <a:ea typeface="Calibri" pitchFamily="34" charset="-122"/>
                 <a:cs typeface="Calibri" pitchFamily="34" charset="-120"/>
               </a:rPr>
-              <a:t>TMC 38%</a:t>
+              <a:t>TMC 20%</a:t>
             </a:r>
             <a:endParaRPr lang="en-US" sz="1400" dirty="0"/>
           </a:p>
@@ -5479,7 +5390,7 @@
                 <a:ea typeface="Calibri" pitchFamily="34" charset="-122"/>
                 <a:cs typeface="Calibri" pitchFamily="34" charset="-120"/>
               </a:rPr>
-              <a:t>BJP 48%</a:t>
+              <a:t>BJP 60%</a:t>
             </a:r>
             <a:endParaRPr lang="en-US" sz="1400" dirty="0"/>
           </a:p>
@@ -5557,7 +5468,7 @@
                 <a:ea typeface="Calibri" pitchFamily="34" charset="-122"/>
                 <a:cs typeface="Calibri" pitchFamily="34" charset="-120"/>
               </a:rPr>
-              <a:t>Pred: TMC 7 · BJP 4 · INC 1</a:t>
+              <a:t>Pred: BJP/GJM 10 · TMC 3</a:t>
             </a:r>
             <a:endParaRPr lang="en-US" sz="1100" dirty="0"/>
           </a:p>
@@ -5596,7 +5507,7 @@
                 <a:ea typeface="Calibri" pitchFamily="34" charset="-122"/>
                 <a:cs typeface="Calibri" pitchFamily="34" charset="-120"/>
               </a:rPr>
-              <a:t>Act:  BJP 7 · TMC 4 · INC 1</a:t>
+              <a:t>Act:  BJP/GJM 10 · TMC 2 · Oth 1</a:t>
             </a:r>
             <a:endParaRPr lang="en-US" sz="1100" dirty="0"/>
           </a:p>
@@ -5674,7 +5585,7 @@
                 <a:ea typeface="Calibri" pitchFamily="34" charset="-122"/>
                 <a:cs typeface="Calibri" pitchFamily="34" charset="-120"/>
               </a:rPr>
-              <a:t>Muslim split + INC weakness.</a:t>
+              <a:t>Correctly predicted.</a:t>
             </a:r>
             <a:endParaRPr lang="en-US" sz="1400" dirty="0"/>
           </a:p>
@@ -5713,7 +5624,7 @@
                 <a:ea typeface="Calibri" pitchFamily="34" charset="-122"/>
                 <a:cs typeface="Calibri" pitchFamily="34" charset="-120"/>
               </a:rPr>
-              <a:t>AIMIM/AJUP fragmentation handed BJP pluralities.</a:t>
+              <a:t>BJP/GJM alliance worked as modelled.</a:t>
             </a:r>
             <a:endParaRPr lang="en-US" sz="1200" dirty="0"/>
           </a:p>
@@ -5752,7 +5663,7 @@
                 <a:ea typeface="Courier New" pitchFamily="34" charset="-122"/>
                 <a:cs typeface="Courier New" pitchFamily="34" charset="-120"/>
               </a:rPr>
-              <a:t>12 SEATS</a:t>
+              <a:t>13 SEATS</a:t>
             </a:r>
             <a:endParaRPr lang="en-US" sz="1000" dirty="0"/>
           </a:p>
@@ -5976,7 +5887,7 @@
                 <a:ea typeface="Courier New" pitchFamily="34" charset="-122"/>
                 <a:cs typeface="Courier New" pitchFamily="34" charset="-120"/>
               </a:rPr>
-              <a:t>ANALYSIS · 10 OF 10 · DARJEELING HILLS</a:t>
+              <a:t>05 — STRUCTURAL FAILURE</a:t>
             </a:r>
             <a:endParaRPr lang="en-US" sz="900" dirty="0"/>
           </a:p>
@@ -5991,23 +5902,23 @@
         <p:spPr>
           <a:xfrm>
             <a:off x="457200" y="566928"/>
-            <a:ext cx="8229600" cy="548640"/>
-          </a:xfrm>
-          <a:prstGeom prst="rect">
-            <a:avLst/>
-          </a:prstGeom>
-          <a:noFill/>
-          <a:ln/>
-        </p:spPr>
-        <p:txBody>
-          <a:bodyPr wrap="square" lIns="0" tIns="0" rIns="0" bIns="0" rtlCol="0" anchor="ctr"/>
-          <a:lstStyle/>
-          <a:p>
-            <a:pPr indent="0" marL="0">
-              <a:buNone/>
-            </a:pPr>
-            <a:r>
-              <a:rPr lang="en-US" sz="3000" b="1" dirty="0">
+            <a:ext cx="7772400" cy="548640"/>
+          </a:xfrm>
+          <a:prstGeom prst="rect">
+            <a:avLst/>
+          </a:prstGeom>
+          <a:noFill/>
+          <a:ln/>
+        </p:spPr>
+        <p:txBody>
+          <a:bodyPr wrap="square" lIns="0" tIns="0" rIns="0" bIns="0" rtlCol="0" anchor="ctr"/>
+          <a:lstStyle/>
+          <a:p>
+            <a:pPr indent="0" marL="0">
+              <a:buNone/>
+            </a:pPr>
+            <a:r>
+              <a:rPr lang="en-US" sz="3200" b="1" dirty="0">
                 <a:solidFill>
                   <a:srgbClr val="E9E6DF"/>
                 </a:solidFill>
@@ -6015,9 +5926,9 @@
                 <a:ea typeface="Arial Narrow" pitchFamily="34" charset="-122"/>
                 <a:cs typeface="Arial Narrow" pitchFamily="34" charset="-120"/>
               </a:rPr>
-              <a:t>Darjeeling Hills: BJP → BJP</a:t>
-            </a:r>
-            <a:endParaRPr lang="en-US" sz="3000" dirty="0"/>
+              <a:t>Three things to fix in the model.</a:t>
+            </a:r>
+            <a:endParaRPr lang="en-US" sz="3200" dirty="0"/>
           </a:p>
         </p:txBody>
       </p:sp>
@@ -6044,55 +5955,32 @@
           </a:ln>
         </p:spPr>
       </p:sp>
-      <p:pic>
-        <p:nvPicPr>
-          <p:cNvPr id="10" name="Image 0" descr="/Users/admin/Documents/Simulatte Projects/PopScale/engineering/maps/wb_cluster_darjeeling_hills.png">    </p:cNvPr>
-          <p:cNvPicPr>
-            <a:picLocks noChangeAspect="1"/>
-          </p:cNvPicPr>
-          <p:nvPr/>
-        </p:nvPicPr>
-        <p:blipFill>
-          <a:blip r:embed="rId1"/>
-          <a:srcRect l="0" r="0" t="0" b="0"/>
-          <a:stretch/>
-        </p:blipFill>
-        <p:spPr>
-          <a:xfrm>
-            <a:off x="502920" y="1508760"/>
-            <a:ext cx="3017520" cy="3108960"/>
-          </a:xfrm>
-          <a:prstGeom prst="rect">
-            <a:avLst/>
-          </a:prstGeom>
-        </p:spPr>
-      </p:pic>
-      <p:sp>
-        <p:nvSpPr>
-          <p:cNvPr id="11" name="Text 8"/>
-          <p:cNvSpPr/>
-          <p:nvPr/>
-        </p:nvSpPr>
-        <p:spPr>
-          <a:xfrm>
-            <a:off x="3749040" y="1554480"/>
-            <a:ext cx="2651760" cy="201168"/>
-          </a:xfrm>
-          <a:prstGeom prst="rect">
-            <a:avLst/>
-          </a:prstGeom>
-          <a:noFill/>
-          <a:ln/>
-        </p:spPr>
-        <p:txBody>
-          <a:bodyPr wrap="square" lIns="0" tIns="0" rIns="0" bIns="0" rtlCol="0" anchor="ctr"/>
-          <a:lstStyle/>
-          <a:p>
-            <a:pPr indent="0" marL="0">
-              <a:buNone/>
-            </a:pPr>
-            <a:r>
-              <a:rPr lang="en-US" sz="900" spc="150" kern="0" dirty="0">
+      <p:sp>
+        <p:nvSpPr>
+          <p:cNvPr id="10" name="Text 8"/>
+          <p:cNvSpPr/>
+          <p:nvPr/>
+        </p:nvSpPr>
+        <p:spPr>
+          <a:xfrm>
+            <a:off x="457200" y="1554480"/>
+            <a:ext cx="457200" cy="457200"/>
+          </a:xfrm>
+          <a:prstGeom prst="rect">
+            <a:avLst/>
+          </a:prstGeom>
+          <a:noFill/>
+          <a:ln/>
+        </p:spPr>
+        <p:txBody>
+          <a:bodyPr wrap="square" lIns="0" tIns="0" rIns="0" bIns="0" rtlCol="0" anchor="ctr"/>
+          <a:lstStyle/>
+          <a:p>
+            <a:pPr indent="0" marL="0">
+              <a:buNone/>
+            </a:pPr>
+            <a:r>
+              <a:rPr lang="en-US" sz="1100" dirty="0">
                 <a:solidFill>
                   <a:srgbClr val="9A9997"/>
                 </a:solidFill>
@@ -6100,38 +5988,38 @@
                 <a:ea typeface="Courier New" pitchFamily="34" charset="-122"/>
                 <a:cs typeface="Courier New" pitchFamily="34" charset="-120"/>
               </a:rPr>
-              <a:t>PREDICTED</a:t>
-            </a:r>
-            <a:endParaRPr lang="en-US" sz="900" dirty="0"/>
-          </a:p>
-        </p:txBody>
-      </p:sp>
-      <p:sp>
-        <p:nvSpPr>
-          <p:cNvPr id="12" name="Text 9"/>
-          <p:cNvSpPr/>
-          <p:nvPr/>
-        </p:nvSpPr>
-        <p:spPr>
-          <a:xfrm>
-            <a:off x="3749040" y="1773936"/>
-            <a:ext cx="2651760" cy="274320"/>
-          </a:xfrm>
-          <a:prstGeom prst="rect">
-            <a:avLst/>
-          </a:prstGeom>
-          <a:noFill/>
-          <a:ln/>
-        </p:spPr>
-        <p:txBody>
-          <a:bodyPr wrap="square" lIns="0" tIns="0" rIns="0" bIns="0" rtlCol="0" anchor="ctr"/>
-          <a:lstStyle/>
-          <a:p>
-            <a:pPr indent="0" marL="0">
-              <a:buNone/>
-            </a:pPr>
-            <a:r>
-              <a:rPr lang="en-US" sz="1400" dirty="0">
+              <a:t>01</a:t>
+            </a:r>
+            <a:endParaRPr lang="en-US" sz="1100" dirty="0"/>
+          </a:p>
+        </p:txBody>
+      </p:sp>
+      <p:sp>
+        <p:nvSpPr>
+          <p:cNvPr id="11" name="Text 9"/>
+          <p:cNvSpPr/>
+          <p:nvPr/>
+        </p:nvSpPr>
+        <p:spPr>
+          <a:xfrm>
+            <a:off x="914400" y="1554480"/>
+            <a:ext cx="7680960" cy="365760"/>
+          </a:xfrm>
+          <a:prstGeom prst="rect">
+            <a:avLst/>
+          </a:prstGeom>
+          <a:noFill/>
+          <a:ln/>
+        </p:spPr>
+        <p:txBody>
+          <a:bodyPr wrap="square" lIns="0" tIns="0" rIns="0" bIns="0" rtlCol="0" anchor="ctr"/>
+          <a:lstStyle/>
+          <a:p>
+            <a:pPr indent="0" marL="0">
+              <a:buNone/>
+            </a:pPr>
+            <a:r>
+              <a:rPr lang="en-US" sz="1300" b="1" dirty="0">
                 <a:solidFill>
                   <a:srgbClr val="E9E6DF"/>
                 </a:solidFill>
@@ -6139,77 +6027,77 @@
                 <a:ea typeface="Calibri" pitchFamily="34" charset="-122"/>
                 <a:cs typeface="Calibri" pitchFamily="34" charset="-120"/>
               </a:rPr>
-              <a:t>TMC 22%</a:t>
-            </a:r>
-            <a:endParaRPr lang="en-US" sz="1400" dirty="0"/>
-          </a:p>
-        </p:txBody>
-      </p:sp>
-      <p:sp>
-        <p:nvSpPr>
-          <p:cNvPr id="13" name="Text 10"/>
-          <p:cNvSpPr/>
-          <p:nvPr/>
-        </p:nvSpPr>
-        <p:spPr>
-          <a:xfrm>
-            <a:off x="3749040" y="2011680"/>
-            <a:ext cx="2651760" cy="274320"/>
-          </a:xfrm>
-          <a:prstGeom prst="rect">
-            <a:avLst/>
-          </a:prstGeom>
-          <a:noFill/>
-          <a:ln/>
-        </p:spPr>
-        <p:txBody>
-          <a:bodyPr wrap="square" lIns="0" tIns="0" rIns="0" bIns="0" rtlCol="0" anchor="ctr"/>
-          <a:lstStyle/>
-          <a:p>
-            <a:pPr indent="0" marL="0">
-              <a:buNone/>
-            </a:pPr>
-            <a:r>
-              <a:rPr lang="en-US" sz="1400" dirty="0">
-                <a:solidFill>
-                  <a:srgbClr val="A8A6A0"/>
+              <a:t>Anchoring on 2021 baseline.</a:t>
+            </a:r>
+            <a:endParaRPr lang="en-US" sz="1300" dirty="0"/>
+          </a:p>
+        </p:txBody>
+      </p:sp>
+      <p:sp>
+        <p:nvSpPr>
+          <p:cNvPr id="12" name="Text 10"/>
+          <p:cNvSpPr/>
+          <p:nvPr/>
+        </p:nvSpPr>
+        <p:spPr>
+          <a:xfrm>
+            <a:off x="914400" y="1920240"/>
+            <a:ext cx="7680960" cy="594360"/>
+          </a:xfrm>
+          <a:prstGeom prst="rect">
+            <a:avLst/>
+          </a:prstGeom>
+          <a:noFill/>
+          <a:ln/>
+        </p:spPr>
+        <p:txBody>
+          <a:bodyPr wrap="square" lIns="0" tIns="0" rIns="0" bIns="0" rtlCol="0" anchor="ctr"/>
+          <a:lstStyle/>
+          <a:p>
+            <a:pPr indent="0" marL="0">
+              <a:buNone/>
+            </a:pPr>
+            <a:r>
+              <a:rPr lang="en-US" sz="1300" dirty="0">
+                <a:solidFill>
+                  <a:srgbClr val="C9C7C0"/>
                 </a:solidFill>
                 <a:latin typeface="Calibri" pitchFamily="34" charset="0"/>
                 <a:ea typeface="Calibri" pitchFamily="34" charset="-122"/>
                 <a:cs typeface="Calibri" pitchFamily="34" charset="-120"/>
               </a:rPr>
-              <a:t>BJP 50%</a:t>
-            </a:r>
-            <a:endParaRPr lang="en-US" sz="1400" dirty="0"/>
-          </a:p>
-        </p:txBody>
-      </p:sp>
-      <p:sp>
-        <p:nvSpPr>
-          <p:cNvPr id="14" name="Text 11"/>
-          <p:cNvSpPr/>
-          <p:nvPr/>
-        </p:nvSpPr>
-        <p:spPr>
-          <a:xfrm>
-            <a:off x="3749040" y="2423160"/>
-            <a:ext cx="2651760" cy="201168"/>
-          </a:xfrm>
-          <a:prstGeom prst="rect">
-            <a:avLst/>
-          </a:prstGeom>
-          <a:noFill/>
-          <a:ln/>
-        </p:spPr>
-        <p:txBody>
-          <a:bodyPr wrap="square" lIns="0" tIns="0" rIns="0" bIns="0" rtlCol="0" anchor="ctr"/>
-          <a:lstStyle/>
-          <a:p>
-            <a:pPr indent="0" marL="0">
-              <a:buNone/>
-            </a:pPr>
-            <a:r>
-              <a:rPr lang="en-US" sz="900" spc="150" kern="0" dirty="0">
+              <a:t>Uniform-swing assumed corrections of 10-20pp; realised swing was 25-30pp.</a:t>
+            </a:r>
+            <a:endParaRPr lang="en-US" sz="1300" dirty="0"/>
+          </a:p>
+        </p:txBody>
+      </p:sp>
+      <p:sp>
+        <p:nvSpPr>
+          <p:cNvPr id="13" name="Text 11"/>
+          <p:cNvSpPr/>
+          <p:nvPr/>
+        </p:nvSpPr>
+        <p:spPr>
+          <a:xfrm>
+            <a:off x="457200" y="2560320"/>
+            <a:ext cx="457200" cy="457200"/>
+          </a:xfrm>
+          <a:prstGeom prst="rect">
+            <a:avLst/>
+          </a:prstGeom>
+          <a:noFill/>
+          <a:ln/>
+        </p:spPr>
+        <p:txBody>
+          <a:bodyPr wrap="square" lIns="0" tIns="0" rIns="0" bIns="0" rtlCol="0" anchor="ctr"/>
+          <a:lstStyle/>
+          <a:p>
+            <a:pPr indent="0" marL="0">
+              <a:buNone/>
+            </a:pPr>
+            <a:r>
+              <a:rPr lang="en-US" sz="1100" dirty="0">
                 <a:solidFill>
                   <a:srgbClr val="9A9997"/>
                 </a:solidFill>
@@ -6217,38 +6105,38 @@
                 <a:ea typeface="Courier New" pitchFamily="34" charset="-122"/>
                 <a:cs typeface="Courier New" pitchFamily="34" charset="-120"/>
               </a:rPr>
-              <a:t>ACTUAL</a:t>
-            </a:r>
-            <a:endParaRPr lang="en-US" sz="900" dirty="0"/>
-          </a:p>
-        </p:txBody>
-      </p:sp>
-      <p:sp>
-        <p:nvSpPr>
-          <p:cNvPr id="15" name="Text 12"/>
-          <p:cNvSpPr/>
-          <p:nvPr/>
-        </p:nvSpPr>
-        <p:spPr>
-          <a:xfrm>
-            <a:off x="3749040" y="2642616"/>
-            <a:ext cx="2651760" cy="274320"/>
-          </a:xfrm>
-          <a:prstGeom prst="rect">
-            <a:avLst/>
-          </a:prstGeom>
-          <a:noFill/>
-          <a:ln/>
-        </p:spPr>
-        <p:txBody>
-          <a:bodyPr wrap="square" lIns="0" tIns="0" rIns="0" bIns="0" rtlCol="0" anchor="ctr"/>
-          <a:lstStyle/>
-          <a:p>
-            <a:pPr indent="0" marL="0">
-              <a:buNone/>
-            </a:pPr>
-            <a:r>
-              <a:rPr lang="en-US" sz="1400" dirty="0">
+              <a:t>02</a:t>
+            </a:r>
+            <a:endParaRPr lang="en-US" sz="1100" dirty="0"/>
+          </a:p>
+        </p:txBody>
+      </p:sp>
+      <p:sp>
+        <p:nvSpPr>
+          <p:cNvPr id="14" name="Text 12"/>
+          <p:cNvSpPr/>
+          <p:nvPr/>
+        </p:nvSpPr>
+        <p:spPr>
+          <a:xfrm>
+            <a:off x="914400" y="2560320"/>
+            <a:ext cx="7680960" cy="365760"/>
+          </a:xfrm>
+          <a:prstGeom prst="rect">
+            <a:avLst/>
+          </a:prstGeom>
+          <a:noFill/>
+          <a:ln/>
+        </p:spPr>
+        <p:txBody>
+          <a:bodyPr wrap="square" lIns="0" tIns="0" rIns="0" bIns="0" rtlCol="0" anchor="ctr"/>
+          <a:lstStyle/>
+          <a:p>
+            <a:pPr indent="0" marL="0">
+              <a:buNone/>
+            </a:pPr>
+            <a:r>
+              <a:rPr lang="en-US" sz="1300" b="1" dirty="0">
                 <a:solidFill>
                   <a:srgbClr val="E9E6DF"/>
                 </a:solidFill>
@@ -6256,77 +6144,77 @@
                 <a:ea typeface="Calibri" pitchFamily="34" charset="-122"/>
                 <a:cs typeface="Calibri" pitchFamily="34" charset="-120"/>
               </a:rPr>
-              <a:t>TMC 20%</a:t>
-            </a:r>
-            <a:endParaRPr lang="en-US" sz="1400" dirty="0"/>
-          </a:p>
-        </p:txBody>
-      </p:sp>
-      <p:sp>
-        <p:nvSpPr>
-          <p:cNvPr id="16" name="Text 13"/>
-          <p:cNvSpPr/>
-          <p:nvPr/>
-        </p:nvSpPr>
-        <p:spPr>
-          <a:xfrm>
-            <a:off x="3749040" y="2880360"/>
-            <a:ext cx="2651760" cy="274320"/>
-          </a:xfrm>
-          <a:prstGeom prst="rect">
-            <a:avLst/>
-          </a:prstGeom>
-          <a:noFill/>
-          <a:ln/>
-        </p:spPr>
-        <p:txBody>
-          <a:bodyPr wrap="square" lIns="0" tIns="0" rIns="0" bIns="0" rtlCol="0" anchor="ctr"/>
-          <a:lstStyle/>
-          <a:p>
-            <a:pPr indent="0" marL="0">
-              <a:buNone/>
-            </a:pPr>
-            <a:r>
-              <a:rPr lang="en-US" sz="1400" dirty="0">
-                <a:solidFill>
-                  <a:srgbClr val="A8A6A0"/>
+              <a:t>Hindu consolidation modelled as localized.</a:t>
+            </a:r>
+            <a:endParaRPr lang="en-US" sz="1300" dirty="0"/>
+          </a:p>
+        </p:txBody>
+      </p:sp>
+      <p:sp>
+        <p:nvSpPr>
+          <p:cNvPr id="15" name="Text 13"/>
+          <p:cNvSpPr/>
+          <p:nvPr/>
+        </p:nvSpPr>
+        <p:spPr>
+          <a:xfrm>
+            <a:off x="914400" y="2926080"/>
+            <a:ext cx="7680960" cy="594360"/>
+          </a:xfrm>
+          <a:prstGeom prst="rect">
+            <a:avLst/>
+          </a:prstGeom>
+          <a:noFill/>
+          <a:ln/>
+        </p:spPr>
+        <p:txBody>
+          <a:bodyPr wrap="square" lIns="0" tIns="0" rIns="0" bIns="0" rtlCol="0" anchor="ctr"/>
+          <a:lstStyle/>
+          <a:p>
+            <a:pPr indent="0" marL="0">
+              <a:buNone/>
+            </a:pPr>
+            <a:r>
+              <a:rPr lang="en-US" sz="1300" dirty="0">
+                <a:solidFill>
+                  <a:srgbClr val="C9C7C0"/>
                 </a:solidFill>
                 <a:latin typeface="Calibri" pitchFamily="34" charset="0"/>
                 <a:ea typeface="Calibri" pitchFamily="34" charset="-122"/>
                 <a:cs typeface="Calibri" pitchFamily="34" charset="-120"/>
               </a:rPr>
-              <a:t>BJP 60%</a:t>
-            </a:r>
-            <a:endParaRPr lang="en-US" sz="1400" dirty="0"/>
-          </a:p>
-        </p:txBody>
-      </p:sp>
-      <p:sp>
-        <p:nvSpPr>
-          <p:cNvPr id="17" name="Text 14"/>
-          <p:cNvSpPr/>
-          <p:nvPr/>
-        </p:nvSpPr>
-        <p:spPr>
-          <a:xfrm>
-            <a:off x="3749040" y="3291840"/>
-            <a:ext cx="2651760" cy="201168"/>
-          </a:xfrm>
-          <a:prstGeom prst="rect">
-            <a:avLst/>
-          </a:prstGeom>
-          <a:noFill/>
-          <a:ln/>
-        </p:spPr>
-        <p:txBody>
-          <a:bodyPr wrap="square" lIns="0" tIns="0" rIns="0" bIns="0" rtlCol="0" anchor="ctr"/>
-          <a:lstStyle/>
-          <a:p>
-            <a:pPr indent="0" marL="0">
-              <a:buNone/>
-            </a:pPr>
-            <a:r>
-              <a:rPr lang="en-US" sz="900" spc="150" kern="0" dirty="0">
+              <a:t>The data shows it was the dominant statewide frame.</a:t>
+            </a:r>
+            <a:endParaRPr lang="en-US" sz="1300" dirty="0"/>
+          </a:p>
+        </p:txBody>
+      </p:sp>
+      <p:sp>
+        <p:nvSpPr>
+          <p:cNvPr id="16" name="Text 14"/>
+          <p:cNvSpPr/>
+          <p:nvPr/>
+        </p:nvSpPr>
+        <p:spPr>
+          <a:xfrm>
+            <a:off x="457200" y="3566160"/>
+            <a:ext cx="457200" cy="457200"/>
+          </a:xfrm>
+          <a:prstGeom prst="rect">
+            <a:avLst/>
+          </a:prstGeom>
+          <a:noFill/>
+          <a:ln/>
+        </p:spPr>
+        <p:txBody>
+          <a:bodyPr wrap="square" lIns="0" tIns="0" rIns="0" bIns="0" rtlCol="0" anchor="ctr"/>
+          <a:lstStyle/>
+          <a:p>
+            <a:pPr indent="0" marL="0">
+              <a:buNone/>
+            </a:pPr>
+            <a:r>
+              <a:rPr lang="en-US" sz="1100" dirty="0">
                 <a:solidFill>
                   <a:srgbClr val="9A9997"/>
                 </a:solidFill>
@@ -6334,243 +6222,87 @@
                 <a:ea typeface="Courier New" pitchFamily="34" charset="-122"/>
                 <a:cs typeface="Courier New" pitchFamily="34" charset="-120"/>
               </a:rPr>
-              <a:t>SEATS</a:t>
-            </a:r>
-            <a:endParaRPr lang="en-US" sz="900" dirty="0"/>
-          </a:p>
-        </p:txBody>
-      </p:sp>
-      <p:sp>
-        <p:nvSpPr>
-          <p:cNvPr id="18" name="Text 15"/>
-          <p:cNvSpPr/>
-          <p:nvPr/>
-        </p:nvSpPr>
-        <p:spPr>
-          <a:xfrm>
-            <a:off x="3749040" y="3502152"/>
-            <a:ext cx="2651760" cy="237744"/>
-          </a:xfrm>
-          <a:prstGeom prst="rect">
-            <a:avLst/>
-          </a:prstGeom>
-          <a:noFill/>
-          <a:ln/>
-        </p:spPr>
-        <p:txBody>
-          <a:bodyPr wrap="square" lIns="0" tIns="0" rIns="0" bIns="0" rtlCol="0" anchor="ctr"/>
-          <a:lstStyle/>
-          <a:p>
-            <a:pPr indent="0" marL="0">
-              <a:buNone/>
-            </a:pPr>
-            <a:r>
-              <a:rPr lang="en-US" sz="1100" dirty="0">
-                <a:solidFill>
-                  <a:srgbClr val="A8A6A0"/>
+              <a:t>03</a:t>
+            </a:r>
+            <a:endParaRPr lang="en-US" sz="1100" dirty="0"/>
+          </a:p>
+        </p:txBody>
+      </p:sp>
+      <p:sp>
+        <p:nvSpPr>
+          <p:cNvPr id="17" name="Text 15"/>
+          <p:cNvSpPr/>
+          <p:nvPr/>
+        </p:nvSpPr>
+        <p:spPr>
+          <a:xfrm>
+            <a:off x="914400" y="3566160"/>
+            <a:ext cx="7680960" cy="365760"/>
+          </a:xfrm>
+          <a:prstGeom prst="rect">
+            <a:avLst/>
+          </a:prstGeom>
+          <a:noFill/>
+          <a:ln/>
+        </p:spPr>
+        <p:txBody>
+          <a:bodyPr wrap="square" lIns="0" tIns="0" rIns="0" bIns="0" rtlCol="0" anchor="ctr"/>
+          <a:lstStyle/>
+          <a:p>
+            <a:pPr indent="0" marL="0">
+              <a:buNone/>
+            </a:pPr>
+            <a:r>
+              <a:rPr lang="en-US" sz="1300" b="1" dirty="0">
+                <a:solidFill>
+                  <a:srgbClr val="E9E6DF"/>
                 </a:solidFill>
                 <a:latin typeface="Calibri" pitchFamily="34" charset="0"/>
                 <a:ea typeface="Calibri" pitchFamily="34" charset="-122"/>
                 <a:cs typeface="Calibri" pitchFamily="34" charset="-120"/>
               </a:rPr>
-              <a:t>Pred: BJP/GJM 10 · TMC 3</a:t>
-            </a:r>
-            <a:endParaRPr lang="en-US" sz="1100" dirty="0"/>
-          </a:p>
-        </p:txBody>
-      </p:sp>
-      <p:sp>
-        <p:nvSpPr>
-          <p:cNvPr id="19" name="Text 16"/>
-          <p:cNvSpPr/>
-          <p:nvPr/>
-        </p:nvSpPr>
-        <p:spPr>
-          <a:xfrm>
-            <a:off x="3749040" y="3730752"/>
-            <a:ext cx="2651760" cy="237744"/>
-          </a:xfrm>
-          <a:prstGeom prst="rect">
-            <a:avLst/>
-          </a:prstGeom>
-          <a:noFill/>
-          <a:ln/>
-        </p:spPr>
-        <p:txBody>
-          <a:bodyPr wrap="square" lIns="0" tIns="0" rIns="0" bIns="0" rtlCol="0" anchor="ctr"/>
-          <a:lstStyle/>
-          <a:p>
-            <a:pPr indent="0" marL="0">
-              <a:buNone/>
-            </a:pPr>
-            <a:r>
-              <a:rPr lang="en-US" sz="1100" dirty="0">
-                <a:solidFill>
-                  <a:srgbClr val="A8A6A0"/>
+              <a:t>SIR weight too small.</a:t>
+            </a:r>
+            <a:endParaRPr lang="en-US" sz="1300" dirty="0"/>
+          </a:p>
+        </p:txBody>
+      </p:sp>
+      <p:sp>
+        <p:nvSpPr>
+          <p:cNvPr id="18" name="Text 16"/>
+          <p:cNvSpPr/>
+          <p:nvPr/>
+        </p:nvSpPr>
+        <p:spPr>
+          <a:xfrm>
+            <a:off x="914400" y="3931920"/>
+            <a:ext cx="7680960" cy="594360"/>
+          </a:xfrm>
+          <a:prstGeom prst="rect">
+            <a:avLst/>
+          </a:prstGeom>
+          <a:noFill/>
+          <a:ln/>
+        </p:spPr>
+        <p:txBody>
+          <a:bodyPr wrap="square" lIns="0" tIns="0" rIns="0" bIns="0" rtlCol="0" anchor="ctr"/>
+          <a:lstStyle/>
+          <a:p>
+            <a:pPr indent="0" marL="0">
+              <a:buNone/>
+            </a:pPr>
+            <a:r>
+              <a:rPr lang="en-US" sz="1300" dirty="0">
+                <a:solidFill>
+                  <a:srgbClr val="C9C7C0"/>
                 </a:solidFill>
                 <a:latin typeface="Calibri" pitchFamily="34" charset="0"/>
                 <a:ea typeface="Calibri" pitchFamily="34" charset="-122"/>
                 <a:cs typeface="Calibri" pitchFamily="34" charset="-120"/>
               </a:rPr>
-              <a:t>Act:  BJP/GJM 10 · TMC 2 · Oth 1</a:t>
-            </a:r>
-            <a:endParaRPr lang="en-US" sz="1100" dirty="0"/>
-          </a:p>
-        </p:txBody>
-      </p:sp>
-      <p:sp>
-        <p:nvSpPr>
-          <p:cNvPr id="20" name="Text 17"/>
-          <p:cNvSpPr/>
-          <p:nvPr/>
-        </p:nvSpPr>
-        <p:spPr>
-          <a:xfrm>
-            <a:off x="6583680" y="1554480"/>
-            <a:ext cx="2240280" cy="201168"/>
-          </a:xfrm>
-          <a:prstGeom prst="rect">
-            <a:avLst/>
-          </a:prstGeom>
-          <a:noFill/>
-          <a:ln/>
-        </p:spPr>
-        <p:txBody>
-          <a:bodyPr wrap="square" lIns="0" tIns="0" rIns="0" bIns="0" rtlCol="0" anchor="ctr"/>
-          <a:lstStyle/>
-          <a:p>
-            <a:pPr indent="0" marL="0">
-              <a:buNone/>
-            </a:pPr>
-            <a:r>
-              <a:rPr lang="en-US" sz="900" spc="150" kern="0" dirty="0">
-                <a:solidFill>
-                  <a:srgbClr val="9A9997"/>
-                </a:solidFill>
-                <a:latin typeface="Courier New" pitchFamily="34" charset="0"/>
-                <a:ea typeface="Courier New" pitchFamily="34" charset="-122"/>
-                <a:cs typeface="Courier New" pitchFamily="34" charset="-120"/>
-              </a:rPr>
-              <a:t>THE FACTOR</a:t>
-            </a:r>
-            <a:endParaRPr lang="en-US" sz="900" dirty="0"/>
-          </a:p>
-        </p:txBody>
-      </p:sp>
-      <p:sp>
-        <p:nvSpPr>
-          <p:cNvPr id="21" name="Text 18"/>
-          <p:cNvSpPr/>
-          <p:nvPr/>
-        </p:nvSpPr>
-        <p:spPr>
-          <a:xfrm>
-            <a:off x="6583680" y="1828800"/>
-            <a:ext cx="2240280" cy="457200"/>
-          </a:xfrm>
-          <a:prstGeom prst="rect">
-            <a:avLst/>
-          </a:prstGeom>
-          <a:noFill/>
-          <a:ln/>
-        </p:spPr>
-        <p:txBody>
-          <a:bodyPr wrap="square" lIns="0" tIns="0" rIns="0" bIns="0" rtlCol="0" anchor="ctr"/>
-          <a:lstStyle/>
-          <a:p>
-            <a:pPr indent="0" marL="0">
-              <a:buNone/>
-            </a:pPr>
-            <a:r>
-              <a:rPr lang="en-US" sz="1400" b="1" dirty="0">
-                <a:solidFill>
-                  <a:srgbClr val="E9E6DF"/>
-                </a:solidFill>
-                <a:latin typeface="Calibri" pitchFamily="34" charset="0"/>
-                <a:ea typeface="Calibri" pitchFamily="34" charset="-122"/>
-                <a:cs typeface="Calibri" pitchFamily="34" charset="-120"/>
-              </a:rPr>
-              <a:t>Correctly predicted.</a:t>
-            </a:r>
-            <a:endParaRPr lang="en-US" sz="1400" dirty="0"/>
-          </a:p>
-        </p:txBody>
-      </p:sp>
-      <p:sp>
-        <p:nvSpPr>
-          <p:cNvPr id="22" name="Text 19"/>
-          <p:cNvSpPr/>
-          <p:nvPr/>
-        </p:nvSpPr>
-        <p:spPr>
-          <a:xfrm>
-            <a:off x="6583680" y="2423160"/>
-            <a:ext cx="2240280" cy="2011680"/>
-          </a:xfrm>
-          <a:prstGeom prst="rect">
-            <a:avLst/>
-          </a:prstGeom>
-          <a:noFill/>
-          <a:ln/>
-        </p:spPr>
-        <p:txBody>
-          <a:bodyPr wrap="square" lIns="0" tIns="0" rIns="0" bIns="0" rtlCol="0" anchor="ctr"/>
-          <a:lstStyle/>
-          <a:p>
-            <a:pPr indent="0" marL="0">
-              <a:buNone/>
-            </a:pPr>
-            <a:r>
-              <a:rPr lang="en-US" sz="1200" dirty="0">
-                <a:solidFill>
-                  <a:srgbClr val="C9C7C0"/>
-                </a:solidFill>
-                <a:latin typeface="Calibri" pitchFamily="34" charset="0"/>
-                <a:ea typeface="Calibri" pitchFamily="34" charset="-122"/>
-                <a:cs typeface="Calibri" pitchFamily="34" charset="-120"/>
-              </a:rPr>
-              <a:t>BJP/GJM alliance worked as modelled.</a:t>
-            </a:r>
-            <a:endParaRPr lang="en-US" sz="1200" dirty="0"/>
-          </a:p>
-        </p:txBody>
-      </p:sp>
-      <p:sp>
-        <p:nvSpPr>
-          <p:cNvPr id="23" name="Text 20"/>
-          <p:cNvSpPr/>
-          <p:nvPr/>
-        </p:nvSpPr>
-        <p:spPr>
-          <a:xfrm>
-            <a:off x="6583680" y="4160520"/>
-            <a:ext cx="2240280" cy="274320"/>
-          </a:xfrm>
-          <a:prstGeom prst="rect">
-            <a:avLst/>
-          </a:prstGeom>
-          <a:noFill/>
-          <a:ln/>
-        </p:spPr>
-        <p:txBody>
-          <a:bodyPr wrap="square" lIns="0" tIns="0" rIns="0" bIns="0" rtlCol="0" anchor="ctr"/>
-          <a:lstStyle/>
-          <a:p>
-            <a:pPr indent="0" marL="0">
-              <a:buNone/>
-            </a:pPr>
-            <a:r>
-              <a:rPr lang="en-US" sz="1000" spc="150" kern="0" dirty="0">
-                <a:solidFill>
-                  <a:srgbClr val="9A9997"/>
-                </a:solidFill>
-                <a:latin typeface="Courier New" pitchFamily="34" charset="0"/>
-                <a:ea typeface="Courier New" pitchFamily="34" charset="-122"/>
-                <a:cs typeface="Courier New" pitchFamily="34" charset="-120"/>
-              </a:rPr>
-              <a:t>13 SEATS</a:t>
-            </a:r>
-            <a:endParaRPr lang="en-US" sz="1000" dirty="0"/>
+              <a:t>Modelled as marginal; reality showed structural turnout asymmetry across all Muslim-majority clusters.</a:t>
+            </a:r>
+            <a:endParaRPr lang="en-US" sz="1300" dirty="0"/>
           </a:p>
         </p:txBody>
       </p:sp>
@@ -6608,643 +6340,6 @@
       </p:grpSpPr>
       <p:sp>
         <p:nvSpPr>
-          <p:cNvPr id="2" name="Shape 0"/>
-          <p:cNvSpPr/>
-          <p:nvPr/>
-        </p:nvSpPr>
-        <p:spPr>
-          <a:xfrm>
-            <a:off x="8522208" y="128016"/>
-            <a:ext cx="329184" cy="329184"/>
-          </a:xfrm>
-          <a:prstGeom prst="ellipse">
-            <a:avLst/>
-          </a:prstGeom>
-          <a:solidFill>
-            <a:srgbClr val="050505"/>
-          </a:solidFill>
-          <a:ln w="19050">
-            <a:solidFill>
-              <a:srgbClr val="A8FF3E"/>
-            </a:solidFill>
-            <a:prstDash val="solid"/>
-          </a:ln>
-        </p:spPr>
-      </p:sp>
-      <p:sp>
-        <p:nvSpPr>
-          <p:cNvPr id="3" name="Shape 1"/>
-          <p:cNvSpPr/>
-          <p:nvPr/>
-        </p:nvSpPr>
-        <p:spPr>
-          <a:xfrm>
-            <a:off x="8595360" y="201168"/>
-            <a:ext cx="182880" cy="182880"/>
-          </a:xfrm>
-          <a:prstGeom prst="ellipse">
-            <a:avLst/>
-          </a:prstGeom>
-          <a:solidFill>
-            <a:srgbClr val="050505"/>
-          </a:solidFill>
-          <a:ln w="12700">
-            <a:solidFill>
-              <a:srgbClr val="A8FF3E"/>
-            </a:solidFill>
-            <a:prstDash val="solid"/>
-          </a:ln>
-        </p:spPr>
-      </p:sp>
-      <p:sp>
-        <p:nvSpPr>
-          <p:cNvPr id="4" name="Shape 2"/>
-          <p:cNvSpPr/>
-          <p:nvPr/>
-        </p:nvSpPr>
-        <p:spPr>
-          <a:xfrm>
-            <a:off x="8650224" y="256032"/>
-            <a:ext cx="73152" cy="73152"/>
-          </a:xfrm>
-          <a:prstGeom prst="ellipse">
-            <a:avLst/>
-          </a:prstGeom>
-          <a:solidFill>
-            <a:srgbClr val="A8FF3E"/>
-          </a:solidFill>
-          <a:ln w="12700">
-            <a:solidFill>
-              <a:srgbClr val="A8FF3E"/>
-            </a:solidFill>
-            <a:prstDash val="solid"/>
-          </a:ln>
-        </p:spPr>
-      </p:sp>
-      <p:sp>
-        <p:nvSpPr>
-          <p:cNvPr id="5" name="Text 3"/>
-          <p:cNvSpPr/>
-          <p:nvPr/>
-        </p:nvSpPr>
-        <p:spPr>
-          <a:xfrm>
-            <a:off x="457200" y="4864608"/>
-            <a:ext cx="3657600" cy="182880"/>
-          </a:xfrm>
-          <a:prstGeom prst="rect">
-            <a:avLst/>
-          </a:prstGeom>
-          <a:noFill/>
-          <a:ln/>
-        </p:spPr>
-        <p:txBody>
-          <a:bodyPr wrap="square" lIns="0" tIns="0" rIns="0" bIns="0" rtlCol="0" anchor="ctr"/>
-          <a:lstStyle/>
-          <a:p>
-            <a:pPr algn="l" indent="0" marL="0">
-              <a:buNone/>
-            </a:pPr>
-            <a:r>
-              <a:rPr lang="en-US" sz="900" dirty="0">
-                <a:solidFill>
-                  <a:srgbClr val="9A9997"/>
-                </a:solidFill>
-                <a:latin typeface="Courier New" pitchFamily="34" charset="0"/>
-                <a:ea typeface="Courier New" pitchFamily="34" charset="-122"/>
-                <a:cs typeface="Courier New" pitchFamily="34" charset="-120"/>
-              </a:rPr>
-              <a:t>Simulatte / Confidential</a:t>
-            </a:r>
-            <a:endParaRPr lang="en-US" sz="900" dirty="0"/>
-          </a:p>
-        </p:txBody>
-      </p:sp>
-      <p:sp>
-        <p:nvSpPr>
-          <p:cNvPr id="6" name="Text 4"/>
-          <p:cNvSpPr/>
-          <p:nvPr/>
-        </p:nvSpPr>
-        <p:spPr>
-          <a:xfrm>
-            <a:off x="8046720" y="4864608"/>
-            <a:ext cx="731520" cy="182880"/>
-          </a:xfrm>
-          <a:prstGeom prst="rect">
-            <a:avLst/>
-          </a:prstGeom>
-          <a:noFill/>
-          <a:ln/>
-        </p:spPr>
-        <p:txBody>
-          <a:bodyPr wrap="square" lIns="0" tIns="0" rIns="0" bIns="0" rtlCol="0" anchor="ctr"/>
-          <a:lstStyle/>
-          <a:p>
-            <a:pPr algn="r" indent="0" marL="0">
-              <a:buNone/>
-            </a:pPr>
-            <a:r>
-              <a:rPr lang="en-US" sz="900" dirty="0">
-                <a:solidFill>
-                  <a:srgbClr val="9A9997"/>
-                </a:solidFill>
-                <a:latin typeface="Courier New" pitchFamily="34" charset="0"/>
-                <a:ea typeface="Courier New" pitchFamily="34" charset="-122"/>
-                <a:cs typeface="Courier New" pitchFamily="34" charset="-120"/>
-              </a:rPr>
-              <a:t>15</a:t>
-            </a:r>
-            <a:endParaRPr lang="en-US" sz="900" dirty="0"/>
-          </a:p>
-        </p:txBody>
-      </p:sp>
-      <p:sp>
-        <p:nvSpPr>
-          <p:cNvPr id="7" name="Text 5"/>
-          <p:cNvSpPr/>
-          <p:nvPr/>
-        </p:nvSpPr>
-        <p:spPr>
-          <a:xfrm>
-            <a:off x="457200" y="201168"/>
-            <a:ext cx="7772400" cy="201168"/>
-          </a:xfrm>
-          <a:prstGeom prst="rect">
-            <a:avLst/>
-          </a:prstGeom>
-          <a:noFill/>
-          <a:ln/>
-        </p:spPr>
-        <p:txBody>
-          <a:bodyPr wrap="square" lIns="0" tIns="0" rIns="0" bIns="0" rtlCol="0" anchor="ctr"/>
-          <a:lstStyle/>
-          <a:p>
-            <a:pPr indent="0" marL="0">
-              <a:buNone/>
-            </a:pPr>
-            <a:r>
-              <a:rPr lang="en-US" sz="900" spc="200" kern="0" dirty="0">
-                <a:solidFill>
-                  <a:srgbClr val="9A9997"/>
-                </a:solidFill>
-                <a:latin typeface="Courier New" pitchFamily="34" charset="0"/>
-                <a:ea typeface="Courier New" pitchFamily="34" charset="-122"/>
-                <a:cs typeface="Courier New" pitchFamily="34" charset="-120"/>
-              </a:rPr>
-              <a:t>05 — STRUCTURAL FAILURE</a:t>
-            </a:r>
-            <a:endParaRPr lang="en-US" sz="900" dirty="0"/>
-          </a:p>
-        </p:txBody>
-      </p:sp>
-      <p:sp>
-        <p:nvSpPr>
-          <p:cNvPr id="8" name="Text 6"/>
-          <p:cNvSpPr/>
-          <p:nvPr/>
-        </p:nvSpPr>
-        <p:spPr>
-          <a:xfrm>
-            <a:off x="457200" y="566928"/>
-            <a:ext cx="7772400" cy="548640"/>
-          </a:xfrm>
-          <a:prstGeom prst="rect">
-            <a:avLst/>
-          </a:prstGeom>
-          <a:noFill/>
-          <a:ln/>
-        </p:spPr>
-        <p:txBody>
-          <a:bodyPr wrap="square" lIns="0" tIns="0" rIns="0" bIns="0" rtlCol="0" anchor="ctr"/>
-          <a:lstStyle/>
-          <a:p>
-            <a:pPr indent="0" marL="0">
-              <a:buNone/>
-            </a:pPr>
-            <a:r>
-              <a:rPr lang="en-US" sz="3200" b="1" dirty="0">
-                <a:solidFill>
-                  <a:srgbClr val="E9E6DF"/>
-                </a:solidFill>
-                <a:latin typeface="Arial Narrow" pitchFamily="34" charset="0"/>
-                <a:ea typeface="Arial Narrow" pitchFamily="34" charset="-122"/>
-                <a:cs typeface="Arial Narrow" pitchFamily="34" charset="-120"/>
-              </a:rPr>
-              <a:t>Three things to fix in the model.</a:t>
-            </a:r>
-            <a:endParaRPr lang="en-US" sz="3200" dirty="0"/>
-          </a:p>
-        </p:txBody>
-      </p:sp>
-      <p:sp>
-        <p:nvSpPr>
-          <p:cNvPr id="9" name="Shape 7"/>
-          <p:cNvSpPr/>
-          <p:nvPr/>
-        </p:nvSpPr>
-        <p:spPr>
-          <a:xfrm>
-            <a:off x="457200" y="1298448"/>
-            <a:ext cx="8229600" cy="0"/>
-          </a:xfrm>
-          <a:prstGeom prst="line">
-            <a:avLst/>
-          </a:prstGeom>
-          <a:noFill/>
-          <a:ln w="6350">
-            <a:solidFill>
-              <a:srgbClr val="9A9997"/>
-            </a:solidFill>
-            <a:prstDash val="solid"/>
-          </a:ln>
-        </p:spPr>
-      </p:sp>
-      <p:sp>
-        <p:nvSpPr>
-          <p:cNvPr id="10" name="Text 8"/>
-          <p:cNvSpPr/>
-          <p:nvPr/>
-        </p:nvSpPr>
-        <p:spPr>
-          <a:xfrm>
-            <a:off x="457200" y="1554480"/>
-            <a:ext cx="457200" cy="457200"/>
-          </a:xfrm>
-          <a:prstGeom prst="rect">
-            <a:avLst/>
-          </a:prstGeom>
-          <a:noFill/>
-          <a:ln/>
-        </p:spPr>
-        <p:txBody>
-          <a:bodyPr wrap="square" lIns="0" tIns="0" rIns="0" bIns="0" rtlCol="0" anchor="ctr"/>
-          <a:lstStyle/>
-          <a:p>
-            <a:pPr indent="0" marL="0">
-              <a:buNone/>
-            </a:pPr>
-            <a:r>
-              <a:rPr lang="en-US" sz="1100" dirty="0">
-                <a:solidFill>
-                  <a:srgbClr val="9A9997"/>
-                </a:solidFill>
-                <a:latin typeface="Courier New" pitchFamily="34" charset="0"/>
-                <a:ea typeface="Courier New" pitchFamily="34" charset="-122"/>
-                <a:cs typeface="Courier New" pitchFamily="34" charset="-120"/>
-              </a:rPr>
-              <a:t>01</a:t>
-            </a:r>
-            <a:endParaRPr lang="en-US" sz="1100" dirty="0"/>
-          </a:p>
-        </p:txBody>
-      </p:sp>
-      <p:sp>
-        <p:nvSpPr>
-          <p:cNvPr id="11" name="Text 9"/>
-          <p:cNvSpPr/>
-          <p:nvPr/>
-        </p:nvSpPr>
-        <p:spPr>
-          <a:xfrm>
-            <a:off x="914400" y="1554480"/>
-            <a:ext cx="7680960" cy="365760"/>
-          </a:xfrm>
-          <a:prstGeom prst="rect">
-            <a:avLst/>
-          </a:prstGeom>
-          <a:noFill/>
-          <a:ln/>
-        </p:spPr>
-        <p:txBody>
-          <a:bodyPr wrap="square" lIns="0" tIns="0" rIns="0" bIns="0" rtlCol="0" anchor="ctr"/>
-          <a:lstStyle/>
-          <a:p>
-            <a:pPr indent="0" marL="0">
-              <a:buNone/>
-            </a:pPr>
-            <a:r>
-              <a:rPr lang="en-US" sz="1300" b="1" dirty="0">
-                <a:solidFill>
-                  <a:srgbClr val="E9E6DF"/>
-                </a:solidFill>
-                <a:latin typeface="Calibri" pitchFamily="34" charset="0"/>
-                <a:ea typeface="Calibri" pitchFamily="34" charset="-122"/>
-                <a:cs typeface="Calibri" pitchFamily="34" charset="-120"/>
-              </a:rPr>
-              <a:t>Anchoring on 2021 baseline.</a:t>
-            </a:r>
-            <a:endParaRPr lang="en-US" sz="1300" dirty="0"/>
-          </a:p>
-        </p:txBody>
-      </p:sp>
-      <p:sp>
-        <p:nvSpPr>
-          <p:cNvPr id="12" name="Text 10"/>
-          <p:cNvSpPr/>
-          <p:nvPr/>
-        </p:nvSpPr>
-        <p:spPr>
-          <a:xfrm>
-            <a:off x="914400" y="1920240"/>
-            <a:ext cx="7680960" cy="594360"/>
-          </a:xfrm>
-          <a:prstGeom prst="rect">
-            <a:avLst/>
-          </a:prstGeom>
-          <a:noFill/>
-          <a:ln/>
-        </p:spPr>
-        <p:txBody>
-          <a:bodyPr wrap="square" lIns="0" tIns="0" rIns="0" bIns="0" rtlCol="0" anchor="ctr"/>
-          <a:lstStyle/>
-          <a:p>
-            <a:pPr indent="0" marL="0">
-              <a:buNone/>
-            </a:pPr>
-            <a:r>
-              <a:rPr lang="en-US" sz="1300" dirty="0">
-                <a:solidFill>
-                  <a:srgbClr val="C9C7C0"/>
-                </a:solidFill>
-                <a:latin typeface="Calibri" pitchFamily="34" charset="0"/>
-                <a:ea typeface="Calibri" pitchFamily="34" charset="-122"/>
-                <a:cs typeface="Calibri" pitchFamily="34" charset="-120"/>
-              </a:rPr>
-              <a:t>Uniform-swing assumed corrections of 10-20pp; realised swing was 25-30pp.</a:t>
-            </a:r>
-            <a:endParaRPr lang="en-US" sz="1300" dirty="0"/>
-          </a:p>
-        </p:txBody>
-      </p:sp>
-      <p:sp>
-        <p:nvSpPr>
-          <p:cNvPr id="13" name="Text 11"/>
-          <p:cNvSpPr/>
-          <p:nvPr/>
-        </p:nvSpPr>
-        <p:spPr>
-          <a:xfrm>
-            <a:off x="457200" y="2560320"/>
-            <a:ext cx="457200" cy="457200"/>
-          </a:xfrm>
-          <a:prstGeom prst="rect">
-            <a:avLst/>
-          </a:prstGeom>
-          <a:noFill/>
-          <a:ln/>
-        </p:spPr>
-        <p:txBody>
-          <a:bodyPr wrap="square" lIns="0" tIns="0" rIns="0" bIns="0" rtlCol="0" anchor="ctr"/>
-          <a:lstStyle/>
-          <a:p>
-            <a:pPr indent="0" marL="0">
-              <a:buNone/>
-            </a:pPr>
-            <a:r>
-              <a:rPr lang="en-US" sz="1100" dirty="0">
-                <a:solidFill>
-                  <a:srgbClr val="9A9997"/>
-                </a:solidFill>
-                <a:latin typeface="Courier New" pitchFamily="34" charset="0"/>
-                <a:ea typeface="Courier New" pitchFamily="34" charset="-122"/>
-                <a:cs typeface="Courier New" pitchFamily="34" charset="-120"/>
-              </a:rPr>
-              <a:t>02</a:t>
-            </a:r>
-            <a:endParaRPr lang="en-US" sz="1100" dirty="0"/>
-          </a:p>
-        </p:txBody>
-      </p:sp>
-      <p:sp>
-        <p:nvSpPr>
-          <p:cNvPr id="14" name="Text 12"/>
-          <p:cNvSpPr/>
-          <p:nvPr/>
-        </p:nvSpPr>
-        <p:spPr>
-          <a:xfrm>
-            <a:off x="914400" y="2560320"/>
-            <a:ext cx="7680960" cy="365760"/>
-          </a:xfrm>
-          <a:prstGeom prst="rect">
-            <a:avLst/>
-          </a:prstGeom>
-          <a:noFill/>
-          <a:ln/>
-        </p:spPr>
-        <p:txBody>
-          <a:bodyPr wrap="square" lIns="0" tIns="0" rIns="0" bIns="0" rtlCol="0" anchor="ctr"/>
-          <a:lstStyle/>
-          <a:p>
-            <a:pPr indent="0" marL="0">
-              <a:buNone/>
-            </a:pPr>
-            <a:r>
-              <a:rPr lang="en-US" sz="1300" b="1" dirty="0">
-                <a:solidFill>
-                  <a:srgbClr val="E9E6DF"/>
-                </a:solidFill>
-                <a:latin typeface="Calibri" pitchFamily="34" charset="0"/>
-                <a:ea typeface="Calibri" pitchFamily="34" charset="-122"/>
-                <a:cs typeface="Calibri" pitchFamily="34" charset="-120"/>
-              </a:rPr>
-              <a:t>Hindu consolidation modelled as localized.</a:t>
-            </a:r>
-            <a:endParaRPr lang="en-US" sz="1300" dirty="0"/>
-          </a:p>
-        </p:txBody>
-      </p:sp>
-      <p:sp>
-        <p:nvSpPr>
-          <p:cNvPr id="15" name="Text 13"/>
-          <p:cNvSpPr/>
-          <p:nvPr/>
-        </p:nvSpPr>
-        <p:spPr>
-          <a:xfrm>
-            <a:off x="914400" y="2926080"/>
-            <a:ext cx="7680960" cy="594360"/>
-          </a:xfrm>
-          <a:prstGeom prst="rect">
-            <a:avLst/>
-          </a:prstGeom>
-          <a:noFill/>
-          <a:ln/>
-        </p:spPr>
-        <p:txBody>
-          <a:bodyPr wrap="square" lIns="0" tIns="0" rIns="0" bIns="0" rtlCol="0" anchor="ctr"/>
-          <a:lstStyle/>
-          <a:p>
-            <a:pPr indent="0" marL="0">
-              <a:buNone/>
-            </a:pPr>
-            <a:r>
-              <a:rPr lang="en-US" sz="1300" dirty="0">
-                <a:solidFill>
-                  <a:srgbClr val="C9C7C0"/>
-                </a:solidFill>
-                <a:latin typeface="Calibri" pitchFamily="34" charset="0"/>
-                <a:ea typeface="Calibri" pitchFamily="34" charset="-122"/>
-                <a:cs typeface="Calibri" pitchFamily="34" charset="-120"/>
-              </a:rPr>
-              <a:t>The data shows it was the dominant statewide frame.</a:t>
-            </a:r>
-            <a:endParaRPr lang="en-US" sz="1300" dirty="0"/>
-          </a:p>
-        </p:txBody>
-      </p:sp>
-      <p:sp>
-        <p:nvSpPr>
-          <p:cNvPr id="16" name="Text 14"/>
-          <p:cNvSpPr/>
-          <p:nvPr/>
-        </p:nvSpPr>
-        <p:spPr>
-          <a:xfrm>
-            <a:off x="457200" y="3566160"/>
-            <a:ext cx="457200" cy="457200"/>
-          </a:xfrm>
-          <a:prstGeom prst="rect">
-            <a:avLst/>
-          </a:prstGeom>
-          <a:noFill/>
-          <a:ln/>
-        </p:spPr>
-        <p:txBody>
-          <a:bodyPr wrap="square" lIns="0" tIns="0" rIns="0" bIns="0" rtlCol="0" anchor="ctr"/>
-          <a:lstStyle/>
-          <a:p>
-            <a:pPr indent="0" marL="0">
-              <a:buNone/>
-            </a:pPr>
-            <a:r>
-              <a:rPr lang="en-US" sz="1100" dirty="0">
-                <a:solidFill>
-                  <a:srgbClr val="9A9997"/>
-                </a:solidFill>
-                <a:latin typeface="Courier New" pitchFamily="34" charset="0"/>
-                <a:ea typeface="Courier New" pitchFamily="34" charset="-122"/>
-                <a:cs typeface="Courier New" pitchFamily="34" charset="-120"/>
-              </a:rPr>
-              <a:t>03</a:t>
-            </a:r>
-            <a:endParaRPr lang="en-US" sz="1100" dirty="0"/>
-          </a:p>
-        </p:txBody>
-      </p:sp>
-      <p:sp>
-        <p:nvSpPr>
-          <p:cNvPr id="17" name="Text 15"/>
-          <p:cNvSpPr/>
-          <p:nvPr/>
-        </p:nvSpPr>
-        <p:spPr>
-          <a:xfrm>
-            <a:off x="914400" y="3566160"/>
-            <a:ext cx="7680960" cy="365760"/>
-          </a:xfrm>
-          <a:prstGeom prst="rect">
-            <a:avLst/>
-          </a:prstGeom>
-          <a:noFill/>
-          <a:ln/>
-        </p:spPr>
-        <p:txBody>
-          <a:bodyPr wrap="square" lIns="0" tIns="0" rIns="0" bIns="0" rtlCol="0" anchor="ctr"/>
-          <a:lstStyle/>
-          <a:p>
-            <a:pPr indent="0" marL="0">
-              <a:buNone/>
-            </a:pPr>
-            <a:r>
-              <a:rPr lang="en-US" sz="1300" b="1" dirty="0">
-                <a:solidFill>
-                  <a:srgbClr val="E9E6DF"/>
-                </a:solidFill>
-                <a:latin typeface="Calibri" pitchFamily="34" charset="0"/>
-                <a:ea typeface="Calibri" pitchFamily="34" charset="-122"/>
-                <a:cs typeface="Calibri" pitchFamily="34" charset="-120"/>
-              </a:rPr>
-              <a:t>SIR weight too small.</a:t>
-            </a:r>
-            <a:endParaRPr lang="en-US" sz="1300" dirty="0"/>
-          </a:p>
-        </p:txBody>
-      </p:sp>
-      <p:sp>
-        <p:nvSpPr>
-          <p:cNvPr id="18" name="Text 16"/>
-          <p:cNvSpPr/>
-          <p:nvPr/>
-        </p:nvSpPr>
-        <p:spPr>
-          <a:xfrm>
-            <a:off x="914400" y="3931920"/>
-            <a:ext cx="7680960" cy="594360"/>
-          </a:xfrm>
-          <a:prstGeom prst="rect">
-            <a:avLst/>
-          </a:prstGeom>
-          <a:noFill/>
-          <a:ln/>
-        </p:spPr>
-        <p:txBody>
-          <a:bodyPr wrap="square" lIns="0" tIns="0" rIns="0" bIns="0" rtlCol="0" anchor="ctr"/>
-          <a:lstStyle/>
-          <a:p>
-            <a:pPr indent="0" marL="0">
-              <a:buNone/>
-            </a:pPr>
-            <a:r>
-              <a:rPr lang="en-US" sz="1300" dirty="0">
-                <a:solidFill>
-                  <a:srgbClr val="C9C7C0"/>
-                </a:solidFill>
-                <a:latin typeface="Calibri" pitchFamily="34" charset="0"/>
-                <a:ea typeface="Calibri" pitchFamily="34" charset="-122"/>
-                <a:cs typeface="Calibri" pitchFamily="34" charset="-120"/>
-              </a:rPr>
-              <a:t>Modelled as marginal; reality showed structural turnout asymmetry across all Muslim-majority clusters.</a:t>
-            </a:r>
-            <a:endParaRPr lang="en-US" sz="1300" dirty="0"/>
-          </a:p>
-        </p:txBody>
-      </p:sp>
-    </p:spTree>
-  </p:cSld>
-  <p:clrMapOvr>
-    <a:masterClrMapping/>
-  </p:clrMapOvr>
-</p:sld>
-</file>
-
-<file path=ppt/slides/slide16.xml><?xml version="1.0" encoding="utf-8"?>
-<p:sld xmlns:a="http://schemas.openxmlformats.org/drawingml/2006/main" xmlns:r="http://schemas.openxmlformats.org/officeDocument/2006/relationships" xmlns:p="http://schemas.openxmlformats.org/presentationml/2006/main">
-  <p:cSld name="Slide 16">
-    <p:bg>
-      <p:bgPr>
-        <a:solidFill>
-          <a:srgbClr val="050505"/>
-        </a:solidFill>
-      </p:bgPr>
-    </p:bg>
-    <p:spTree>
-      <p:nvGrpSpPr>
-        <p:cNvPr id="1" name=""/>
-        <p:cNvGrpSpPr/>
-        <p:nvPr/>
-      </p:nvGrpSpPr>
-      <p:grpSpPr>
-        <a:xfrm>
-          <a:off x="0" y="0"/>
-          <a:ext cx="0" cy="0"/>
-          <a:chOff x="0" y="0"/>
-          <a:chExt cx="0" cy="0"/>
-        </a:xfrm>
-      </p:grpSpPr>
-      <p:sp>
-        <p:nvSpPr>
           <p:cNvPr id="2" name="Text 0"/>
           <p:cNvSpPr/>
           <p:nvPr/>
@@ -9075,7 +8170,7 @@
                 <a:ea typeface="Courier New" pitchFamily="34" charset="-122"/>
                 <a:cs typeface="Courier New" pitchFamily="34" charset="-120"/>
               </a:rPr>
-              <a:t>03 — 294 ASSEMBLY SEATS  |  PREDICTED WINNER  |  WEST BENGAL 2026</a:t>
+              <a:t>01 — PREDICTED VS ACTUAL  |  WEST BENGAL 2026</a:t>
             </a:r>
             <a:endParaRPr lang="en-US" sz="900" dirty="0"/>
           </a:p>
@@ -9106,7 +8201,7 @@
               <a:buNone/>
             </a:pPr>
             <a:r>
-              <a:rPr lang="en-US" sz="3600" b="1" dirty="0">
+              <a:rPr lang="en-US" sz="3200" b="1" dirty="0">
                 <a:solidFill>
                   <a:srgbClr val="E9E6DF"/>
                 </a:solidFill>
@@ -9114,40 +8209,37 @@
                 <a:ea typeface="Arial Narrow" pitchFamily="34" charset="-122"/>
                 <a:cs typeface="Arial Narrow" pitchFamily="34" charset="-120"/>
               </a:rPr>
-              <a:t>TMC holds the</a:t>
-            </a:r>
-            <a:pPr indent="0" marL="0">
-              <a:buNone/>
-            </a:pPr>
-            <a:r>
-              <a:rPr lang="en-US" sz="3600" b="1" dirty="0">
-                <a:solidFill>
-                  <a:srgbClr val="000000"/>
+              <a:t>We staked </a:t>
+            </a:r>
+            <a:pPr indent="0" marL="0">
+              <a:buNone/>
+            </a:pPr>
+            <a:r>
+              <a:rPr lang="en-US" sz="3200" b="1" dirty="0">
+                <a:solidFill>
+                  <a:srgbClr val="A8FF3E"/>
                 </a:solidFill>
                 <a:latin typeface="Arial Narrow" pitchFamily="34" charset="0"/>
                 <a:ea typeface="Arial Narrow" pitchFamily="34" charset="-122"/>
                 <a:cs typeface="Arial Narrow" pitchFamily="34" charset="-120"/>
               </a:rPr>
-              <a:t> </a:t>
-            </a:r>
-            <a:pPr indent="0" marL="0">
-              <a:buNone/>
-            </a:pPr>
-            <a:pPr indent="0" marL="0">
-              <a:buNone/>
-            </a:pPr>
-            <a:r>
-              <a:rPr lang="en-US" sz="3600" b="1" dirty="0">
-                <a:solidFill>
-                  <a:srgbClr val="A8FF3E"/>
+              <a:t>TMC.</a:t>
+            </a:r>
+            <a:pPr indent="0" marL="0">
+              <a:buNone/>
+            </a:pPr>
+            <a:r>
+              <a:rPr lang="en-US" sz="3200" b="1" dirty="0">
+                <a:solidFill>
+                  <a:srgbClr val="E9E6DF"/>
                 </a:solidFill>
                 <a:latin typeface="Arial Narrow" pitchFamily="34" charset="0"/>
                 <a:ea typeface="Arial Narrow" pitchFamily="34" charset="-122"/>
                 <a:cs typeface="Arial Narrow" pitchFamily="34" charset="-120"/>
               </a:rPr>
-              <a:t>map.</a:t>
-            </a:r>
-            <a:endParaRPr lang="en-US" sz="3600" dirty="0"/>
+              <a:t> Bengal voted otherwise.</a:t>
+            </a:r>
+            <a:endParaRPr lang="en-US" sz="3200" dirty="0"/>
           </a:p>
         </p:txBody>
       </p:sp>
@@ -9160,23 +8252,23 @@
         <p:spPr>
           <a:xfrm>
             <a:off x="365760" y="1097280"/>
-            <a:ext cx="2560320" cy="182880"/>
-          </a:xfrm>
-          <a:prstGeom prst="rect">
-            <a:avLst/>
-          </a:prstGeom>
-          <a:noFill/>
-          <a:ln/>
-        </p:spPr>
-        <p:txBody>
-          <a:bodyPr wrap="square" lIns="0" tIns="0" rIns="0" bIns="0" rtlCol="0" anchor="ctr"/>
-          <a:lstStyle/>
-          <a:p>
-            <a:pPr indent="0" marL="0">
-              <a:buNone/>
-            </a:pPr>
-            <a:r>
-              <a:rPr lang="en-US" sz="900" spc="200" kern="0" dirty="0">
+            <a:ext cx="4023360" cy="201168"/>
+          </a:xfrm>
+          <a:prstGeom prst="rect">
+            <a:avLst/>
+          </a:prstGeom>
+          <a:noFill/>
+          <a:ln/>
+        </p:spPr>
+        <p:txBody>
+          <a:bodyPr wrap="square" lIns="0" tIns="0" rIns="0" bIns="0" rtlCol="0" anchor="ctr"/>
+          <a:lstStyle/>
+          <a:p>
+            <a:pPr indent="0" marL="0">
+              <a:buNone/>
+            </a:pPr>
+            <a:r>
+              <a:rPr lang="en-US" sz="1000" spc="200" kern="0" dirty="0">
                 <a:solidFill>
                   <a:srgbClr val="9A9997"/>
                 </a:solidFill>
@@ -9184,54 +8276,15 @@
                 <a:ea typeface="Courier New" pitchFamily="34" charset="-122"/>
                 <a:cs typeface="Courier New" pitchFamily="34" charset="-120"/>
               </a:rPr>
-              <a:t>SEAT DISTRIBUTION</a:t>
-            </a:r>
-            <a:endParaRPr lang="en-US" sz="900" dirty="0"/>
-          </a:p>
-        </p:txBody>
-      </p:sp>
-      <p:sp>
-        <p:nvSpPr>
-          <p:cNvPr id="10" name="Text 8"/>
-          <p:cNvSpPr/>
-          <p:nvPr/>
-        </p:nvSpPr>
-        <p:spPr>
-          <a:xfrm>
-            <a:off x="365760" y="1298448"/>
-            <a:ext cx="2560320" cy="310896"/>
-          </a:xfrm>
-          <a:prstGeom prst="rect">
-            <a:avLst/>
-          </a:prstGeom>
-          <a:noFill/>
-          <a:ln/>
-        </p:spPr>
-        <p:txBody>
-          <a:bodyPr wrap="square" lIns="0" tIns="0" rIns="0" bIns="0" rtlCol="0" anchor="ctr"/>
-          <a:lstStyle/>
-          <a:p>
-            <a:pPr indent="0" marL="0">
-              <a:buNone/>
-            </a:pPr>
-            <a:r>
-              <a:rPr lang="en-US" sz="2200" dirty="0">
-                <a:solidFill>
-                  <a:srgbClr val="E9E6DF"/>
-                </a:solidFill>
-                <a:latin typeface="Arial Narrow" pitchFamily="34" charset="0"/>
-                <a:ea typeface="Arial Narrow" pitchFamily="34" charset="-122"/>
-                <a:cs typeface="Arial Narrow" pitchFamily="34" charset="-120"/>
-              </a:rPr>
-              <a:t>294  /  TMC 194</a:t>
-            </a:r>
-            <a:endParaRPr lang="en-US" sz="2200" dirty="0"/>
+              <a:t>PREDICTED</a:t>
+            </a:r>
+            <a:endParaRPr lang="en-US" sz="1000" dirty="0"/>
           </a:p>
         </p:txBody>
       </p:sp>
       <p:pic>
         <p:nvPicPr>
-          <p:cNvPr id="11" name="Image 0" descr="/Users/admin/Documents/Simulatte Projects/PopScale/engineering/maps/wb_predicted_hemicycle.png">    </p:cNvPr>
+          <p:cNvPr id="10" name="Image 0" descr="/Users/admin/Documents/Simulatte Projects/PopScale/engineering/maps/wb_predicted_per_ac.png">    </p:cNvPr>
           <p:cNvPicPr>
             <a:picLocks noChangeAspect="1"/>
           </p:cNvPicPr>
@@ -9244,8 +8297,8 @@
         </p:blipFill>
         <p:spPr>
           <a:xfrm>
-            <a:off x="365760" y="1645920"/>
-            <a:ext cx="2560320" cy="1417320"/>
+            <a:off x="822960" y="1325880"/>
+            <a:ext cx="3108960" cy="2743200"/>
           </a:xfrm>
           <a:prstGeom prst="rect">
             <a:avLst/>
@@ -9254,30 +8307,147 @@
       </p:pic>
       <p:sp>
         <p:nvSpPr>
+          <p:cNvPr id="11" name="Text 8"/>
+          <p:cNvSpPr/>
+          <p:nvPr/>
+        </p:nvSpPr>
+        <p:spPr>
+          <a:xfrm>
+            <a:off x="365760" y="4160520"/>
+            <a:ext cx="4023360" cy="219456"/>
+          </a:xfrm>
+          <a:prstGeom prst="rect">
+            <a:avLst/>
+          </a:prstGeom>
+          <a:noFill/>
+          <a:ln/>
+        </p:spPr>
+        <p:txBody>
+          <a:bodyPr wrap="square" lIns="0" tIns="0" rIns="0" bIns="0" rtlCol="0" anchor="ctr"/>
+          <a:lstStyle/>
+          <a:p>
+            <a:pPr algn="ctr" indent="0" marL="0">
+              <a:buNone/>
+            </a:pPr>
+            <a:r>
+              <a:rPr lang="en-US" sz="1100" dirty="0">
+                <a:solidFill>
+                  <a:srgbClr val="E9E6DF"/>
+                </a:solidFill>
+                <a:latin typeface="Calibri" pitchFamily="34" charset="0"/>
+                <a:ea typeface="Calibri" pitchFamily="34" charset="-122"/>
+                <a:cs typeface="Calibri" pitchFamily="34" charset="-120"/>
+              </a:rPr>
+              <a:t>TMC 194 · BJP 45 · INDI 50 · OTH 5</a:t>
+            </a:r>
+            <a:endParaRPr lang="en-US" sz="1100" dirty="0"/>
+          </a:p>
+        </p:txBody>
+      </p:sp>
+      <p:sp>
+        <p:nvSpPr>
           <p:cNvPr id="12" name="Text 9"/>
           <p:cNvSpPr/>
           <p:nvPr/>
         </p:nvSpPr>
         <p:spPr>
           <a:xfrm>
-            <a:off x="365760" y="3108960"/>
-            <a:ext cx="2560320" cy="182880"/>
-          </a:xfrm>
-          <a:prstGeom prst="rect">
-            <a:avLst/>
-          </a:prstGeom>
-          <a:noFill/>
-          <a:ln/>
-        </p:spPr>
-        <p:txBody>
-          <a:bodyPr wrap="square" lIns="0" tIns="0" rIns="0" bIns="0" rtlCol="0" anchor="ctr"/>
-          <a:lstStyle/>
-          <a:p>
-            <a:pPr indent="0" marL="0">
-              <a:buNone/>
-            </a:pPr>
-            <a:r>
-              <a:rPr lang="en-US" sz="800" spc="150" kern="0" dirty="0">
+            <a:off x="365760" y="4379976"/>
+            <a:ext cx="4023360" cy="219456"/>
+          </a:xfrm>
+          <a:prstGeom prst="rect">
+            <a:avLst/>
+          </a:prstGeom>
+          <a:noFill/>
+          <a:ln/>
+        </p:spPr>
+        <p:txBody>
+          <a:bodyPr wrap="square" lIns="0" tIns="0" rIns="0" bIns="0" rtlCol="0" anchor="ctr"/>
+          <a:lstStyle/>
+          <a:p>
+            <a:pPr algn="ctr" indent="0" marL="0">
+              <a:buNone/>
+            </a:pPr>
+            <a:r>
+              <a:rPr lang="en-US" sz="1100" dirty="0">
+                <a:solidFill>
+                  <a:srgbClr val="E9E6DF"/>
+                </a:solidFill>
+                <a:latin typeface="Calibri" pitchFamily="34" charset="0"/>
+                <a:ea typeface="Calibri" pitchFamily="34" charset="-122"/>
+                <a:cs typeface="Calibri" pitchFamily="34" charset="-120"/>
+              </a:rPr>
+              <a:t>TMC majority by +47</a:t>
+            </a:r>
+            <a:endParaRPr lang="en-US" sz="1100" dirty="0"/>
+          </a:p>
+        </p:txBody>
+      </p:sp>
+      <p:sp>
+        <p:nvSpPr>
+          <p:cNvPr id="13" name="Text 10"/>
+          <p:cNvSpPr/>
+          <p:nvPr/>
+        </p:nvSpPr>
+        <p:spPr>
+          <a:xfrm>
+            <a:off x="365760" y="4599432"/>
+            <a:ext cx="4023360" cy="219456"/>
+          </a:xfrm>
+          <a:prstGeom prst="rect">
+            <a:avLst/>
+          </a:prstGeom>
+          <a:noFill/>
+          <a:ln/>
+        </p:spPr>
+        <p:txBody>
+          <a:bodyPr wrap="square" lIns="0" tIns="0" rIns="0" bIns="0" rtlCol="0" anchor="ctr"/>
+          <a:lstStyle/>
+          <a:p>
+            <a:pPr algn="ctr" indent="0" marL="0">
+              <a:buNone/>
+            </a:pPr>
+            <a:r>
+              <a:rPr lang="en-US" sz="1100" dirty="0">
+                <a:solidFill>
+                  <a:srgbClr val="E9E6DF"/>
+                </a:solidFill>
+                <a:latin typeface="Calibri" pitchFamily="34" charset="0"/>
+                <a:ea typeface="Calibri" pitchFamily="34" charset="-122"/>
+                <a:cs typeface="Calibri" pitchFamily="34" charset="-120"/>
+              </a:rPr>
+              <a:t>Vote share: TMC 52% · BJP 22%</a:t>
+            </a:r>
+            <a:endParaRPr lang="en-US" sz="1100" dirty="0"/>
+          </a:p>
+        </p:txBody>
+      </p:sp>
+      <p:sp>
+        <p:nvSpPr>
+          <p:cNvPr id="14" name="Text 11"/>
+          <p:cNvSpPr/>
+          <p:nvPr/>
+        </p:nvSpPr>
+        <p:spPr>
+          <a:xfrm>
+            <a:off x="4754880" y="1097280"/>
+            <a:ext cx="4023360" cy="201168"/>
+          </a:xfrm>
+          <a:prstGeom prst="rect">
+            <a:avLst/>
+          </a:prstGeom>
+          <a:noFill/>
+          <a:ln/>
+        </p:spPr>
+        <p:txBody>
+          <a:bodyPr wrap="square" lIns="0" tIns="0" rIns="0" bIns="0" rtlCol="0" anchor="ctr"/>
+          <a:lstStyle/>
+          <a:p>
+            <a:pPr indent="0" marL="0">
+              <a:buNone/>
+            </a:pPr>
+            <a:r>
+              <a:rPr lang="en-US" sz="1000" spc="200" kern="0" dirty="0">
                 <a:solidFill>
                   <a:srgbClr val="9A9997"/>
                 </a:solidFill>
@@ -9285,466 +8455,15 @@
                 <a:ea typeface="Courier New" pitchFamily="34" charset="-122"/>
                 <a:cs typeface="Courier New" pitchFamily="34" charset="-120"/>
               </a:rPr>
-              <a:t>294 SEATS  ·  148 = MAJORITY</a:t>
-            </a:r>
-            <a:endParaRPr lang="en-US" sz="800" dirty="0"/>
-          </a:p>
-        </p:txBody>
-      </p:sp>
-      <p:sp>
-        <p:nvSpPr>
-          <p:cNvPr id="13" name="Shape 10"/>
-          <p:cNvSpPr/>
-          <p:nvPr/>
-        </p:nvSpPr>
-        <p:spPr>
-          <a:xfrm>
-            <a:off x="365760" y="3429000"/>
-            <a:ext cx="146304" cy="146304"/>
-          </a:xfrm>
-          <a:prstGeom prst="rect">
-            <a:avLst/>
-          </a:prstGeom>
-          <a:solidFill>
-            <a:srgbClr val="3FA34D"/>
-          </a:solidFill>
-          <a:ln w="12700">
-            <a:solidFill>
-              <a:srgbClr val="3FA34D"/>
-            </a:solidFill>
-            <a:prstDash val="solid"/>
-          </a:ln>
-        </p:spPr>
-      </p:sp>
-      <p:sp>
-        <p:nvSpPr>
-          <p:cNvPr id="14" name="Text 11"/>
-          <p:cNvSpPr/>
-          <p:nvPr/>
-        </p:nvSpPr>
-        <p:spPr>
-          <a:xfrm>
-            <a:off x="585216" y="3383280"/>
-            <a:ext cx="1280160" cy="237744"/>
-          </a:xfrm>
-          <a:prstGeom prst="rect">
-            <a:avLst/>
-          </a:prstGeom>
-          <a:noFill/>
-          <a:ln/>
-        </p:spPr>
-        <p:txBody>
-          <a:bodyPr wrap="square" lIns="0" tIns="0" rIns="0" bIns="0" rtlCol="0" anchor="ctr"/>
-          <a:lstStyle/>
-          <a:p>
-            <a:pPr indent="0" marL="0">
-              <a:buNone/>
-            </a:pPr>
-            <a:r>
-              <a:rPr lang="en-US" sz="1300" b="1" dirty="0">
-                <a:solidFill>
-                  <a:srgbClr val="E9E6DF"/>
-                </a:solidFill>
-                <a:latin typeface="Arial Narrow" pitchFamily="34" charset="0"/>
-                <a:ea typeface="Arial Narrow" pitchFamily="34" charset="-122"/>
-                <a:cs typeface="Arial Narrow" pitchFamily="34" charset="-120"/>
-              </a:rPr>
-              <a:t>TMC</a:t>
-            </a:r>
-            <a:endParaRPr lang="en-US" sz="1300" dirty="0"/>
-          </a:p>
-        </p:txBody>
-      </p:sp>
-      <p:sp>
-        <p:nvSpPr>
-          <p:cNvPr id="15" name="Text 12"/>
-          <p:cNvSpPr/>
-          <p:nvPr/>
-        </p:nvSpPr>
-        <p:spPr>
-          <a:xfrm>
-            <a:off x="1828800" y="3383280"/>
-            <a:ext cx="1097280" cy="237744"/>
-          </a:xfrm>
-          <a:prstGeom prst="rect">
-            <a:avLst/>
-          </a:prstGeom>
-          <a:noFill/>
-          <a:ln/>
-        </p:spPr>
-        <p:txBody>
-          <a:bodyPr wrap="square" lIns="0" tIns="0" rIns="0" bIns="0" rtlCol="0" anchor="ctr"/>
-          <a:lstStyle/>
-          <a:p>
-            <a:pPr algn="r" indent="0" marL="0">
-              <a:buNone/>
-            </a:pPr>
-            <a:r>
-              <a:rPr lang="en-US" sz="1300" b="1" dirty="0">
-                <a:solidFill>
-                  <a:srgbClr val="A8FF3E"/>
-                </a:solidFill>
-                <a:latin typeface="Arial Narrow" pitchFamily="34" charset="0"/>
-                <a:ea typeface="Arial Narrow" pitchFamily="34" charset="-122"/>
-                <a:cs typeface="Arial Narrow" pitchFamily="34" charset="-120"/>
-              </a:rPr>
-              <a:t>194</a:t>
-            </a:r>
-            <a:endParaRPr lang="en-US" sz="1300" dirty="0"/>
-          </a:p>
-        </p:txBody>
-      </p:sp>
-      <p:sp>
-        <p:nvSpPr>
-          <p:cNvPr id="16" name="Shape 13"/>
-          <p:cNvSpPr/>
-          <p:nvPr/>
-        </p:nvSpPr>
-        <p:spPr>
-          <a:xfrm>
-            <a:off x="365760" y="3721608"/>
-            <a:ext cx="146304" cy="146304"/>
-          </a:xfrm>
-          <a:prstGeom prst="rect">
-            <a:avLst/>
-          </a:prstGeom>
-          <a:solidFill>
-            <a:srgbClr val="F4A02C"/>
-          </a:solidFill>
-          <a:ln w="12700">
-            <a:solidFill>
-              <a:srgbClr val="F4A02C"/>
-            </a:solidFill>
-            <a:prstDash val="solid"/>
-          </a:ln>
-        </p:spPr>
-      </p:sp>
-      <p:sp>
-        <p:nvSpPr>
-          <p:cNvPr id="17" name="Text 14"/>
-          <p:cNvSpPr/>
-          <p:nvPr/>
-        </p:nvSpPr>
-        <p:spPr>
-          <a:xfrm>
-            <a:off x="585216" y="3675888"/>
-            <a:ext cx="1280160" cy="237744"/>
-          </a:xfrm>
-          <a:prstGeom prst="rect">
-            <a:avLst/>
-          </a:prstGeom>
-          <a:noFill/>
-          <a:ln/>
-        </p:spPr>
-        <p:txBody>
-          <a:bodyPr wrap="square" lIns="0" tIns="0" rIns="0" bIns="0" rtlCol="0" anchor="ctr"/>
-          <a:lstStyle/>
-          <a:p>
-            <a:pPr indent="0" marL="0">
-              <a:buNone/>
-            </a:pPr>
-            <a:r>
-              <a:rPr lang="en-US" sz="1300" b="1" dirty="0">
-                <a:solidFill>
-                  <a:srgbClr val="E9E6DF"/>
-                </a:solidFill>
-                <a:latin typeface="Arial Narrow" pitchFamily="34" charset="0"/>
-                <a:ea typeface="Arial Narrow" pitchFamily="34" charset="-122"/>
-                <a:cs typeface="Arial Narrow" pitchFamily="34" charset="-120"/>
-              </a:rPr>
-              <a:t>BJP</a:t>
-            </a:r>
-            <a:endParaRPr lang="en-US" sz="1300" dirty="0"/>
-          </a:p>
-        </p:txBody>
-      </p:sp>
-      <p:sp>
-        <p:nvSpPr>
-          <p:cNvPr id="18" name="Text 15"/>
-          <p:cNvSpPr/>
-          <p:nvPr/>
-        </p:nvSpPr>
-        <p:spPr>
-          <a:xfrm>
-            <a:off x="1828800" y="3675888"/>
-            <a:ext cx="1097280" cy="237744"/>
-          </a:xfrm>
-          <a:prstGeom prst="rect">
-            <a:avLst/>
-          </a:prstGeom>
-          <a:noFill/>
-          <a:ln/>
-        </p:spPr>
-        <p:txBody>
-          <a:bodyPr wrap="square" lIns="0" tIns="0" rIns="0" bIns="0" rtlCol="0" anchor="ctr"/>
-          <a:lstStyle/>
-          <a:p>
-            <a:pPr algn="r" indent="0" marL="0">
-              <a:buNone/>
-            </a:pPr>
-            <a:r>
-              <a:rPr lang="en-US" sz="1300" b="1" dirty="0">
-                <a:solidFill>
-                  <a:srgbClr val="E9E6DF"/>
-                </a:solidFill>
-                <a:latin typeface="Arial Narrow" pitchFamily="34" charset="0"/>
-                <a:ea typeface="Arial Narrow" pitchFamily="34" charset="-122"/>
-                <a:cs typeface="Arial Narrow" pitchFamily="34" charset="-120"/>
-              </a:rPr>
-              <a:t>45</a:t>
-            </a:r>
-            <a:endParaRPr lang="en-US" sz="1300" dirty="0"/>
-          </a:p>
-        </p:txBody>
-      </p:sp>
-      <p:sp>
-        <p:nvSpPr>
-          <p:cNvPr id="19" name="Shape 16"/>
-          <p:cNvSpPr/>
-          <p:nvPr/>
-        </p:nvSpPr>
-        <p:spPr>
-          <a:xfrm>
-            <a:off x="365760" y="4014216"/>
-            <a:ext cx="146304" cy="146304"/>
-          </a:xfrm>
-          <a:prstGeom prst="rect">
-            <a:avLst/>
-          </a:prstGeom>
-          <a:solidFill>
-            <a:srgbClr val="C44545"/>
-          </a:solidFill>
-          <a:ln w="12700">
-            <a:solidFill>
-              <a:srgbClr val="C44545"/>
-            </a:solidFill>
-            <a:prstDash val="solid"/>
-          </a:ln>
-        </p:spPr>
-      </p:sp>
-      <p:sp>
-        <p:nvSpPr>
-          <p:cNvPr id="20" name="Text 17"/>
-          <p:cNvSpPr/>
-          <p:nvPr/>
-        </p:nvSpPr>
-        <p:spPr>
-          <a:xfrm>
-            <a:off x="585216" y="3968496"/>
-            <a:ext cx="1280160" cy="237744"/>
-          </a:xfrm>
-          <a:prstGeom prst="rect">
-            <a:avLst/>
-          </a:prstGeom>
-          <a:noFill/>
-          <a:ln/>
-        </p:spPr>
-        <p:txBody>
-          <a:bodyPr wrap="square" lIns="0" tIns="0" rIns="0" bIns="0" rtlCol="0" anchor="ctr"/>
-          <a:lstStyle/>
-          <a:p>
-            <a:pPr indent="0" marL="0">
-              <a:buNone/>
-            </a:pPr>
-            <a:r>
-              <a:rPr lang="en-US" sz="1300" b="1" dirty="0">
-                <a:solidFill>
-                  <a:srgbClr val="E9E6DF"/>
-                </a:solidFill>
-                <a:latin typeface="Arial Narrow" pitchFamily="34" charset="0"/>
-                <a:ea typeface="Arial Narrow" pitchFamily="34" charset="-122"/>
-                <a:cs typeface="Arial Narrow" pitchFamily="34" charset="-120"/>
-              </a:rPr>
-              <a:t>INDI</a:t>
-            </a:r>
-            <a:endParaRPr lang="en-US" sz="1300" dirty="0"/>
-          </a:p>
-        </p:txBody>
-      </p:sp>
-      <p:sp>
-        <p:nvSpPr>
-          <p:cNvPr id="21" name="Text 18"/>
-          <p:cNvSpPr/>
-          <p:nvPr/>
-        </p:nvSpPr>
-        <p:spPr>
-          <a:xfrm>
-            <a:off x="1828800" y="3968496"/>
-            <a:ext cx="1097280" cy="237744"/>
-          </a:xfrm>
-          <a:prstGeom prst="rect">
-            <a:avLst/>
-          </a:prstGeom>
-          <a:noFill/>
-          <a:ln/>
-        </p:spPr>
-        <p:txBody>
-          <a:bodyPr wrap="square" lIns="0" tIns="0" rIns="0" bIns="0" rtlCol="0" anchor="ctr"/>
-          <a:lstStyle/>
-          <a:p>
-            <a:pPr algn="r" indent="0" marL="0">
-              <a:buNone/>
-            </a:pPr>
-            <a:r>
-              <a:rPr lang="en-US" sz="1300" b="1" dirty="0">
-                <a:solidFill>
-                  <a:srgbClr val="E9E6DF"/>
-                </a:solidFill>
-                <a:latin typeface="Arial Narrow" pitchFamily="34" charset="0"/>
-                <a:ea typeface="Arial Narrow" pitchFamily="34" charset="-122"/>
-                <a:cs typeface="Arial Narrow" pitchFamily="34" charset="-120"/>
-              </a:rPr>
-              <a:t>50</a:t>
-            </a:r>
-            <a:endParaRPr lang="en-US" sz="1300" dirty="0"/>
-          </a:p>
-        </p:txBody>
-      </p:sp>
-      <p:sp>
-        <p:nvSpPr>
-          <p:cNvPr id="22" name="Shape 19"/>
-          <p:cNvSpPr/>
-          <p:nvPr/>
-        </p:nvSpPr>
-        <p:spPr>
-          <a:xfrm>
-            <a:off x="365760" y="4306824"/>
-            <a:ext cx="146304" cy="146304"/>
-          </a:xfrm>
-          <a:prstGeom prst="rect">
-            <a:avLst/>
-          </a:prstGeom>
-          <a:solidFill>
-            <a:srgbClr val="8A8A8A"/>
-          </a:solidFill>
-          <a:ln w="12700">
-            <a:solidFill>
-              <a:srgbClr val="8A8A8A"/>
-            </a:solidFill>
-            <a:prstDash val="solid"/>
-          </a:ln>
-        </p:spPr>
-      </p:sp>
-      <p:sp>
-        <p:nvSpPr>
-          <p:cNvPr id="23" name="Text 20"/>
-          <p:cNvSpPr/>
-          <p:nvPr/>
-        </p:nvSpPr>
-        <p:spPr>
-          <a:xfrm>
-            <a:off x="585216" y="4261104"/>
-            <a:ext cx="1280160" cy="237744"/>
-          </a:xfrm>
-          <a:prstGeom prst="rect">
-            <a:avLst/>
-          </a:prstGeom>
-          <a:noFill/>
-          <a:ln/>
-        </p:spPr>
-        <p:txBody>
-          <a:bodyPr wrap="square" lIns="0" tIns="0" rIns="0" bIns="0" rtlCol="0" anchor="ctr"/>
-          <a:lstStyle/>
-          <a:p>
-            <a:pPr indent="0" marL="0">
-              <a:buNone/>
-            </a:pPr>
-            <a:r>
-              <a:rPr lang="en-US" sz="1300" b="1" dirty="0">
-                <a:solidFill>
-                  <a:srgbClr val="E9E6DF"/>
-                </a:solidFill>
-                <a:latin typeface="Arial Narrow" pitchFamily="34" charset="0"/>
-                <a:ea typeface="Arial Narrow" pitchFamily="34" charset="-122"/>
-                <a:cs typeface="Arial Narrow" pitchFamily="34" charset="-120"/>
-              </a:rPr>
-              <a:t>OTH</a:t>
-            </a:r>
-            <a:endParaRPr lang="en-US" sz="1300" dirty="0"/>
-          </a:p>
-        </p:txBody>
-      </p:sp>
-      <p:sp>
-        <p:nvSpPr>
-          <p:cNvPr id="24" name="Text 21"/>
-          <p:cNvSpPr/>
-          <p:nvPr/>
-        </p:nvSpPr>
-        <p:spPr>
-          <a:xfrm>
-            <a:off x="1828800" y="4261104"/>
-            <a:ext cx="1097280" cy="237744"/>
-          </a:xfrm>
-          <a:prstGeom prst="rect">
-            <a:avLst/>
-          </a:prstGeom>
-          <a:noFill/>
-          <a:ln/>
-        </p:spPr>
-        <p:txBody>
-          <a:bodyPr wrap="square" lIns="0" tIns="0" rIns="0" bIns="0" rtlCol="0" anchor="ctr"/>
-          <a:lstStyle/>
-          <a:p>
-            <a:pPr algn="r" indent="0" marL="0">
-              <a:buNone/>
-            </a:pPr>
-            <a:r>
-              <a:rPr lang="en-US" sz="1300" b="1" dirty="0">
-                <a:solidFill>
-                  <a:srgbClr val="E9E6DF"/>
-                </a:solidFill>
-                <a:latin typeface="Arial Narrow" pitchFamily="34" charset="0"/>
-                <a:ea typeface="Arial Narrow" pitchFamily="34" charset="-122"/>
-                <a:cs typeface="Arial Narrow" pitchFamily="34" charset="-120"/>
-              </a:rPr>
-              <a:t>5</a:t>
-            </a:r>
-            <a:endParaRPr lang="en-US" sz="1300" dirty="0"/>
-          </a:p>
-        </p:txBody>
-      </p:sp>
-      <p:sp>
-        <p:nvSpPr>
-          <p:cNvPr id="25" name="Text 22"/>
-          <p:cNvSpPr/>
-          <p:nvPr/>
-        </p:nvSpPr>
-        <p:spPr>
-          <a:xfrm>
-            <a:off x="3108960" y="1097280"/>
-            <a:ext cx="3840480" cy="182880"/>
-          </a:xfrm>
-          <a:prstGeom prst="rect">
-            <a:avLst/>
-          </a:prstGeom>
-          <a:noFill/>
-          <a:ln/>
-        </p:spPr>
-        <p:txBody>
-          <a:bodyPr wrap="square" lIns="0" tIns="0" rIns="0" bIns="0" rtlCol="0" anchor="ctr"/>
-          <a:lstStyle/>
-          <a:p>
-            <a:pPr algn="ctr" indent="0" marL="0">
-              <a:buNone/>
-            </a:pPr>
-            <a:r>
-              <a:rPr lang="en-US" sz="900" spc="200" kern="0" dirty="0">
-                <a:solidFill>
-                  <a:srgbClr val="9A9997"/>
-                </a:solidFill>
-                <a:latin typeface="Courier New" pitchFamily="34" charset="0"/>
-                <a:ea typeface="Courier New" pitchFamily="34" charset="-122"/>
-                <a:cs typeface="Courier New" pitchFamily="34" charset="-120"/>
-              </a:rPr>
-              <a:t>WEST BENGAL · 294 ASSEMBLY CONSTITUENCIES</a:t>
-            </a:r>
-            <a:endParaRPr lang="en-US" sz="900" dirty="0"/>
+              <a:t>ACTUAL</a:t>
+            </a:r>
+            <a:endParaRPr lang="en-US" sz="1000" dirty="0"/>
           </a:p>
         </p:txBody>
       </p:sp>
       <p:pic>
         <p:nvPicPr>
-          <p:cNvPr id="26" name="Image 1" descr="/Users/admin/Documents/Simulatte Projects/PopScale/engineering/maps/wb_predicted_per_ac.png">    </p:cNvPr>
+          <p:cNvPr id="15" name="Image 1" descr="/Users/admin/Documents/Simulatte Projects/PopScale/engineering/maps/wb_actual_per_ac.png">    </p:cNvPr>
           <p:cNvPicPr>
             <a:picLocks noChangeAspect="1"/>
           </p:cNvPicPr>
@@ -9757,8 +8476,8 @@
         </p:blipFill>
         <p:spPr>
           <a:xfrm>
-            <a:off x="3108960" y="1280160"/>
-            <a:ext cx="3840480" cy="3611880"/>
+            <a:off x="5212080" y="1325880"/>
+            <a:ext cx="3108960" cy="2743200"/>
           </a:xfrm>
           <a:prstGeom prst="rect">
             <a:avLst/>
@@ -9767,335 +8486,118 @@
       </p:pic>
       <p:sp>
         <p:nvSpPr>
-          <p:cNvPr id="27" name="Shape 23"/>
-          <p:cNvSpPr/>
-          <p:nvPr/>
-        </p:nvSpPr>
-        <p:spPr>
-          <a:xfrm>
-            <a:off x="7132320" y="1097280"/>
-            <a:ext cx="1737360" cy="1078992"/>
-          </a:xfrm>
-          <a:prstGeom prst="rect">
-            <a:avLst/>
-          </a:prstGeom>
-          <a:solidFill>
-            <a:srgbClr val="050505"/>
-          </a:solidFill>
-          <a:ln w="9525">
-            <a:solidFill>
-              <a:srgbClr val="1A1A1A"/>
-            </a:solidFill>
-            <a:prstDash val="solid"/>
-          </a:ln>
-        </p:spPr>
-      </p:sp>
-      <p:sp>
-        <p:nvSpPr>
-          <p:cNvPr id="28" name="Text 24"/>
-          <p:cNvSpPr/>
-          <p:nvPr/>
-        </p:nvSpPr>
-        <p:spPr>
-          <a:xfrm>
-            <a:off x="7260336" y="1188720"/>
-            <a:ext cx="1554480" cy="182880"/>
-          </a:xfrm>
-          <a:prstGeom prst="rect">
-            <a:avLst/>
-          </a:prstGeom>
-          <a:noFill/>
-          <a:ln/>
-        </p:spPr>
-        <p:txBody>
-          <a:bodyPr wrap="square" lIns="0" tIns="0" rIns="0" bIns="0" rtlCol="0" anchor="ctr"/>
-          <a:lstStyle/>
-          <a:p>
-            <a:pPr indent="0" marL="0">
-              <a:buNone/>
-            </a:pPr>
-            <a:r>
-              <a:rPr lang="en-US" sz="800" spc="150" kern="0" dirty="0">
-                <a:solidFill>
-                  <a:srgbClr val="9A9997"/>
-                </a:solidFill>
-                <a:latin typeface="Courier New" pitchFamily="34" charset="0"/>
-                <a:ea typeface="Courier New" pitchFamily="34" charset="-122"/>
-                <a:cs typeface="Courier New" pitchFamily="34" charset="-120"/>
-              </a:rPr>
-              <a:t>MAJORITY LINE</a:t>
-            </a:r>
-            <a:endParaRPr lang="en-US" sz="800" dirty="0"/>
-          </a:p>
-        </p:txBody>
-      </p:sp>
-      <p:sp>
-        <p:nvSpPr>
-          <p:cNvPr id="29" name="Text 25"/>
-          <p:cNvSpPr/>
-          <p:nvPr/>
-        </p:nvSpPr>
-        <p:spPr>
-          <a:xfrm>
-            <a:off x="7260336" y="1417320"/>
-            <a:ext cx="1554480" cy="640080"/>
-          </a:xfrm>
-          <a:prstGeom prst="rect">
-            <a:avLst/>
-          </a:prstGeom>
-          <a:noFill/>
-          <a:ln/>
-        </p:spPr>
-        <p:txBody>
-          <a:bodyPr wrap="square" lIns="0" tIns="0" rIns="0" bIns="0" rtlCol="0" anchor="ctr"/>
-          <a:lstStyle/>
-          <a:p>
-            <a:pPr indent="0" marL="0">
-              <a:buNone/>
-            </a:pPr>
-            <a:r>
-              <a:rPr lang="en-US" sz="3600" b="1" dirty="0">
+          <p:cNvPr id="16" name="Text 12"/>
+          <p:cNvSpPr/>
+          <p:nvPr/>
+        </p:nvSpPr>
+        <p:spPr>
+          <a:xfrm>
+            <a:off x="4754880" y="4160520"/>
+            <a:ext cx="4023360" cy="219456"/>
+          </a:xfrm>
+          <a:prstGeom prst="rect">
+            <a:avLst/>
+          </a:prstGeom>
+          <a:noFill/>
+          <a:ln/>
+        </p:spPr>
+        <p:txBody>
+          <a:bodyPr wrap="square" lIns="0" tIns="0" rIns="0" bIns="0" rtlCol="0" anchor="ctr"/>
+          <a:lstStyle/>
+          <a:p>
+            <a:pPr algn="ctr" indent="0" marL="0">
+              <a:buNone/>
+            </a:pPr>
+            <a:r>
+              <a:rPr lang="en-US" sz="1100" dirty="0">
                 <a:solidFill>
                   <a:srgbClr val="E9E6DF"/>
                 </a:solidFill>
-                <a:latin typeface="Arial Narrow" pitchFamily="34" charset="0"/>
-                <a:ea typeface="Arial Narrow" pitchFamily="34" charset="-122"/>
-                <a:cs typeface="Arial Narrow" pitchFamily="34" charset="-120"/>
-              </a:rPr>
-              <a:t>148</a:t>
-            </a:r>
-            <a:endParaRPr lang="en-US" sz="3600" dirty="0"/>
-          </a:p>
-        </p:txBody>
-      </p:sp>
-      <p:sp>
-        <p:nvSpPr>
-          <p:cNvPr id="30" name="Shape 26"/>
-          <p:cNvSpPr/>
-          <p:nvPr/>
-        </p:nvSpPr>
-        <p:spPr>
-          <a:xfrm>
-            <a:off x="7132320" y="2331720"/>
-            <a:ext cx="1737360" cy="1078992"/>
-          </a:xfrm>
-          <a:prstGeom prst="rect">
-            <a:avLst/>
-          </a:prstGeom>
-          <a:solidFill>
-            <a:srgbClr val="050505"/>
-          </a:solidFill>
-          <a:ln w="9525">
-            <a:solidFill>
-              <a:srgbClr val="1A1A1A"/>
-            </a:solidFill>
-            <a:prstDash val="solid"/>
-          </a:ln>
-        </p:spPr>
-      </p:sp>
-      <p:sp>
-        <p:nvSpPr>
-          <p:cNvPr id="31" name="Shape 27"/>
-          <p:cNvSpPr/>
-          <p:nvPr/>
-        </p:nvSpPr>
-        <p:spPr>
-          <a:xfrm>
-            <a:off x="7132320" y="2331720"/>
-            <a:ext cx="54864" cy="1078992"/>
-          </a:xfrm>
-          <a:prstGeom prst="rect">
-            <a:avLst/>
-          </a:prstGeom>
-          <a:solidFill>
-            <a:srgbClr val="A8FF3E"/>
-          </a:solidFill>
-          <a:ln w="12700">
-            <a:solidFill>
-              <a:srgbClr val="A8FF3E"/>
-            </a:solidFill>
-            <a:prstDash val="solid"/>
-          </a:ln>
-        </p:spPr>
-      </p:sp>
-      <p:sp>
-        <p:nvSpPr>
-          <p:cNvPr id="32" name="Text 28"/>
-          <p:cNvSpPr/>
-          <p:nvPr/>
-        </p:nvSpPr>
-        <p:spPr>
-          <a:xfrm>
-            <a:off x="7296912" y="2423160"/>
-            <a:ext cx="1517904" cy="182880"/>
-          </a:xfrm>
-          <a:prstGeom prst="rect">
-            <a:avLst/>
-          </a:prstGeom>
-          <a:noFill/>
-          <a:ln/>
-        </p:spPr>
-        <p:txBody>
-          <a:bodyPr wrap="square" lIns="0" tIns="0" rIns="0" bIns="0" rtlCol="0" anchor="ctr"/>
-          <a:lstStyle/>
-          <a:p>
-            <a:pPr indent="0" marL="0">
-              <a:buNone/>
-            </a:pPr>
-            <a:r>
-              <a:rPr lang="en-US" sz="800" spc="150" kern="0" dirty="0">
-                <a:solidFill>
-                  <a:srgbClr val="9A9997"/>
-                </a:solidFill>
-                <a:latin typeface="Courier New" pitchFamily="34" charset="0"/>
-                <a:ea typeface="Courier New" pitchFamily="34" charset="-122"/>
-                <a:cs typeface="Courier New" pitchFamily="34" charset="-120"/>
-              </a:rPr>
-              <a:t>TMC MARGIN</a:t>
-            </a:r>
-            <a:endParaRPr lang="en-US" sz="800" dirty="0"/>
-          </a:p>
-        </p:txBody>
-      </p:sp>
-      <p:sp>
-        <p:nvSpPr>
-          <p:cNvPr id="33" name="Text 29"/>
-          <p:cNvSpPr/>
-          <p:nvPr/>
-        </p:nvSpPr>
-        <p:spPr>
-          <a:xfrm>
-            <a:off x="7296912" y="2651760"/>
-            <a:ext cx="1517904" cy="640080"/>
-          </a:xfrm>
-          <a:prstGeom prst="rect">
-            <a:avLst/>
-          </a:prstGeom>
-          <a:noFill/>
-          <a:ln/>
-        </p:spPr>
-        <p:txBody>
-          <a:bodyPr wrap="square" lIns="0" tIns="0" rIns="0" bIns="0" rtlCol="0" anchor="ctr"/>
-          <a:lstStyle/>
-          <a:p>
-            <a:pPr indent="0" marL="0">
-              <a:buNone/>
-            </a:pPr>
-            <a:r>
-              <a:rPr lang="en-US" sz="3600" b="1" dirty="0">
-                <a:solidFill>
-                  <a:srgbClr val="A8FF3E"/>
-                </a:solidFill>
-                <a:latin typeface="Arial Narrow" pitchFamily="34" charset="0"/>
-                <a:ea typeface="Arial Narrow" pitchFamily="34" charset="-122"/>
-                <a:cs typeface="Arial Narrow" pitchFamily="34" charset="-120"/>
-              </a:rPr>
-              <a:t>+47</a:t>
-            </a:r>
-            <a:endParaRPr lang="en-US" sz="3600" dirty="0"/>
-          </a:p>
-        </p:txBody>
-      </p:sp>
-      <p:sp>
-        <p:nvSpPr>
-          <p:cNvPr id="34" name="Shape 30"/>
-          <p:cNvSpPr/>
-          <p:nvPr/>
-        </p:nvSpPr>
-        <p:spPr>
-          <a:xfrm>
-            <a:off x="7132320" y="3566160"/>
-            <a:ext cx="1737360" cy="1078992"/>
-          </a:xfrm>
-          <a:prstGeom prst="rect">
-            <a:avLst/>
-          </a:prstGeom>
-          <a:solidFill>
-            <a:srgbClr val="050505"/>
-          </a:solidFill>
-          <a:ln w="9525">
-            <a:solidFill>
-              <a:srgbClr val="1A1A1A"/>
-            </a:solidFill>
-            <a:prstDash val="solid"/>
-          </a:ln>
-        </p:spPr>
-      </p:sp>
-      <p:sp>
-        <p:nvSpPr>
-          <p:cNvPr id="35" name="Text 31"/>
-          <p:cNvSpPr/>
-          <p:nvPr/>
-        </p:nvSpPr>
-        <p:spPr>
-          <a:xfrm>
-            <a:off x="7260336" y="3657600"/>
-            <a:ext cx="1554480" cy="182880"/>
-          </a:xfrm>
-          <a:prstGeom prst="rect">
-            <a:avLst/>
-          </a:prstGeom>
-          <a:noFill/>
-          <a:ln/>
-        </p:spPr>
-        <p:txBody>
-          <a:bodyPr wrap="square" lIns="0" tIns="0" rIns="0" bIns="0" rtlCol="0" anchor="ctr"/>
-          <a:lstStyle/>
-          <a:p>
-            <a:pPr indent="0" marL="0">
-              <a:buNone/>
-            </a:pPr>
-            <a:r>
-              <a:rPr lang="en-US" sz="800" spc="150" kern="0" dirty="0">
-                <a:solidFill>
-                  <a:srgbClr val="9A9997"/>
-                </a:solidFill>
-                <a:latin typeface="Courier New" pitchFamily="34" charset="0"/>
-                <a:ea typeface="Courier New" pitchFamily="34" charset="-122"/>
-                <a:cs typeface="Courier New" pitchFamily="34" charset="-120"/>
-              </a:rPr>
-              <a:t>TMC SEATS / 294</a:t>
-            </a:r>
-            <a:endParaRPr lang="en-US" sz="800" dirty="0"/>
-          </a:p>
-        </p:txBody>
-      </p:sp>
-      <p:sp>
-        <p:nvSpPr>
-          <p:cNvPr id="36" name="Text 32"/>
-          <p:cNvSpPr/>
-          <p:nvPr/>
-        </p:nvSpPr>
-        <p:spPr>
-          <a:xfrm>
-            <a:off x="7260336" y="3886200"/>
-            <a:ext cx="1554480" cy="640080"/>
-          </a:xfrm>
-          <a:prstGeom prst="rect">
-            <a:avLst/>
-          </a:prstGeom>
-          <a:noFill/>
-          <a:ln/>
-        </p:spPr>
-        <p:txBody>
-          <a:bodyPr wrap="square" lIns="0" tIns="0" rIns="0" bIns="0" rtlCol="0" anchor="ctr"/>
-          <a:lstStyle/>
-          <a:p>
-            <a:pPr indent="0" marL="0">
-              <a:buNone/>
-            </a:pPr>
-            <a:r>
-              <a:rPr lang="en-US" sz="3600" b="1" dirty="0">
+                <a:latin typeface="Calibri" pitchFamily="34" charset="0"/>
+                <a:ea typeface="Calibri" pitchFamily="34" charset="-122"/>
+                <a:cs typeface="Calibri" pitchFamily="34" charset="-120"/>
+              </a:rPr>
+              <a:t>BJP 203 · TMC 84 · INDI 6 · OTH 1</a:t>
+            </a:r>
+            <a:endParaRPr lang="en-US" sz="1100" dirty="0"/>
+          </a:p>
+        </p:txBody>
+      </p:sp>
+      <p:sp>
+        <p:nvSpPr>
+          <p:cNvPr id="17" name="Text 13"/>
+          <p:cNvSpPr/>
+          <p:nvPr/>
+        </p:nvSpPr>
+        <p:spPr>
+          <a:xfrm>
+            <a:off x="4754880" y="4379976"/>
+            <a:ext cx="4023360" cy="219456"/>
+          </a:xfrm>
+          <a:prstGeom prst="rect">
+            <a:avLst/>
+          </a:prstGeom>
+          <a:noFill/>
+          <a:ln/>
+        </p:spPr>
+        <p:txBody>
+          <a:bodyPr wrap="square" lIns="0" tIns="0" rIns="0" bIns="0" rtlCol="0" anchor="ctr"/>
+          <a:lstStyle/>
+          <a:p>
+            <a:pPr algn="ctr" indent="0" marL="0">
+              <a:buNone/>
+            </a:pPr>
+            <a:r>
+              <a:rPr lang="en-US" sz="1100" dirty="0">
                 <a:solidFill>
                   <a:srgbClr val="E9E6DF"/>
                 </a:solidFill>
-                <a:latin typeface="Arial Narrow" pitchFamily="34" charset="0"/>
-                <a:ea typeface="Arial Narrow" pitchFamily="34" charset="-122"/>
-                <a:cs typeface="Arial Narrow" pitchFamily="34" charset="-120"/>
-              </a:rPr>
-              <a:t>194</a:t>
-            </a:r>
-            <a:endParaRPr lang="en-US" sz="3600" dirty="0"/>
+                <a:latin typeface="Calibri" pitchFamily="34" charset="0"/>
+                <a:ea typeface="Calibri" pitchFamily="34" charset="-122"/>
+                <a:cs typeface="Calibri" pitchFamily="34" charset="-120"/>
+              </a:rPr>
+              <a:t>BJP majority by +55</a:t>
+            </a:r>
+            <a:endParaRPr lang="en-US" sz="1100" dirty="0"/>
+          </a:p>
+        </p:txBody>
+      </p:sp>
+      <p:sp>
+        <p:nvSpPr>
+          <p:cNvPr id="18" name="Text 14"/>
+          <p:cNvSpPr/>
+          <p:nvPr/>
+        </p:nvSpPr>
+        <p:spPr>
+          <a:xfrm>
+            <a:off x="4754880" y="4599432"/>
+            <a:ext cx="4023360" cy="219456"/>
+          </a:xfrm>
+          <a:prstGeom prst="rect">
+            <a:avLst/>
+          </a:prstGeom>
+          <a:noFill/>
+          <a:ln/>
+        </p:spPr>
+        <p:txBody>
+          <a:bodyPr wrap="square" lIns="0" tIns="0" rIns="0" bIns="0" rtlCol="0" anchor="ctr"/>
+          <a:lstStyle/>
+          <a:p>
+            <a:pPr algn="ctr" indent="0" marL="0">
+              <a:buNone/>
+            </a:pPr>
+            <a:r>
+              <a:rPr lang="en-US" sz="1100" dirty="0">
+                <a:solidFill>
+                  <a:srgbClr val="E9E6DF"/>
+                </a:solidFill>
+                <a:latin typeface="Calibri" pitchFamily="34" charset="0"/>
+                <a:ea typeface="Calibri" pitchFamily="34" charset="-122"/>
+                <a:cs typeface="Calibri" pitchFamily="34" charset="-120"/>
+              </a:rPr>
+              <a:t>Vote share: BJP 45.1% · TMC 41.0%</a:t>
+            </a:r>
+            <a:endParaRPr lang="en-US" sz="1100" dirty="0"/>
           </a:p>
         </p:txBody>
       </p:sp>
@@ -10317,7 +8819,7 @@
                 <a:ea typeface="Courier New" pitchFamily="34" charset="-122"/>
                 <a:cs typeface="Courier New" pitchFamily="34" charset="-120"/>
               </a:rPr>
-              <a:t>04 — 294 ASSEMBLY SEATS  |  ACTUAL WINNER  |  WEST BENGAL 2026</a:t>
+              <a:t>ANALYSIS · 01 OF 10 · MATUA BELT (NADIA · N24PGS)</a:t>
             </a:r>
             <a:endParaRPr lang="en-US" sz="900" dirty="0"/>
           </a:p>
@@ -10331,24 +8833,24 @@
         </p:nvSpPr>
         <p:spPr>
           <a:xfrm>
-            <a:off x="365760" y="502920"/>
-            <a:ext cx="8412480" cy="502920"/>
-          </a:xfrm>
-          <a:prstGeom prst="rect">
-            <a:avLst/>
-          </a:prstGeom>
-          <a:noFill/>
-          <a:ln/>
-        </p:spPr>
-        <p:txBody>
-          <a:bodyPr wrap="square" lIns="0" tIns="0" rIns="0" bIns="0" rtlCol="0" anchor="ctr"/>
-          <a:lstStyle/>
-          <a:p>
-            <a:pPr indent="0" marL="0">
-              <a:buNone/>
-            </a:pPr>
-            <a:r>
-              <a:rPr lang="en-US" sz="3600" b="1" dirty="0">
+            <a:off x="457200" y="566928"/>
+            <a:ext cx="8229600" cy="548640"/>
+          </a:xfrm>
+          <a:prstGeom prst="rect">
+            <a:avLst/>
+          </a:prstGeom>
+          <a:noFill/>
+          <a:ln/>
+        </p:spPr>
+        <p:txBody>
+          <a:bodyPr wrap="square" lIns="0" tIns="0" rIns="0" bIns="0" rtlCol="0" anchor="ctr"/>
+          <a:lstStyle/>
+          <a:p>
+            <a:pPr indent="0" marL="0">
+              <a:buNone/>
+            </a:pPr>
+            <a:r>
+              <a:rPr lang="en-US" sz="3000" b="1" dirty="0">
                 <a:solidFill>
                   <a:srgbClr val="E9E6DF"/>
                 </a:solidFill>
@@ -10356,124 +8858,38 @@
                 <a:ea typeface="Arial Narrow" pitchFamily="34" charset="-122"/>
                 <a:cs typeface="Arial Narrow" pitchFamily="34" charset="-120"/>
               </a:rPr>
-              <a:t>BJP holds the</a:t>
-            </a:r>
-            <a:pPr indent="0" marL="0">
-              <a:buNone/>
-            </a:pPr>
-            <a:r>
-              <a:rPr lang="en-US" sz="3600" b="1" dirty="0">
-                <a:solidFill>
-                  <a:srgbClr val="000000"/>
-                </a:solidFill>
-                <a:latin typeface="Arial Narrow" pitchFamily="34" charset="0"/>
-                <a:ea typeface="Arial Narrow" pitchFamily="34" charset="-122"/>
-                <a:cs typeface="Arial Narrow" pitchFamily="34" charset="-120"/>
-              </a:rPr>
-              <a:t> </a:t>
-            </a:r>
-            <a:pPr indent="0" marL="0">
-              <a:buNone/>
-            </a:pPr>
-            <a:pPr indent="0" marL="0">
-              <a:buNone/>
-            </a:pPr>
-            <a:r>
-              <a:rPr lang="en-US" sz="3600" b="1" dirty="0">
-                <a:solidFill>
-                  <a:srgbClr val="A8FF3E"/>
-                </a:solidFill>
-                <a:latin typeface="Arial Narrow" pitchFamily="34" charset="0"/>
-                <a:ea typeface="Arial Narrow" pitchFamily="34" charset="-122"/>
-                <a:cs typeface="Arial Narrow" pitchFamily="34" charset="-120"/>
-              </a:rPr>
-              <a:t>map.</a:t>
-            </a:r>
-            <a:endParaRPr lang="en-US" sz="3600" dirty="0"/>
-          </a:p>
-        </p:txBody>
-      </p:sp>
-      <p:sp>
-        <p:nvSpPr>
-          <p:cNvPr id="9" name="Text 7"/>
-          <p:cNvSpPr/>
-          <p:nvPr/>
-        </p:nvSpPr>
-        <p:spPr>
-          <a:xfrm>
-            <a:off x="365760" y="1097280"/>
-            <a:ext cx="2560320" cy="182880"/>
-          </a:xfrm>
-          <a:prstGeom prst="rect">
-            <a:avLst/>
-          </a:prstGeom>
-          <a:noFill/>
-          <a:ln/>
-        </p:spPr>
-        <p:txBody>
-          <a:bodyPr wrap="square" lIns="0" tIns="0" rIns="0" bIns="0" rtlCol="0" anchor="ctr"/>
-          <a:lstStyle/>
-          <a:p>
-            <a:pPr indent="0" marL="0">
-              <a:buNone/>
-            </a:pPr>
-            <a:r>
-              <a:rPr lang="en-US" sz="900" spc="200" kern="0" dirty="0">
-                <a:solidFill>
-                  <a:srgbClr val="9A9997"/>
-                </a:solidFill>
-                <a:latin typeface="Courier New" pitchFamily="34" charset="0"/>
-                <a:ea typeface="Courier New" pitchFamily="34" charset="-122"/>
-                <a:cs typeface="Courier New" pitchFamily="34" charset="-120"/>
-              </a:rPr>
-              <a:t>SEAT DISTRIBUTION</a:t>
-            </a:r>
-            <a:endParaRPr lang="en-US" sz="900" dirty="0"/>
-          </a:p>
-        </p:txBody>
-      </p:sp>
-      <p:sp>
-        <p:nvSpPr>
-          <p:cNvPr id="10" name="Text 8"/>
-          <p:cNvSpPr/>
-          <p:nvPr/>
-        </p:nvSpPr>
-        <p:spPr>
-          <a:xfrm>
-            <a:off x="365760" y="1298448"/>
-            <a:ext cx="2560320" cy="310896"/>
-          </a:xfrm>
-          <a:prstGeom prst="rect">
-            <a:avLst/>
-          </a:prstGeom>
-          <a:noFill/>
-          <a:ln/>
-        </p:spPr>
-        <p:txBody>
-          <a:bodyPr wrap="square" lIns="0" tIns="0" rIns="0" bIns="0" rtlCol="0" anchor="ctr"/>
-          <a:lstStyle/>
-          <a:p>
-            <a:pPr indent="0" marL="0">
-              <a:buNone/>
-            </a:pPr>
-            <a:r>
-              <a:rPr lang="en-US" sz="2200" dirty="0">
-                <a:solidFill>
-                  <a:srgbClr val="E9E6DF"/>
-                </a:solidFill>
-                <a:latin typeface="Arial Narrow" pitchFamily="34" charset="0"/>
-                <a:ea typeface="Arial Narrow" pitchFamily="34" charset="-122"/>
-                <a:cs typeface="Arial Narrow" pitchFamily="34" charset="-120"/>
-              </a:rPr>
-              <a:t>294  /  BJP 203</a:t>
-            </a:r>
-            <a:endParaRPr lang="en-US" sz="2200" dirty="0"/>
-          </a:p>
-        </p:txBody>
+              <a:t>Matua Belt (Nadia · N24Pgs): TMC → BJP</a:t>
+            </a:r>
+            <a:endParaRPr lang="en-US" sz="3000" dirty="0"/>
+          </a:p>
+        </p:txBody>
+      </p:sp>
+      <p:sp>
+        <p:nvSpPr>
+          <p:cNvPr id="9" name="Shape 7"/>
+          <p:cNvSpPr/>
+          <p:nvPr/>
+        </p:nvSpPr>
+        <p:spPr>
+          <a:xfrm>
+            <a:off x="457200" y="1298448"/>
+            <a:ext cx="8229600" cy="0"/>
+          </a:xfrm>
+          <a:prstGeom prst="line">
+            <a:avLst/>
+          </a:prstGeom>
+          <a:noFill/>
+          <a:ln w="6350">
+            <a:solidFill>
+              <a:srgbClr val="9A9997"/>
+            </a:solidFill>
+            <a:prstDash val="solid"/>
+          </a:ln>
+        </p:spPr>
       </p:sp>
       <p:pic>
         <p:nvPicPr>
-          <p:cNvPr id="11" name="Image 0" descr="/Users/admin/Documents/Simulatte Projects/PopScale/engineering/maps/wb_actual_hemicycle.png">    </p:cNvPr>
+          <p:cNvPr id="10" name="Image 0" descr="/Users/admin/Documents/Simulatte Projects/PopScale/engineering/maps/wb_cluster_matua_belt.png">    </p:cNvPr>
           <p:cNvPicPr>
             <a:picLocks noChangeAspect="1"/>
           </p:cNvPicPr>
@@ -10486,8 +8902,8 @@
         </p:blipFill>
         <p:spPr>
           <a:xfrm>
-            <a:off x="365760" y="1645920"/>
-            <a:ext cx="2560320" cy="1417320"/>
+            <a:off x="502920" y="1508760"/>
+            <a:ext cx="3017520" cy="3108960"/>
           </a:xfrm>
           <a:prstGeom prst="rect">
             <a:avLst/>
@@ -10496,30 +8912,30 @@
       </p:pic>
       <p:sp>
         <p:nvSpPr>
-          <p:cNvPr id="12" name="Text 9"/>
-          <p:cNvSpPr/>
-          <p:nvPr/>
-        </p:nvSpPr>
-        <p:spPr>
-          <a:xfrm>
-            <a:off x="365760" y="3108960"/>
-            <a:ext cx="2560320" cy="182880"/>
-          </a:xfrm>
-          <a:prstGeom prst="rect">
-            <a:avLst/>
-          </a:prstGeom>
-          <a:noFill/>
-          <a:ln/>
-        </p:spPr>
-        <p:txBody>
-          <a:bodyPr wrap="square" lIns="0" tIns="0" rIns="0" bIns="0" rtlCol="0" anchor="ctr"/>
-          <a:lstStyle/>
-          <a:p>
-            <a:pPr indent="0" marL="0">
-              <a:buNone/>
-            </a:pPr>
-            <a:r>
-              <a:rPr lang="en-US" sz="800" spc="150" kern="0" dirty="0">
+          <p:cNvPr id="11" name="Text 8"/>
+          <p:cNvSpPr/>
+          <p:nvPr/>
+        </p:nvSpPr>
+        <p:spPr>
+          <a:xfrm>
+            <a:off x="3749040" y="1554480"/>
+            <a:ext cx="2651760" cy="201168"/>
+          </a:xfrm>
+          <a:prstGeom prst="rect">
+            <a:avLst/>
+          </a:prstGeom>
+          <a:noFill/>
+          <a:ln/>
+        </p:spPr>
+        <p:txBody>
+          <a:bodyPr wrap="square" lIns="0" tIns="0" rIns="0" bIns="0" rtlCol="0" anchor="ctr"/>
+          <a:lstStyle/>
+          <a:p>
+            <a:pPr indent="0" marL="0">
+              <a:buNone/>
+            </a:pPr>
+            <a:r>
+              <a:rPr lang="en-US" sz="900" spc="150" kern="0" dirty="0">
                 <a:solidFill>
                   <a:srgbClr val="9A9997"/>
                 </a:solidFill>
@@ -10527,36 +8943,89 @@
                 <a:ea typeface="Courier New" pitchFamily="34" charset="-122"/>
                 <a:cs typeface="Courier New" pitchFamily="34" charset="-120"/>
               </a:rPr>
-              <a:t>294 SEATS  ·  148 = MAJORITY</a:t>
-            </a:r>
-            <a:endParaRPr lang="en-US" sz="800" dirty="0"/>
-          </a:p>
-        </p:txBody>
-      </p:sp>
-      <p:sp>
-        <p:nvSpPr>
-          <p:cNvPr id="13" name="Shape 10"/>
-          <p:cNvSpPr/>
-          <p:nvPr/>
-        </p:nvSpPr>
-        <p:spPr>
-          <a:xfrm>
-            <a:off x="365760" y="3429000"/>
-            <a:ext cx="146304" cy="146304"/>
-          </a:xfrm>
-          <a:prstGeom prst="rect">
-            <a:avLst/>
-          </a:prstGeom>
-          <a:solidFill>
-            <a:srgbClr val="F4A02C"/>
-          </a:solidFill>
-          <a:ln w="12700">
-            <a:solidFill>
-              <a:srgbClr val="F4A02C"/>
-            </a:solidFill>
-            <a:prstDash val="solid"/>
-          </a:ln>
-        </p:spPr>
+              <a:t>PREDICTED</a:t>
+            </a:r>
+            <a:endParaRPr lang="en-US" sz="900" dirty="0"/>
+          </a:p>
+        </p:txBody>
+      </p:sp>
+      <p:sp>
+        <p:nvSpPr>
+          <p:cNvPr id="12" name="Text 9"/>
+          <p:cNvSpPr/>
+          <p:nvPr/>
+        </p:nvSpPr>
+        <p:spPr>
+          <a:xfrm>
+            <a:off x="3749040" y="1773936"/>
+            <a:ext cx="2651760" cy="274320"/>
+          </a:xfrm>
+          <a:prstGeom prst="rect">
+            <a:avLst/>
+          </a:prstGeom>
+          <a:noFill/>
+          <a:ln/>
+        </p:spPr>
+        <p:txBody>
+          <a:bodyPr wrap="square" lIns="0" tIns="0" rIns="0" bIns="0" rtlCol="0" anchor="ctr"/>
+          <a:lstStyle/>
+          <a:p>
+            <a:pPr indent="0" marL="0">
+              <a:buNone/>
+            </a:pPr>
+            <a:r>
+              <a:rPr lang="en-US" sz="1400" dirty="0">
+                <a:solidFill>
+                  <a:srgbClr val="E9E6DF"/>
+                </a:solidFill>
+                <a:latin typeface="Calibri" pitchFamily="34" charset="0"/>
+                <a:ea typeface="Calibri" pitchFamily="34" charset="-122"/>
+                <a:cs typeface="Calibri" pitchFamily="34" charset="-120"/>
+              </a:rPr>
+              <a:t>TMC 65%</a:t>
+            </a:r>
+            <a:endParaRPr lang="en-US" sz="1400" dirty="0"/>
+          </a:p>
+        </p:txBody>
+      </p:sp>
+      <p:sp>
+        <p:nvSpPr>
+          <p:cNvPr id="13" name="Text 10"/>
+          <p:cNvSpPr/>
+          <p:nvPr/>
+        </p:nvSpPr>
+        <p:spPr>
+          <a:xfrm>
+            <a:off x="3749040" y="2011680"/>
+            <a:ext cx="2651760" cy="274320"/>
+          </a:xfrm>
+          <a:prstGeom prst="rect">
+            <a:avLst/>
+          </a:prstGeom>
+          <a:noFill/>
+          <a:ln/>
+        </p:spPr>
+        <p:txBody>
+          <a:bodyPr wrap="square" lIns="0" tIns="0" rIns="0" bIns="0" rtlCol="0" anchor="ctr"/>
+          <a:lstStyle/>
+          <a:p>
+            <a:pPr indent="0" marL="0">
+              <a:buNone/>
+            </a:pPr>
+            <a:r>
+              <a:rPr lang="en-US" sz="1400" dirty="0">
+                <a:solidFill>
+                  <a:srgbClr val="A8A6A0"/>
+                </a:solidFill>
+                <a:latin typeface="Calibri" pitchFamily="34" charset="0"/>
+                <a:ea typeface="Calibri" pitchFamily="34" charset="-122"/>
+                <a:cs typeface="Calibri" pitchFamily="34" charset="-120"/>
+              </a:rPr>
+              <a:t>BJP 30%</a:t>
+            </a:r>
+            <a:endParaRPr lang="en-US" sz="1400" dirty="0"/>
+          </a:p>
+        </p:txBody>
       </p:sp>
       <p:sp>
         <p:nvSpPr>
@@ -10566,411 +9035,24 @@
         </p:nvSpPr>
         <p:spPr>
           <a:xfrm>
-            <a:off x="585216" y="3383280"/>
-            <a:ext cx="1280160" cy="237744"/>
-          </a:xfrm>
-          <a:prstGeom prst="rect">
-            <a:avLst/>
-          </a:prstGeom>
-          <a:noFill/>
-          <a:ln/>
-        </p:spPr>
-        <p:txBody>
-          <a:bodyPr wrap="square" lIns="0" tIns="0" rIns="0" bIns="0" rtlCol="0" anchor="ctr"/>
-          <a:lstStyle/>
-          <a:p>
-            <a:pPr indent="0" marL="0">
-              <a:buNone/>
-            </a:pPr>
-            <a:r>
-              <a:rPr lang="en-US" sz="1300" b="1" dirty="0">
-                <a:solidFill>
-                  <a:srgbClr val="E9E6DF"/>
-                </a:solidFill>
-                <a:latin typeface="Arial Narrow" pitchFamily="34" charset="0"/>
-                <a:ea typeface="Arial Narrow" pitchFamily="34" charset="-122"/>
-                <a:cs typeface="Arial Narrow" pitchFamily="34" charset="-120"/>
-              </a:rPr>
-              <a:t>BJP</a:t>
-            </a:r>
-            <a:endParaRPr lang="en-US" sz="1300" dirty="0"/>
-          </a:p>
-        </p:txBody>
-      </p:sp>
-      <p:sp>
-        <p:nvSpPr>
-          <p:cNvPr id="15" name="Text 12"/>
-          <p:cNvSpPr/>
-          <p:nvPr/>
-        </p:nvSpPr>
-        <p:spPr>
-          <a:xfrm>
-            <a:off x="1828800" y="3383280"/>
-            <a:ext cx="1097280" cy="237744"/>
-          </a:xfrm>
-          <a:prstGeom prst="rect">
-            <a:avLst/>
-          </a:prstGeom>
-          <a:noFill/>
-          <a:ln/>
-        </p:spPr>
-        <p:txBody>
-          <a:bodyPr wrap="square" lIns="0" tIns="0" rIns="0" bIns="0" rtlCol="0" anchor="ctr"/>
-          <a:lstStyle/>
-          <a:p>
-            <a:pPr algn="r" indent="0" marL="0">
-              <a:buNone/>
-            </a:pPr>
-            <a:r>
-              <a:rPr lang="en-US" sz="1300" b="1" dirty="0">
-                <a:solidFill>
-                  <a:srgbClr val="A8FF3E"/>
-                </a:solidFill>
-                <a:latin typeface="Arial Narrow" pitchFamily="34" charset="0"/>
-                <a:ea typeface="Arial Narrow" pitchFamily="34" charset="-122"/>
-                <a:cs typeface="Arial Narrow" pitchFamily="34" charset="-120"/>
-              </a:rPr>
-              <a:t>203</a:t>
-            </a:r>
-            <a:endParaRPr lang="en-US" sz="1300" dirty="0"/>
-          </a:p>
-        </p:txBody>
-      </p:sp>
-      <p:sp>
-        <p:nvSpPr>
-          <p:cNvPr id="16" name="Shape 13"/>
-          <p:cNvSpPr/>
-          <p:nvPr/>
-        </p:nvSpPr>
-        <p:spPr>
-          <a:xfrm>
-            <a:off x="365760" y="3721608"/>
-            <a:ext cx="146304" cy="146304"/>
-          </a:xfrm>
-          <a:prstGeom prst="rect">
-            <a:avLst/>
-          </a:prstGeom>
-          <a:solidFill>
-            <a:srgbClr val="3FA34D"/>
-          </a:solidFill>
-          <a:ln w="12700">
-            <a:solidFill>
-              <a:srgbClr val="3FA34D"/>
-            </a:solidFill>
-            <a:prstDash val="solid"/>
-          </a:ln>
-        </p:spPr>
-      </p:sp>
-      <p:sp>
-        <p:nvSpPr>
-          <p:cNvPr id="17" name="Text 14"/>
-          <p:cNvSpPr/>
-          <p:nvPr/>
-        </p:nvSpPr>
-        <p:spPr>
-          <a:xfrm>
-            <a:off x="585216" y="3675888"/>
-            <a:ext cx="1280160" cy="237744"/>
-          </a:xfrm>
-          <a:prstGeom prst="rect">
-            <a:avLst/>
-          </a:prstGeom>
-          <a:noFill/>
-          <a:ln/>
-        </p:spPr>
-        <p:txBody>
-          <a:bodyPr wrap="square" lIns="0" tIns="0" rIns="0" bIns="0" rtlCol="0" anchor="ctr"/>
-          <a:lstStyle/>
-          <a:p>
-            <a:pPr indent="0" marL="0">
-              <a:buNone/>
-            </a:pPr>
-            <a:r>
-              <a:rPr lang="en-US" sz="1300" b="1" dirty="0">
-                <a:solidFill>
-                  <a:srgbClr val="E9E6DF"/>
-                </a:solidFill>
-                <a:latin typeface="Arial Narrow" pitchFamily="34" charset="0"/>
-                <a:ea typeface="Arial Narrow" pitchFamily="34" charset="-122"/>
-                <a:cs typeface="Arial Narrow" pitchFamily="34" charset="-120"/>
-              </a:rPr>
-              <a:t>TMC</a:t>
-            </a:r>
-            <a:endParaRPr lang="en-US" sz="1300" dirty="0"/>
-          </a:p>
-        </p:txBody>
-      </p:sp>
-      <p:sp>
-        <p:nvSpPr>
-          <p:cNvPr id="18" name="Text 15"/>
-          <p:cNvSpPr/>
-          <p:nvPr/>
-        </p:nvSpPr>
-        <p:spPr>
-          <a:xfrm>
-            <a:off x="1828800" y="3675888"/>
-            <a:ext cx="1097280" cy="237744"/>
-          </a:xfrm>
-          <a:prstGeom prst="rect">
-            <a:avLst/>
-          </a:prstGeom>
-          <a:noFill/>
-          <a:ln/>
-        </p:spPr>
-        <p:txBody>
-          <a:bodyPr wrap="square" lIns="0" tIns="0" rIns="0" bIns="0" rtlCol="0" anchor="ctr"/>
-          <a:lstStyle/>
-          <a:p>
-            <a:pPr algn="r" indent="0" marL="0">
-              <a:buNone/>
-            </a:pPr>
-            <a:r>
-              <a:rPr lang="en-US" sz="1300" b="1" dirty="0">
-                <a:solidFill>
-                  <a:srgbClr val="E9E6DF"/>
-                </a:solidFill>
-                <a:latin typeface="Arial Narrow" pitchFamily="34" charset="0"/>
-                <a:ea typeface="Arial Narrow" pitchFamily="34" charset="-122"/>
-                <a:cs typeface="Arial Narrow" pitchFamily="34" charset="-120"/>
-              </a:rPr>
-              <a:t>84</a:t>
-            </a:r>
-            <a:endParaRPr lang="en-US" sz="1300" dirty="0"/>
-          </a:p>
-        </p:txBody>
-      </p:sp>
-      <p:sp>
-        <p:nvSpPr>
-          <p:cNvPr id="19" name="Shape 16"/>
-          <p:cNvSpPr/>
-          <p:nvPr/>
-        </p:nvSpPr>
-        <p:spPr>
-          <a:xfrm>
-            <a:off x="365760" y="4014216"/>
-            <a:ext cx="146304" cy="146304"/>
-          </a:xfrm>
-          <a:prstGeom prst="rect">
-            <a:avLst/>
-          </a:prstGeom>
-          <a:solidFill>
-            <a:srgbClr val="C44545"/>
-          </a:solidFill>
-          <a:ln w="12700">
-            <a:solidFill>
-              <a:srgbClr val="C44545"/>
-            </a:solidFill>
-            <a:prstDash val="solid"/>
-          </a:ln>
-        </p:spPr>
-      </p:sp>
-      <p:sp>
-        <p:nvSpPr>
-          <p:cNvPr id="20" name="Text 17"/>
-          <p:cNvSpPr/>
-          <p:nvPr/>
-        </p:nvSpPr>
-        <p:spPr>
-          <a:xfrm>
-            <a:off x="585216" y="3968496"/>
-            <a:ext cx="1280160" cy="237744"/>
-          </a:xfrm>
-          <a:prstGeom prst="rect">
-            <a:avLst/>
-          </a:prstGeom>
-          <a:noFill/>
-          <a:ln/>
-        </p:spPr>
-        <p:txBody>
-          <a:bodyPr wrap="square" lIns="0" tIns="0" rIns="0" bIns="0" rtlCol="0" anchor="ctr"/>
-          <a:lstStyle/>
-          <a:p>
-            <a:pPr indent="0" marL="0">
-              <a:buNone/>
-            </a:pPr>
-            <a:r>
-              <a:rPr lang="en-US" sz="1300" b="1" dirty="0">
-                <a:solidFill>
-                  <a:srgbClr val="E9E6DF"/>
-                </a:solidFill>
-                <a:latin typeface="Arial Narrow" pitchFamily="34" charset="0"/>
-                <a:ea typeface="Arial Narrow" pitchFamily="34" charset="-122"/>
-                <a:cs typeface="Arial Narrow" pitchFamily="34" charset="-120"/>
-              </a:rPr>
-              <a:t>INDI</a:t>
-            </a:r>
-            <a:endParaRPr lang="en-US" sz="1300" dirty="0"/>
-          </a:p>
-        </p:txBody>
-      </p:sp>
-      <p:sp>
-        <p:nvSpPr>
-          <p:cNvPr id="21" name="Text 18"/>
-          <p:cNvSpPr/>
-          <p:nvPr/>
-        </p:nvSpPr>
-        <p:spPr>
-          <a:xfrm>
-            <a:off x="1828800" y="3968496"/>
-            <a:ext cx="1097280" cy="237744"/>
-          </a:xfrm>
-          <a:prstGeom prst="rect">
-            <a:avLst/>
-          </a:prstGeom>
-          <a:noFill/>
-          <a:ln/>
-        </p:spPr>
-        <p:txBody>
-          <a:bodyPr wrap="square" lIns="0" tIns="0" rIns="0" bIns="0" rtlCol="0" anchor="ctr"/>
-          <a:lstStyle/>
-          <a:p>
-            <a:pPr algn="r" indent="0" marL="0">
-              <a:buNone/>
-            </a:pPr>
-            <a:r>
-              <a:rPr lang="en-US" sz="1300" b="1" dirty="0">
-                <a:solidFill>
-                  <a:srgbClr val="E9E6DF"/>
-                </a:solidFill>
-                <a:latin typeface="Arial Narrow" pitchFamily="34" charset="0"/>
-                <a:ea typeface="Arial Narrow" pitchFamily="34" charset="-122"/>
-                <a:cs typeface="Arial Narrow" pitchFamily="34" charset="-120"/>
-              </a:rPr>
-              <a:t>6</a:t>
-            </a:r>
-            <a:endParaRPr lang="en-US" sz="1300" dirty="0"/>
-          </a:p>
-        </p:txBody>
-      </p:sp>
-      <p:sp>
-        <p:nvSpPr>
-          <p:cNvPr id="22" name="Shape 19"/>
-          <p:cNvSpPr/>
-          <p:nvPr/>
-        </p:nvSpPr>
-        <p:spPr>
-          <a:xfrm>
-            <a:off x="365760" y="4306824"/>
-            <a:ext cx="146304" cy="146304"/>
-          </a:xfrm>
-          <a:prstGeom prst="rect">
-            <a:avLst/>
-          </a:prstGeom>
-          <a:solidFill>
-            <a:srgbClr val="8A8A8A"/>
-          </a:solidFill>
-          <a:ln w="12700">
-            <a:solidFill>
-              <a:srgbClr val="8A8A8A"/>
-            </a:solidFill>
-            <a:prstDash val="solid"/>
-          </a:ln>
-        </p:spPr>
-      </p:sp>
-      <p:sp>
-        <p:nvSpPr>
-          <p:cNvPr id="23" name="Text 20"/>
-          <p:cNvSpPr/>
-          <p:nvPr/>
-        </p:nvSpPr>
-        <p:spPr>
-          <a:xfrm>
-            <a:off x="585216" y="4261104"/>
-            <a:ext cx="1280160" cy="237744"/>
-          </a:xfrm>
-          <a:prstGeom prst="rect">
-            <a:avLst/>
-          </a:prstGeom>
-          <a:noFill/>
-          <a:ln/>
-        </p:spPr>
-        <p:txBody>
-          <a:bodyPr wrap="square" lIns="0" tIns="0" rIns="0" bIns="0" rtlCol="0" anchor="ctr"/>
-          <a:lstStyle/>
-          <a:p>
-            <a:pPr indent="0" marL="0">
-              <a:buNone/>
-            </a:pPr>
-            <a:r>
-              <a:rPr lang="en-US" sz="1300" b="1" dirty="0">
-                <a:solidFill>
-                  <a:srgbClr val="E9E6DF"/>
-                </a:solidFill>
-                <a:latin typeface="Arial Narrow" pitchFamily="34" charset="0"/>
-                <a:ea typeface="Arial Narrow" pitchFamily="34" charset="-122"/>
-                <a:cs typeface="Arial Narrow" pitchFamily="34" charset="-120"/>
-              </a:rPr>
-              <a:t>OTH</a:t>
-            </a:r>
-            <a:endParaRPr lang="en-US" sz="1300" dirty="0"/>
-          </a:p>
-        </p:txBody>
-      </p:sp>
-      <p:sp>
-        <p:nvSpPr>
-          <p:cNvPr id="24" name="Text 21"/>
-          <p:cNvSpPr/>
-          <p:nvPr/>
-        </p:nvSpPr>
-        <p:spPr>
-          <a:xfrm>
-            <a:off x="1828800" y="4261104"/>
-            <a:ext cx="1097280" cy="237744"/>
-          </a:xfrm>
-          <a:prstGeom prst="rect">
-            <a:avLst/>
-          </a:prstGeom>
-          <a:noFill/>
-          <a:ln/>
-        </p:spPr>
-        <p:txBody>
-          <a:bodyPr wrap="square" lIns="0" tIns="0" rIns="0" bIns="0" rtlCol="0" anchor="ctr"/>
-          <a:lstStyle/>
-          <a:p>
-            <a:pPr algn="r" indent="0" marL="0">
-              <a:buNone/>
-            </a:pPr>
-            <a:r>
-              <a:rPr lang="en-US" sz="1300" b="1" dirty="0">
-                <a:solidFill>
-                  <a:srgbClr val="E9E6DF"/>
-                </a:solidFill>
-                <a:latin typeface="Arial Narrow" pitchFamily="34" charset="0"/>
-                <a:ea typeface="Arial Narrow" pitchFamily="34" charset="-122"/>
-                <a:cs typeface="Arial Narrow" pitchFamily="34" charset="-120"/>
-              </a:rPr>
-              <a:t>1</a:t>
-            </a:r>
-            <a:endParaRPr lang="en-US" sz="1300" dirty="0"/>
-          </a:p>
-        </p:txBody>
-      </p:sp>
-      <p:sp>
-        <p:nvSpPr>
-          <p:cNvPr id="25" name="Text 22"/>
-          <p:cNvSpPr/>
-          <p:nvPr/>
-        </p:nvSpPr>
-        <p:spPr>
-          <a:xfrm>
-            <a:off x="3108960" y="1097280"/>
-            <a:ext cx="3840480" cy="182880"/>
-          </a:xfrm>
-          <a:prstGeom prst="rect">
-            <a:avLst/>
-          </a:prstGeom>
-          <a:noFill/>
-          <a:ln/>
-        </p:spPr>
-        <p:txBody>
-          <a:bodyPr wrap="square" lIns="0" tIns="0" rIns="0" bIns="0" rtlCol="0" anchor="ctr"/>
-          <a:lstStyle/>
-          <a:p>
-            <a:pPr algn="ctr" indent="0" marL="0">
-              <a:buNone/>
-            </a:pPr>
-            <a:r>
-              <a:rPr lang="en-US" sz="900" spc="200" kern="0" dirty="0">
+            <a:off x="3749040" y="2423160"/>
+            <a:ext cx="2651760" cy="201168"/>
+          </a:xfrm>
+          <a:prstGeom prst="rect">
+            <a:avLst/>
+          </a:prstGeom>
+          <a:noFill/>
+          <a:ln/>
+        </p:spPr>
+        <p:txBody>
+          <a:bodyPr wrap="square" lIns="0" tIns="0" rIns="0" bIns="0" rtlCol="0" anchor="ctr"/>
+          <a:lstStyle/>
+          <a:p>
+            <a:pPr indent="0" marL="0">
+              <a:buNone/>
+            </a:pPr>
+            <a:r>
+              <a:rPr lang="en-US" sz="900" spc="150" kern="0" dirty="0">
                 <a:solidFill>
                   <a:srgbClr val="9A9997"/>
                 </a:solidFill>
@@ -10978,86 +9060,116 @@
                 <a:ea typeface="Courier New" pitchFamily="34" charset="-122"/>
                 <a:cs typeface="Courier New" pitchFamily="34" charset="-120"/>
               </a:rPr>
-              <a:t>WEST BENGAL · 294 ASSEMBLY CONSTITUENCIES</a:t>
+              <a:t>ACTUAL</a:t>
             </a:r>
             <a:endParaRPr lang="en-US" sz="900" dirty="0"/>
           </a:p>
         </p:txBody>
       </p:sp>
-      <p:pic>
-        <p:nvPicPr>
-          <p:cNvPr id="26" name="Image 1" descr="/Users/admin/Documents/Simulatte Projects/PopScale/engineering/maps/wb_actual_per_ac.png">    </p:cNvPr>
-          <p:cNvPicPr>
-            <a:picLocks noChangeAspect="1"/>
-          </p:cNvPicPr>
-          <p:nvPr/>
-        </p:nvPicPr>
-        <p:blipFill>
-          <a:blip r:embed="rId2"/>
-          <a:srcRect l="0" r="0" t="0" b="0"/>
-          <a:stretch/>
-        </p:blipFill>
-        <p:spPr>
-          <a:xfrm>
-            <a:off x="3108960" y="1280160"/>
-            <a:ext cx="3840480" cy="3611880"/>
-          </a:xfrm>
-          <a:prstGeom prst="rect">
-            <a:avLst/>
-          </a:prstGeom>
-        </p:spPr>
-      </p:pic>
-      <p:sp>
-        <p:nvSpPr>
-          <p:cNvPr id="27" name="Shape 23"/>
-          <p:cNvSpPr/>
-          <p:nvPr/>
-        </p:nvSpPr>
-        <p:spPr>
-          <a:xfrm>
-            <a:off x="7132320" y="1097280"/>
-            <a:ext cx="1737360" cy="1078992"/>
-          </a:xfrm>
-          <a:prstGeom prst="rect">
-            <a:avLst/>
-          </a:prstGeom>
-          <a:solidFill>
-            <a:srgbClr val="050505"/>
-          </a:solidFill>
-          <a:ln w="9525">
-            <a:solidFill>
-              <a:srgbClr val="1A1A1A"/>
-            </a:solidFill>
-            <a:prstDash val="solid"/>
-          </a:ln>
-        </p:spPr>
-      </p:sp>
-      <p:sp>
-        <p:nvSpPr>
-          <p:cNvPr id="28" name="Text 24"/>
-          <p:cNvSpPr/>
-          <p:nvPr/>
-        </p:nvSpPr>
-        <p:spPr>
-          <a:xfrm>
-            <a:off x="7260336" y="1188720"/>
-            <a:ext cx="1554480" cy="182880"/>
-          </a:xfrm>
-          <a:prstGeom prst="rect">
-            <a:avLst/>
-          </a:prstGeom>
-          <a:noFill/>
-          <a:ln/>
-        </p:spPr>
-        <p:txBody>
-          <a:bodyPr wrap="square" lIns="0" tIns="0" rIns="0" bIns="0" rtlCol="0" anchor="ctr"/>
-          <a:lstStyle/>
-          <a:p>
-            <a:pPr indent="0" marL="0">
-              <a:buNone/>
-            </a:pPr>
-            <a:r>
-              <a:rPr lang="en-US" sz="800" spc="150" kern="0" dirty="0">
+      <p:sp>
+        <p:nvSpPr>
+          <p:cNvPr id="15" name="Text 12"/>
+          <p:cNvSpPr/>
+          <p:nvPr/>
+        </p:nvSpPr>
+        <p:spPr>
+          <a:xfrm>
+            <a:off x="3749040" y="2642616"/>
+            <a:ext cx="2651760" cy="274320"/>
+          </a:xfrm>
+          <a:prstGeom prst="rect">
+            <a:avLst/>
+          </a:prstGeom>
+          <a:noFill/>
+          <a:ln/>
+        </p:spPr>
+        <p:txBody>
+          <a:bodyPr wrap="square" lIns="0" tIns="0" rIns="0" bIns="0" rtlCol="0" anchor="ctr"/>
+          <a:lstStyle/>
+          <a:p>
+            <a:pPr indent="0" marL="0">
+              <a:buNone/>
+            </a:pPr>
+            <a:r>
+              <a:rPr lang="en-US" sz="1400" dirty="0">
+                <a:solidFill>
+                  <a:srgbClr val="E9E6DF"/>
+                </a:solidFill>
+                <a:latin typeface="Calibri" pitchFamily="34" charset="0"/>
+                <a:ea typeface="Calibri" pitchFamily="34" charset="-122"/>
+                <a:cs typeface="Calibri" pitchFamily="34" charset="-120"/>
+              </a:rPr>
+              <a:t>TMC 30%</a:t>
+            </a:r>
+            <a:endParaRPr lang="en-US" sz="1400" dirty="0"/>
+          </a:p>
+        </p:txBody>
+      </p:sp>
+      <p:sp>
+        <p:nvSpPr>
+          <p:cNvPr id="16" name="Text 13"/>
+          <p:cNvSpPr/>
+          <p:nvPr/>
+        </p:nvSpPr>
+        <p:spPr>
+          <a:xfrm>
+            <a:off x="3749040" y="2880360"/>
+            <a:ext cx="2651760" cy="274320"/>
+          </a:xfrm>
+          <a:prstGeom prst="rect">
+            <a:avLst/>
+          </a:prstGeom>
+          <a:noFill/>
+          <a:ln/>
+        </p:spPr>
+        <p:txBody>
+          <a:bodyPr wrap="square" lIns="0" tIns="0" rIns="0" bIns="0" rtlCol="0" anchor="ctr"/>
+          <a:lstStyle/>
+          <a:p>
+            <a:pPr indent="0" marL="0">
+              <a:buNone/>
+            </a:pPr>
+            <a:r>
+              <a:rPr lang="en-US" sz="1400" dirty="0">
+                <a:solidFill>
+                  <a:srgbClr val="A8A6A0"/>
+                </a:solidFill>
+                <a:latin typeface="Calibri" pitchFamily="34" charset="0"/>
+                <a:ea typeface="Calibri" pitchFamily="34" charset="-122"/>
+                <a:cs typeface="Calibri" pitchFamily="34" charset="-120"/>
+              </a:rPr>
+              <a:t>BJP 60%</a:t>
+            </a:r>
+            <a:endParaRPr lang="en-US" sz="1400" dirty="0"/>
+          </a:p>
+        </p:txBody>
+      </p:sp>
+      <p:sp>
+        <p:nvSpPr>
+          <p:cNvPr id="17" name="Text 14"/>
+          <p:cNvSpPr/>
+          <p:nvPr/>
+        </p:nvSpPr>
+        <p:spPr>
+          <a:xfrm>
+            <a:off x="3749040" y="3291840"/>
+            <a:ext cx="2651760" cy="201168"/>
+          </a:xfrm>
+          <a:prstGeom prst="rect">
+            <a:avLst/>
+          </a:prstGeom>
+          <a:noFill/>
+          <a:ln/>
+        </p:spPr>
+        <p:txBody>
+          <a:bodyPr wrap="square" lIns="0" tIns="0" rIns="0" bIns="0" rtlCol="0" anchor="ctr"/>
+          <a:lstStyle/>
+          <a:p>
+            <a:pPr indent="0" marL="0">
+              <a:buNone/>
+            </a:pPr>
+            <a:r>
+              <a:rPr lang="en-US" sz="900" spc="150" kern="0" dirty="0">
                 <a:solidFill>
                   <a:srgbClr val="9A9997"/>
                 </a:solidFill>
@@ -11065,127 +9177,116 @@
                 <a:ea typeface="Courier New" pitchFamily="34" charset="-122"/>
                 <a:cs typeface="Courier New" pitchFamily="34" charset="-120"/>
               </a:rPr>
-              <a:t>MAJORITY LINE</a:t>
-            </a:r>
-            <a:endParaRPr lang="en-US" sz="800" dirty="0"/>
-          </a:p>
-        </p:txBody>
-      </p:sp>
-      <p:sp>
-        <p:nvSpPr>
-          <p:cNvPr id="29" name="Text 25"/>
-          <p:cNvSpPr/>
-          <p:nvPr/>
-        </p:nvSpPr>
-        <p:spPr>
-          <a:xfrm>
-            <a:off x="7260336" y="1417320"/>
-            <a:ext cx="1554480" cy="640080"/>
-          </a:xfrm>
-          <a:prstGeom prst="rect">
-            <a:avLst/>
-          </a:prstGeom>
-          <a:noFill/>
-          <a:ln/>
-        </p:spPr>
-        <p:txBody>
-          <a:bodyPr wrap="square" lIns="0" tIns="0" rIns="0" bIns="0" rtlCol="0" anchor="ctr"/>
-          <a:lstStyle/>
-          <a:p>
-            <a:pPr indent="0" marL="0">
-              <a:buNone/>
-            </a:pPr>
-            <a:r>
-              <a:rPr lang="en-US" sz="3600" b="1" dirty="0">
-                <a:solidFill>
-                  <a:srgbClr val="E9E6DF"/>
-                </a:solidFill>
-                <a:latin typeface="Arial Narrow" pitchFamily="34" charset="0"/>
-                <a:ea typeface="Arial Narrow" pitchFamily="34" charset="-122"/>
-                <a:cs typeface="Arial Narrow" pitchFamily="34" charset="-120"/>
-              </a:rPr>
-              <a:t>148</a:t>
-            </a:r>
-            <a:endParaRPr lang="en-US" sz="3600" dirty="0"/>
-          </a:p>
-        </p:txBody>
-      </p:sp>
-      <p:sp>
-        <p:nvSpPr>
-          <p:cNvPr id="30" name="Shape 26"/>
-          <p:cNvSpPr/>
-          <p:nvPr/>
-        </p:nvSpPr>
-        <p:spPr>
-          <a:xfrm>
-            <a:off x="7132320" y="2331720"/>
-            <a:ext cx="1737360" cy="1078992"/>
-          </a:xfrm>
-          <a:prstGeom prst="rect">
-            <a:avLst/>
-          </a:prstGeom>
-          <a:solidFill>
-            <a:srgbClr val="050505"/>
-          </a:solidFill>
-          <a:ln w="9525">
-            <a:solidFill>
-              <a:srgbClr val="1A1A1A"/>
-            </a:solidFill>
-            <a:prstDash val="solid"/>
-          </a:ln>
-        </p:spPr>
-      </p:sp>
-      <p:sp>
-        <p:nvSpPr>
-          <p:cNvPr id="31" name="Shape 27"/>
-          <p:cNvSpPr/>
-          <p:nvPr/>
-        </p:nvSpPr>
-        <p:spPr>
-          <a:xfrm>
-            <a:off x="7132320" y="2331720"/>
-            <a:ext cx="54864" cy="1078992"/>
-          </a:xfrm>
-          <a:prstGeom prst="rect">
-            <a:avLst/>
-          </a:prstGeom>
-          <a:solidFill>
-            <a:srgbClr val="A8FF3E"/>
-          </a:solidFill>
-          <a:ln w="12700">
-            <a:solidFill>
-              <a:srgbClr val="A8FF3E"/>
-            </a:solidFill>
-            <a:prstDash val="solid"/>
-          </a:ln>
-        </p:spPr>
-      </p:sp>
-      <p:sp>
-        <p:nvSpPr>
-          <p:cNvPr id="32" name="Text 28"/>
-          <p:cNvSpPr/>
-          <p:nvPr/>
-        </p:nvSpPr>
-        <p:spPr>
-          <a:xfrm>
-            <a:off x="7296912" y="2423160"/>
-            <a:ext cx="1517904" cy="182880"/>
-          </a:xfrm>
-          <a:prstGeom prst="rect">
-            <a:avLst/>
-          </a:prstGeom>
-          <a:noFill/>
-          <a:ln/>
-        </p:spPr>
-        <p:txBody>
-          <a:bodyPr wrap="square" lIns="0" tIns="0" rIns="0" bIns="0" rtlCol="0" anchor="ctr"/>
-          <a:lstStyle/>
-          <a:p>
-            <a:pPr indent="0" marL="0">
-              <a:buNone/>
-            </a:pPr>
-            <a:r>
-              <a:rPr lang="en-US" sz="800" spc="150" kern="0" dirty="0">
+              <a:t>SEATS</a:t>
+            </a:r>
+            <a:endParaRPr lang="en-US" sz="900" dirty="0"/>
+          </a:p>
+        </p:txBody>
+      </p:sp>
+      <p:sp>
+        <p:nvSpPr>
+          <p:cNvPr id="18" name="Text 15"/>
+          <p:cNvSpPr/>
+          <p:nvPr/>
+        </p:nvSpPr>
+        <p:spPr>
+          <a:xfrm>
+            <a:off x="3749040" y="3502152"/>
+            <a:ext cx="2651760" cy="237744"/>
+          </a:xfrm>
+          <a:prstGeom prst="rect">
+            <a:avLst/>
+          </a:prstGeom>
+          <a:noFill/>
+          <a:ln/>
+        </p:spPr>
+        <p:txBody>
+          <a:bodyPr wrap="square" lIns="0" tIns="0" rIns="0" bIns="0" rtlCol="0" anchor="ctr"/>
+          <a:lstStyle/>
+          <a:p>
+            <a:pPr indent="0" marL="0">
+              <a:buNone/>
+            </a:pPr>
+            <a:r>
+              <a:rPr lang="en-US" sz="1100" dirty="0">
+                <a:solidFill>
+                  <a:srgbClr val="A8A6A0"/>
+                </a:solidFill>
+                <a:latin typeface="Calibri" pitchFamily="34" charset="0"/>
+                <a:ea typeface="Calibri" pitchFamily="34" charset="-122"/>
+                <a:cs typeface="Calibri" pitchFamily="34" charset="-120"/>
+              </a:rPr>
+              <a:t>Pred: TMC 28 · BJP 12</a:t>
+            </a:r>
+            <a:endParaRPr lang="en-US" sz="1100" dirty="0"/>
+          </a:p>
+        </p:txBody>
+      </p:sp>
+      <p:sp>
+        <p:nvSpPr>
+          <p:cNvPr id="19" name="Text 16"/>
+          <p:cNvSpPr/>
+          <p:nvPr/>
+        </p:nvSpPr>
+        <p:spPr>
+          <a:xfrm>
+            <a:off x="3749040" y="3730752"/>
+            <a:ext cx="2651760" cy="237744"/>
+          </a:xfrm>
+          <a:prstGeom prst="rect">
+            <a:avLst/>
+          </a:prstGeom>
+          <a:noFill/>
+          <a:ln/>
+        </p:spPr>
+        <p:txBody>
+          <a:bodyPr wrap="square" lIns="0" tIns="0" rIns="0" bIns="0" rtlCol="0" anchor="ctr"/>
+          <a:lstStyle/>
+          <a:p>
+            <a:pPr indent="0" marL="0">
+              <a:buNone/>
+            </a:pPr>
+            <a:r>
+              <a:rPr lang="en-US" sz="1100" dirty="0">
+                <a:solidFill>
+                  <a:srgbClr val="A8A6A0"/>
+                </a:solidFill>
+                <a:latin typeface="Calibri" pitchFamily="34" charset="0"/>
+                <a:ea typeface="Calibri" pitchFamily="34" charset="-122"/>
+                <a:cs typeface="Calibri" pitchFamily="34" charset="-120"/>
+              </a:rPr>
+              <a:t>Act:  BJP 33 · TMC 7</a:t>
+            </a:r>
+            <a:endParaRPr lang="en-US" sz="1100" dirty="0"/>
+          </a:p>
+        </p:txBody>
+      </p:sp>
+      <p:sp>
+        <p:nvSpPr>
+          <p:cNvPr id="20" name="Text 17"/>
+          <p:cNvSpPr/>
+          <p:nvPr/>
+        </p:nvSpPr>
+        <p:spPr>
+          <a:xfrm>
+            <a:off x="6583680" y="1554480"/>
+            <a:ext cx="2240280" cy="201168"/>
+          </a:xfrm>
+          <a:prstGeom prst="rect">
+            <a:avLst/>
+          </a:prstGeom>
+          <a:noFill/>
+          <a:ln/>
+        </p:spPr>
+        <p:txBody>
+          <a:bodyPr wrap="square" lIns="0" tIns="0" rIns="0" bIns="0" rtlCol="0" anchor="ctr"/>
+          <a:lstStyle/>
+          <a:p>
+            <a:pPr indent="0" marL="0">
+              <a:buNone/>
+            </a:pPr>
+            <a:r>
+              <a:rPr lang="en-US" sz="900" spc="150" kern="0" dirty="0">
                 <a:solidFill>
                   <a:srgbClr val="9A9997"/>
                 </a:solidFill>
@@ -11193,102 +9294,116 @@
                 <a:ea typeface="Courier New" pitchFamily="34" charset="-122"/>
                 <a:cs typeface="Courier New" pitchFamily="34" charset="-120"/>
               </a:rPr>
-              <a:t>BJP MARGIN</a:t>
-            </a:r>
-            <a:endParaRPr lang="en-US" sz="800" dirty="0"/>
-          </a:p>
-        </p:txBody>
-      </p:sp>
-      <p:sp>
-        <p:nvSpPr>
-          <p:cNvPr id="33" name="Text 29"/>
-          <p:cNvSpPr/>
-          <p:nvPr/>
-        </p:nvSpPr>
-        <p:spPr>
-          <a:xfrm>
-            <a:off x="7296912" y="2651760"/>
-            <a:ext cx="1517904" cy="640080"/>
-          </a:xfrm>
-          <a:prstGeom prst="rect">
-            <a:avLst/>
-          </a:prstGeom>
-          <a:noFill/>
-          <a:ln/>
-        </p:spPr>
-        <p:txBody>
-          <a:bodyPr wrap="square" lIns="0" tIns="0" rIns="0" bIns="0" rtlCol="0" anchor="ctr"/>
-          <a:lstStyle/>
-          <a:p>
-            <a:pPr indent="0" marL="0">
-              <a:buNone/>
-            </a:pPr>
-            <a:r>
-              <a:rPr lang="en-US" sz="3600" b="1" dirty="0">
-                <a:solidFill>
-                  <a:srgbClr val="A8FF3E"/>
-                </a:solidFill>
-                <a:latin typeface="Arial Narrow" pitchFamily="34" charset="0"/>
-                <a:ea typeface="Arial Narrow" pitchFamily="34" charset="-122"/>
-                <a:cs typeface="Arial Narrow" pitchFamily="34" charset="-120"/>
-              </a:rPr>
-              <a:t>+55</a:t>
-            </a:r>
-            <a:endParaRPr lang="en-US" sz="3600" dirty="0"/>
-          </a:p>
-        </p:txBody>
-      </p:sp>
-      <p:sp>
-        <p:nvSpPr>
-          <p:cNvPr id="34" name="Shape 30"/>
-          <p:cNvSpPr/>
-          <p:nvPr/>
-        </p:nvSpPr>
-        <p:spPr>
-          <a:xfrm>
-            <a:off x="7132320" y="3566160"/>
-            <a:ext cx="1737360" cy="1078992"/>
-          </a:xfrm>
-          <a:prstGeom prst="rect">
-            <a:avLst/>
-          </a:prstGeom>
-          <a:solidFill>
-            <a:srgbClr val="050505"/>
-          </a:solidFill>
-          <a:ln w="9525">
-            <a:solidFill>
-              <a:srgbClr val="1A1A1A"/>
-            </a:solidFill>
-            <a:prstDash val="solid"/>
-          </a:ln>
-        </p:spPr>
-      </p:sp>
-      <p:sp>
-        <p:nvSpPr>
-          <p:cNvPr id="35" name="Text 31"/>
-          <p:cNvSpPr/>
-          <p:nvPr/>
-        </p:nvSpPr>
-        <p:spPr>
-          <a:xfrm>
-            <a:off x="7260336" y="3657600"/>
-            <a:ext cx="1554480" cy="182880"/>
-          </a:xfrm>
-          <a:prstGeom prst="rect">
-            <a:avLst/>
-          </a:prstGeom>
-          <a:noFill/>
-          <a:ln/>
-        </p:spPr>
-        <p:txBody>
-          <a:bodyPr wrap="square" lIns="0" tIns="0" rIns="0" bIns="0" rtlCol="0" anchor="ctr"/>
-          <a:lstStyle/>
-          <a:p>
-            <a:pPr indent="0" marL="0">
-              <a:buNone/>
-            </a:pPr>
-            <a:r>
-              <a:rPr lang="en-US" sz="800" spc="150" kern="0" dirty="0">
+              <a:t>THE FACTOR</a:t>
+            </a:r>
+            <a:endParaRPr lang="en-US" sz="900" dirty="0"/>
+          </a:p>
+        </p:txBody>
+      </p:sp>
+      <p:sp>
+        <p:nvSpPr>
+          <p:cNvPr id="21" name="Text 18"/>
+          <p:cNvSpPr/>
+          <p:nvPr/>
+        </p:nvSpPr>
+        <p:spPr>
+          <a:xfrm>
+            <a:off x="6583680" y="1828800"/>
+            <a:ext cx="2240280" cy="457200"/>
+          </a:xfrm>
+          <a:prstGeom prst="rect">
+            <a:avLst/>
+          </a:prstGeom>
+          <a:noFill/>
+          <a:ln/>
+        </p:spPr>
+        <p:txBody>
+          <a:bodyPr wrap="square" lIns="0" tIns="0" rIns="0" bIns="0" rtlCol="0" anchor="ctr"/>
+          <a:lstStyle/>
+          <a:p>
+            <a:pPr indent="0" marL="0">
+              <a:buNone/>
+            </a:pPr>
+            <a:r>
+              <a:rPr lang="en-US" sz="1400" b="1" dirty="0">
+                <a:solidFill>
+                  <a:srgbClr val="E9E6DF"/>
+                </a:solidFill>
+                <a:latin typeface="Calibri" pitchFamily="34" charset="0"/>
+                <a:ea typeface="Calibri" pitchFamily="34" charset="-122"/>
+                <a:cs typeface="Calibri" pitchFamily="34" charset="-120"/>
+              </a:rPr>
+              <a:t>Reverse CAA swing.</a:t>
+            </a:r>
+            <a:endParaRPr lang="en-US" sz="1400" dirty="0"/>
+          </a:p>
+        </p:txBody>
+      </p:sp>
+      <p:sp>
+        <p:nvSpPr>
+          <p:cNvPr id="22" name="Text 19"/>
+          <p:cNvSpPr/>
+          <p:nvPr/>
+        </p:nvSpPr>
+        <p:spPr>
+          <a:xfrm>
+            <a:off x="6583680" y="2423160"/>
+            <a:ext cx="2240280" cy="2011680"/>
+          </a:xfrm>
+          <a:prstGeom prst="rect">
+            <a:avLst/>
+          </a:prstGeom>
+          <a:noFill/>
+          <a:ln/>
+        </p:spPr>
+        <p:txBody>
+          <a:bodyPr wrap="square" lIns="0" tIns="0" rIns="0" bIns="0" rtlCol="0" anchor="ctr"/>
+          <a:lstStyle/>
+          <a:p>
+            <a:pPr indent="0" marL="0">
+              <a:buNone/>
+            </a:pPr>
+            <a:r>
+              <a:rPr lang="en-US" sz="1200" dirty="0">
+                <a:solidFill>
+                  <a:srgbClr val="C9C7C0"/>
+                </a:solidFill>
+                <a:latin typeface="Calibri" pitchFamily="34" charset="0"/>
+                <a:ea typeface="Calibri" pitchFamily="34" charset="-122"/>
+                <a:cs typeface="Calibri" pitchFamily="34" charset="-120"/>
+              </a:rPr>
+              <a:t>Matua identification with BJP's CAA delivery, not the modelled backlash.</a:t>
+            </a:r>
+            <a:endParaRPr lang="en-US" sz="1200" dirty="0"/>
+          </a:p>
+        </p:txBody>
+      </p:sp>
+      <p:sp>
+        <p:nvSpPr>
+          <p:cNvPr id="23" name="Text 20"/>
+          <p:cNvSpPr/>
+          <p:nvPr/>
+        </p:nvSpPr>
+        <p:spPr>
+          <a:xfrm>
+            <a:off x="6583680" y="4160520"/>
+            <a:ext cx="2240280" cy="274320"/>
+          </a:xfrm>
+          <a:prstGeom prst="rect">
+            <a:avLst/>
+          </a:prstGeom>
+          <a:noFill/>
+          <a:ln/>
+        </p:spPr>
+        <p:txBody>
+          <a:bodyPr wrap="square" lIns="0" tIns="0" rIns="0" bIns="0" rtlCol="0" anchor="ctr"/>
+          <a:lstStyle/>
+          <a:p>
+            <a:pPr indent="0" marL="0">
+              <a:buNone/>
+            </a:pPr>
+            <a:r>
+              <a:rPr lang="en-US" sz="1000" spc="150" kern="0" dirty="0">
                 <a:solidFill>
                   <a:srgbClr val="9A9997"/>
                 </a:solidFill>
@@ -11296,48 +9411,9 @@
                 <a:ea typeface="Courier New" pitchFamily="34" charset="-122"/>
                 <a:cs typeface="Courier New" pitchFamily="34" charset="-120"/>
               </a:rPr>
-              <a:t>BJP SEATS / 294</a:t>
-            </a:r>
-            <a:endParaRPr lang="en-US" sz="800" dirty="0"/>
-          </a:p>
-        </p:txBody>
-      </p:sp>
-      <p:sp>
-        <p:nvSpPr>
-          <p:cNvPr id="36" name="Text 32"/>
-          <p:cNvSpPr/>
-          <p:nvPr/>
-        </p:nvSpPr>
-        <p:spPr>
-          <a:xfrm>
-            <a:off x="7260336" y="3886200"/>
-            <a:ext cx="1554480" cy="640080"/>
-          </a:xfrm>
-          <a:prstGeom prst="rect">
-            <a:avLst/>
-          </a:prstGeom>
-          <a:noFill/>
-          <a:ln/>
-        </p:spPr>
-        <p:txBody>
-          <a:bodyPr wrap="square" lIns="0" tIns="0" rIns="0" bIns="0" rtlCol="0" anchor="ctr"/>
-          <a:lstStyle/>
-          <a:p>
-            <a:pPr indent="0" marL="0">
-              <a:buNone/>
-            </a:pPr>
-            <a:r>
-              <a:rPr lang="en-US" sz="3600" b="1" dirty="0">
-                <a:solidFill>
-                  <a:srgbClr val="E9E6DF"/>
-                </a:solidFill>
-                <a:latin typeface="Arial Narrow" pitchFamily="34" charset="0"/>
-                <a:ea typeface="Arial Narrow" pitchFamily="34" charset="-122"/>
-                <a:cs typeface="Arial Narrow" pitchFamily="34" charset="-120"/>
-              </a:rPr>
-              <a:t>203</a:t>
-            </a:r>
-            <a:endParaRPr lang="en-US" sz="3600" dirty="0"/>
+              <a:t>40 SEATS</a:t>
+            </a:r>
+            <a:endParaRPr lang="en-US" sz="1000" dirty="0"/>
           </a:p>
         </p:txBody>
       </p:sp>
@@ -11559,7 +9635,7 @@
                 <a:ea typeface="Courier New" pitchFamily="34" charset="-122"/>
                 <a:cs typeface="Courier New" pitchFamily="34" charset="-120"/>
               </a:rPr>
-              <a:t>ANALYSIS · 01 OF 10 · MATUA BELT (NADIA · N24PGS)</a:t>
+              <a:t>ANALYSIS · 02 OF 10 · PRESIDENCY SUBURBS</a:t>
             </a:r>
             <a:endParaRPr lang="en-US" sz="900" dirty="0"/>
           </a:p>
@@ -11598,7 +9674,7 @@
                 <a:ea typeface="Arial Narrow" pitchFamily="34" charset="-122"/>
                 <a:cs typeface="Arial Narrow" pitchFamily="34" charset="-120"/>
               </a:rPr>
-              <a:t>Matua Belt (Nadia · N24Pgs): TMC → BJP</a:t>
+              <a:t>Presidency Suburbs: TMC → BJP</a:t>
             </a:r>
             <a:endParaRPr lang="en-US" sz="3000" dirty="0"/>
           </a:p>
@@ -11629,7 +9705,7 @@
       </p:sp>
       <p:pic>
         <p:nvPicPr>
-          <p:cNvPr id="10" name="Image 0" descr="/Users/admin/Documents/Simulatte Projects/PopScale/engineering/maps/wb_cluster_matua_belt.png">    </p:cNvPr>
+          <p:cNvPr id="10" name="Image 0" descr="/Users/admin/Documents/Simulatte Projects/PopScale/engineering/maps/wb_cluster_presidency_suburbs.png">    </p:cNvPr>
           <p:cNvPicPr>
             <a:picLocks noChangeAspect="1"/>
           </p:cNvPicPr>
@@ -11722,7 +9798,7 @@
                 <a:ea typeface="Calibri" pitchFamily="34" charset="-122"/>
                 <a:cs typeface="Calibri" pitchFamily="34" charset="-120"/>
               </a:rPr>
-              <a:t>TMC 65%</a:t>
+              <a:t>TMC 52%</a:t>
             </a:r>
             <a:endParaRPr lang="en-US" sz="1400" dirty="0"/>
           </a:p>
@@ -11839,7 +9915,7 @@
                 <a:ea typeface="Calibri" pitchFamily="34" charset="-122"/>
                 <a:cs typeface="Calibri" pitchFamily="34" charset="-120"/>
               </a:rPr>
-              <a:t>TMC 30%</a:t>
+              <a:t>TMC 36%</a:t>
             </a:r>
             <a:endParaRPr lang="en-US" sz="1400" dirty="0"/>
           </a:p>
@@ -11878,7 +9954,7 @@
                 <a:ea typeface="Calibri" pitchFamily="34" charset="-122"/>
                 <a:cs typeface="Calibri" pitchFamily="34" charset="-120"/>
               </a:rPr>
-              <a:t>BJP 60%</a:t>
+              <a:t>BJP 50%</a:t>
             </a:r>
             <a:endParaRPr lang="en-US" sz="1400" dirty="0"/>
           </a:p>
@@ -11995,7 +10071,7 @@
                 <a:ea typeface="Calibri" pitchFamily="34" charset="-122"/>
                 <a:cs typeface="Calibri" pitchFamily="34" charset="-120"/>
               </a:rPr>
-              <a:t>Act:  BJP 33 · TMC 7</a:t>
+              <a:t>Act:  BJP 30 · TMC 10</a:t>
             </a:r>
             <a:endParaRPr lang="en-US" sz="1100" dirty="0"/>
           </a:p>
@@ -12073,7 +10149,7 @@
                 <a:ea typeface="Calibri" pitchFamily="34" charset="-122"/>
                 <a:cs typeface="Calibri" pitchFamily="34" charset="-120"/>
               </a:rPr>
-              <a:t>Reverse CAA swing.</a:t>
+              <a:t>Hindu consolidation.</a:t>
             </a:r>
             <a:endParaRPr lang="en-US" sz="1400" dirty="0"/>
           </a:p>
@@ -12112,7 +10188,7 @@
                 <a:ea typeface="Calibri" pitchFamily="34" charset="-122"/>
                 <a:cs typeface="Calibri" pitchFamily="34" charset="-120"/>
               </a:rPr>
-              <a:t>Matua identification with BJP's CAA delivery, not the modelled backlash.</a:t>
+              <a:t>Unified BJP voteshare across heterogeneous suburbs.</a:t>
             </a:r>
             <a:endParaRPr lang="en-US" sz="1200" dirty="0"/>
           </a:p>
@@ -12375,7 +10451,7 @@
                 <a:ea typeface="Courier New" pitchFamily="34" charset="-122"/>
                 <a:cs typeface="Courier New" pitchFamily="34" charset="-120"/>
               </a:rPr>
-              <a:t>ANALYSIS · 02 OF 10 · PRESIDENCY SUBURBS</a:t>
+              <a:t>ANALYSIS · 03 OF 10 · JUNGLE MAHAL</a:t>
             </a:r>
             <a:endParaRPr lang="en-US" sz="900" dirty="0"/>
           </a:p>
@@ -12414,7 +10490,7 @@
                 <a:ea typeface="Arial Narrow" pitchFamily="34" charset="-122"/>
                 <a:cs typeface="Arial Narrow" pitchFamily="34" charset="-120"/>
               </a:rPr>
-              <a:t>Presidency Suburbs: TMC → BJP</a:t>
+              <a:t>Jungle Mahal: TMC → BJP</a:t>
             </a:r>
             <a:endParaRPr lang="en-US" sz="3000" dirty="0"/>
           </a:p>
@@ -12445,7 +10521,7 @@
       </p:sp>
       <p:pic>
         <p:nvPicPr>
-          <p:cNvPr id="10" name="Image 0" descr="/Users/admin/Documents/Simulatte Projects/PopScale/engineering/maps/wb_cluster_presidency_suburbs.png">    </p:cNvPr>
+          <p:cNvPr id="10" name="Image 0" descr="/Users/admin/Documents/Simulatte Projects/PopScale/engineering/maps/wb_cluster_jungle_mahal.png">    </p:cNvPr>
           <p:cNvPicPr>
             <a:picLocks noChangeAspect="1"/>
           </p:cNvPicPr>
@@ -12538,7 +10614,7 @@
                 <a:ea typeface="Calibri" pitchFamily="34" charset="-122"/>
                 <a:cs typeface="Calibri" pitchFamily="34" charset="-120"/>
               </a:rPr>
-              <a:t>TMC 52%</a:t>
+              <a:t>TMC 58%</a:t>
             </a:r>
             <a:endParaRPr lang="en-US" sz="1400" dirty="0"/>
           </a:p>
@@ -12577,7 +10653,7 @@
                 <a:ea typeface="Calibri" pitchFamily="34" charset="-122"/>
                 <a:cs typeface="Calibri" pitchFamily="34" charset="-120"/>
               </a:rPr>
-              <a:t>BJP 30%</a:t>
+              <a:t>BJP 28%</a:t>
             </a:r>
             <a:endParaRPr lang="en-US" sz="1400" dirty="0"/>
           </a:p>
@@ -12655,7 +10731,7 @@
                 <a:ea typeface="Calibri" pitchFamily="34" charset="-122"/>
                 <a:cs typeface="Calibri" pitchFamily="34" charset="-120"/>
               </a:rPr>
-              <a:t>TMC 36%</a:t>
+              <a:t>TMC 32%</a:t>
             </a:r>
             <a:endParaRPr lang="en-US" sz="1400" dirty="0"/>
           </a:p>
@@ -12694,7 +10770,7 @@
                 <a:ea typeface="Calibri" pitchFamily="34" charset="-122"/>
                 <a:cs typeface="Calibri" pitchFamily="34" charset="-120"/>
               </a:rPr>
-              <a:t>BJP 50%</a:t>
+              <a:t>BJP 56%</a:t>
             </a:r>
             <a:endParaRPr lang="en-US" sz="1400" dirty="0"/>
           </a:p>
@@ -12772,7 +10848,7 @@
                 <a:ea typeface="Calibri" pitchFamily="34" charset="-122"/>
                 <a:cs typeface="Calibri" pitchFamily="34" charset="-120"/>
               </a:rPr>
-              <a:t>Pred: TMC 28 · BJP 12</a:t>
+              <a:t>Pred: TMC 38 · BJP 12</a:t>
             </a:r>
             <a:endParaRPr lang="en-US" sz="1100" dirty="0"/>
           </a:p>
@@ -12811,7 +10887,7 @@
                 <a:ea typeface="Calibri" pitchFamily="34" charset="-122"/>
                 <a:cs typeface="Calibri" pitchFamily="34" charset="-120"/>
               </a:rPr>
-              <a:t>Act:  BJP 30 · TMC 10</a:t>
+              <a:t>Act:  BJP 38 · TMC 12</a:t>
             </a:r>
             <a:endParaRPr lang="en-US" sz="1100" dirty="0"/>
           </a:p>
@@ -12889,7 +10965,7 @@
                 <a:ea typeface="Calibri" pitchFamily="34" charset="-122"/>
                 <a:cs typeface="Calibri" pitchFamily="34" charset="-120"/>
               </a:rPr>
-              <a:t>Hindu consolidation.</a:t>
+              <a:t>Sustained BJP organisation.</a:t>
             </a:r>
             <a:endParaRPr lang="en-US" sz="1400" dirty="0"/>
           </a:p>
@@ -12928,7 +11004,7 @@
                 <a:ea typeface="Calibri" pitchFamily="34" charset="-122"/>
                 <a:cs typeface="Calibri" pitchFamily="34" charset="-120"/>
               </a:rPr>
-              <a:t>Unified BJP voteshare across heterogeneous suburbs.</a:t>
+              <a:t>2021 anti-BJP correction did not stick; rural welfare delivery held.</a:t>
             </a:r>
             <a:endParaRPr lang="en-US" sz="1200" dirty="0"/>
           </a:p>
@@ -12967,7 +11043,7 @@
                 <a:ea typeface="Courier New" pitchFamily="34" charset="-122"/>
                 <a:cs typeface="Courier New" pitchFamily="34" charset="-120"/>
               </a:rPr>
-              <a:t>40 SEATS</a:t>
+              <a:t>50 SEATS</a:t>
             </a:r>
             <a:endParaRPr lang="en-US" sz="1000" dirty="0"/>
           </a:p>
@@ -13191,7 +11267,7 @@
                 <a:ea typeface="Courier New" pitchFamily="34" charset="-122"/>
                 <a:cs typeface="Courier New" pitchFamily="34" charset="-120"/>
               </a:rPr>
-              <a:t>ANALYSIS · 03 OF 10 · JUNGLE MAHAL</a:t>
+              <a:t>ANALYSIS · 04 OF 10 · SOUTH RURAL</a:t>
             </a:r>
             <a:endParaRPr lang="en-US" sz="900" dirty="0"/>
           </a:p>
@@ -13230,7 +11306,7 @@
                 <a:ea typeface="Arial Narrow" pitchFamily="34" charset="-122"/>
                 <a:cs typeface="Arial Narrow" pitchFamily="34" charset="-120"/>
               </a:rPr>
-              <a:t>Jungle Mahal: TMC → BJP</a:t>
+              <a:t>South Rural: TMC → BJP</a:t>
             </a:r>
             <a:endParaRPr lang="en-US" sz="3000" dirty="0"/>
           </a:p>
@@ -13261,7 +11337,7 @@
       </p:sp>
       <p:pic>
         <p:nvPicPr>
-          <p:cNvPr id="10" name="Image 0" descr="/Users/admin/Documents/Simulatte Projects/PopScale/engineering/maps/wb_cluster_jungle_mahal.png">    </p:cNvPr>
+          <p:cNvPr id="10" name="Image 0" descr="/Users/admin/Documents/Simulatte Projects/PopScale/engineering/maps/wb_cluster_south_rural.png">    </p:cNvPr>
           <p:cNvPicPr>
             <a:picLocks noChangeAspect="1"/>
           </p:cNvPicPr>
@@ -13354,7 +11430,7 @@
                 <a:ea typeface="Calibri" pitchFamily="34" charset="-122"/>
                 <a:cs typeface="Calibri" pitchFamily="34" charset="-120"/>
               </a:rPr>
-              <a:t>TMC 58%</a:t>
+              <a:t>TMC 55%</a:t>
             </a:r>
             <a:endParaRPr lang="en-US" sz="1400" dirty="0"/>
           </a:p>
@@ -13393,7 +11469,7 @@
                 <a:ea typeface="Calibri" pitchFamily="34" charset="-122"/>
                 <a:cs typeface="Calibri" pitchFamily="34" charset="-120"/>
               </a:rPr>
-              <a:t>BJP 28%</a:t>
+              <a:t>BJP 32%</a:t>
             </a:r>
             <a:endParaRPr lang="en-US" sz="1400" dirty="0"/>
           </a:p>
@@ -13471,7 +11547,7 @@
                 <a:ea typeface="Calibri" pitchFamily="34" charset="-122"/>
                 <a:cs typeface="Calibri" pitchFamily="34" charset="-120"/>
               </a:rPr>
-              <a:t>TMC 32%</a:t>
+              <a:t>TMC 35%</a:t>
             </a:r>
             <a:endParaRPr lang="en-US" sz="1400" dirty="0"/>
           </a:p>
@@ -13510,7 +11586,7 @@
                 <a:ea typeface="Calibri" pitchFamily="34" charset="-122"/>
                 <a:cs typeface="Calibri" pitchFamily="34" charset="-120"/>
               </a:rPr>
-              <a:t>BJP 56%</a:t>
+              <a:t>BJP 52%</a:t>
             </a:r>
             <a:endParaRPr lang="en-US" sz="1400" dirty="0"/>
           </a:p>
@@ -13588,7 +11664,7 @@
                 <a:ea typeface="Calibri" pitchFamily="34" charset="-122"/>
                 <a:cs typeface="Calibri" pitchFamily="34" charset="-120"/>
               </a:rPr>
-              <a:t>Pred: TMC 38 · BJP 12</a:t>
+              <a:t>Pred: TMC 25 · BJP 10</a:t>
             </a:r>
             <a:endParaRPr lang="en-US" sz="1100" dirty="0"/>
           </a:p>
@@ -13627,7 +11703,7 @@
                 <a:ea typeface="Calibri" pitchFamily="34" charset="-122"/>
                 <a:cs typeface="Calibri" pitchFamily="34" charset="-120"/>
               </a:rPr>
-              <a:t>Act:  BJP 38 · TMC 12</a:t>
+              <a:t>Act:  BJP 26 · TMC 9</a:t>
             </a:r>
             <a:endParaRPr lang="en-US" sz="1100" dirty="0"/>
           </a:p>
@@ -13705,7 +11781,7 @@
                 <a:ea typeface="Calibri" pitchFamily="34" charset="-122"/>
                 <a:cs typeface="Calibri" pitchFamily="34" charset="-120"/>
               </a:rPr>
-              <a:t>Sustained BJP organisation.</a:t>
+              <a:t>Anti-incumbency.</a:t>
             </a:r>
             <a:endParaRPr lang="en-US" sz="1400" dirty="0"/>
           </a:p>
@@ -13744,7 +11820,7 @@
                 <a:ea typeface="Calibri" pitchFamily="34" charset="-122"/>
                 <a:cs typeface="Calibri" pitchFamily="34" charset="-120"/>
               </a:rPr>
-              <a:t>2021 anti-BJP correction did not stick; rural welfare delivery held.</a:t>
+              <a:t>Corruption cases (Sandeshkhali, recruitment scam) cut deepest here.</a:t>
             </a:r>
             <a:endParaRPr lang="en-US" sz="1200" dirty="0"/>
           </a:p>
@@ -13783,7 +11859,7 @@
                 <a:ea typeface="Courier New" pitchFamily="34" charset="-122"/>
                 <a:cs typeface="Courier New" pitchFamily="34" charset="-120"/>
               </a:rPr>
-              <a:t>50 SEATS</a:t>
+              <a:t>35 SEATS</a:t>
             </a:r>
             <a:endParaRPr lang="en-US" sz="1000" dirty="0"/>
           </a:p>
@@ -14007,7 +12083,7 @@
                 <a:ea typeface="Courier New" pitchFamily="34" charset="-122"/>
                 <a:cs typeface="Courier New" pitchFamily="34" charset="-120"/>
               </a:rPr>
-              <a:t>ANALYSIS · 04 OF 10 · SOUTH RURAL</a:t>
+              <a:t>ANALYSIS · 05 OF 10 · KOLKATA URBAN</a:t>
             </a:r>
             <a:endParaRPr lang="en-US" sz="900" dirty="0"/>
           </a:p>
@@ -14046,7 +12122,7 @@
                 <a:ea typeface="Arial Narrow" pitchFamily="34" charset="-122"/>
                 <a:cs typeface="Arial Narrow" pitchFamily="34" charset="-120"/>
               </a:rPr>
-              <a:t>South Rural: TMC → BJP</a:t>
+              <a:t>Kolkata Urban: TMC → BJP</a:t>
             </a:r>
             <a:endParaRPr lang="en-US" sz="3000" dirty="0"/>
           </a:p>
@@ -14077,7 +12153,7 @@
       </p:sp>
       <p:pic>
         <p:nvPicPr>
-          <p:cNvPr id="10" name="Image 0" descr="/Users/admin/Documents/Simulatte Projects/PopScale/engineering/maps/wb_cluster_south_rural.png">    </p:cNvPr>
+          <p:cNvPr id="10" name="Image 0" descr="/Users/admin/Documents/Simulatte Projects/PopScale/engineering/maps/wb_cluster_kolkata_urban.png">    </p:cNvPr>
           <p:cNvPicPr>
             <a:picLocks noChangeAspect="1"/>
           </p:cNvPicPr>
@@ -14170,7 +12246,7 @@
                 <a:ea typeface="Calibri" pitchFamily="34" charset="-122"/>
                 <a:cs typeface="Calibri" pitchFamily="34" charset="-120"/>
               </a:rPr>
-              <a:t>TMC 55%</a:t>
+              <a:t>TMC 50%</a:t>
             </a:r>
             <a:endParaRPr lang="en-US" sz="1400" dirty="0"/>
           </a:p>
@@ -14209,7 +12285,7 @@
                 <a:ea typeface="Calibri" pitchFamily="34" charset="-122"/>
                 <a:cs typeface="Calibri" pitchFamily="34" charset="-120"/>
               </a:rPr>
-              <a:t>BJP 32%</a:t>
+              <a:t>BJP 28%</a:t>
             </a:r>
             <a:endParaRPr lang="en-US" sz="1400" dirty="0"/>
           </a:p>
@@ -14287,7 +12363,7 @@
                 <a:ea typeface="Calibri" pitchFamily="34" charset="-122"/>
                 <a:cs typeface="Calibri" pitchFamily="34" charset="-120"/>
               </a:rPr>
-              <a:t>TMC 35%</a:t>
+              <a:t>TMC 36%</a:t>
             </a:r>
             <a:endParaRPr lang="en-US" sz="1400" dirty="0"/>
           </a:p>
@@ -14326,7 +12402,7 @@
                 <a:ea typeface="Calibri" pitchFamily="34" charset="-122"/>
                 <a:cs typeface="Calibri" pitchFamily="34" charset="-120"/>
               </a:rPr>
-              <a:t>BJP 52%</a:t>
+              <a:t>BJP 48%</a:t>
             </a:r>
             <a:endParaRPr lang="en-US" sz="1400" dirty="0"/>
           </a:p>
@@ -14404,7 +12480,7 @@
                 <a:ea typeface="Calibri" pitchFamily="34" charset="-122"/>
                 <a:cs typeface="Calibri" pitchFamily="34" charset="-120"/>
               </a:rPr>
-              <a:t>Pred: TMC 25 · BJP 10</a:t>
+              <a:t>Pred: TMC 22 · BJP 10</a:t>
             </a:r>
             <a:endParaRPr lang="en-US" sz="1100" dirty="0"/>
           </a:p>
@@ -14443,7 +12519,7 @@
                 <a:ea typeface="Calibri" pitchFamily="34" charset="-122"/>
                 <a:cs typeface="Calibri" pitchFamily="34" charset="-120"/>
               </a:rPr>
-              <a:t>Act:  BJP 26 · TMC 9</a:t>
+              <a:t>Act:  BJP 20 · TMC 12</a:t>
             </a:r>
             <a:endParaRPr lang="en-US" sz="1100" dirty="0"/>
           </a:p>
@@ -14521,7 +12597,7 @@
                 <a:ea typeface="Calibri" pitchFamily="34" charset="-122"/>
                 <a:cs typeface="Calibri" pitchFamily="34" charset="-120"/>
               </a:rPr>
-              <a:t>Anti-incumbency.</a:t>
+              <a:t>Muslim vote split.</a:t>
             </a:r>
             <a:endParaRPr lang="en-US" sz="1400" dirty="0"/>
           </a:p>
@@ -14560,7 +12636,7 @@
                 <a:ea typeface="Calibri" pitchFamily="34" charset="-122"/>
                 <a:cs typeface="Calibri" pitchFamily="34" charset="-120"/>
               </a:rPr>
-              <a:t>Corruption cases (Sandeshkhali, recruitment scam) cut deepest here.</a:t>
+              <a:t>4-way fragmentation handed BJP pluralities in Muslim-mixed seats.</a:t>
             </a:r>
             <a:endParaRPr lang="en-US" sz="1200" dirty="0"/>
           </a:p>
@@ -14599,7 +12675,7 @@
                 <a:ea typeface="Courier New" pitchFamily="34" charset="-122"/>
                 <a:cs typeface="Courier New" pitchFamily="34" charset="-120"/>
               </a:rPr>
-              <a:t>35 SEATS</a:t>
+              <a:t>32 SEATS</a:t>
             </a:r>
             <a:endParaRPr lang="en-US" sz="1000" dirty="0"/>
           </a:p>
@@ -14823,7 +12899,7 @@
                 <a:ea typeface="Courier New" pitchFamily="34" charset="-122"/>
                 <a:cs typeface="Courier New" pitchFamily="34" charset="-120"/>
               </a:rPr>
-              <a:t>ANALYSIS · 05 OF 10 · KOLKATA URBAN</a:t>
+              <a:t>ANALYSIS · 06 OF 10 · BURDWAN INDUSTRIAL</a:t>
             </a:r>
             <a:endParaRPr lang="en-US" sz="900" dirty="0"/>
           </a:p>
@@ -14862,7 +12938,7 @@
                 <a:ea typeface="Arial Narrow" pitchFamily="34" charset="-122"/>
                 <a:cs typeface="Arial Narrow" pitchFamily="34" charset="-120"/>
               </a:rPr>
-              <a:t>Kolkata Urban: TMC → BJP</a:t>
+              <a:t>Burdwan Industrial: TMC → BJP</a:t>
             </a:r>
             <a:endParaRPr lang="en-US" sz="3000" dirty="0"/>
           </a:p>
@@ -14893,7 +12969,7 @@
       </p:sp>
       <p:pic>
         <p:nvPicPr>
-          <p:cNvPr id="10" name="Image 0" descr="/Users/admin/Documents/Simulatte Projects/PopScale/engineering/maps/wb_cluster_kolkata_urban.png">    </p:cNvPr>
+          <p:cNvPr id="10" name="Image 0" descr="/Users/admin/Documents/Simulatte Projects/PopScale/engineering/maps/wb_cluster_burdwan_industrial.png">    </p:cNvPr>
           <p:cNvPicPr>
             <a:picLocks noChangeAspect="1"/>
           </p:cNvPicPr>
@@ -14986,7 +13062,7 @@
                 <a:ea typeface="Calibri" pitchFamily="34" charset="-122"/>
                 <a:cs typeface="Calibri" pitchFamily="34" charset="-120"/>
               </a:rPr>
-              <a:t>TMC 50%</a:t>
+              <a:t>TMC 53%</a:t>
             </a:r>
             <a:endParaRPr lang="en-US" sz="1400" dirty="0"/>
           </a:p>
@@ -15025,7 +13101,7 @@
                 <a:ea typeface="Calibri" pitchFamily="34" charset="-122"/>
                 <a:cs typeface="Calibri" pitchFamily="34" charset="-120"/>
               </a:rPr>
-              <a:t>BJP 28%</a:t>
+              <a:t>BJP 30%</a:t>
             </a:r>
             <a:endParaRPr lang="en-US" sz="1400" dirty="0"/>
           </a:p>
@@ -15103,7 +13179,7 @@
                 <a:ea typeface="Calibri" pitchFamily="34" charset="-122"/>
                 <a:cs typeface="Calibri" pitchFamily="34" charset="-120"/>
               </a:rPr>
-              <a:t>TMC 36%</a:t>
+              <a:t>TMC 35%</a:t>
             </a:r>
             <a:endParaRPr lang="en-US" sz="1400" dirty="0"/>
           </a:p>
@@ -15142,7 +13218,7 @@
                 <a:ea typeface="Calibri" pitchFamily="34" charset="-122"/>
                 <a:cs typeface="Calibri" pitchFamily="34" charset="-120"/>
               </a:rPr>
-              <a:t>BJP 48%</a:t>
+              <a:t>BJP 50%</a:t>
             </a:r>
             <a:endParaRPr lang="en-US" sz="1400" dirty="0"/>
           </a:p>
@@ -15220,7 +13296,7 @@
                 <a:ea typeface="Calibri" pitchFamily="34" charset="-122"/>
                 <a:cs typeface="Calibri" pitchFamily="34" charset="-120"/>
               </a:rPr>
-              <a:t>Pred: TMC 22 · BJP 10</a:t>
+              <a:t>Pred: TMC 17 · BJP 8</a:t>
             </a:r>
             <a:endParaRPr lang="en-US" sz="1100" dirty="0"/>
           </a:p>
@@ -15259,7 +13335,7 @@
                 <a:ea typeface="Calibri" pitchFamily="34" charset="-122"/>
                 <a:cs typeface="Calibri" pitchFamily="34" charset="-120"/>
               </a:rPr>
-              <a:t>Act:  BJP 20 · TMC 12</a:t>
+              <a:t>Act:  BJP 18 · TMC 7</a:t>
             </a:r>
             <a:endParaRPr lang="en-US" sz="1100" dirty="0"/>
           </a:p>
@@ -15337,7 +13413,7 @@
                 <a:ea typeface="Calibri" pitchFamily="34" charset="-122"/>
                 <a:cs typeface="Calibri" pitchFamily="34" charset="-120"/>
               </a:rPr>
-              <a:t>Muslim vote split.</a:t>
+              <a:t>Industrial worker swing.</a:t>
             </a:r>
             <a:endParaRPr lang="en-US" sz="1400" dirty="0"/>
           </a:p>
@@ -15376,7 +13452,7 @@
                 <a:ea typeface="Calibri" pitchFamily="34" charset="-122"/>
                 <a:cs typeface="Calibri" pitchFamily="34" charset="-120"/>
               </a:rPr>
-              <a:t>4-way fragmentation handed BJP pluralities in Muslim-mixed seats.</a:t>
+              <a:t>Economic anxiety + Hindu consolidation, not modelled together.</a:t>
             </a:r>
             <a:endParaRPr lang="en-US" sz="1200" dirty="0"/>
           </a:p>
@@ -15415,7 +13491,7 @@
                 <a:ea typeface="Courier New" pitchFamily="34" charset="-122"/>
                 <a:cs typeface="Courier New" pitchFamily="34" charset="-120"/>
               </a:rPr>
-              <a:t>32 SEATS</a:t>
+              <a:t>25 SEATS</a:t>
             </a:r>
             <a:endParaRPr lang="en-US" sz="1000" dirty="0"/>
           </a:p>

--- a/engineering/wb_2026_postmortem_deck.pptx
+++ b/engineering/wb_2026_postmortem_deck.pptx
@@ -4776,7 +4776,7 @@
                 <a:ea typeface="Arial Narrow" pitchFamily="34" charset="-122"/>
                 <a:cs typeface="Arial Narrow" pitchFamily="34" charset="-120"/>
               </a:rPr>
-              <a:t>SIR voter-roll deletions — structural disenfranchisement.</a:t>
+              <a:t>Voter-roll revisions under SIR were not captured in our population data.</a:t>
             </a:r>
             <a:endParaRPr lang="en-US" sz="1800" dirty="0"/>
           </a:p>
@@ -4815,7 +4815,7 @@
                 <a:ea typeface="Calibri" pitchFamily="34" charset="-122"/>
                 <a:cs typeface="Calibri" pitchFamily="34" charset="-120"/>
               </a:rPr>
-              <a:t>Systematic deletion of names in Muslim-majority blocks in North Bengal and Murshidabad. Not visible from published rolls at modelling time; no signal in our population layer.</a:t>
+              <a:t>Name deletions across multiple blocks in North Bengal and Murshidabad created a turnout asymmetry our population layer did not account for. No per-block attrition signal was available at modelling time.</a:t>
             </a:r>
             <a:endParaRPr lang="en-US" sz="1200" dirty="0"/>
           </a:p>
@@ -5010,7 +5010,7 @@
                 <a:ea typeface="Arial Narrow" pitchFamily="34" charset="-122"/>
                 <a:cs typeface="Arial Narrow" pitchFamily="34" charset="-120"/>
               </a:rPr>
-              <a:t>2026 became a Hindu identity election, not a welfare election.</a:t>
+              <a:t>The mobilisation frame shifted from welfare delivery to political consolidation.</a:t>
             </a:r>
             <a:endParaRPr lang="en-US" sz="1800" dirty="0"/>
           </a:p>
@@ -5049,7 +5049,7 @@
                 <a:ea typeface="Calibri" pitchFamily="34" charset="-122"/>
                 <a:cs typeface="Calibri" pitchFamily="34" charset="-120"/>
               </a:rPr>
-              <a:t>The simulation ran on welfare delivery signals (beneficiary schemes, Duare Sarkar reach). The operative frame on election day was religio-cultural consolidation — orthogonal to our model.</a:t>
+              <a:t>The simulation's signal layer was built on scheme reach and beneficiary satisfaction. The dominant operative dynamic on election day was cross-community political consolidation — a frame welfare metrics cannot proxy.</a:t>
             </a:r>
             <a:endParaRPr lang="en-US" sz="1200" dirty="0"/>
           </a:p>
